--- a/booklets/slides/Mars_Habitat_Presentation.pptx
+++ b/booklets/slides/Mars_Habitat_Presentation.pptx
@@ -5,30 +5,30 @@
     <p:sldMasterId id="2147483648" r:id="rId1"/>
   </p:sldMasterIdLst>
   <p:sldIdLst>
-    <p:sldId id="256" r:id="rId7"/>
-    <p:sldId id="257" r:id="rId8"/>
-    <p:sldId id="258" r:id="rId9"/>
-    <p:sldId id="259" r:id="rId10"/>
-    <p:sldId id="260" r:id="rId11"/>
-    <p:sldId id="261" r:id="rId12"/>
-    <p:sldId id="262" r:id="rId13"/>
-    <p:sldId id="263" r:id="rId14"/>
-    <p:sldId id="264" r:id="rId15"/>
-    <p:sldId id="265" r:id="rId16"/>
-    <p:sldId id="266" r:id="rId17"/>
-    <p:sldId id="267" r:id="rId18"/>
-    <p:sldId id="268" r:id="rId19"/>
-    <p:sldId id="269" r:id="rId20"/>
-    <p:sldId id="270" r:id="rId21"/>
-    <p:sldId id="271" r:id="rId22"/>
-    <p:sldId id="272" r:id="rId23"/>
-    <p:sldId id="273" r:id="rId24"/>
-    <p:sldId id="274" r:id="rId25"/>
-    <p:sldId id="275" r:id="rId26"/>
-    <p:sldId id="276" r:id="rId27"/>
-    <p:sldId id="277" r:id="rId28"/>
+    <p:sldId id="256" r:id="rId2"/>
+    <p:sldId id="257" r:id="rId3"/>
+    <p:sldId id="258" r:id="rId4"/>
+    <p:sldId id="259" r:id="rId5"/>
+    <p:sldId id="260" r:id="rId6"/>
+    <p:sldId id="261" r:id="rId7"/>
+    <p:sldId id="262" r:id="rId8"/>
+    <p:sldId id="263" r:id="rId9"/>
+    <p:sldId id="264" r:id="rId10"/>
+    <p:sldId id="265" r:id="rId11"/>
+    <p:sldId id="266" r:id="rId12"/>
+    <p:sldId id="267" r:id="rId13"/>
+    <p:sldId id="268" r:id="rId14"/>
+    <p:sldId id="269" r:id="rId15"/>
+    <p:sldId id="270" r:id="rId16"/>
+    <p:sldId id="271" r:id="rId17"/>
+    <p:sldId id="272" r:id="rId18"/>
+    <p:sldId id="273" r:id="rId19"/>
+    <p:sldId id="274" r:id="rId20"/>
+    <p:sldId id="275" r:id="rId21"/>
+    <p:sldId id="276" r:id="rId22"/>
+    <p:sldId id="277" r:id="rId23"/>
   </p:sldIdLst>
-  <p:sldSz cx="12191695" cy="6858000" type="screen4x3"/>
+  <p:sldSz cx="12192000" cy="6858000"/>
   <p:notesSz cx="6858000" cy="9144000"/>
   <p:defaultTextStyle>
     <a:defPPr>
@@ -125,6 +125,22 @@
       </a:defRPr>
     </a:lvl9pPr>
   </p:defaultTextStyle>
+  <p:extLst>
+    <p:ext uri="{EFAFB233-063F-42B5-8137-9DF3F51BA10A}">
+      <p15:sldGuideLst xmlns:p15="http://schemas.microsoft.com/office/powerpoint/2012/main">
+        <p15:guide id="1" orient="horz" pos="2160">
+          <p15:clr>
+            <a:srgbClr val="A4A3A4"/>
+          </p15:clr>
+        </p15:guide>
+        <p15:guide id="2" pos="2880">
+          <p15:clr>
+            <a:srgbClr val="A4A3A4"/>
+          </p15:clr>
+        </p15:guide>
+      </p15:sldGuideLst>
+    </p:ext>
+  </p:extLst>
 </p:presentation>
 </file>
 
@@ -166,10 +182,9 @@
           <a:lstStyle/>
           <a:p>
             <a:r>
-              <a:rPr lang="en-US" smtClean="0"/>
+              <a:rPr lang="en-US"/>
               <a:t>Click to edit Master title style</a:t>
             </a:r>
-            <a:endParaRPr lang="en-US"/>
           </a:p>
         </p:txBody>
       </p:sp>
@@ -285,10 +300,9 @@
           </a:lstStyle>
           <a:p>
             <a:r>
-              <a:rPr lang="en-US" smtClean="0"/>
+              <a:rPr lang="en-US"/>
               <a:t>Click to edit Master subtitle style</a:t>
             </a:r>
-            <a:endParaRPr lang="en-US"/>
           </a:p>
         </p:txBody>
       </p:sp>
@@ -309,7 +323,7 @@
           <a:p>
             <a:fld id="{5BCAD085-E8A6-8845-BD4E-CB4CCA059FC4}" type="datetimeFigureOut">
               <a:rPr lang="en-US" smtClean="0"/>
-              <a:t>1/27/13</a:t>
+              <a:t>3/10/2026</a:t>
             </a:fld>
             <a:endParaRPr lang="en-US"/>
           </a:p>
@@ -403,10 +417,9 @@
           <a:lstStyle/>
           <a:p>
             <a:r>
-              <a:rPr lang="en-US" smtClean="0"/>
+              <a:rPr lang="en-US"/>
               <a:t>Click to edit Master title style</a:t>
             </a:r>
-            <a:endParaRPr lang="en-US"/>
           </a:p>
         </p:txBody>
       </p:sp>
@@ -427,38 +440,37 @@
           <a:p>
             <a:pPr lvl="0"/>
             <a:r>
-              <a:rPr lang="en-US" smtClean="0"/>
+              <a:rPr lang="en-US"/>
               <a:t>Click to edit Master text styles</a:t>
             </a:r>
           </a:p>
           <a:p>
             <a:pPr lvl="1"/>
             <a:r>
-              <a:rPr lang="en-US" smtClean="0"/>
+              <a:rPr lang="en-US"/>
               <a:t>Second level</a:t>
             </a:r>
           </a:p>
           <a:p>
             <a:pPr lvl="2"/>
             <a:r>
-              <a:rPr lang="en-US" smtClean="0"/>
+              <a:rPr lang="en-US"/>
               <a:t>Third level</a:t>
             </a:r>
           </a:p>
           <a:p>
             <a:pPr lvl="3"/>
             <a:r>
-              <a:rPr lang="en-US" smtClean="0"/>
+              <a:rPr lang="en-US"/>
               <a:t>Fourth level</a:t>
             </a:r>
           </a:p>
           <a:p>
             <a:pPr lvl="4"/>
             <a:r>
-              <a:rPr lang="en-US" smtClean="0"/>
+              <a:rPr lang="en-US"/>
               <a:t>Fifth level</a:t>
             </a:r>
-            <a:endParaRPr lang="en-US"/>
           </a:p>
         </p:txBody>
       </p:sp>
@@ -479,7 +491,7 @@
           <a:p>
             <a:fld id="{5BCAD085-E8A6-8845-BD4E-CB4CCA059FC4}" type="datetimeFigureOut">
               <a:rPr lang="en-US" smtClean="0"/>
-              <a:t>1/27/13</a:t>
+              <a:t>3/10/2026</a:t>
             </a:fld>
             <a:endParaRPr lang="en-US"/>
           </a:p>
@@ -578,10 +590,9 @@
           <a:lstStyle/>
           <a:p>
             <a:r>
-              <a:rPr lang="en-US" smtClean="0"/>
+              <a:rPr lang="en-US"/>
               <a:t>Click to edit Master title style</a:t>
             </a:r>
-            <a:endParaRPr lang="en-US"/>
           </a:p>
         </p:txBody>
       </p:sp>
@@ -607,38 +618,37 @@
           <a:p>
             <a:pPr lvl="0"/>
             <a:r>
-              <a:rPr lang="en-US" smtClean="0"/>
+              <a:rPr lang="en-US"/>
               <a:t>Click to edit Master text styles</a:t>
             </a:r>
           </a:p>
           <a:p>
             <a:pPr lvl="1"/>
             <a:r>
-              <a:rPr lang="en-US" smtClean="0"/>
+              <a:rPr lang="en-US"/>
               <a:t>Second level</a:t>
             </a:r>
           </a:p>
           <a:p>
             <a:pPr lvl="2"/>
             <a:r>
-              <a:rPr lang="en-US" smtClean="0"/>
+              <a:rPr lang="en-US"/>
               <a:t>Third level</a:t>
             </a:r>
           </a:p>
           <a:p>
             <a:pPr lvl="3"/>
             <a:r>
-              <a:rPr lang="en-US" smtClean="0"/>
+              <a:rPr lang="en-US"/>
               <a:t>Fourth level</a:t>
             </a:r>
           </a:p>
           <a:p>
             <a:pPr lvl="4"/>
             <a:r>
-              <a:rPr lang="en-US" smtClean="0"/>
+              <a:rPr lang="en-US"/>
               <a:t>Fifth level</a:t>
             </a:r>
-            <a:endParaRPr lang="en-US"/>
           </a:p>
         </p:txBody>
       </p:sp>
@@ -659,7 +669,7 @@
           <a:p>
             <a:fld id="{5BCAD085-E8A6-8845-BD4E-CB4CCA059FC4}" type="datetimeFigureOut">
               <a:rPr lang="en-US" smtClean="0"/>
-              <a:t>1/27/13</a:t>
+              <a:t>3/10/2026</a:t>
             </a:fld>
             <a:endParaRPr lang="en-US"/>
           </a:p>
@@ -753,10 +763,9 @@
           <a:lstStyle/>
           <a:p>
             <a:r>
-              <a:rPr lang="en-US" smtClean="0"/>
+              <a:rPr lang="en-US"/>
               <a:t>Click to edit Master title style</a:t>
             </a:r>
-            <a:endParaRPr lang="en-US"/>
           </a:p>
         </p:txBody>
       </p:sp>
@@ -777,38 +786,37 @@
           <a:p>
             <a:pPr lvl="0"/>
             <a:r>
-              <a:rPr lang="en-US" smtClean="0"/>
+              <a:rPr lang="en-US"/>
               <a:t>Click to edit Master text styles</a:t>
             </a:r>
           </a:p>
           <a:p>
             <a:pPr lvl="1"/>
             <a:r>
-              <a:rPr lang="en-US" smtClean="0"/>
+              <a:rPr lang="en-US"/>
               <a:t>Second level</a:t>
             </a:r>
           </a:p>
           <a:p>
             <a:pPr lvl="2"/>
             <a:r>
-              <a:rPr lang="en-US" smtClean="0"/>
+              <a:rPr lang="en-US"/>
               <a:t>Third level</a:t>
             </a:r>
           </a:p>
           <a:p>
             <a:pPr lvl="3"/>
             <a:r>
-              <a:rPr lang="en-US" smtClean="0"/>
+              <a:rPr lang="en-US"/>
               <a:t>Fourth level</a:t>
             </a:r>
           </a:p>
           <a:p>
             <a:pPr lvl="4"/>
             <a:r>
-              <a:rPr lang="en-US" smtClean="0"/>
+              <a:rPr lang="en-US"/>
               <a:t>Fifth level</a:t>
             </a:r>
-            <a:endParaRPr lang="en-US"/>
           </a:p>
         </p:txBody>
       </p:sp>
@@ -829,7 +837,7 @@
           <a:p>
             <a:fld id="{5BCAD085-E8A6-8845-BD4E-CB4CCA059FC4}" type="datetimeFigureOut">
               <a:rPr lang="en-US" smtClean="0"/>
-              <a:t>1/27/13</a:t>
+              <a:t>3/10/2026</a:t>
             </a:fld>
             <a:endParaRPr lang="en-US"/>
           </a:p>
@@ -932,10 +940,9 @@
           </a:lstStyle>
           <a:p>
             <a:r>
-              <a:rPr lang="en-US" smtClean="0"/>
+              <a:rPr lang="en-US"/>
               <a:t>Click to edit Master title style</a:t>
             </a:r>
-            <a:endParaRPr lang="en-US"/>
           </a:p>
         </p:txBody>
       </p:sp>
@@ -1052,7 +1059,7 @@
           <a:p>
             <a:pPr lvl="0"/>
             <a:r>
-              <a:rPr lang="en-US" smtClean="0"/>
+              <a:rPr lang="en-US"/>
               <a:t>Click to edit Master text styles</a:t>
             </a:r>
           </a:p>
@@ -1075,7 +1082,7 @@
           <a:p>
             <a:fld id="{5BCAD085-E8A6-8845-BD4E-CB4CCA059FC4}" type="datetimeFigureOut">
               <a:rPr lang="en-US" smtClean="0"/>
-              <a:t>1/27/13</a:t>
+              <a:t>3/10/2026</a:t>
             </a:fld>
             <a:endParaRPr lang="en-US"/>
           </a:p>
@@ -1169,10 +1176,9 @@
           <a:lstStyle/>
           <a:p>
             <a:r>
-              <a:rPr lang="en-US" smtClean="0"/>
+              <a:rPr lang="en-US"/>
               <a:t>Click to edit Master title style</a:t>
             </a:r>
-            <a:endParaRPr lang="en-US"/>
           </a:p>
         </p:txBody>
       </p:sp>
@@ -1226,38 +1232,37 @@
           <a:p>
             <a:pPr lvl="0"/>
             <a:r>
-              <a:rPr lang="en-US" smtClean="0"/>
+              <a:rPr lang="en-US"/>
               <a:t>Click to edit Master text styles</a:t>
             </a:r>
           </a:p>
           <a:p>
             <a:pPr lvl="1"/>
             <a:r>
-              <a:rPr lang="en-US" smtClean="0"/>
+              <a:rPr lang="en-US"/>
               <a:t>Second level</a:t>
             </a:r>
           </a:p>
           <a:p>
             <a:pPr lvl="2"/>
             <a:r>
-              <a:rPr lang="en-US" smtClean="0"/>
+              <a:rPr lang="en-US"/>
               <a:t>Third level</a:t>
             </a:r>
           </a:p>
           <a:p>
             <a:pPr lvl="3"/>
             <a:r>
-              <a:rPr lang="en-US" smtClean="0"/>
+              <a:rPr lang="en-US"/>
               <a:t>Fourth level</a:t>
             </a:r>
           </a:p>
           <a:p>
             <a:pPr lvl="4"/>
             <a:r>
-              <a:rPr lang="en-US" smtClean="0"/>
+              <a:rPr lang="en-US"/>
               <a:t>Fifth level</a:t>
             </a:r>
-            <a:endParaRPr lang="en-US"/>
           </a:p>
         </p:txBody>
       </p:sp>
@@ -1311,38 +1316,37 @@
           <a:p>
             <a:pPr lvl="0"/>
             <a:r>
-              <a:rPr lang="en-US" smtClean="0"/>
+              <a:rPr lang="en-US"/>
               <a:t>Click to edit Master text styles</a:t>
             </a:r>
           </a:p>
           <a:p>
             <a:pPr lvl="1"/>
             <a:r>
-              <a:rPr lang="en-US" smtClean="0"/>
+              <a:rPr lang="en-US"/>
               <a:t>Second level</a:t>
             </a:r>
           </a:p>
           <a:p>
             <a:pPr lvl="2"/>
             <a:r>
-              <a:rPr lang="en-US" smtClean="0"/>
+              <a:rPr lang="en-US"/>
               <a:t>Third level</a:t>
             </a:r>
           </a:p>
           <a:p>
             <a:pPr lvl="3"/>
             <a:r>
-              <a:rPr lang="en-US" smtClean="0"/>
+              <a:rPr lang="en-US"/>
               <a:t>Fourth level</a:t>
             </a:r>
           </a:p>
           <a:p>
             <a:pPr lvl="4"/>
             <a:r>
-              <a:rPr lang="en-US" smtClean="0"/>
+              <a:rPr lang="en-US"/>
               <a:t>Fifth level</a:t>
             </a:r>
-            <a:endParaRPr lang="en-US"/>
           </a:p>
         </p:txBody>
       </p:sp>
@@ -1363,7 +1367,7 @@
           <a:p>
             <a:fld id="{5BCAD085-E8A6-8845-BD4E-CB4CCA059FC4}" type="datetimeFigureOut">
               <a:rPr lang="en-US" smtClean="0"/>
-              <a:t>1/27/13</a:t>
+              <a:t>3/10/2026</a:t>
             </a:fld>
             <a:endParaRPr lang="en-US"/>
           </a:p>
@@ -1461,10 +1465,9 @@
           </a:lstStyle>
           <a:p>
             <a:r>
-              <a:rPr lang="en-US" smtClean="0"/>
+              <a:rPr lang="en-US"/>
               <a:t>Click to edit Master title style</a:t>
             </a:r>
-            <a:endParaRPr lang="en-US"/>
           </a:p>
         </p:txBody>
       </p:sp>
@@ -1527,7 +1530,7 @@
           <a:p>
             <a:pPr lvl="0"/>
             <a:r>
-              <a:rPr lang="en-US" smtClean="0"/>
+              <a:rPr lang="en-US"/>
               <a:t>Click to edit Master text styles</a:t>
             </a:r>
           </a:p>
@@ -1583,38 +1586,37 @@
           <a:p>
             <a:pPr lvl="0"/>
             <a:r>
-              <a:rPr lang="en-US" smtClean="0"/>
+              <a:rPr lang="en-US"/>
               <a:t>Click to edit Master text styles</a:t>
             </a:r>
           </a:p>
           <a:p>
             <a:pPr lvl="1"/>
             <a:r>
-              <a:rPr lang="en-US" smtClean="0"/>
+              <a:rPr lang="en-US"/>
               <a:t>Second level</a:t>
             </a:r>
           </a:p>
           <a:p>
             <a:pPr lvl="2"/>
             <a:r>
-              <a:rPr lang="en-US" smtClean="0"/>
+              <a:rPr lang="en-US"/>
               <a:t>Third level</a:t>
             </a:r>
           </a:p>
           <a:p>
             <a:pPr lvl="3"/>
             <a:r>
-              <a:rPr lang="en-US" smtClean="0"/>
+              <a:rPr lang="en-US"/>
               <a:t>Fourth level</a:t>
             </a:r>
           </a:p>
           <a:p>
             <a:pPr lvl="4"/>
             <a:r>
-              <a:rPr lang="en-US" smtClean="0"/>
+              <a:rPr lang="en-US"/>
               <a:t>Fifth level</a:t>
             </a:r>
-            <a:endParaRPr lang="en-US"/>
           </a:p>
         </p:txBody>
       </p:sp>
@@ -1677,7 +1679,7 @@
           <a:p>
             <a:pPr lvl="0"/>
             <a:r>
-              <a:rPr lang="en-US" smtClean="0"/>
+              <a:rPr lang="en-US"/>
               <a:t>Click to edit Master text styles</a:t>
             </a:r>
           </a:p>
@@ -1733,38 +1735,37 @@
           <a:p>
             <a:pPr lvl="0"/>
             <a:r>
-              <a:rPr lang="en-US" smtClean="0"/>
+              <a:rPr lang="en-US"/>
               <a:t>Click to edit Master text styles</a:t>
             </a:r>
           </a:p>
           <a:p>
             <a:pPr lvl="1"/>
             <a:r>
-              <a:rPr lang="en-US" smtClean="0"/>
+              <a:rPr lang="en-US"/>
               <a:t>Second level</a:t>
             </a:r>
           </a:p>
           <a:p>
             <a:pPr lvl="2"/>
             <a:r>
-              <a:rPr lang="en-US" smtClean="0"/>
+              <a:rPr lang="en-US"/>
               <a:t>Third level</a:t>
             </a:r>
           </a:p>
           <a:p>
             <a:pPr lvl="3"/>
             <a:r>
-              <a:rPr lang="en-US" smtClean="0"/>
+              <a:rPr lang="en-US"/>
               <a:t>Fourth level</a:t>
             </a:r>
           </a:p>
           <a:p>
             <a:pPr lvl="4"/>
             <a:r>
-              <a:rPr lang="en-US" smtClean="0"/>
+              <a:rPr lang="en-US"/>
               <a:t>Fifth level</a:t>
             </a:r>
-            <a:endParaRPr lang="en-US"/>
           </a:p>
         </p:txBody>
       </p:sp>
@@ -1785,7 +1786,7 @@
           <a:p>
             <a:fld id="{5BCAD085-E8A6-8845-BD4E-CB4CCA059FC4}" type="datetimeFigureOut">
               <a:rPr lang="en-US" smtClean="0"/>
-              <a:t>1/27/13</a:t>
+              <a:t>3/10/2026</a:t>
             </a:fld>
             <a:endParaRPr lang="en-US"/>
           </a:p>
@@ -1879,10 +1880,9 @@
           <a:lstStyle/>
           <a:p>
             <a:r>
-              <a:rPr lang="en-US" smtClean="0"/>
+              <a:rPr lang="en-US"/>
               <a:t>Click to edit Master title style</a:t>
             </a:r>
-            <a:endParaRPr lang="en-US"/>
           </a:p>
         </p:txBody>
       </p:sp>
@@ -1903,7 +1903,7 @@
           <a:p>
             <a:fld id="{5BCAD085-E8A6-8845-BD4E-CB4CCA059FC4}" type="datetimeFigureOut">
               <a:rPr lang="en-US" smtClean="0"/>
-              <a:t>1/27/13</a:t>
+              <a:t>3/10/2026</a:t>
             </a:fld>
             <a:endParaRPr lang="en-US"/>
           </a:p>
@@ -1998,7 +1998,7 @@
           <a:p>
             <a:fld id="{5BCAD085-E8A6-8845-BD4E-CB4CCA059FC4}" type="datetimeFigureOut">
               <a:rPr lang="en-US" smtClean="0"/>
-              <a:t>1/27/13</a:t>
+              <a:t>3/10/2026</a:t>
             </a:fld>
             <a:endParaRPr lang="en-US"/>
           </a:p>
@@ -2101,10 +2101,9 @@
           </a:lstStyle>
           <a:p>
             <a:r>
-              <a:rPr lang="en-US" smtClean="0"/>
+              <a:rPr lang="en-US"/>
               <a:t>Click to edit Master title style</a:t>
             </a:r>
-            <a:endParaRPr lang="en-US"/>
           </a:p>
         </p:txBody>
       </p:sp>
@@ -2158,38 +2157,37 @@
           <a:p>
             <a:pPr lvl="0"/>
             <a:r>
-              <a:rPr lang="en-US" smtClean="0"/>
+              <a:rPr lang="en-US"/>
               <a:t>Click to edit Master text styles</a:t>
             </a:r>
           </a:p>
           <a:p>
             <a:pPr lvl="1"/>
             <a:r>
-              <a:rPr lang="en-US" smtClean="0"/>
+              <a:rPr lang="en-US"/>
               <a:t>Second level</a:t>
             </a:r>
           </a:p>
           <a:p>
             <a:pPr lvl="2"/>
             <a:r>
-              <a:rPr lang="en-US" smtClean="0"/>
+              <a:rPr lang="en-US"/>
               <a:t>Third level</a:t>
             </a:r>
           </a:p>
           <a:p>
             <a:pPr lvl="3"/>
             <a:r>
-              <a:rPr lang="en-US" smtClean="0"/>
+              <a:rPr lang="en-US"/>
               <a:t>Fourth level</a:t>
             </a:r>
           </a:p>
           <a:p>
             <a:pPr lvl="4"/>
             <a:r>
-              <a:rPr lang="en-US" smtClean="0"/>
+              <a:rPr lang="en-US"/>
               <a:t>Fifth level</a:t>
             </a:r>
-            <a:endParaRPr lang="en-US"/>
           </a:p>
         </p:txBody>
       </p:sp>
@@ -2252,7 +2250,7 @@
           <a:p>
             <a:pPr lvl="0"/>
             <a:r>
-              <a:rPr lang="en-US" smtClean="0"/>
+              <a:rPr lang="en-US"/>
               <a:t>Click to edit Master text styles</a:t>
             </a:r>
           </a:p>
@@ -2275,7 +2273,7 @@
           <a:p>
             <a:fld id="{5BCAD085-E8A6-8845-BD4E-CB4CCA059FC4}" type="datetimeFigureOut">
               <a:rPr lang="en-US" smtClean="0"/>
-              <a:t>1/27/13</a:t>
+              <a:t>3/10/2026</a:t>
             </a:fld>
             <a:endParaRPr lang="en-US"/>
           </a:p>
@@ -2378,10 +2376,9 @@
           </a:lstStyle>
           <a:p>
             <a:r>
-              <a:rPr lang="en-US" smtClean="0"/>
+              <a:rPr lang="en-US"/>
               <a:t>Click to edit Master title style</a:t>
             </a:r>
-            <a:endParaRPr lang="en-US"/>
           </a:p>
         </p:txBody>
       </p:sp>
@@ -2505,7 +2502,7 @@
           <a:p>
             <a:pPr lvl="0"/>
             <a:r>
-              <a:rPr lang="en-US" smtClean="0"/>
+              <a:rPr lang="en-US"/>
               <a:t>Click to edit Master text styles</a:t>
             </a:r>
           </a:p>
@@ -2528,7 +2525,7 @@
           <a:p>
             <a:fld id="{5BCAD085-E8A6-8845-BD4E-CB4CCA059FC4}" type="datetimeFigureOut">
               <a:rPr lang="en-US" smtClean="0"/>
-              <a:t>1/27/13</a:t>
+              <a:t>3/10/2026</a:t>
             </a:fld>
             <a:endParaRPr lang="en-US"/>
           </a:p>
@@ -2637,10 +2634,9 @@
           <a:lstStyle/>
           <a:p>
             <a:r>
-              <a:rPr lang="en-US" smtClean="0"/>
+              <a:rPr lang="en-US"/>
               <a:t>Click to edit Master title style</a:t>
             </a:r>
-            <a:endParaRPr lang="en-US"/>
           </a:p>
         </p:txBody>
       </p:sp>
@@ -2671,38 +2667,37 @@
           <a:p>
             <a:pPr lvl="0"/>
             <a:r>
-              <a:rPr lang="en-US" smtClean="0"/>
+              <a:rPr lang="en-US"/>
               <a:t>Click to edit Master text styles</a:t>
             </a:r>
           </a:p>
           <a:p>
             <a:pPr lvl="1"/>
             <a:r>
-              <a:rPr lang="en-US" smtClean="0"/>
+              <a:rPr lang="en-US"/>
               <a:t>Second level</a:t>
             </a:r>
           </a:p>
           <a:p>
             <a:pPr lvl="2"/>
             <a:r>
-              <a:rPr lang="en-US" smtClean="0"/>
+              <a:rPr lang="en-US"/>
               <a:t>Third level</a:t>
             </a:r>
           </a:p>
           <a:p>
             <a:pPr lvl="3"/>
             <a:r>
-              <a:rPr lang="en-US" smtClean="0"/>
+              <a:rPr lang="en-US"/>
               <a:t>Fourth level</a:t>
             </a:r>
           </a:p>
           <a:p>
             <a:pPr lvl="4"/>
             <a:r>
-              <a:rPr lang="en-US" smtClean="0"/>
+              <a:rPr lang="en-US"/>
               <a:t>Fifth level</a:t>
             </a:r>
-            <a:endParaRPr lang="en-US"/>
           </a:p>
         </p:txBody>
       </p:sp>
@@ -2741,7 +2736,7 @@
           <a:p>
             <a:fld id="{5BCAD085-E8A6-8845-BD4E-CB4CCA059FC4}" type="datetimeFigureOut">
               <a:rPr lang="en-US" smtClean="0"/>
-              <a:t>1/27/13</a:t>
+              <a:t>3/10/2026</a:t>
             </a:fld>
             <a:endParaRPr lang="en-US"/>
           </a:p>
@@ -3100,7 +3095,7 @@
 </file>
 
 <file path=ppt/slides/slide1.xml><?xml version="1.0" encoding="utf-8"?>
-<p:sld xmlns:a="http://schemas.openxmlformats.org/drawingml/2006/main" xmlns:p="http://schemas.openxmlformats.org/presentationml/2006/main" xmlns:r="http://schemas.openxmlformats.org/officeDocument/2006/relationships">
+<p:sld xmlns:a="http://schemas.openxmlformats.org/drawingml/2006/main" xmlns:r="http://schemas.openxmlformats.org/officeDocument/2006/relationships" xmlns:p="http://schemas.openxmlformats.org/presentationml/2006/main">
   <p:cSld>
     <p:spTree>
       <p:nvGrpSpPr>
@@ -3108,7 +3103,14 @@
         <p:cNvGrpSpPr/>
         <p:nvPr/>
       </p:nvGrpSpPr>
-      <p:grpSpPr/>
+      <p:grpSpPr>
+        <a:xfrm>
+          <a:off x="0" y="0"/>
+          <a:ext cx="0" cy="0"/>
+          <a:chOff x="0" y="0"/>
+          <a:chExt cx="0" cy="0"/>
+        </a:xfrm>
+      </p:grpSpPr>
       <p:sp>
         <p:nvSpPr>
           <p:cNvPr id="2" name="Rectangle 1"/>
@@ -3149,6 +3151,7 @@
           <a:lstStyle/>
           <a:p>
             <a:pPr algn="ctr"/>
+            <a:endParaRPr/>
           </a:p>
         </p:txBody>
       </p:sp>
@@ -3192,6 +3195,7 @@
           <a:lstStyle/>
           <a:p>
             <a:pPr algn="ctr"/>
+            <a:endParaRPr/>
           </a:p>
         </p:txBody>
       </p:sp>
@@ -3203,7 +3207,7 @@
         </p:nvSpPr>
         <p:spPr>
           <a:xfrm>
-            <a:off x="731520" y="1828800"/>
+            <a:off x="731520" y="960120"/>
             <a:ext cx="10698480" cy="1371600"/>
           </a:xfrm>
           <a:prstGeom prst="rect">
@@ -3226,6 +3230,7 @@
               </a:defRPr>
             </a:pPr>
             <a:r>
+              <a:rPr dirty="0"/>
               <a:t>Mars Habitat Automation Platform</a:t>
             </a:r>
           </a:p>
@@ -3239,7 +3244,7 @@
         </p:nvSpPr>
         <p:spPr>
           <a:xfrm>
-            <a:off x="731520" y="3200400"/>
+            <a:off x="746607" y="3383280"/>
             <a:ext cx="10698480" cy="731520"/>
           </a:xfrm>
           <a:prstGeom prst="rect">
@@ -3262,6 +3267,7 @@
               </a:defRPr>
             </a:pPr>
             <a:r>
+              <a:rPr dirty="0"/>
               <a:t>Distributed Event-Driven System for Habitat Monitoring &amp; Control</a:t>
             </a:r>
           </a:p>
@@ -3275,7 +3281,7 @@
         </p:nvSpPr>
         <p:spPr>
           <a:xfrm>
-            <a:off x="4572000" y="4023360"/>
+            <a:off x="4587087" y="4608576"/>
             <a:ext cx="3017520" cy="36576"/>
           </a:xfrm>
           <a:prstGeom prst="rect">
@@ -3307,6 +3313,7 @@
           <a:lstStyle/>
           <a:p>
             <a:pPr algn="ctr"/>
+            <a:endParaRPr/>
           </a:p>
         </p:txBody>
       </p:sp>
@@ -3318,7 +3325,7 @@
         </p:nvSpPr>
         <p:spPr>
           <a:xfrm>
-            <a:off x="731520" y="4846320"/>
+            <a:off x="746607" y="5029200"/>
             <a:ext cx="10698480" cy="548640"/>
           </a:xfrm>
           <a:prstGeom prst="rect">
@@ -3341,7 +3348,24 @@
               </a:defRPr>
             </a:pPr>
             <a:r>
-              <a:t>Deda Daniel  •  Macrì Francesco  •  Pagliarini Paolo  •  Torresi Flavio</a:t>
+              <a:rPr dirty="0"/>
+              <a:t>Deda Daniel  •  </a:t>
+            </a:r>
+            <a:r>
+              <a:rPr dirty="0" err="1"/>
+              <a:t>Macrì</a:t>
+            </a:r>
+            <a:r>
+              <a:rPr dirty="0"/>
+              <a:t> Francesco  •  Pagliarini Paolo  •  </a:t>
+            </a:r>
+            <a:r>
+              <a:rPr dirty="0" err="1"/>
+              <a:t>Torresi</a:t>
+            </a:r>
+            <a:r>
+              <a:rPr dirty="0"/>
+              <a:t> Flavio</a:t>
             </a:r>
           </a:p>
         </p:txBody>
@@ -3355,7 +3379,7 @@
         <p:spPr>
           <a:xfrm>
             <a:off x="731520" y="5760720"/>
-            <a:ext cx="10698480" cy="365760"/>
+            <a:ext cx="10698480" cy="338554"/>
           </a:xfrm>
           <a:prstGeom prst="rect">
             <a:avLst/>
@@ -3377,8 +3401,14 @@
               </a:defRPr>
             </a:pPr>
             <a:r>
-              <a:t>Laboratory of Advanced Programming – Hackathon Exam 2024/2025</a:t>
-            </a:r>
+              <a:rPr dirty="0"/>
+              <a:t>Laboratory of Advanced Programming – Hackathon Exam 202</a:t>
+            </a:r>
+            <a:r>
+              <a:rPr lang="it-IT"/>
+              <a:t>5/2026</a:t>
+            </a:r>
+            <a:endParaRPr/>
           </a:p>
         </p:txBody>
       </p:sp>
@@ -3391,7 +3421,7 @@
 </file>
 
 <file path=ppt/slides/slide10.xml><?xml version="1.0" encoding="utf-8"?>
-<p:sld xmlns:a="http://schemas.openxmlformats.org/drawingml/2006/main" xmlns:p="http://schemas.openxmlformats.org/presentationml/2006/main" xmlns:r="http://schemas.openxmlformats.org/officeDocument/2006/relationships">
+<p:sld xmlns:a="http://schemas.openxmlformats.org/drawingml/2006/main" xmlns:r="http://schemas.openxmlformats.org/officeDocument/2006/relationships" xmlns:p="http://schemas.openxmlformats.org/presentationml/2006/main">
   <p:cSld>
     <p:spTree>
       <p:nvGrpSpPr>
@@ -3399,7 +3429,14 @@
         <p:cNvGrpSpPr/>
         <p:nvPr/>
       </p:nvGrpSpPr>
-      <p:grpSpPr/>
+      <p:grpSpPr>
+        <a:xfrm>
+          <a:off x="0" y="0"/>
+          <a:ext cx="0" cy="0"/>
+          <a:chOff x="0" y="0"/>
+          <a:chExt cx="0" cy="0"/>
+        </a:xfrm>
+      </p:grpSpPr>
       <p:sp>
         <p:nvSpPr>
           <p:cNvPr id="2" name="Rectangle 1"/>
@@ -3440,6 +3477,7 @@
           <a:lstStyle/>
           <a:p>
             <a:pPr algn="ctr"/>
+            <a:endParaRPr/>
           </a:p>
         </p:txBody>
       </p:sp>
@@ -3481,49 +3519,6 @@
       </p:sp>
       <p:sp>
         <p:nvSpPr>
-          <p:cNvPr id="4" name="Rectangle 3"/>
-          <p:cNvSpPr/>
-          <p:nvPr/>
-        </p:nvSpPr>
-        <p:spPr>
-          <a:xfrm>
-            <a:off x="731520" y="960120"/>
-            <a:ext cx="109728" cy="457200"/>
-          </a:xfrm>
-          <a:prstGeom prst="rect">
-            <a:avLst/>
-          </a:prstGeom>
-          <a:solidFill>
-            <a:srgbClr val="00D4FF"/>
-          </a:solidFill>
-          <a:ln>
-            <a:noFill/>
-          </a:ln>
-        </p:spPr>
-        <p:style>
-          <a:lnRef idx="1">
-            <a:schemeClr val="accent1"/>
-          </a:lnRef>
-          <a:fillRef idx="3">
-            <a:schemeClr val="accent1"/>
-          </a:fillRef>
-          <a:effectRef idx="2">
-            <a:schemeClr val="accent1"/>
-          </a:effectRef>
-          <a:fontRef idx="minor">
-            <a:schemeClr val="lt1"/>
-          </a:fontRef>
-        </p:style>
-        <p:txBody>
-          <a:bodyPr rtlCol="0" anchor="ctr"/>
-          <a:lstStyle/>
-          <a:p>
-            <a:pPr algn="ctr"/>
-          </a:p>
-        </p:txBody>
-      </p:sp>
-      <p:sp>
-        <p:nvSpPr>
           <p:cNvPr id="5" name="TextBox 4"/>
           <p:cNvSpPr txBox="1"/>
           <p:nvPr/>
@@ -4034,8 +4029,8 @@
         </p:nvSpPr>
         <p:spPr>
           <a:xfrm>
-            <a:off x="5029200" y="2971800"/>
-            <a:ext cx="1463040" cy="320040"/>
+            <a:off x="5029199" y="2971800"/>
+            <a:ext cx="1549879" cy="369332"/>
           </a:xfrm>
           <a:prstGeom prst="rect">
             <a:avLst/>
@@ -4057,8 +4052,14 @@
               </a:defRPr>
             </a:pPr>
             <a:r>
-              <a:t>Rule Builder</a:t>
-            </a:r>
+              <a:rPr dirty="0"/>
+              <a:t>Rule </a:t>
+            </a:r>
+            <a:r>
+              <a:rPr lang="it-IT" dirty="0"/>
+              <a:t>Builder</a:t>
+            </a:r>
+            <a:endParaRPr dirty="0"/>
           </a:p>
         </p:txBody>
       </p:sp>
@@ -4284,6 +4285,7 @@
           <a:lstStyle/>
           <a:p>
             <a:pPr algn="ctr"/>
+            <a:endParaRPr/>
           </a:p>
         </p:txBody>
       </p:sp>
@@ -4396,6 +4398,56 @@
             <a:r>
               <a:t>10/22</a:t>
             </a:r>
+          </a:p>
+        </p:txBody>
+      </p:sp>
+      <p:sp>
+        <p:nvSpPr>
+          <p:cNvPr id="29" name="Rectangle 28">
+            <a:extLst>
+              <a:ext uri="{FF2B5EF4-FFF2-40B4-BE49-F238E27FC236}">
+                <a16:creationId xmlns:a16="http://schemas.microsoft.com/office/drawing/2014/main" id="{230AF359-90CF-F120-437D-93449B5EDC3F}"/>
+              </a:ext>
+            </a:extLst>
+          </p:cNvPr>
+          <p:cNvSpPr/>
+          <p:nvPr/>
+        </p:nvSpPr>
+        <p:spPr>
+          <a:xfrm>
+            <a:off x="676656" y="548640"/>
+            <a:ext cx="109728" cy="640080"/>
+          </a:xfrm>
+          <a:prstGeom prst="rect">
+            <a:avLst/>
+          </a:prstGeom>
+          <a:solidFill>
+            <a:srgbClr val="00D4FF"/>
+          </a:solidFill>
+          <a:ln>
+            <a:noFill/>
+          </a:ln>
+        </p:spPr>
+        <p:style>
+          <a:lnRef idx="1">
+            <a:schemeClr val="accent1"/>
+          </a:lnRef>
+          <a:fillRef idx="3">
+            <a:schemeClr val="accent1"/>
+          </a:fillRef>
+          <a:effectRef idx="2">
+            <a:schemeClr val="accent1"/>
+          </a:effectRef>
+          <a:fontRef idx="minor">
+            <a:schemeClr val="lt1"/>
+          </a:fontRef>
+        </p:style>
+        <p:txBody>
+          <a:bodyPr rtlCol="0" anchor="ctr"/>
+          <a:lstStyle/>
+          <a:p>
+            <a:pPr algn="ctr"/>
+            <a:endParaRPr/>
           </a:p>
         </p:txBody>
       </p:sp>
@@ -4408,7 +4460,7 @@
 </file>
 
 <file path=ppt/slides/slide11.xml><?xml version="1.0" encoding="utf-8"?>
-<p:sld xmlns:a="http://schemas.openxmlformats.org/drawingml/2006/main" xmlns:p="http://schemas.openxmlformats.org/presentationml/2006/main" xmlns:r="http://schemas.openxmlformats.org/officeDocument/2006/relationships">
+<p:sld xmlns:a="http://schemas.openxmlformats.org/drawingml/2006/main" xmlns:r="http://schemas.openxmlformats.org/officeDocument/2006/relationships" xmlns:p="http://schemas.openxmlformats.org/presentationml/2006/main">
   <p:cSld>
     <p:spTree>
       <p:nvGrpSpPr>
@@ -4416,7 +4468,14 @@
         <p:cNvGrpSpPr/>
         <p:nvPr/>
       </p:nvGrpSpPr>
-      <p:grpSpPr/>
+      <p:grpSpPr>
+        <a:xfrm>
+          <a:off x="0" y="0"/>
+          <a:ext cx="0" cy="0"/>
+          <a:chOff x="0" y="0"/>
+          <a:chExt cx="0" cy="0"/>
+        </a:xfrm>
+      </p:grpSpPr>
       <p:sp>
         <p:nvSpPr>
           <p:cNvPr id="2" name="Rectangle 1"/>
@@ -4457,6 +4516,7 @@
           <a:lstStyle/>
           <a:p>
             <a:pPr algn="ctr"/>
+            <a:endParaRPr/>
           </a:p>
         </p:txBody>
       </p:sp>
@@ -4498,56 +4558,13 @@
       </p:sp>
       <p:sp>
         <p:nvSpPr>
-          <p:cNvPr id="4" name="Rectangle 3"/>
-          <p:cNvSpPr/>
-          <p:nvPr/>
-        </p:nvSpPr>
-        <p:spPr>
-          <a:xfrm>
-            <a:off x="731520" y="777240"/>
-            <a:ext cx="91440" cy="365760"/>
-          </a:xfrm>
-          <a:prstGeom prst="rect">
-            <a:avLst/>
-          </a:prstGeom>
-          <a:solidFill>
-            <a:srgbClr val="00D4FF"/>
-          </a:solidFill>
-          <a:ln>
-            <a:noFill/>
-          </a:ln>
-        </p:spPr>
-        <p:style>
-          <a:lnRef idx="1">
-            <a:schemeClr val="accent1"/>
-          </a:lnRef>
-          <a:fillRef idx="3">
-            <a:schemeClr val="accent1"/>
-          </a:fillRef>
-          <a:effectRef idx="2">
-            <a:schemeClr val="accent1"/>
-          </a:effectRef>
-          <a:fontRef idx="minor">
-            <a:schemeClr val="lt1"/>
-          </a:fontRef>
-        </p:style>
-        <p:txBody>
-          <a:bodyPr rtlCol="0" anchor="ctr"/>
-          <a:lstStyle/>
-          <a:p>
-            <a:pPr algn="ctr"/>
-          </a:p>
-        </p:txBody>
-      </p:sp>
-      <p:sp>
-        <p:nvSpPr>
           <p:cNvPr id="5" name="TextBox 4"/>
           <p:cNvSpPr txBox="1"/>
           <p:nvPr/>
         </p:nvSpPr>
         <p:spPr>
           <a:xfrm>
-            <a:off x="1828800" y="274320"/>
+            <a:off x="776377" y="1041746"/>
             <a:ext cx="9144000" cy="457200"/>
           </a:xfrm>
           <a:prstGeom prst="rect">
@@ -4570,6 +4587,7 @@
               </a:defRPr>
             </a:pPr>
             <a:r>
+              <a:rPr dirty="0"/>
               <a:t>Real-time REST sensor monitoring with status indicators</a:t>
             </a:r>
           </a:p>
@@ -4591,8 +4609,8 @@
         </p:blipFill>
         <p:spPr>
           <a:xfrm>
-            <a:off x="457200" y="1097280"/>
-            <a:ext cx="11247120" cy="5557171"/>
+            <a:off x="1567132" y="1739877"/>
+            <a:ext cx="8945592" cy="4419992"/>
           </a:xfrm>
           <a:prstGeom prst="rect">
             <a:avLst/>
@@ -4632,6 +4650,56 @@
             <a:r>
               <a:t>11/22</a:t>
             </a:r>
+          </a:p>
+        </p:txBody>
+      </p:sp>
+      <p:sp>
+        <p:nvSpPr>
+          <p:cNvPr id="8" name="Rectangle 7">
+            <a:extLst>
+              <a:ext uri="{FF2B5EF4-FFF2-40B4-BE49-F238E27FC236}">
+                <a16:creationId xmlns:a16="http://schemas.microsoft.com/office/drawing/2014/main" id="{6541D0D0-24FF-96D2-BAFE-5BA9FF26F664}"/>
+              </a:ext>
+            </a:extLst>
+          </p:cNvPr>
+          <p:cNvSpPr/>
+          <p:nvPr/>
+        </p:nvSpPr>
+        <p:spPr>
+          <a:xfrm>
+            <a:off x="621792" y="411480"/>
+            <a:ext cx="109728" cy="640080"/>
+          </a:xfrm>
+          <a:prstGeom prst="rect">
+            <a:avLst/>
+          </a:prstGeom>
+          <a:solidFill>
+            <a:srgbClr val="00D4FF"/>
+          </a:solidFill>
+          <a:ln>
+            <a:noFill/>
+          </a:ln>
+        </p:spPr>
+        <p:style>
+          <a:lnRef idx="1">
+            <a:schemeClr val="accent1"/>
+          </a:lnRef>
+          <a:fillRef idx="3">
+            <a:schemeClr val="accent1"/>
+          </a:fillRef>
+          <a:effectRef idx="2">
+            <a:schemeClr val="accent1"/>
+          </a:effectRef>
+          <a:fontRef idx="minor">
+            <a:schemeClr val="lt1"/>
+          </a:fontRef>
+        </p:style>
+        <p:txBody>
+          <a:bodyPr rtlCol="0" anchor="ctr"/>
+          <a:lstStyle/>
+          <a:p>
+            <a:pPr algn="ctr"/>
+            <a:endParaRPr/>
           </a:p>
         </p:txBody>
       </p:sp>
@@ -4644,7 +4712,7 @@
 </file>
 
 <file path=ppt/slides/slide12.xml><?xml version="1.0" encoding="utf-8"?>
-<p:sld xmlns:a="http://schemas.openxmlformats.org/drawingml/2006/main" xmlns:p="http://schemas.openxmlformats.org/presentationml/2006/main" xmlns:r="http://schemas.openxmlformats.org/officeDocument/2006/relationships">
+<p:sld xmlns:a="http://schemas.openxmlformats.org/drawingml/2006/main" xmlns:r="http://schemas.openxmlformats.org/officeDocument/2006/relationships" xmlns:p="http://schemas.openxmlformats.org/presentationml/2006/main">
   <p:cSld>
     <p:spTree>
       <p:nvGrpSpPr>
@@ -4652,7 +4720,14 @@
         <p:cNvGrpSpPr/>
         <p:nvPr/>
       </p:nvGrpSpPr>
-      <p:grpSpPr/>
+      <p:grpSpPr>
+        <a:xfrm>
+          <a:off x="0" y="0"/>
+          <a:ext cx="0" cy="0"/>
+          <a:chOff x="0" y="0"/>
+          <a:chExt cx="0" cy="0"/>
+        </a:xfrm>
+      </p:grpSpPr>
       <p:sp>
         <p:nvSpPr>
           <p:cNvPr id="2" name="Rectangle 1"/>
@@ -4693,6 +4768,7 @@
           <a:lstStyle/>
           <a:p>
             <a:pPr algn="ctr"/>
+            <a:endParaRPr/>
           </a:p>
         </p:txBody>
       </p:sp>
@@ -4734,56 +4810,13 @@
       </p:sp>
       <p:sp>
         <p:nvSpPr>
-          <p:cNvPr id="4" name="Rectangle 3"/>
-          <p:cNvSpPr/>
-          <p:nvPr/>
-        </p:nvSpPr>
-        <p:spPr>
-          <a:xfrm>
-            <a:off x="731520" y="777240"/>
-            <a:ext cx="91440" cy="365760"/>
-          </a:xfrm>
-          <a:prstGeom prst="rect">
-            <a:avLst/>
-          </a:prstGeom>
-          <a:solidFill>
-            <a:srgbClr val="00D4FF"/>
-          </a:solidFill>
-          <a:ln>
-            <a:noFill/>
-          </a:ln>
-        </p:spPr>
-        <p:style>
-          <a:lnRef idx="1">
-            <a:schemeClr val="accent1"/>
-          </a:lnRef>
-          <a:fillRef idx="3">
-            <a:schemeClr val="accent1"/>
-          </a:fillRef>
-          <a:effectRef idx="2">
-            <a:schemeClr val="accent1"/>
-          </a:effectRef>
-          <a:fontRef idx="minor">
-            <a:schemeClr val="lt1"/>
-          </a:fontRef>
-        </p:style>
-        <p:txBody>
-          <a:bodyPr rtlCol="0" anchor="ctr"/>
-          <a:lstStyle/>
-          <a:p>
-            <a:pPr algn="ctr"/>
-          </a:p>
-        </p:txBody>
-      </p:sp>
-      <p:sp>
-        <p:nvSpPr>
           <p:cNvPr id="5" name="TextBox 4"/>
           <p:cNvSpPr txBox="1"/>
           <p:nvPr/>
         </p:nvSpPr>
         <p:spPr>
           <a:xfrm>
-            <a:off x="2560320" y="274320"/>
+            <a:off x="731520" y="1005840"/>
             <a:ext cx="9144000" cy="457200"/>
           </a:xfrm>
           <a:prstGeom prst="rect">
@@ -4806,6 +4839,7 @@
               </a:defRPr>
             </a:pPr>
             <a:r>
+              <a:rPr dirty="0"/>
               <a:t>SSE-powered live data visualization</a:t>
             </a:r>
           </a:p>
@@ -4827,8 +4861,8 @@
         </p:blipFill>
         <p:spPr>
           <a:xfrm>
-            <a:off x="457200" y="1097280"/>
-            <a:ext cx="11247120" cy="5557171"/>
+            <a:off x="1623051" y="1740508"/>
+            <a:ext cx="8945592" cy="4419993"/>
           </a:xfrm>
           <a:prstGeom prst="rect">
             <a:avLst/>
@@ -4868,6 +4902,56 @@
             <a:r>
               <a:t>12/22</a:t>
             </a:r>
+          </a:p>
+        </p:txBody>
+      </p:sp>
+      <p:sp>
+        <p:nvSpPr>
+          <p:cNvPr id="8" name="Rectangle 7">
+            <a:extLst>
+              <a:ext uri="{FF2B5EF4-FFF2-40B4-BE49-F238E27FC236}">
+                <a16:creationId xmlns:a16="http://schemas.microsoft.com/office/drawing/2014/main" id="{5E921D5D-617A-23F4-22E1-3CBEF8E321D8}"/>
+              </a:ext>
+            </a:extLst>
+          </p:cNvPr>
+          <p:cNvSpPr/>
+          <p:nvPr/>
+        </p:nvSpPr>
+        <p:spPr>
+          <a:xfrm>
+            <a:off x="621792" y="411480"/>
+            <a:ext cx="109728" cy="640080"/>
+          </a:xfrm>
+          <a:prstGeom prst="rect">
+            <a:avLst/>
+          </a:prstGeom>
+          <a:solidFill>
+            <a:srgbClr val="00D4FF"/>
+          </a:solidFill>
+          <a:ln>
+            <a:noFill/>
+          </a:ln>
+        </p:spPr>
+        <p:style>
+          <a:lnRef idx="1">
+            <a:schemeClr val="accent1"/>
+          </a:lnRef>
+          <a:fillRef idx="3">
+            <a:schemeClr val="accent1"/>
+          </a:fillRef>
+          <a:effectRef idx="2">
+            <a:schemeClr val="accent1"/>
+          </a:effectRef>
+          <a:fontRef idx="minor">
+            <a:schemeClr val="lt1"/>
+          </a:fontRef>
+        </p:style>
+        <p:txBody>
+          <a:bodyPr rtlCol="0" anchor="ctr"/>
+          <a:lstStyle/>
+          <a:p>
+            <a:pPr algn="ctr"/>
+            <a:endParaRPr/>
           </a:p>
         </p:txBody>
       </p:sp>
@@ -4880,7 +4964,7 @@
 </file>
 
 <file path=ppt/slides/slide13.xml><?xml version="1.0" encoding="utf-8"?>
-<p:sld xmlns:a="http://schemas.openxmlformats.org/drawingml/2006/main" xmlns:p="http://schemas.openxmlformats.org/presentationml/2006/main" xmlns:r="http://schemas.openxmlformats.org/officeDocument/2006/relationships">
+<p:sld xmlns:a="http://schemas.openxmlformats.org/drawingml/2006/main" xmlns:r="http://schemas.openxmlformats.org/officeDocument/2006/relationships" xmlns:p="http://schemas.openxmlformats.org/presentationml/2006/main">
   <p:cSld>
     <p:spTree>
       <p:nvGrpSpPr>
@@ -4888,7 +4972,14 @@
         <p:cNvGrpSpPr/>
         <p:nvPr/>
       </p:nvGrpSpPr>
-      <p:grpSpPr/>
+      <p:grpSpPr>
+        <a:xfrm>
+          <a:off x="0" y="0"/>
+          <a:ext cx="0" cy="0"/>
+          <a:chOff x="0" y="0"/>
+          <a:chExt cx="0" cy="0"/>
+        </a:xfrm>
+      </p:grpSpPr>
       <p:sp>
         <p:nvSpPr>
           <p:cNvPr id="2" name="Rectangle 1"/>
@@ -4929,6 +5020,7 @@
           <a:lstStyle/>
           <a:p>
             <a:pPr algn="ctr"/>
+            <a:endParaRPr/>
           </a:p>
         </p:txBody>
       </p:sp>
@@ -4970,56 +5062,13 @@
       </p:sp>
       <p:sp>
         <p:nvSpPr>
-          <p:cNvPr id="4" name="Rectangle 3"/>
-          <p:cNvSpPr/>
-          <p:nvPr/>
-        </p:nvSpPr>
-        <p:spPr>
-          <a:xfrm>
-            <a:off x="731520" y="777240"/>
-            <a:ext cx="91440" cy="365760"/>
-          </a:xfrm>
-          <a:prstGeom prst="rect">
-            <a:avLst/>
-          </a:prstGeom>
-          <a:solidFill>
-            <a:srgbClr val="00D4FF"/>
-          </a:solidFill>
-          <a:ln>
-            <a:noFill/>
-          </a:ln>
-        </p:spPr>
-        <p:style>
-          <a:lnRef idx="1">
-            <a:schemeClr val="accent1"/>
-          </a:lnRef>
-          <a:fillRef idx="3">
-            <a:schemeClr val="accent1"/>
-          </a:fillRef>
-          <a:effectRef idx="2">
-            <a:schemeClr val="accent1"/>
-          </a:effectRef>
-          <a:fontRef idx="minor">
-            <a:schemeClr val="lt1"/>
-          </a:fontRef>
-        </p:style>
-        <p:txBody>
-          <a:bodyPr rtlCol="0" anchor="ctr"/>
-          <a:lstStyle/>
-          <a:p>
-            <a:pPr algn="ctr"/>
-          </a:p>
-        </p:txBody>
-      </p:sp>
-      <p:sp>
-        <p:nvSpPr>
           <p:cNvPr id="5" name="TextBox 4"/>
           <p:cNvSpPr txBox="1"/>
           <p:nvPr/>
         </p:nvSpPr>
         <p:spPr>
           <a:xfrm>
-            <a:off x="2286000" y="274320"/>
+            <a:off x="762000" y="993007"/>
             <a:ext cx="9144000" cy="457200"/>
           </a:xfrm>
           <a:prstGeom prst="rect">
@@ -5042,6 +5091,7 @@
               </a:defRPr>
             </a:pPr>
             <a:r>
+              <a:rPr dirty="0"/>
               <a:t>Manual control and command history audit trail</a:t>
             </a:r>
           </a:p>
@@ -5063,8 +5113,8 @@
         </p:blipFill>
         <p:spPr>
           <a:xfrm>
-            <a:off x="457200" y="1097280"/>
-            <a:ext cx="11247120" cy="5557171"/>
+            <a:off x="1602347" y="1620254"/>
+            <a:ext cx="8986999" cy="4440451"/>
           </a:xfrm>
           <a:prstGeom prst="rect">
             <a:avLst/>
@@ -5104,6 +5154,56 @@
             <a:r>
               <a:t>13/22</a:t>
             </a:r>
+          </a:p>
+        </p:txBody>
+      </p:sp>
+      <p:sp>
+        <p:nvSpPr>
+          <p:cNvPr id="9" name="Rectangle 8">
+            <a:extLst>
+              <a:ext uri="{FF2B5EF4-FFF2-40B4-BE49-F238E27FC236}">
+                <a16:creationId xmlns:a16="http://schemas.microsoft.com/office/drawing/2014/main" id="{EDDCB29E-FE9A-00E1-0344-19BAD6A6D021}"/>
+              </a:ext>
+            </a:extLst>
+          </p:cNvPr>
+          <p:cNvSpPr/>
+          <p:nvPr/>
+        </p:nvSpPr>
+        <p:spPr>
+          <a:xfrm>
+            <a:off x="652272" y="389626"/>
+            <a:ext cx="109728" cy="640080"/>
+          </a:xfrm>
+          <a:prstGeom prst="rect">
+            <a:avLst/>
+          </a:prstGeom>
+          <a:solidFill>
+            <a:srgbClr val="00D4FF"/>
+          </a:solidFill>
+          <a:ln>
+            <a:noFill/>
+          </a:ln>
+        </p:spPr>
+        <p:style>
+          <a:lnRef idx="1">
+            <a:schemeClr val="accent1"/>
+          </a:lnRef>
+          <a:fillRef idx="3">
+            <a:schemeClr val="accent1"/>
+          </a:fillRef>
+          <a:effectRef idx="2">
+            <a:schemeClr val="accent1"/>
+          </a:effectRef>
+          <a:fontRef idx="minor">
+            <a:schemeClr val="lt1"/>
+          </a:fontRef>
+        </p:style>
+        <p:txBody>
+          <a:bodyPr rtlCol="0" anchor="ctr"/>
+          <a:lstStyle/>
+          <a:p>
+            <a:pPr algn="ctr"/>
+            <a:endParaRPr/>
           </a:p>
         </p:txBody>
       </p:sp>
@@ -5116,7 +5216,7 @@
 </file>
 
 <file path=ppt/slides/slide14.xml><?xml version="1.0" encoding="utf-8"?>
-<p:sld xmlns:a="http://schemas.openxmlformats.org/drawingml/2006/main" xmlns:p="http://schemas.openxmlformats.org/presentationml/2006/main" xmlns:r="http://schemas.openxmlformats.org/officeDocument/2006/relationships">
+<p:sld xmlns:a="http://schemas.openxmlformats.org/drawingml/2006/main" xmlns:r="http://schemas.openxmlformats.org/officeDocument/2006/relationships" xmlns:p="http://schemas.openxmlformats.org/presentationml/2006/main">
   <p:cSld>
     <p:spTree>
       <p:nvGrpSpPr>
@@ -5124,7 +5224,14 @@
         <p:cNvGrpSpPr/>
         <p:nvPr/>
       </p:nvGrpSpPr>
-      <p:grpSpPr/>
+      <p:grpSpPr>
+        <a:xfrm>
+          <a:off x="0" y="0"/>
+          <a:ext cx="0" cy="0"/>
+          <a:chOff x="0" y="0"/>
+          <a:chExt cx="0" cy="0"/>
+        </a:xfrm>
+      </p:grpSpPr>
       <p:sp>
         <p:nvSpPr>
           <p:cNvPr id="2" name="Rectangle 1"/>
@@ -5165,6 +5272,7 @@
           <a:lstStyle/>
           <a:p>
             <a:pPr algn="ctr"/>
+            <a:endParaRPr/>
           </a:p>
         </p:txBody>
       </p:sp>
@@ -5206,56 +5314,13 @@
       </p:sp>
       <p:sp>
         <p:nvSpPr>
-          <p:cNvPr id="4" name="Rectangle 3"/>
-          <p:cNvSpPr/>
-          <p:nvPr/>
-        </p:nvSpPr>
-        <p:spPr>
-          <a:xfrm>
-            <a:off x="731520" y="777240"/>
-            <a:ext cx="91440" cy="365760"/>
-          </a:xfrm>
-          <a:prstGeom prst="rect">
-            <a:avLst/>
-          </a:prstGeom>
-          <a:solidFill>
-            <a:srgbClr val="00D4FF"/>
-          </a:solidFill>
-          <a:ln>
-            <a:noFill/>
-          </a:ln>
-        </p:spPr>
-        <p:style>
-          <a:lnRef idx="1">
-            <a:schemeClr val="accent1"/>
-          </a:lnRef>
-          <a:fillRef idx="3">
-            <a:schemeClr val="accent1"/>
-          </a:fillRef>
-          <a:effectRef idx="2">
-            <a:schemeClr val="accent1"/>
-          </a:effectRef>
-          <a:fontRef idx="minor">
-            <a:schemeClr val="lt1"/>
-          </a:fontRef>
-        </p:style>
-        <p:txBody>
-          <a:bodyPr rtlCol="0" anchor="ctr"/>
-          <a:lstStyle/>
-          <a:p>
-            <a:pPr algn="ctr"/>
-          </a:p>
-        </p:txBody>
-      </p:sp>
-      <p:sp>
-        <p:nvSpPr>
           <p:cNvPr id="5" name="TextBox 4"/>
           <p:cNvSpPr txBox="1"/>
           <p:nvPr/>
         </p:nvSpPr>
         <p:spPr>
           <a:xfrm>
-            <a:off x="2103120" y="274320"/>
+            <a:off x="762000" y="1005840"/>
             <a:ext cx="9144000" cy="457200"/>
           </a:xfrm>
           <a:prstGeom prst="rect">
@@ -5278,6 +5343,7 @@
               </a:defRPr>
             </a:pPr>
             <a:r>
+              <a:rPr dirty="0"/>
               <a:t>Create IF-THEN automation rules visually</a:t>
             </a:r>
           </a:p>
@@ -5299,8 +5365,8 @@
         </p:blipFill>
         <p:spPr>
           <a:xfrm>
-            <a:off x="457200" y="1097280"/>
-            <a:ext cx="11247120" cy="6595967"/>
+            <a:off x="2214823" y="1564421"/>
+            <a:ext cx="7762048" cy="4552118"/>
           </a:xfrm>
           <a:prstGeom prst="rect">
             <a:avLst/>
@@ -5340,6 +5406,56 @@
             <a:r>
               <a:t>14/22</a:t>
             </a:r>
+          </a:p>
+        </p:txBody>
+      </p:sp>
+      <p:sp>
+        <p:nvSpPr>
+          <p:cNvPr id="9" name="Rectangle 8">
+            <a:extLst>
+              <a:ext uri="{FF2B5EF4-FFF2-40B4-BE49-F238E27FC236}">
+                <a16:creationId xmlns:a16="http://schemas.microsoft.com/office/drawing/2014/main" id="{48D09FF2-4829-9520-B9A3-8836607E3D01}"/>
+              </a:ext>
+            </a:extLst>
+          </p:cNvPr>
+          <p:cNvSpPr/>
+          <p:nvPr/>
+        </p:nvSpPr>
+        <p:spPr>
+          <a:xfrm>
+            <a:off x="652272" y="411480"/>
+            <a:ext cx="109728" cy="640080"/>
+          </a:xfrm>
+          <a:prstGeom prst="rect">
+            <a:avLst/>
+          </a:prstGeom>
+          <a:solidFill>
+            <a:srgbClr val="00D4FF"/>
+          </a:solidFill>
+          <a:ln>
+            <a:noFill/>
+          </a:ln>
+        </p:spPr>
+        <p:style>
+          <a:lnRef idx="1">
+            <a:schemeClr val="accent1"/>
+          </a:lnRef>
+          <a:fillRef idx="3">
+            <a:schemeClr val="accent1"/>
+          </a:fillRef>
+          <a:effectRef idx="2">
+            <a:schemeClr val="accent1"/>
+          </a:effectRef>
+          <a:fontRef idx="minor">
+            <a:schemeClr val="lt1"/>
+          </a:fontRef>
+        </p:style>
+        <p:txBody>
+          <a:bodyPr rtlCol="0" anchor="ctr"/>
+          <a:lstStyle/>
+          <a:p>
+            <a:pPr algn="ctr"/>
+            <a:endParaRPr/>
           </a:p>
         </p:txBody>
       </p:sp>
@@ -5352,7 +5468,7 @@
 </file>
 
 <file path=ppt/slides/slide15.xml><?xml version="1.0" encoding="utf-8"?>
-<p:sld xmlns:a="http://schemas.openxmlformats.org/drawingml/2006/main" xmlns:p="http://schemas.openxmlformats.org/presentationml/2006/main" xmlns:r="http://schemas.openxmlformats.org/officeDocument/2006/relationships">
+<p:sld xmlns:a="http://schemas.openxmlformats.org/drawingml/2006/main" xmlns:r="http://schemas.openxmlformats.org/officeDocument/2006/relationships" xmlns:p="http://schemas.openxmlformats.org/presentationml/2006/main">
   <p:cSld>
     <p:spTree>
       <p:nvGrpSpPr>
@@ -5360,7 +5476,14 @@
         <p:cNvGrpSpPr/>
         <p:nvPr/>
       </p:nvGrpSpPr>
-      <p:grpSpPr/>
+      <p:grpSpPr>
+        <a:xfrm>
+          <a:off x="0" y="0"/>
+          <a:ext cx="0" cy="0"/>
+          <a:chOff x="0" y="0"/>
+          <a:chExt cx="0" cy="0"/>
+        </a:xfrm>
+      </p:grpSpPr>
       <p:sp>
         <p:nvSpPr>
           <p:cNvPr id="2" name="Rectangle 1"/>
@@ -5401,6 +5524,7 @@
           <a:lstStyle/>
           <a:p>
             <a:pPr algn="ctr"/>
+            <a:endParaRPr/>
           </a:p>
         </p:txBody>
       </p:sp>
@@ -5442,56 +5566,13 @@
       </p:sp>
       <p:sp>
         <p:nvSpPr>
-          <p:cNvPr id="4" name="Rectangle 3"/>
-          <p:cNvSpPr/>
-          <p:nvPr/>
-        </p:nvSpPr>
-        <p:spPr>
-          <a:xfrm>
-            <a:off x="731520" y="777240"/>
-            <a:ext cx="91440" cy="365760"/>
-          </a:xfrm>
-          <a:prstGeom prst="rect">
-            <a:avLst/>
-          </a:prstGeom>
-          <a:solidFill>
-            <a:srgbClr val="00D4FF"/>
-          </a:solidFill>
-          <a:ln>
-            <a:noFill/>
-          </a:ln>
-        </p:spPr>
-        <p:style>
-          <a:lnRef idx="1">
-            <a:schemeClr val="accent1"/>
-          </a:lnRef>
-          <a:fillRef idx="3">
-            <a:schemeClr val="accent1"/>
-          </a:fillRef>
-          <a:effectRef idx="2">
-            <a:schemeClr val="accent1"/>
-          </a:effectRef>
-          <a:fontRef idx="minor">
-            <a:schemeClr val="lt1"/>
-          </a:fontRef>
-        </p:style>
-        <p:txBody>
-          <a:bodyPr rtlCol="0" anchor="ctr"/>
-          <a:lstStyle/>
-          <a:p>
-            <a:pPr algn="ctr"/>
-          </a:p>
-        </p:txBody>
-      </p:sp>
-      <p:sp>
-        <p:nvSpPr>
           <p:cNvPr id="5" name="TextBox 4"/>
           <p:cNvSpPr txBox="1"/>
           <p:nvPr/>
         </p:nvSpPr>
         <p:spPr>
           <a:xfrm>
-            <a:off x="2560320" y="274320"/>
+            <a:off x="786384" y="915838"/>
             <a:ext cx="9144000" cy="457200"/>
           </a:xfrm>
           <a:prstGeom prst="rect">
@@ -5514,6 +5595,7 @@
               </a:defRPr>
             </a:pPr>
             <a:r>
+              <a:rPr dirty="0"/>
               <a:t>List, toggle, edit, and delete automation rules</a:t>
             </a:r>
           </a:p>
@@ -5535,8 +5617,8 @@
         </p:blipFill>
         <p:spPr>
           <a:xfrm>
-            <a:off x="457200" y="1097280"/>
-            <a:ext cx="11247120" cy="4686300"/>
+            <a:off x="1424643" y="1894145"/>
+            <a:ext cx="9342408" cy="3892670"/>
           </a:xfrm>
           <a:prstGeom prst="rect">
             <a:avLst/>
@@ -5576,6 +5658,56 @@
             <a:r>
               <a:t>15/22</a:t>
             </a:r>
+          </a:p>
+        </p:txBody>
+      </p:sp>
+      <p:sp>
+        <p:nvSpPr>
+          <p:cNvPr id="8" name="Rectangle 7">
+            <a:extLst>
+              <a:ext uri="{FF2B5EF4-FFF2-40B4-BE49-F238E27FC236}">
+                <a16:creationId xmlns:a16="http://schemas.microsoft.com/office/drawing/2014/main" id="{93C6DF6F-1D9F-B856-4F6B-3A19BF0CCC83}"/>
+              </a:ext>
+            </a:extLst>
+          </p:cNvPr>
+          <p:cNvSpPr/>
+          <p:nvPr/>
+        </p:nvSpPr>
+        <p:spPr>
+          <a:xfrm>
+            <a:off x="676656" y="400050"/>
+            <a:ext cx="109728" cy="640080"/>
+          </a:xfrm>
+          <a:prstGeom prst="rect">
+            <a:avLst/>
+          </a:prstGeom>
+          <a:solidFill>
+            <a:srgbClr val="00D4FF"/>
+          </a:solidFill>
+          <a:ln>
+            <a:noFill/>
+          </a:ln>
+        </p:spPr>
+        <p:style>
+          <a:lnRef idx="1">
+            <a:schemeClr val="accent1"/>
+          </a:lnRef>
+          <a:fillRef idx="3">
+            <a:schemeClr val="accent1"/>
+          </a:fillRef>
+          <a:effectRef idx="2">
+            <a:schemeClr val="accent1"/>
+          </a:effectRef>
+          <a:fontRef idx="minor">
+            <a:schemeClr val="lt1"/>
+          </a:fontRef>
+        </p:style>
+        <p:txBody>
+          <a:bodyPr rtlCol="0" anchor="ctr"/>
+          <a:lstStyle/>
+          <a:p>
+            <a:pPr algn="ctr"/>
+            <a:endParaRPr/>
           </a:p>
         </p:txBody>
       </p:sp>
@@ -5588,7 +5720,7 @@
 </file>
 
 <file path=ppt/slides/slide16.xml><?xml version="1.0" encoding="utf-8"?>
-<p:sld xmlns:a="http://schemas.openxmlformats.org/drawingml/2006/main" xmlns:p="http://schemas.openxmlformats.org/presentationml/2006/main" xmlns:r="http://schemas.openxmlformats.org/officeDocument/2006/relationships">
+<p:sld xmlns:a="http://schemas.openxmlformats.org/drawingml/2006/main" xmlns:r="http://schemas.openxmlformats.org/officeDocument/2006/relationships" xmlns:p="http://schemas.openxmlformats.org/presentationml/2006/main">
   <p:cSld>
     <p:spTree>
       <p:nvGrpSpPr>
@@ -5596,7 +5728,14 @@
         <p:cNvGrpSpPr/>
         <p:nvPr/>
       </p:nvGrpSpPr>
-      <p:grpSpPr/>
+      <p:grpSpPr>
+        <a:xfrm>
+          <a:off x="0" y="0"/>
+          <a:ext cx="0" cy="0"/>
+          <a:chOff x="0" y="0"/>
+          <a:chExt cx="0" cy="0"/>
+        </a:xfrm>
+      </p:grpSpPr>
       <p:sp>
         <p:nvSpPr>
           <p:cNvPr id="2" name="Rectangle 1"/>
@@ -5637,6 +5776,7 @@
           <a:lstStyle/>
           <a:p>
             <a:pPr algn="ctr"/>
+            <a:endParaRPr/>
           </a:p>
         </p:txBody>
       </p:sp>
@@ -5678,56 +5818,13 @@
       </p:sp>
       <p:sp>
         <p:nvSpPr>
-          <p:cNvPr id="4" name="Rectangle 3"/>
-          <p:cNvSpPr/>
-          <p:nvPr/>
-        </p:nvSpPr>
-        <p:spPr>
-          <a:xfrm>
-            <a:off x="731520" y="777240"/>
-            <a:ext cx="91440" cy="365760"/>
-          </a:xfrm>
-          <a:prstGeom prst="rect">
-            <a:avLst/>
-          </a:prstGeom>
-          <a:solidFill>
-            <a:srgbClr val="00D4FF"/>
-          </a:solidFill>
-          <a:ln>
-            <a:noFill/>
-          </a:ln>
-        </p:spPr>
-        <p:style>
-          <a:lnRef idx="1">
-            <a:schemeClr val="accent1"/>
-          </a:lnRef>
-          <a:fillRef idx="3">
-            <a:schemeClr val="accent1"/>
-          </a:fillRef>
-          <a:effectRef idx="2">
-            <a:schemeClr val="accent1"/>
-          </a:effectRef>
-          <a:fontRef idx="minor">
-            <a:schemeClr val="lt1"/>
-          </a:fontRef>
-        </p:style>
-        <p:txBody>
-          <a:bodyPr rtlCol="0" anchor="ctr"/>
-          <a:lstStyle/>
-          <a:p>
-            <a:pPr algn="ctr"/>
-          </a:p>
-        </p:txBody>
-      </p:sp>
-      <p:sp>
-        <p:nvSpPr>
           <p:cNvPr id="5" name="TextBox 4"/>
           <p:cNvSpPr txBox="1"/>
           <p:nvPr/>
         </p:nvSpPr>
         <p:spPr>
           <a:xfrm>
-            <a:off x="2103120" y="274320"/>
+            <a:off x="731520" y="960120"/>
             <a:ext cx="9144000" cy="457200"/>
           </a:xfrm>
           <a:prstGeom prst="rect">
@@ -5750,6 +5847,7 @@
               </a:defRPr>
             </a:pPr>
             <a:r>
+              <a:rPr dirty="0"/>
               <a:t>Health monitoring and notification center</a:t>
             </a:r>
           </a:p>
@@ -5771,8 +5869,8 @@
         </p:blipFill>
         <p:spPr>
           <a:xfrm>
-            <a:off x="457200" y="1097280"/>
-            <a:ext cx="11247120" cy="6689693"/>
+            <a:off x="2214976" y="1541144"/>
+            <a:ext cx="7731568" cy="4598672"/>
           </a:xfrm>
           <a:prstGeom prst="rect">
             <a:avLst/>
@@ -5812,6 +5910,56 @@
             <a:r>
               <a:t>16/22</a:t>
             </a:r>
+          </a:p>
+        </p:txBody>
+      </p:sp>
+      <p:sp>
+        <p:nvSpPr>
+          <p:cNvPr id="9" name="Rectangle 8">
+            <a:extLst>
+              <a:ext uri="{FF2B5EF4-FFF2-40B4-BE49-F238E27FC236}">
+                <a16:creationId xmlns:a16="http://schemas.microsoft.com/office/drawing/2014/main" id="{2AAE04EB-28EB-14E2-A774-BE3FBAB4045C}"/>
+              </a:ext>
+            </a:extLst>
+          </p:cNvPr>
+          <p:cNvSpPr/>
+          <p:nvPr/>
+        </p:nvSpPr>
+        <p:spPr>
+          <a:xfrm>
+            <a:off x="621792" y="411480"/>
+            <a:ext cx="109728" cy="640080"/>
+          </a:xfrm>
+          <a:prstGeom prst="rect">
+            <a:avLst/>
+          </a:prstGeom>
+          <a:solidFill>
+            <a:srgbClr val="00D4FF"/>
+          </a:solidFill>
+          <a:ln>
+            <a:noFill/>
+          </a:ln>
+        </p:spPr>
+        <p:style>
+          <a:lnRef idx="1">
+            <a:schemeClr val="accent1"/>
+          </a:lnRef>
+          <a:fillRef idx="3">
+            <a:schemeClr val="accent1"/>
+          </a:fillRef>
+          <a:effectRef idx="2">
+            <a:schemeClr val="accent1"/>
+          </a:effectRef>
+          <a:fontRef idx="minor">
+            <a:schemeClr val="lt1"/>
+          </a:fontRef>
+        </p:style>
+        <p:txBody>
+          <a:bodyPr rtlCol="0" anchor="ctr"/>
+          <a:lstStyle/>
+          <a:p>
+            <a:pPr algn="ctr"/>
+            <a:endParaRPr/>
           </a:p>
         </p:txBody>
       </p:sp>
@@ -5824,7 +5972,7 @@
 </file>
 
 <file path=ppt/slides/slide17.xml><?xml version="1.0" encoding="utf-8"?>
-<p:sld xmlns:a="http://schemas.openxmlformats.org/drawingml/2006/main" xmlns:p="http://schemas.openxmlformats.org/presentationml/2006/main" xmlns:r="http://schemas.openxmlformats.org/officeDocument/2006/relationships">
+<p:sld xmlns:a="http://schemas.openxmlformats.org/drawingml/2006/main" xmlns:r="http://schemas.openxmlformats.org/officeDocument/2006/relationships" xmlns:p="http://schemas.openxmlformats.org/presentationml/2006/main">
   <p:cSld>
     <p:spTree>
       <p:nvGrpSpPr>
@@ -5832,7 +5980,14 @@
         <p:cNvGrpSpPr/>
         <p:nvPr/>
       </p:nvGrpSpPr>
-      <p:grpSpPr/>
+      <p:grpSpPr>
+        <a:xfrm>
+          <a:off x="0" y="0"/>
+          <a:ext cx="0" cy="0"/>
+          <a:chOff x="0" y="0"/>
+          <a:chExt cx="0" cy="0"/>
+        </a:xfrm>
+      </p:grpSpPr>
       <p:sp>
         <p:nvSpPr>
           <p:cNvPr id="2" name="Rectangle 1"/>
@@ -5873,6 +6028,7 @@
           <a:lstStyle/>
           <a:p>
             <a:pPr algn="ctr"/>
+            <a:endParaRPr/>
           </a:p>
         </p:txBody>
       </p:sp>
@@ -5909,49 +6065,6 @@
             <a:r>
               <a:t>Database Design</a:t>
             </a:r>
-          </a:p>
-        </p:txBody>
-      </p:sp>
-      <p:sp>
-        <p:nvSpPr>
-          <p:cNvPr id="4" name="Rectangle 3"/>
-          <p:cNvSpPr/>
-          <p:nvPr/>
-        </p:nvSpPr>
-        <p:spPr>
-          <a:xfrm>
-            <a:off x="731520" y="960120"/>
-            <a:ext cx="109728" cy="457200"/>
-          </a:xfrm>
-          <a:prstGeom prst="rect">
-            <a:avLst/>
-          </a:prstGeom>
-          <a:solidFill>
-            <a:srgbClr val="00D4FF"/>
-          </a:solidFill>
-          <a:ln>
-            <a:noFill/>
-          </a:ln>
-        </p:spPr>
-        <p:style>
-          <a:lnRef idx="1">
-            <a:schemeClr val="accent1"/>
-          </a:lnRef>
-          <a:fillRef idx="3">
-            <a:schemeClr val="accent1"/>
-          </a:fillRef>
-          <a:effectRef idx="2">
-            <a:schemeClr val="accent1"/>
-          </a:effectRef>
-          <a:fontRef idx="minor">
-            <a:schemeClr val="lt1"/>
-          </a:fontRef>
-        </p:style>
-        <p:txBody>
-          <a:bodyPr rtlCol="0" anchor="ctr"/>
-          <a:lstStyle/>
-          <a:p>
-            <a:pPr algn="ctr"/>
           </a:p>
         </p:txBody>
       </p:sp>
@@ -5997,6 +6110,7 @@
           <a:lstStyle/>
           <a:p>
             <a:pPr algn="ctr"/>
+            <a:endParaRPr/>
           </a:p>
         </p:txBody>
       </p:sp>
@@ -6076,6 +6190,7 @@
           <a:lstStyle/>
           <a:p>
             <a:pPr algn="ctr"/>
+            <a:endParaRPr/>
           </a:p>
         </p:txBody>
       </p:sp>
@@ -6373,6 +6488,7 @@
           <a:lstStyle/>
           <a:p>
             <a:pPr algn="ctr"/>
+            <a:endParaRPr/>
           </a:p>
         </p:txBody>
       </p:sp>
@@ -6452,6 +6568,7 @@
           <a:lstStyle/>
           <a:p>
             <a:pPr algn="ctr"/>
+            <a:endParaRPr/>
           </a:p>
         </p:txBody>
       </p:sp>
@@ -6749,6 +6866,7 @@
           <a:lstStyle/>
           <a:p>
             <a:pPr algn="ctr"/>
+            <a:endParaRPr/>
           </a:p>
         </p:txBody>
       </p:sp>
@@ -6828,6 +6946,7 @@
           <a:lstStyle/>
           <a:p>
             <a:pPr algn="ctr"/>
+            <a:endParaRPr/>
           </a:p>
         </p:txBody>
       </p:sp>
@@ -7116,6 +7235,56 @@
             <a:r>
               <a:t>17/22</a:t>
             </a:r>
+          </a:p>
+        </p:txBody>
+      </p:sp>
+      <p:sp>
+        <p:nvSpPr>
+          <p:cNvPr id="36" name="Rectangle 35">
+            <a:extLst>
+              <a:ext uri="{FF2B5EF4-FFF2-40B4-BE49-F238E27FC236}">
+                <a16:creationId xmlns:a16="http://schemas.microsoft.com/office/drawing/2014/main" id="{C0E2A0B7-99F6-2FD8-36E6-FEC092ECAB94}"/>
+              </a:ext>
+            </a:extLst>
+          </p:cNvPr>
+          <p:cNvSpPr/>
+          <p:nvPr/>
+        </p:nvSpPr>
+        <p:spPr>
+          <a:xfrm>
+            <a:off x="652272" y="530352"/>
+            <a:ext cx="109728" cy="640080"/>
+          </a:xfrm>
+          <a:prstGeom prst="rect">
+            <a:avLst/>
+          </a:prstGeom>
+          <a:solidFill>
+            <a:srgbClr val="00D4FF"/>
+          </a:solidFill>
+          <a:ln>
+            <a:noFill/>
+          </a:ln>
+        </p:spPr>
+        <p:style>
+          <a:lnRef idx="1">
+            <a:schemeClr val="accent1"/>
+          </a:lnRef>
+          <a:fillRef idx="3">
+            <a:schemeClr val="accent1"/>
+          </a:fillRef>
+          <a:effectRef idx="2">
+            <a:schemeClr val="accent1"/>
+          </a:effectRef>
+          <a:fontRef idx="minor">
+            <a:schemeClr val="lt1"/>
+          </a:fontRef>
+        </p:style>
+        <p:txBody>
+          <a:bodyPr rtlCol="0" anchor="ctr"/>
+          <a:lstStyle/>
+          <a:p>
+            <a:pPr algn="ctr"/>
+            <a:endParaRPr/>
           </a:p>
         </p:txBody>
       </p:sp>
@@ -7128,7 +7297,7 @@
 </file>
 
 <file path=ppt/slides/slide18.xml><?xml version="1.0" encoding="utf-8"?>
-<p:sld xmlns:a="http://schemas.openxmlformats.org/drawingml/2006/main" xmlns:p="http://schemas.openxmlformats.org/presentationml/2006/main" xmlns:r="http://schemas.openxmlformats.org/officeDocument/2006/relationships">
+<p:sld xmlns:a="http://schemas.openxmlformats.org/drawingml/2006/main" xmlns:r="http://schemas.openxmlformats.org/officeDocument/2006/relationships" xmlns:p="http://schemas.openxmlformats.org/presentationml/2006/main">
   <p:cSld>
     <p:spTree>
       <p:nvGrpSpPr>
@@ -7136,7 +7305,14 @@
         <p:cNvGrpSpPr/>
         <p:nvPr/>
       </p:nvGrpSpPr>
-      <p:grpSpPr/>
+      <p:grpSpPr>
+        <a:xfrm>
+          <a:off x="0" y="0"/>
+          <a:ext cx="0" cy="0"/>
+          <a:chOff x="0" y="0"/>
+          <a:chExt cx="0" cy="0"/>
+        </a:xfrm>
+      </p:grpSpPr>
       <p:sp>
         <p:nvSpPr>
           <p:cNvPr id="2" name="Rectangle 1"/>
@@ -7177,6 +7353,7 @@
           <a:lstStyle/>
           <a:p>
             <a:pPr algn="ctr"/>
+            <a:endParaRPr/>
           </a:p>
         </p:txBody>
       </p:sp>
@@ -7213,49 +7390,6 @@
             <a:r>
               <a:t>Data Flow Architecture</a:t>
             </a:r>
-          </a:p>
-        </p:txBody>
-      </p:sp>
-      <p:sp>
-        <p:nvSpPr>
-          <p:cNvPr id="4" name="Rectangle 3"/>
-          <p:cNvSpPr/>
-          <p:nvPr/>
-        </p:nvSpPr>
-        <p:spPr>
-          <a:xfrm>
-            <a:off x="731520" y="960120"/>
-            <a:ext cx="109728" cy="457200"/>
-          </a:xfrm>
-          <a:prstGeom prst="rect">
-            <a:avLst/>
-          </a:prstGeom>
-          <a:solidFill>
-            <a:srgbClr val="00D4FF"/>
-          </a:solidFill>
-          <a:ln>
-            <a:noFill/>
-          </a:ln>
-        </p:spPr>
-        <p:style>
-          <a:lnRef idx="1">
-            <a:schemeClr val="accent1"/>
-          </a:lnRef>
-          <a:fillRef idx="3">
-            <a:schemeClr val="accent1"/>
-          </a:fillRef>
-          <a:effectRef idx="2">
-            <a:schemeClr val="accent1"/>
-          </a:effectRef>
-          <a:fontRef idx="minor">
-            <a:schemeClr val="lt1"/>
-          </a:fontRef>
-        </p:style>
-        <p:txBody>
-          <a:bodyPr rtlCol="0" anchor="ctr"/>
-          <a:lstStyle/>
-          <a:p>
-            <a:pPr algn="ctr"/>
           </a:p>
         </p:txBody>
       </p:sp>
@@ -7301,6 +7435,7 @@
           <a:lstStyle/>
           <a:p>
             <a:pPr algn="ctr"/>
+            <a:endParaRPr/>
           </a:p>
         </p:txBody>
       </p:sp>
@@ -7420,6 +7555,7 @@
           <a:lstStyle/>
           <a:p>
             <a:pPr algn="ctr"/>
+            <a:endParaRPr/>
           </a:p>
         </p:txBody>
       </p:sp>
@@ -7465,6 +7601,7 @@
           <a:lstStyle/>
           <a:p>
             <a:pPr algn="ctr"/>
+            <a:endParaRPr/>
           </a:p>
         </p:txBody>
       </p:sp>
@@ -7584,6 +7721,7 @@
           <a:lstStyle/>
           <a:p>
             <a:pPr algn="ctr"/>
+            <a:endParaRPr/>
           </a:p>
         </p:txBody>
       </p:sp>
@@ -7629,6 +7767,7 @@
           <a:lstStyle/>
           <a:p>
             <a:pPr algn="ctr"/>
+            <a:endParaRPr/>
           </a:p>
         </p:txBody>
       </p:sp>
@@ -7748,6 +7887,7 @@
           <a:lstStyle/>
           <a:p>
             <a:pPr algn="ctr"/>
+            <a:endParaRPr/>
           </a:p>
         </p:txBody>
       </p:sp>
@@ -7793,6 +7933,7 @@
           <a:lstStyle/>
           <a:p>
             <a:pPr algn="ctr"/>
+            <a:endParaRPr/>
           </a:p>
         </p:txBody>
       </p:sp>
@@ -7912,6 +8053,7 @@
           <a:lstStyle/>
           <a:p>
             <a:pPr algn="ctr"/>
+            <a:endParaRPr/>
           </a:p>
         </p:txBody>
       </p:sp>
@@ -7957,6 +8099,7 @@
           <a:lstStyle/>
           <a:p>
             <a:pPr algn="ctr"/>
+            <a:endParaRPr/>
           </a:p>
         </p:txBody>
       </p:sp>
@@ -8112,6 +8255,7 @@
           <a:lstStyle/>
           <a:p>
             <a:pPr algn="ctr"/>
+            <a:endParaRPr/>
           </a:p>
         </p:txBody>
       </p:sp>
@@ -8227,6 +8371,7 @@
           <a:lstStyle/>
           <a:p>
             <a:pPr algn="ctr"/>
+            <a:endParaRPr/>
           </a:p>
         </p:txBody>
       </p:sp>
@@ -8342,6 +8487,7 @@
           <a:lstStyle/>
           <a:p>
             <a:pPr algn="ctr"/>
+            <a:endParaRPr/>
           </a:p>
         </p:txBody>
       </p:sp>
@@ -8450,6 +8596,56 @@
             <a:r>
               <a:t>18/22</a:t>
             </a:r>
+          </a:p>
+        </p:txBody>
+      </p:sp>
+      <p:sp>
+        <p:nvSpPr>
+          <p:cNvPr id="35" name="Rectangle 34">
+            <a:extLst>
+              <a:ext uri="{FF2B5EF4-FFF2-40B4-BE49-F238E27FC236}">
+                <a16:creationId xmlns:a16="http://schemas.microsoft.com/office/drawing/2014/main" id="{DC6BDC2F-EB72-1B69-777C-B8D9B1553349}"/>
+              </a:ext>
+            </a:extLst>
+          </p:cNvPr>
+          <p:cNvSpPr/>
+          <p:nvPr/>
+        </p:nvSpPr>
+        <p:spPr>
+          <a:xfrm>
+            <a:off x="640080" y="548639"/>
+            <a:ext cx="109728" cy="640080"/>
+          </a:xfrm>
+          <a:prstGeom prst="rect">
+            <a:avLst/>
+          </a:prstGeom>
+          <a:solidFill>
+            <a:srgbClr val="00D4FF"/>
+          </a:solidFill>
+          <a:ln>
+            <a:noFill/>
+          </a:ln>
+        </p:spPr>
+        <p:style>
+          <a:lnRef idx="1">
+            <a:schemeClr val="accent1"/>
+          </a:lnRef>
+          <a:fillRef idx="3">
+            <a:schemeClr val="accent1"/>
+          </a:fillRef>
+          <a:effectRef idx="2">
+            <a:schemeClr val="accent1"/>
+          </a:effectRef>
+          <a:fontRef idx="minor">
+            <a:schemeClr val="lt1"/>
+          </a:fontRef>
+        </p:style>
+        <p:txBody>
+          <a:bodyPr rtlCol="0" anchor="ctr"/>
+          <a:lstStyle/>
+          <a:p>
+            <a:pPr algn="ctr"/>
+            <a:endParaRPr/>
           </a:p>
         </p:txBody>
       </p:sp>
@@ -8462,7 +8658,7 @@
 </file>
 
 <file path=ppt/slides/slide19.xml><?xml version="1.0" encoding="utf-8"?>
-<p:sld xmlns:a="http://schemas.openxmlformats.org/drawingml/2006/main" xmlns:p="http://schemas.openxmlformats.org/presentationml/2006/main" xmlns:r="http://schemas.openxmlformats.org/officeDocument/2006/relationships">
+<p:sld xmlns:a="http://schemas.openxmlformats.org/drawingml/2006/main" xmlns:r="http://schemas.openxmlformats.org/officeDocument/2006/relationships" xmlns:p="http://schemas.openxmlformats.org/presentationml/2006/main">
   <p:cSld>
     <p:spTree>
       <p:nvGrpSpPr>
@@ -8470,7 +8666,14 @@
         <p:cNvGrpSpPr/>
         <p:nvPr/>
       </p:nvGrpSpPr>
-      <p:grpSpPr/>
+      <p:grpSpPr>
+        <a:xfrm>
+          <a:off x="0" y="0"/>
+          <a:ext cx="0" cy="0"/>
+          <a:chOff x="0" y="0"/>
+          <a:chExt cx="0" cy="0"/>
+        </a:xfrm>
+      </p:grpSpPr>
       <p:sp>
         <p:nvSpPr>
           <p:cNvPr id="2" name="Rectangle 1"/>
@@ -8511,6 +8714,7 @@
           <a:lstStyle/>
           <a:p>
             <a:pPr algn="ctr"/>
+            <a:endParaRPr/>
           </a:p>
         </p:txBody>
       </p:sp>
@@ -8547,49 +8751,6 @@
             <a:r>
               <a:t>Technology Stack</a:t>
             </a:r>
-          </a:p>
-        </p:txBody>
-      </p:sp>
-      <p:sp>
-        <p:nvSpPr>
-          <p:cNvPr id="4" name="Rectangle 3"/>
-          <p:cNvSpPr/>
-          <p:nvPr/>
-        </p:nvSpPr>
-        <p:spPr>
-          <a:xfrm>
-            <a:off x="731520" y="960120"/>
-            <a:ext cx="109728" cy="457200"/>
-          </a:xfrm>
-          <a:prstGeom prst="rect">
-            <a:avLst/>
-          </a:prstGeom>
-          <a:solidFill>
-            <a:srgbClr val="00D4FF"/>
-          </a:solidFill>
-          <a:ln>
-            <a:noFill/>
-          </a:ln>
-        </p:spPr>
-        <p:style>
-          <a:lnRef idx="1">
-            <a:schemeClr val="accent1"/>
-          </a:lnRef>
-          <a:fillRef idx="3">
-            <a:schemeClr val="accent1"/>
-          </a:fillRef>
-          <a:effectRef idx="2">
-            <a:schemeClr val="accent1"/>
-          </a:effectRef>
-          <a:fontRef idx="minor">
-            <a:schemeClr val="lt1"/>
-          </a:fontRef>
-        </p:style>
-        <p:txBody>
-          <a:bodyPr rtlCol="0" anchor="ctr"/>
-          <a:lstStyle/>
-          <a:p>
-            <a:pPr algn="ctr"/>
           </a:p>
         </p:txBody>
       </p:sp>
@@ -8635,6 +8796,7 @@
           <a:lstStyle/>
           <a:p>
             <a:pPr algn="ctr"/>
+            <a:endParaRPr/>
           </a:p>
         </p:txBody>
       </p:sp>
@@ -8705,8 +8867,14 @@
               </a:defRPr>
             </a:pPr>
             <a:r>
-              <a:t>• Python 3.11+</a:t>
-            </a:r>
+              <a:rPr dirty="0"/>
+              <a:t>• Python</a:t>
+            </a:r>
+            <a:r>
+              <a:rPr lang="it-IT" dirty="0"/>
+              <a:t> 3.11+</a:t>
+            </a:r>
+            <a:endParaRPr dirty="0"/>
           </a:p>
         </p:txBody>
       </p:sp>
@@ -8968,6 +9136,7 @@
           <a:lstStyle/>
           <a:p>
             <a:pPr algn="ctr"/>
+            <a:endParaRPr/>
           </a:p>
         </p:txBody>
       </p:sp>
@@ -9038,6 +9207,7 @@
               </a:defRPr>
             </a:pPr>
             <a:r>
+              <a:rPr dirty="0"/>
               <a:t>• React 18</a:t>
             </a:r>
           </a:p>
@@ -9301,6 +9471,7 @@
           <a:lstStyle/>
           <a:p>
             <a:pPr algn="ctr"/>
+            <a:endParaRPr/>
           </a:p>
         </p:txBody>
       </p:sp>
@@ -9605,6 +9776,56 @@
             <a:r>
               <a:t>19/22</a:t>
             </a:r>
+          </a:p>
+        </p:txBody>
+      </p:sp>
+      <p:sp>
+        <p:nvSpPr>
+          <p:cNvPr id="32" name="Rectangle 31">
+            <a:extLst>
+              <a:ext uri="{FF2B5EF4-FFF2-40B4-BE49-F238E27FC236}">
+                <a16:creationId xmlns:a16="http://schemas.microsoft.com/office/drawing/2014/main" id="{C941ADB9-6F53-8ABE-B608-5967F65FF12D}"/>
+              </a:ext>
+            </a:extLst>
+          </p:cNvPr>
+          <p:cNvSpPr/>
+          <p:nvPr/>
+        </p:nvSpPr>
+        <p:spPr>
+          <a:xfrm>
+            <a:off x="585216" y="548640"/>
+            <a:ext cx="109728" cy="640080"/>
+          </a:xfrm>
+          <a:prstGeom prst="rect">
+            <a:avLst/>
+          </a:prstGeom>
+          <a:solidFill>
+            <a:srgbClr val="00D4FF"/>
+          </a:solidFill>
+          <a:ln>
+            <a:noFill/>
+          </a:ln>
+        </p:spPr>
+        <p:style>
+          <a:lnRef idx="1">
+            <a:schemeClr val="accent1"/>
+          </a:lnRef>
+          <a:fillRef idx="3">
+            <a:schemeClr val="accent1"/>
+          </a:fillRef>
+          <a:effectRef idx="2">
+            <a:schemeClr val="accent1"/>
+          </a:effectRef>
+          <a:fontRef idx="minor">
+            <a:schemeClr val="lt1"/>
+          </a:fontRef>
+        </p:style>
+        <p:txBody>
+          <a:bodyPr rtlCol="0" anchor="ctr"/>
+          <a:lstStyle/>
+          <a:p>
+            <a:pPr algn="ctr"/>
+            <a:endParaRPr/>
           </a:p>
         </p:txBody>
       </p:sp>
@@ -9617,7 +9838,7 @@
 </file>
 
 <file path=ppt/slides/slide2.xml><?xml version="1.0" encoding="utf-8"?>
-<p:sld xmlns:a="http://schemas.openxmlformats.org/drawingml/2006/main" xmlns:p="http://schemas.openxmlformats.org/presentationml/2006/main" xmlns:r="http://schemas.openxmlformats.org/officeDocument/2006/relationships">
+<p:sld xmlns:a="http://schemas.openxmlformats.org/drawingml/2006/main" xmlns:r="http://schemas.openxmlformats.org/officeDocument/2006/relationships" xmlns:p="http://schemas.openxmlformats.org/presentationml/2006/main">
   <p:cSld>
     <p:spTree>
       <p:nvGrpSpPr>
@@ -9625,7 +9846,14 @@
         <p:cNvGrpSpPr/>
         <p:nvPr/>
       </p:nvGrpSpPr>
-      <p:grpSpPr/>
+      <p:grpSpPr>
+        <a:xfrm>
+          <a:off x="0" y="0"/>
+          <a:ext cx="0" cy="0"/>
+          <a:chOff x="0" y="0"/>
+          <a:chExt cx="0" cy="0"/>
+        </a:xfrm>
+      </p:grpSpPr>
       <p:sp>
         <p:nvSpPr>
           <p:cNvPr id="2" name="Rectangle 1"/>
@@ -9666,6 +9894,7 @@
           <a:lstStyle/>
           <a:p>
             <a:pPr algn="ctr"/>
+            <a:endParaRPr/>
           </a:p>
         </p:txBody>
       </p:sp>
@@ -9677,7 +9906,7 @@
         </p:nvSpPr>
         <p:spPr>
           <a:xfrm>
-            <a:off x="731520" y="457200"/>
+            <a:off x="746607" y="345632"/>
             <a:ext cx="10698480" cy="822960"/>
           </a:xfrm>
           <a:prstGeom prst="rect">
@@ -9700,6 +9929,7 @@
               </a:defRPr>
             </a:pPr>
             <a:r>
+              <a:rPr dirty="0"/>
               <a:t>Agenda</a:t>
             </a:r>
           </a:p>
@@ -9713,7 +9943,7 @@
         </p:nvSpPr>
         <p:spPr>
           <a:xfrm>
-            <a:off x="731520" y="1234440"/>
+            <a:off x="570494" y="515572"/>
             <a:ext cx="109728" cy="640080"/>
           </a:xfrm>
           <a:prstGeom prst="rect">
@@ -9745,6 +9975,7 @@
           <a:lstStyle/>
           <a:p>
             <a:pPr algn="ctr"/>
+            <a:endParaRPr/>
           </a:p>
         </p:txBody>
       </p:sp>
@@ -9815,6 +10046,7 @@
               </a:defRPr>
             </a:pPr>
             <a:r>
+              <a:rPr dirty="0"/>
               <a:t>Project Overview</a:t>
             </a:r>
           </a:p>
@@ -10549,7 +10781,7 @@
 </file>
 
 <file path=ppt/slides/slide20.xml><?xml version="1.0" encoding="utf-8"?>
-<p:sld xmlns:a="http://schemas.openxmlformats.org/drawingml/2006/main" xmlns:p="http://schemas.openxmlformats.org/presentationml/2006/main" xmlns:r="http://schemas.openxmlformats.org/officeDocument/2006/relationships">
+<p:sld xmlns:a="http://schemas.openxmlformats.org/drawingml/2006/main" xmlns:r="http://schemas.openxmlformats.org/officeDocument/2006/relationships" xmlns:p="http://schemas.openxmlformats.org/presentationml/2006/main">
   <p:cSld>
     <p:spTree>
       <p:nvGrpSpPr>
@@ -10557,7 +10789,14 @@
         <p:cNvGrpSpPr/>
         <p:nvPr/>
       </p:nvGrpSpPr>
-      <p:grpSpPr/>
+      <p:grpSpPr>
+        <a:xfrm>
+          <a:off x="0" y="0"/>
+          <a:ext cx="0" cy="0"/>
+          <a:chOff x="0" y="0"/>
+          <a:chExt cx="0" cy="0"/>
+        </a:xfrm>
+      </p:grpSpPr>
       <p:sp>
         <p:nvSpPr>
           <p:cNvPr id="2" name="Rectangle 1"/>
@@ -10598,6 +10837,7 @@
           <a:lstStyle/>
           <a:p>
             <a:pPr algn="ctr"/>
+            <a:endParaRPr/>
           </a:p>
         </p:txBody>
       </p:sp>
@@ -10634,49 +10874,6 @@
             <a:r>
               <a:t>Key User Stories</a:t>
             </a:r>
-          </a:p>
-        </p:txBody>
-      </p:sp>
-      <p:sp>
-        <p:nvSpPr>
-          <p:cNvPr id="4" name="Rectangle 3"/>
-          <p:cNvSpPr/>
-          <p:nvPr/>
-        </p:nvSpPr>
-        <p:spPr>
-          <a:xfrm>
-            <a:off x="731520" y="960120"/>
-            <a:ext cx="109728" cy="457200"/>
-          </a:xfrm>
-          <a:prstGeom prst="rect">
-            <a:avLst/>
-          </a:prstGeom>
-          <a:solidFill>
-            <a:srgbClr val="00D4FF"/>
-          </a:solidFill>
-          <a:ln>
-            <a:noFill/>
-          </a:ln>
-        </p:spPr>
-        <p:style>
-          <a:lnRef idx="1">
-            <a:schemeClr val="accent1"/>
-          </a:lnRef>
-          <a:fillRef idx="3">
-            <a:schemeClr val="accent1"/>
-          </a:fillRef>
-          <a:effectRef idx="2">
-            <a:schemeClr val="accent1"/>
-          </a:effectRef>
-          <a:fontRef idx="minor">
-            <a:schemeClr val="lt1"/>
-          </a:fontRef>
-        </p:style>
-        <p:txBody>
-          <a:bodyPr rtlCol="0" anchor="ctr"/>
-          <a:lstStyle/>
-          <a:p>
-            <a:pPr algn="ctr"/>
           </a:p>
         </p:txBody>
       </p:sp>
@@ -10722,6 +10919,7 @@
           <a:lstStyle/>
           <a:p>
             <a:pPr algn="ctr"/>
+            <a:endParaRPr/>
           </a:p>
         </p:txBody>
       </p:sp>
@@ -10765,6 +10963,7 @@
           <a:lstStyle/>
           <a:p>
             <a:pPr algn="ctr"/>
+            <a:endParaRPr/>
           </a:p>
         </p:txBody>
       </p:sp>
@@ -11026,6 +11225,7 @@
           <a:lstStyle/>
           <a:p>
             <a:pPr algn="ctr"/>
+            <a:endParaRPr/>
           </a:p>
         </p:txBody>
       </p:sp>
@@ -11069,6 +11269,7 @@
           <a:lstStyle/>
           <a:p>
             <a:pPr algn="ctr"/>
+            <a:endParaRPr/>
           </a:p>
         </p:txBody>
       </p:sp>
@@ -11294,6 +11495,7 @@
           <a:lstStyle/>
           <a:p>
             <a:pPr algn="ctr"/>
+            <a:endParaRPr/>
           </a:p>
         </p:txBody>
       </p:sp>
@@ -11337,6 +11539,7 @@
           <a:lstStyle/>
           <a:p>
             <a:pPr algn="ctr"/>
+            <a:endParaRPr/>
           </a:p>
         </p:txBody>
       </p:sp>
@@ -11598,6 +11801,7 @@
           <a:lstStyle/>
           <a:p>
             <a:pPr algn="ctr"/>
+            <a:endParaRPr/>
           </a:p>
         </p:txBody>
       </p:sp>
@@ -11641,6 +11845,7 @@
           <a:lstStyle/>
           <a:p>
             <a:pPr algn="ctr"/>
+            <a:endParaRPr/>
           </a:p>
         </p:txBody>
       </p:sp>
@@ -11857,6 +12062,56 @@
             <a:r>
               <a:t>20/22</a:t>
             </a:r>
+          </a:p>
+        </p:txBody>
+      </p:sp>
+      <p:sp>
+        <p:nvSpPr>
+          <p:cNvPr id="36" name="Rectangle 35">
+            <a:extLst>
+              <a:ext uri="{FF2B5EF4-FFF2-40B4-BE49-F238E27FC236}">
+                <a16:creationId xmlns:a16="http://schemas.microsoft.com/office/drawing/2014/main" id="{8CC55A89-25A2-99C1-A77B-F92BF313F9D2}"/>
+              </a:ext>
+            </a:extLst>
+          </p:cNvPr>
+          <p:cNvSpPr/>
+          <p:nvPr/>
+        </p:nvSpPr>
+        <p:spPr>
+          <a:xfrm>
+            <a:off x="621792" y="548640"/>
+            <a:ext cx="109728" cy="640080"/>
+          </a:xfrm>
+          <a:prstGeom prst="rect">
+            <a:avLst/>
+          </a:prstGeom>
+          <a:solidFill>
+            <a:srgbClr val="00D4FF"/>
+          </a:solidFill>
+          <a:ln>
+            <a:noFill/>
+          </a:ln>
+        </p:spPr>
+        <p:style>
+          <a:lnRef idx="1">
+            <a:schemeClr val="accent1"/>
+          </a:lnRef>
+          <a:fillRef idx="3">
+            <a:schemeClr val="accent1"/>
+          </a:fillRef>
+          <a:effectRef idx="2">
+            <a:schemeClr val="accent1"/>
+          </a:effectRef>
+          <a:fontRef idx="minor">
+            <a:schemeClr val="lt1"/>
+          </a:fontRef>
+        </p:style>
+        <p:txBody>
+          <a:bodyPr rtlCol="0" anchor="ctr"/>
+          <a:lstStyle/>
+          <a:p>
+            <a:pPr algn="ctr"/>
+            <a:endParaRPr/>
           </a:p>
         </p:txBody>
       </p:sp>
@@ -11869,7 +12124,7 @@
 </file>
 
 <file path=ppt/slides/slide21.xml><?xml version="1.0" encoding="utf-8"?>
-<p:sld xmlns:a="http://schemas.openxmlformats.org/drawingml/2006/main" xmlns:p="http://schemas.openxmlformats.org/presentationml/2006/main" xmlns:r="http://schemas.openxmlformats.org/officeDocument/2006/relationships">
+<p:sld xmlns:a="http://schemas.openxmlformats.org/drawingml/2006/main" xmlns:r="http://schemas.openxmlformats.org/officeDocument/2006/relationships" xmlns:p="http://schemas.openxmlformats.org/presentationml/2006/main">
   <p:cSld>
     <p:spTree>
       <p:nvGrpSpPr>
@@ -11877,7 +12132,14 @@
         <p:cNvGrpSpPr/>
         <p:nvPr/>
       </p:nvGrpSpPr>
-      <p:grpSpPr/>
+      <p:grpSpPr>
+        <a:xfrm>
+          <a:off x="0" y="0"/>
+          <a:ext cx="0" cy="0"/>
+          <a:chOff x="0" y="0"/>
+          <a:chExt cx="0" cy="0"/>
+        </a:xfrm>
+      </p:grpSpPr>
       <p:sp>
         <p:nvSpPr>
           <p:cNvPr id="2" name="Rectangle 1"/>
@@ -11918,6 +12180,7 @@
           <a:lstStyle/>
           <a:p>
             <a:pPr algn="ctr"/>
+            <a:endParaRPr/>
           </a:p>
         </p:txBody>
       </p:sp>
@@ -11959,14 +12222,844 @@
       </p:sp>
       <p:sp>
         <p:nvSpPr>
-          <p:cNvPr id="4" name="Rectangle 3"/>
+          <p:cNvPr id="5" name="TextBox 4"/>
+          <p:cNvSpPr txBox="1"/>
+          <p:nvPr/>
+        </p:nvSpPr>
+        <p:spPr>
+          <a:xfrm>
+            <a:off x="731520" y="1737360"/>
+            <a:ext cx="10698480" cy="457200"/>
+          </a:xfrm>
+          <a:prstGeom prst="rect">
+            <a:avLst/>
+          </a:prstGeom>
+          <a:noFill/>
+        </p:spPr>
+        <p:txBody>
+          <a:bodyPr wrap="square">
+            <a:spAutoFit/>
+          </a:bodyPr>
+          <a:lstStyle/>
+          <a:p>
+            <a:pPr algn="l">
+              <a:defRPr sz="2200" b="1" i="0">
+                <a:solidFill>
+                  <a:srgbClr val="10B981"/>
+                </a:solidFill>
+                <a:latin typeface="Segoe UI"/>
+              </a:defRPr>
+            </a:pPr>
+            <a:r>
+              <a:rPr dirty="0"/>
+              <a:t>Project Achievements</a:t>
+            </a:r>
+          </a:p>
+        </p:txBody>
+      </p:sp>
+      <p:sp>
+        <p:nvSpPr>
+          <p:cNvPr id="6" name="Oval 5"/>
           <p:cNvSpPr/>
           <p:nvPr/>
         </p:nvSpPr>
         <p:spPr>
           <a:xfrm>
-            <a:off x="731520" y="1188720"/>
-            <a:ext cx="109728" cy="548640"/>
+            <a:off x="731520" y="2304288"/>
+            <a:ext cx="91440" cy="91440"/>
+          </a:xfrm>
+          <a:prstGeom prst="ellipse">
+            <a:avLst/>
+          </a:prstGeom>
+          <a:solidFill>
+            <a:srgbClr val="10B981"/>
+          </a:solidFill>
+          <a:ln>
+            <a:noFill/>
+          </a:ln>
+        </p:spPr>
+        <p:style>
+          <a:lnRef idx="1">
+            <a:schemeClr val="accent1"/>
+          </a:lnRef>
+          <a:fillRef idx="3">
+            <a:schemeClr val="accent1"/>
+          </a:fillRef>
+          <a:effectRef idx="2">
+            <a:schemeClr val="accent1"/>
+          </a:effectRef>
+          <a:fontRef idx="minor">
+            <a:schemeClr val="lt1"/>
+          </a:fontRef>
+        </p:style>
+        <p:txBody>
+          <a:bodyPr rtlCol="0" anchor="ctr"/>
+          <a:lstStyle/>
+          <a:p>
+            <a:pPr algn="ctr"/>
+            <a:endParaRPr/>
+          </a:p>
+        </p:txBody>
+      </p:sp>
+      <p:sp>
+        <p:nvSpPr>
+          <p:cNvPr id="7" name="TextBox 6"/>
+          <p:cNvSpPr txBox="1"/>
+          <p:nvPr/>
+        </p:nvSpPr>
+        <p:spPr>
+          <a:xfrm>
+            <a:off x="1005840" y="2194560"/>
+            <a:ext cx="10058400" cy="411480"/>
+          </a:xfrm>
+          <a:prstGeom prst="rect">
+            <a:avLst/>
+          </a:prstGeom>
+          <a:noFill/>
+        </p:spPr>
+        <p:txBody>
+          <a:bodyPr wrap="square">
+            <a:spAutoFit/>
+          </a:bodyPr>
+          <a:lstStyle/>
+          <a:p>
+            <a:pPr algn="l">
+              <a:defRPr sz="1800" b="0" i="0">
+                <a:solidFill>
+                  <a:srgbClr val="9494B0"/>
+                </a:solidFill>
+                <a:latin typeface="Segoe UI"/>
+              </a:defRPr>
+            </a:pPr>
+            <a:r>
+              <a:t>Distributed microservices architecture with event-driven communication</a:t>
+            </a:r>
+          </a:p>
+        </p:txBody>
+      </p:sp>
+      <p:sp>
+        <p:nvSpPr>
+          <p:cNvPr id="8" name="Oval 7"/>
+          <p:cNvSpPr/>
+          <p:nvPr/>
+        </p:nvSpPr>
+        <p:spPr>
+          <a:xfrm>
+            <a:off x="731520" y="2743200"/>
+            <a:ext cx="91440" cy="91440"/>
+          </a:xfrm>
+          <a:prstGeom prst="ellipse">
+            <a:avLst/>
+          </a:prstGeom>
+          <a:solidFill>
+            <a:srgbClr val="10B981"/>
+          </a:solidFill>
+          <a:ln>
+            <a:noFill/>
+          </a:ln>
+        </p:spPr>
+        <p:style>
+          <a:lnRef idx="1">
+            <a:schemeClr val="accent1"/>
+          </a:lnRef>
+          <a:fillRef idx="3">
+            <a:schemeClr val="accent1"/>
+          </a:fillRef>
+          <a:effectRef idx="2">
+            <a:schemeClr val="accent1"/>
+          </a:effectRef>
+          <a:fontRef idx="minor">
+            <a:schemeClr val="lt1"/>
+          </a:fontRef>
+        </p:style>
+        <p:txBody>
+          <a:bodyPr rtlCol="0" anchor="ctr"/>
+          <a:lstStyle/>
+          <a:p>
+            <a:pPr algn="ctr"/>
+            <a:endParaRPr/>
+          </a:p>
+        </p:txBody>
+      </p:sp>
+      <p:sp>
+        <p:nvSpPr>
+          <p:cNvPr id="9" name="TextBox 8"/>
+          <p:cNvSpPr txBox="1"/>
+          <p:nvPr/>
+        </p:nvSpPr>
+        <p:spPr>
+          <a:xfrm>
+            <a:off x="1005840" y="2633472"/>
+            <a:ext cx="10058400" cy="411480"/>
+          </a:xfrm>
+          <a:prstGeom prst="rect">
+            <a:avLst/>
+          </a:prstGeom>
+          <a:noFill/>
+        </p:spPr>
+        <p:txBody>
+          <a:bodyPr wrap="square">
+            <a:spAutoFit/>
+          </a:bodyPr>
+          <a:lstStyle/>
+          <a:p>
+            <a:pPr algn="l">
+              <a:defRPr sz="1800" b="0" i="0">
+                <a:solidFill>
+                  <a:srgbClr val="9494B0"/>
+                </a:solidFill>
+                <a:latin typeface="Segoe UI"/>
+              </a:defRPr>
+            </a:pPr>
+            <a:r>
+              <a:t>Real-time monitoring and control of simulated Mars habitat</a:t>
+            </a:r>
+          </a:p>
+        </p:txBody>
+      </p:sp>
+      <p:sp>
+        <p:nvSpPr>
+          <p:cNvPr id="10" name="Oval 9"/>
+          <p:cNvSpPr/>
+          <p:nvPr/>
+        </p:nvSpPr>
+        <p:spPr>
+          <a:xfrm>
+            <a:off x="731520" y="3182112"/>
+            <a:ext cx="91440" cy="91440"/>
+          </a:xfrm>
+          <a:prstGeom prst="ellipse">
+            <a:avLst/>
+          </a:prstGeom>
+          <a:solidFill>
+            <a:srgbClr val="10B981"/>
+          </a:solidFill>
+          <a:ln>
+            <a:noFill/>
+          </a:ln>
+        </p:spPr>
+        <p:style>
+          <a:lnRef idx="1">
+            <a:schemeClr val="accent1"/>
+          </a:lnRef>
+          <a:fillRef idx="3">
+            <a:schemeClr val="accent1"/>
+          </a:fillRef>
+          <a:effectRef idx="2">
+            <a:schemeClr val="accent1"/>
+          </a:effectRef>
+          <a:fontRef idx="minor">
+            <a:schemeClr val="lt1"/>
+          </a:fontRef>
+        </p:style>
+        <p:txBody>
+          <a:bodyPr rtlCol="0" anchor="ctr"/>
+          <a:lstStyle/>
+          <a:p>
+            <a:pPr algn="ctr"/>
+            <a:endParaRPr/>
+          </a:p>
+        </p:txBody>
+      </p:sp>
+      <p:sp>
+        <p:nvSpPr>
+          <p:cNvPr id="11" name="TextBox 10"/>
+          <p:cNvSpPr txBox="1"/>
+          <p:nvPr/>
+        </p:nvSpPr>
+        <p:spPr>
+          <a:xfrm>
+            <a:off x="1005840" y="3072384"/>
+            <a:ext cx="10058400" cy="411480"/>
+          </a:xfrm>
+          <a:prstGeom prst="rect">
+            <a:avLst/>
+          </a:prstGeom>
+          <a:noFill/>
+        </p:spPr>
+        <p:txBody>
+          <a:bodyPr wrap="square">
+            <a:spAutoFit/>
+          </a:bodyPr>
+          <a:lstStyle/>
+          <a:p>
+            <a:pPr algn="l">
+              <a:defRPr sz="1800" b="0" i="0">
+                <a:solidFill>
+                  <a:srgbClr val="9494B0"/>
+                </a:solidFill>
+                <a:latin typeface="Segoe UI"/>
+              </a:defRPr>
+            </a:pPr>
+            <a:r>
+              <a:t>IF-THEN automation rules with automatic actuator control</a:t>
+            </a:r>
+          </a:p>
+        </p:txBody>
+      </p:sp>
+      <p:sp>
+        <p:nvSpPr>
+          <p:cNvPr id="12" name="Oval 11"/>
+          <p:cNvSpPr/>
+          <p:nvPr/>
+        </p:nvSpPr>
+        <p:spPr>
+          <a:xfrm>
+            <a:off x="731520" y="3621024"/>
+            <a:ext cx="91440" cy="91440"/>
+          </a:xfrm>
+          <a:prstGeom prst="ellipse">
+            <a:avLst/>
+          </a:prstGeom>
+          <a:solidFill>
+            <a:srgbClr val="10B981"/>
+          </a:solidFill>
+          <a:ln>
+            <a:noFill/>
+          </a:ln>
+        </p:spPr>
+        <p:style>
+          <a:lnRef idx="1">
+            <a:schemeClr val="accent1"/>
+          </a:lnRef>
+          <a:fillRef idx="3">
+            <a:schemeClr val="accent1"/>
+          </a:fillRef>
+          <a:effectRef idx="2">
+            <a:schemeClr val="accent1"/>
+          </a:effectRef>
+          <a:fontRef idx="minor">
+            <a:schemeClr val="lt1"/>
+          </a:fontRef>
+        </p:style>
+        <p:txBody>
+          <a:bodyPr rtlCol="0" anchor="ctr"/>
+          <a:lstStyle/>
+          <a:p>
+            <a:pPr algn="ctr"/>
+            <a:endParaRPr/>
+          </a:p>
+        </p:txBody>
+      </p:sp>
+      <p:sp>
+        <p:nvSpPr>
+          <p:cNvPr id="13" name="TextBox 12"/>
+          <p:cNvSpPr txBox="1"/>
+          <p:nvPr/>
+        </p:nvSpPr>
+        <p:spPr>
+          <a:xfrm>
+            <a:off x="1005840" y="3511296"/>
+            <a:ext cx="10058400" cy="411480"/>
+          </a:xfrm>
+          <a:prstGeom prst="rect">
+            <a:avLst/>
+          </a:prstGeom>
+          <a:noFill/>
+        </p:spPr>
+        <p:txBody>
+          <a:bodyPr wrap="square">
+            <a:spAutoFit/>
+          </a:bodyPr>
+          <a:lstStyle/>
+          <a:p>
+            <a:pPr algn="l">
+              <a:defRPr sz="1800" b="0" i="0">
+                <a:solidFill>
+                  <a:srgbClr val="9494B0"/>
+                </a:solidFill>
+                <a:latin typeface="Segoe UI"/>
+              </a:defRPr>
+            </a:pPr>
+            <a:r>
+              <a:t>Modern React dashboard with SSE-based live updates</a:t>
+            </a:r>
+          </a:p>
+        </p:txBody>
+      </p:sp>
+      <p:sp>
+        <p:nvSpPr>
+          <p:cNvPr id="14" name="Oval 13"/>
+          <p:cNvSpPr/>
+          <p:nvPr/>
+        </p:nvSpPr>
+        <p:spPr>
+          <a:xfrm>
+            <a:off x="731520" y="4059936"/>
+            <a:ext cx="91440" cy="91440"/>
+          </a:xfrm>
+          <a:prstGeom prst="ellipse">
+            <a:avLst/>
+          </a:prstGeom>
+          <a:solidFill>
+            <a:srgbClr val="10B981"/>
+          </a:solidFill>
+          <a:ln>
+            <a:noFill/>
+          </a:ln>
+        </p:spPr>
+        <p:style>
+          <a:lnRef idx="1">
+            <a:schemeClr val="accent1"/>
+          </a:lnRef>
+          <a:fillRef idx="3">
+            <a:schemeClr val="accent1"/>
+          </a:fillRef>
+          <a:effectRef idx="2">
+            <a:schemeClr val="accent1"/>
+          </a:effectRef>
+          <a:fontRef idx="minor">
+            <a:schemeClr val="lt1"/>
+          </a:fontRef>
+        </p:style>
+        <p:txBody>
+          <a:bodyPr rtlCol="0" anchor="ctr"/>
+          <a:lstStyle/>
+          <a:p>
+            <a:pPr algn="ctr"/>
+            <a:endParaRPr/>
+          </a:p>
+        </p:txBody>
+      </p:sp>
+      <p:sp>
+        <p:nvSpPr>
+          <p:cNvPr id="15" name="TextBox 14"/>
+          <p:cNvSpPr txBox="1"/>
+          <p:nvPr/>
+        </p:nvSpPr>
+        <p:spPr>
+          <a:xfrm>
+            <a:off x="1005840" y="3950208"/>
+            <a:ext cx="10058400" cy="411480"/>
+          </a:xfrm>
+          <a:prstGeom prst="rect">
+            <a:avLst/>
+          </a:prstGeom>
+          <a:noFill/>
+        </p:spPr>
+        <p:txBody>
+          <a:bodyPr wrap="square">
+            <a:spAutoFit/>
+          </a:bodyPr>
+          <a:lstStyle/>
+          <a:p>
+            <a:pPr algn="l">
+              <a:defRPr sz="1800" b="0" i="0">
+                <a:solidFill>
+                  <a:srgbClr val="9494B0"/>
+                </a:solidFill>
+                <a:latin typeface="Segoe UI"/>
+              </a:defRPr>
+            </a:pPr>
+            <a:r>
+              <a:t>Containerized deployment with Docker Compose</a:t>
+            </a:r>
+          </a:p>
+        </p:txBody>
+      </p:sp>
+      <p:sp>
+        <p:nvSpPr>
+          <p:cNvPr id="16" name="Oval 15"/>
+          <p:cNvSpPr/>
+          <p:nvPr/>
+        </p:nvSpPr>
+        <p:spPr>
+          <a:xfrm>
+            <a:off x="731520" y="4498848"/>
+            <a:ext cx="91440" cy="91440"/>
+          </a:xfrm>
+          <a:prstGeom prst="ellipse">
+            <a:avLst/>
+          </a:prstGeom>
+          <a:solidFill>
+            <a:srgbClr val="10B981"/>
+          </a:solidFill>
+          <a:ln>
+            <a:noFill/>
+          </a:ln>
+        </p:spPr>
+        <p:style>
+          <a:lnRef idx="1">
+            <a:schemeClr val="accent1"/>
+          </a:lnRef>
+          <a:fillRef idx="3">
+            <a:schemeClr val="accent1"/>
+          </a:fillRef>
+          <a:effectRef idx="2">
+            <a:schemeClr val="accent1"/>
+          </a:effectRef>
+          <a:fontRef idx="minor">
+            <a:schemeClr val="lt1"/>
+          </a:fontRef>
+        </p:style>
+        <p:txBody>
+          <a:bodyPr rtlCol="0" anchor="ctr"/>
+          <a:lstStyle/>
+          <a:p>
+            <a:pPr algn="ctr"/>
+            <a:endParaRPr/>
+          </a:p>
+        </p:txBody>
+      </p:sp>
+      <p:sp>
+        <p:nvSpPr>
+          <p:cNvPr id="17" name="TextBox 16"/>
+          <p:cNvSpPr txBox="1"/>
+          <p:nvPr/>
+        </p:nvSpPr>
+        <p:spPr>
+          <a:xfrm>
+            <a:off x="1005840" y="4389120"/>
+            <a:ext cx="10058400" cy="411480"/>
+          </a:xfrm>
+          <a:prstGeom prst="rect">
+            <a:avLst/>
+          </a:prstGeom>
+          <a:noFill/>
+        </p:spPr>
+        <p:txBody>
+          <a:bodyPr wrap="square">
+            <a:spAutoFit/>
+          </a:bodyPr>
+          <a:lstStyle/>
+          <a:p>
+            <a:pPr algn="l">
+              <a:defRPr sz="1800" b="0" i="0">
+                <a:solidFill>
+                  <a:srgbClr val="9494B0"/>
+                </a:solidFill>
+                <a:latin typeface="Segoe UI"/>
+              </a:defRPr>
+            </a:pPr>
+            <a:r>
+              <a:t>Unified event schema for heterogeneous data sources</a:t>
+            </a:r>
+          </a:p>
+        </p:txBody>
+      </p:sp>
+      <p:sp>
+        <p:nvSpPr>
+          <p:cNvPr id="18" name="TextBox 17"/>
+          <p:cNvSpPr txBox="1"/>
+          <p:nvPr/>
+        </p:nvSpPr>
+        <p:spPr>
+          <a:xfrm>
+            <a:off x="731520" y="4937760"/>
+            <a:ext cx="10698480" cy="457200"/>
+          </a:xfrm>
+          <a:prstGeom prst="rect">
+            <a:avLst/>
+          </a:prstGeom>
+          <a:noFill/>
+        </p:spPr>
+        <p:txBody>
+          <a:bodyPr wrap="square">
+            <a:spAutoFit/>
+          </a:bodyPr>
+          <a:lstStyle/>
+          <a:p>
+            <a:pPr algn="l">
+              <a:defRPr sz="2200" b="1" i="0">
+                <a:solidFill>
+                  <a:srgbClr val="8B5CF6"/>
+                </a:solidFill>
+                <a:latin typeface="Segoe UI"/>
+              </a:defRPr>
+            </a:pPr>
+            <a:r>
+              <a:t>Future Enhancements</a:t>
+            </a:r>
+          </a:p>
+        </p:txBody>
+      </p:sp>
+      <p:sp>
+        <p:nvSpPr>
+          <p:cNvPr id="19" name="TextBox 18"/>
+          <p:cNvSpPr txBox="1"/>
+          <p:nvPr/>
+        </p:nvSpPr>
+        <p:spPr>
+          <a:xfrm>
+            <a:off x="914400" y="5394960"/>
+            <a:ext cx="2829464" cy="369332"/>
+          </a:xfrm>
+          <a:prstGeom prst="rect">
+            <a:avLst/>
+          </a:prstGeom>
+          <a:noFill/>
+        </p:spPr>
+        <p:txBody>
+          <a:bodyPr wrap="square">
+            <a:spAutoFit/>
+          </a:bodyPr>
+          <a:lstStyle/>
+          <a:p>
+            <a:pPr algn="l">
+              <a:defRPr sz="1800" b="1" i="0">
+                <a:solidFill>
+                  <a:srgbClr val="FFFFFF"/>
+                </a:solidFill>
+                <a:latin typeface="Segoe UI"/>
+              </a:defRPr>
+            </a:pPr>
+            <a:r>
+              <a:rPr dirty="0"/>
+              <a:t>→ </a:t>
+            </a:r>
+            <a:r>
+              <a:rPr dirty="0" err="1"/>
+              <a:t>MachineLearning</a:t>
+            </a:r>
+            <a:r>
+              <a:rPr dirty="0"/>
+              <a:t>:</a:t>
+            </a:r>
+          </a:p>
+        </p:txBody>
+      </p:sp>
+      <p:sp>
+        <p:nvSpPr>
+          <p:cNvPr id="20" name="TextBox 19"/>
+          <p:cNvSpPr txBox="1"/>
+          <p:nvPr/>
+        </p:nvSpPr>
+        <p:spPr>
+          <a:xfrm>
+            <a:off x="3355676" y="5419606"/>
+            <a:ext cx="7315200" cy="320040"/>
+          </a:xfrm>
+          <a:prstGeom prst="rect">
+            <a:avLst/>
+          </a:prstGeom>
+          <a:noFill/>
+        </p:spPr>
+        <p:txBody>
+          <a:bodyPr wrap="square">
+            <a:spAutoFit/>
+          </a:bodyPr>
+          <a:lstStyle/>
+          <a:p>
+            <a:pPr algn="l">
+              <a:defRPr sz="1800" b="0" i="0">
+                <a:solidFill>
+                  <a:srgbClr val="6B6B80"/>
+                </a:solidFill>
+                <a:latin typeface="Segoe UI"/>
+              </a:defRPr>
+            </a:pPr>
+            <a:r>
+              <a:t>Predictive maintenance and anomaly detection</a:t>
+            </a:r>
+          </a:p>
+        </p:txBody>
+      </p:sp>
+      <p:sp>
+        <p:nvSpPr>
+          <p:cNvPr id="21" name="TextBox 20"/>
+          <p:cNvSpPr txBox="1"/>
+          <p:nvPr/>
+        </p:nvSpPr>
+        <p:spPr>
+          <a:xfrm>
+            <a:off x="914400" y="5760720"/>
+            <a:ext cx="2286000" cy="320040"/>
+          </a:xfrm>
+          <a:prstGeom prst="rect">
+            <a:avLst/>
+          </a:prstGeom>
+          <a:noFill/>
+        </p:spPr>
+        <p:txBody>
+          <a:bodyPr wrap="square">
+            <a:spAutoFit/>
+          </a:bodyPr>
+          <a:lstStyle/>
+          <a:p>
+            <a:pPr algn="l">
+              <a:defRPr sz="1800" b="1" i="0">
+                <a:solidFill>
+                  <a:srgbClr val="FFFFFF"/>
+                </a:solidFill>
+                <a:latin typeface="Segoe UI"/>
+              </a:defRPr>
+            </a:pPr>
+            <a:r>
+              <a:t>→ Mobile App:</a:t>
+            </a:r>
+          </a:p>
+        </p:txBody>
+      </p:sp>
+      <p:sp>
+        <p:nvSpPr>
+          <p:cNvPr id="22" name="TextBox 21"/>
+          <p:cNvSpPr txBox="1"/>
+          <p:nvPr/>
+        </p:nvSpPr>
+        <p:spPr>
+          <a:xfrm>
+            <a:off x="3355676" y="5757148"/>
+            <a:ext cx="7315200" cy="320040"/>
+          </a:xfrm>
+          <a:prstGeom prst="rect">
+            <a:avLst/>
+          </a:prstGeom>
+          <a:noFill/>
+        </p:spPr>
+        <p:txBody>
+          <a:bodyPr wrap="square">
+            <a:spAutoFit/>
+          </a:bodyPr>
+          <a:lstStyle/>
+          <a:p>
+            <a:pPr algn="l">
+              <a:defRPr sz="1800" b="0" i="0">
+                <a:solidFill>
+                  <a:srgbClr val="6B6B80"/>
+                </a:solidFill>
+                <a:latin typeface="Segoe UI"/>
+              </a:defRPr>
+            </a:pPr>
+            <a:r>
+              <a:t>Remote monitoring and push notifications</a:t>
+            </a:r>
+          </a:p>
+        </p:txBody>
+      </p:sp>
+      <p:sp>
+        <p:nvSpPr>
+          <p:cNvPr id="23" name="TextBox 22"/>
+          <p:cNvSpPr txBox="1"/>
+          <p:nvPr/>
+        </p:nvSpPr>
+        <p:spPr>
+          <a:xfrm>
+            <a:off x="914400" y="6126480"/>
+            <a:ext cx="2582174" cy="369332"/>
+          </a:xfrm>
+          <a:prstGeom prst="rect">
+            <a:avLst/>
+          </a:prstGeom>
+          <a:noFill/>
+        </p:spPr>
+        <p:txBody>
+          <a:bodyPr wrap="square">
+            <a:spAutoFit/>
+          </a:bodyPr>
+          <a:lstStyle/>
+          <a:p>
+            <a:pPr algn="l">
+              <a:defRPr sz="1800" b="1" i="0">
+                <a:solidFill>
+                  <a:srgbClr val="FFFFFF"/>
+                </a:solidFill>
+                <a:latin typeface="Segoe UI"/>
+              </a:defRPr>
+            </a:pPr>
+            <a:r>
+              <a:rPr dirty="0"/>
+              <a:t>→ Advanced</a:t>
+            </a:r>
+            <a:r>
+              <a:rPr lang="it-IT" dirty="0"/>
+              <a:t> </a:t>
+            </a:r>
+            <a:r>
+              <a:rPr dirty="0"/>
+              <a:t>Alerting:</a:t>
+            </a:r>
+          </a:p>
+        </p:txBody>
+      </p:sp>
+      <p:sp>
+        <p:nvSpPr>
+          <p:cNvPr id="24" name="TextBox 23"/>
+          <p:cNvSpPr txBox="1"/>
+          <p:nvPr/>
+        </p:nvSpPr>
+        <p:spPr>
+          <a:xfrm>
+            <a:off x="3355676" y="6153343"/>
+            <a:ext cx="7315200" cy="320040"/>
+          </a:xfrm>
+          <a:prstGeom prst="rect">
+            <a:avLst/>
+          </a:prstGeom>
+          <a:noFill/>
+        </p:spPr>
+        <p:txBody>
+          <a:bodyPr wrap="square">
+            <a:spAutoFit/>
+          </a:bodyPr>
+          <a:lstStyle/>
+          <a:p>
+            <a:pPr algn="l">
+              <a:defRPr sz="1800" b="0" i="0">
+                <a:solidFill>
+                  <a:srgbClr val="6B6B80"/>
+                </a:solidFill>
+                <a:latin typeface="Segoe UI"/>
+              </a:defRPr>
+            </a:pPr>
+            <a:r>
+              <a:rPr dirty="0"/>
+              <a:t>Email/SMS notifications for critical events</a:t>
+            </a:r>
+          </a:p>
+        </p:txBody>
+      </p:sp>
+      <p:sp>
+        <p:nvSpPr>
+          <p:cNvPr id="25" name="TextBox 24"/>
+          <p:cNvSpPr txBox="1"/>
+          <p:nvPr/>
+        </p:nvSpPr>
+        <p:spPr>
+          <a:xfrm>
+            <a:off x="11155680" y="6309360"/>
+            <a:ext cx="731520" cy="274320"/>
+          </a:xfrm>
+          <a:prstGeom prst="rect">
+            <a:avLst/>
+          </a:prstGeom>
+          <a:noFill/>
+        </p:spPr>
+        <p:txBody>
+          <a:bodyPr wrap="square">
+            <a:spAutoFit/>
+          </a:bodyPr>
+          <a:lstStyle/>
+          <a:p>
+            <a:pPr algn="r">
+              <a:defRPr sz="1400" b="0" i="0">
+                <a:solidFill>
+                  <a:srgbClr val="6B6B80"/>
+                </a:solidFill>
+                <a:latin typeface="Segoe UI"/>
+              </a:defRPr>
+            </a:pPr>
+            <a:r>
+              <a:t>21/22</a:t>
+            </a:r>
+          </a:p>
+        </p:txBody>
+      </p:sp>
+      <p:sp>
+        <p:nvSpPr>
+          <p:cNvPr id="26" name="Rectangle 25">
+            <a:extLst>
+              <a:ext uri="{FF2B5EF4-FFF2-40B4-BE49-F238E27FC236}">
+                <a16:creationId xmlns:a16="http://schemas.microsoft.com/office/drawing/2014/main" id="{3D97FD9C-9CA4-0EDC-9ECA-37AB89CFF66A}"/>
+              </a:ext>
+            </a:extLst>
+          </p:cNvPr>
+          <p:cNvSpPr/>
+          <p:nvPr/>
+        </p:nvSpPr>
+        <p:spPr>
+          <a:xfrm>
+            <a:off x="676656" y="589788"/>
+            <a:ext cx="109728" cy="640080"/>
           </a:xfrm>
           <a:prstGeom prst="rect">
             <a:avLst/>
@@ -11997,804 +13090,7 @@
           <a:lstStyle/>
           <a:p>
             <a:pPr algn="ctr"/>
-          </a:p>
-        </p:txBody>
-      </p:sp>
-      <p:sp>
-        <p:nvSpPr>
-          <p:cNvPr id="5" name="TextBox 4"/>
-          <p:cNvSpPr txBox="1"/>
-          <p:nvPr/>
-        </p:nvSpPr>
-        <p:spPr>
-          <a:xfrm>
-            <a:off x="731520" y="1737360"/>
-            <a:ext cx="10698480" cy="457200"/>
-          </a:xfrm>
-          <a:prstGeom prst="rect">
-            <a:avLst/>
-          </a:prstGeom>
-          <a:noFill/>
-        </p:spPr>
-        <p:txBody>
-          <a:bodyPr wrap="square">
-            <a:spAutoFit/>
-          </a:bodyPr>
-          <a:lstStyle/>
-          <a:p>
-            <a:pPr algn="l">
-              <a:defRPr sz="2200" b="1" i="0">
-                <a:solidFill>
-                  <a:srgbClr val="10B981"/>
-                </a:solidFill>
-                <a:latin typeface="Segoe UI"/>
-              </a:defRPr>
-            </a:pPr>
-            <a:r>
-              <a:t>Project Achievements</a:t>
-            </a:r>
-          </a:p>
-        </p:txBody>
-      </p:sp>
-      <p:sp>
-        <p:nvSpPr>
-          <p:cNvPr id="6" name="Oval 5"/>
-          <p:cNvSpPr/>
-          <p:nvPr/>
-        </p:nvSpPr>
-        <p:spPr>
-          <a:xfrm>
-            <a:off x="731520" y="2304288"/>
-            <a:ext cx="91440" cy="91440"/>
-          </a:xfrm>
-          <a:prstGeom prst="ellipse">
-            <a:avLst/>
-          </a:prstGeom>
-          <a:solidFill>
-            <a:srgbClr val="10B981"/>
-          </a:solidFill>
-          <a:ln>
-            <a:noFill/>
-          </a:ln>
-        </p:spPr>
-        <p:style>
-          <a:lnRef idx="1">
-            <a:schemeClr val="accent1"/>
-          </a:lnRef>
-          <a:fillRef idx="3">
-            <a:schemeClr val="accent1"/>
-          </a:fillRef>
-          <a:effectRef idx="2">
-            <a:schemeClr val="accent1"/>
-          </a:effectRef>
-          <a:fontRef idx="minor">
-            <a:schemeClr val="lt1"/>
-          </a:fontRef>
-        </p:style>
-        <p:txBody>
-          <a:bodyPr rtlCol="0" anchor="ctr"/>
-          <a:lstStyle/>
-          <a:p>
-            <a:pPr algn="ctr"/>
-          </a:p>
-        </p:txBody>
-      </p:sp>
-      <p:sp>
-        <p:nvSpPr>
-          <p:cNvPr id="7" name="TextBox 6"/>
-          <p:cNvSpPr txBox="1"/>
-          <p:nvPr/>
-        </p:nvSpPr>
-        <p:spPr>
-          <a:xfrm>
-            <a:off x="1005840" y="2194560"/>
-            <a:ext cx="10058400" cy="411480"/>
-          </a:xfrm>
-          <a:prstGeom prst="rect">
-            <a:avLst/>
-          </a:prstGeom>
-          <a:noFill/>
-        </p:spPr>
-        <p:txBody>
-          <a:bodyPr wrap="square">
-            <a:spAutoFit/>
-          </a:bodyPr>
-          <a:lstStyle/>
-          <a:p>
-            <a:pPr algn="l">
-              <a:defRPr sz="1800" b="0" i="0">
-                <a:solidFill>
-                  <a:srgbClr val="9494B0"/>
-                </a:solidFill>
-                <a:latin typeface="Segoe UI"/>
-              </a:defRPr>
-            </a:pPr>
-            <a:r>
-              <a:t>Distributed microservices architecture with event-driven communication</a:t>
-            </a:r>
-          </a:p>
-        </p:txBody>
-      </p:sp>
-      <p:sp>
-        <p:nvSpPr>
-          <p:cNvPr id="8" name="Oval 7"/>
-          <p:cNvSpPr/>
-          <p:nvPr/>
-        </p:nvSpPr>
-        <p:spPr>
-          <a:xfrm>
-            <a:off x="731520" y="2743200"/>
-            <a:ext cx="91440" cy="91440"/>
-          </a:xfrm>
-          <a:prstGeom prst="ellipse">
-            <a:avLst/>
-          </a:prstGeom>
-          <a:solidFill>
-            <a:srgbClr val="10B981"/>
-          </a:solidFill>
-          <a:ln>
-            <a:noFill/>
-          </a:ln>
-        </p:spPr>
-        <p:style>
-          <a:lnRef idx="1">
-            <a:schemeClr val="accent1"/>
-          </a:lnRef>
-          <a:fillRef idx="3">
-            <a:schemeClr val="accent1"/>
-          </a:fillRef>
-          <a:effectRef idx="2">
-            <a:schemeClr val="accent1"/>
-          </a:effectRef>
-          <a:fontRef idx="minor">
-            <a:schemeClr val="lt1"/>
-          </a:fontRef>
-        </p:style>
-        <p:txBody>
-          <a:bodyPr rtlCol="0" anchor="ctr"/>
-          <a:lstStyle/>
-          <a:p>
-            <a:pPr algn="ctr"/>
-          </a:p>
-        </p:txBody>
-      </p:sp>
-      <p:sp>
-        <p:nvSpPr>
-          <p:cNvPr id="9" name="TextBox 8"/>
-          <p:cNvSpPr txBox="1"/>
-          <p:nvPr/>
-        </p:nvSpPr>
-        <p:spPr>
-          <a:xfrm>
-            <a:off x="1005840" y="2633472"/>
-            <a:ext cx="10058400" cy="411480"/>
-          </a:xfrm>
-          <a:prstGeom prst="rect">
-            <a:avLst/>
-          </a:prstGeom>
-          <a:noFill/>
-        </p:spPr>
-        <p:txBody>
-          <a:bodyPr wrap="square">
-            <a:spAutoFit/>
-          </a:bodyPr>
-          <a:lstStyle/>
-          <a:p>
-            <a:pPr algn="l">
-              <a:defRPr sz="1800" b="0" i="0">
-                <a:solidFill>
-                  <a:srgbClr val="9494B0"/>
-                </a:solidFill>
-                <a:latin typeface="Segoe UI"/>
-              </a:defRPr>
-            </a:pPr>
-            <a:r>
-              <a:t>Real-time monitoring and control of simulated Mars habitat</a:t>
-            </a:r>
-          </a:p>
-        </p:txBody>
-      </p:sp>
-      <p:sp>
-        <p:nvSpPr>
-          <p:cNvPr id="10" name="Oval 9"/>
-          <p:cNvSpPr/>
-          <p:nvPr/>
-        </p:nvSpPr>
-        <p:spPr>
-          <a:xfrm>
-            <a:off x="731520" y="3182112"/>
-            <a:ext cx="91440" cy="91440"/>
-          </a:xfrm>
-          <a:prstGeom prst="ellipse">
-            <a:avLst/>
-          </a:prstGeom>
-          <a:solidFill>
-            <a:srgbClr val="10B981"/>
-          </a:solidFill>
-          <a:ln>
-            <a:noFill/>
-          </a:ln>
-        </p:spPr>
-        <p:style>
-          <a:lnRef idx="1">
-            <a:schemeClr val="accent1"/>
-          </a:lnRef>
-          <a:fillRef idx="3">
-            <a:schemeClr val="accent1"/>
-          </a:fillRef>
-          <a:effectRef idx="2">
-            <a:schemeClr val="accent1"/>
-          </a:effectRef>
-          <a:fontRef idx="minor">
-            <a:schemeClr val="lt1"/>
-          </a:fontRef>
-        </p:style>
-        <p:txBody>
-          <a:bodyPr rtlCol="0" anchor="ctr"/>
-          <a:lstStyle/>
-          <a:p>
-            <a:pPr algn="ctr"/>
-          </a:p>
-        </p:txBody>
-      </p:sp>
-      <p:sp>
-        <p:nvSpPr>
-          <p:cNvPr id="11" name="TextBox 10"/>
-          <p:cNvSpPr txBox="1"/>
-          <p:nvPr/>
-        </p:nvSpPr>
-        <p:spPr>
-          <a:xfrm>
-            <a:off x="1005840" y="3072384"/>
-            <a:ext cx="10058400" cy="411480"/>
-          </a:xfrm>
-          <a:prstGeom prst="rect">
-            <a:avLst/>
-          </a:prstGeom>
-          <a:noFill/>
-        </p:spPr>
-        <p:txBody>
-          <a:bodyPr wrap="square">
-            <a:spAutoFit/>
-          </a:bodyPr>
-          <a:lstStyle/>
-          <a:p>
-            <a:pPr algn="l">
-              <a:defRPr sz="1800" b="0" i="0">
-                <a:solidFill>
-                  <a:srgbClr val="9494B0"/>
-                </a:solidFill>
-                <a:latin typeface="Segoe UI"/>
-              </a:defRPr>
-            </a:pPr>
-            <a:r>
-              <a:t>IF-THEN automation rules with automatic actuator control</a:t>
-            </a:r>
-          </a:p>
-        </p:txBody>
-      </p:sp>
-      <p:sp>
-        <p:nvSpPr>
-          <p:cNvPr id="12" name="Oval 11"/>
-          <p:cNvSpPr/>
-          <p:nvPr/>
-        </p:nvSpPr>
-        <p:spPr>
-          <a:xfrm>
-            <a:off x="731520" y="3621024"/>
-            <a:ext cx="91440" cy="91440"/>
-          </a:xfrm>
-          <a:prstGeom prst="ellipse">
-            <a:avLst/>
-          </a:prstGeom>
-          <a:solidFill>
-            <a:srgbClr val="10B981"/>
-          </a:solidFill>
-          <a:ln>
-            <a:noFill/>
-          </a:ln>
-        </p:spPr>
-        <p:style>
-          <a:lnRef idx="1">
-            <a:schemeClr val="accent1"/>
-          </a:lnRef>
-          <a:fillRef idx="3">
-            <a:schemeClr val="accent1"/>
-          </a:fillRef>
-          <a:effectRef idx="2">
-            <a:schemeClr val="accent1"/>
-          </a:effectRef>
-          <a:fontRef idx="minor">
-            <a:schemeClr val="lt1"/>
-          </a:fontRef>
-        </p:style>
-        <p:txBody>
-          <a:bodyPr rtlCol="0" anchor="ctr"/>
-          <a:lstStyle/>
-          <a:p>
-            <a:pPr algn="ctr"/>
-          </a:p>
-        </p:txBody>
-      </p:sp>
-      <p:sp>
-        <p:nvSpPr>
-          <p:cNvPr id="13" name="TextBox 12"/>
-          <p:cNvSpPr txBox="1"/>
-          <p:nvPr/>
-        </p:nvSpPr>
-        <p:spPr>
-          <a:xfrm>
-            <a:off x="1005840" y="3511296"/>
-            <a:ext cx="10058400" cy="411480"/>
-          </a:xfrm>
-          <a:prstGeom prst="rect">
-            <a:avLst/>
-          </a:prstGeom>
-          <a:noFill/>
-        </p:spPr>
-        <p:txBody>
-          <a:bodyPr wrap="square">
-            <a:spAutoFit/>
-          </a:bodyPr>
-          <a:lstStyle/>
-          <a:p>
-            <a:pPr algn="l">
-              <a:defRPr sz="1800" b="0" i="0">
-                <a:solidFill>
-                  <a:srgbClr val="9494B0"/>
-                </a:solidFill>
-                <a:latin typeface="Segoe UI"/>
-              </a:defRPr>
-            </a:pPr>
-            <a:r>
-              <a:t>Modern React dashboard with SSE-based live updates</a:t>
-            </a:r>
-          </a:p>
-        </p:txBody>
-      </p:sp>
-      <p:sp>
-        <p:nvSpPr>
-          <p:cNvPr id="14" name="Oval 13"/>
-          <p:cNvSpPr/>
-          <p:nvPr/>
-        </p:nvSpPr>
-        <p:spPr>
-          <a:xfrm>
-            <a:off x="731520" y="4059936"/>
-            <a:ext cx="91440" cy="91440"/>
-          </a:xfrm>
-          <a:prstGeom prst="ellipse">
-            <a:avLst/>
-          </a:prstGeom>
-          <a:solidFill>
-            <a:srgbClr val="10B981"/>
-          </a:solidFill>
-          <a:ln>
-            <a:noFill/>
-          </a:ln>
-        </p:spPr>
-        <p:style>
-          <a:lnRef idx="1">
-            <a:schemeClr val="accent1"/>
-          </a:lnRef>
-          <a:fillRef idx="3">
-            <a:schemeClr val="accent1"/>
-          </a:fillRef>
-          <a:effectRef idx="2">
-            <a:schemeClr val="accent1"/>
-          </a:effectRef>
-          <a:fontRef idx="minor">
-            <a:schemeClr val="lt1"/>
-          </a:fontRef>
-        </p:style>
-        <p:txBody>
-          <a:bodyPr rtlCol="0" anchor="ctr"/>
-          <a:lstStyle/>
-          <a:p>
-            <a:pPr algn="ctr"/>
-          </a:p>
-        </p:txBody>
-      </p:sp>
-      <p:sp>
-        <p:nvSpPr>
-          <p:cNvPr id="15" name="TextBox 14"/>
-          <p:cNvSpPr txBox="1"/>
-          <p:nvPr/>
-        </p:nvSpPr>
-        <p:spPr>
-          <a:xfrm>
-            <a:off x="1005840" y="3950208"/>
-            <a:ext cx="10058400" cy="411480"/>
-          </a:xfrm>
-          <a:prstGeom prst="rect">
-            <a:avLst/>
-          </a:prstGeom>
-          <a:noFill/>
-        </p:spPr>
-        <p:txBody>
-          <a:bodyPr wrap="square">
-            <a:spAutoFit/>
-          </a:bodyPr>
-          <a:lstStyle/>
-          <a:p>
-            <a:pPr algn="l">
-              <a:defRPr sz="1800" b="0" i="0">
-                <a:solidFill>
-                  <a:srgbClr val="9494B0"/>
-                </a:solidFill>
-                <a:latin typeface="Segoe UI"/>
-              </a:defRPr>
-            </a:pPr>
-            <a:r>
-              <a:t>Containerized deployment with Docker Compose</a:t>
-            </a:r>
-          </a:p>
-        </p:txBody>
-      </p:sp>
-      <p:sp>
-        <p:nvSpPr>
-          <p:cNvPr id="16" name="Oval 15"/>
-          <p:cNvSpPr/>
-          <p:nvPr/>
-        </p:nvSpPr>
-        <p:spPr>
-          <a:xfrm>
-            <a:off x="731520" y="4498848"/>
-            <a:ext cx="91440" cy="91440"/>
-          </a:xfrm>
-          <a:prstGeom prst="ellipse">
-            <a:avLst/>
-          </a:prstGeom>
-          <a:solidFill>
-            <a:srgbClr val="10B981"/>
-          </a:solidFill>
-          <a:ln>
-            <a:noFill/>
-          </a:ln>
-        </p:spPr>
-        <p:style>
-          <a:lnRef idx="1">
-            <a:schemeClr val="accent1"/>
-          </a:lnRef>
-          <a:fillRef idx="3">
-            <a:schemeClr val="accent1"/>
-          </a:fillRef>
-          <a:effectRef idx="2">
-            <a:schemeClr val="accent1"/>
-          </a:effectRef>
-          <a:fontRef idx="minor">
-            <a:schemeClr val="lt1"/>
-          </a:fontRef>
-        </p:style>
-        <p:txBody>
-          <a:bodyPr rtlCol="0" anchor="ctr"/>
-          <a:lstStyle/>
-          <a:p>
-            <a:pPr algn="ctr"/>
-          </a:p>
-        </p:txBody>
-      </p:sp>
-      <p:sp>
-        <p:nvSpPr>
-          <p:cNvPr id="17" name="TextBox 16"/>
-          <p:cNvSpPr txBox="1"/>
-          <p:nvPr/>
-        </p:nvSpPr>
-        <p:spPr>
-          <a:xfrm>
-            <a:off x="1005840" y="4389120"/>
-            <a:ext cx="10058400" cy="411480"/>
-          </a:xfrm>
-          <a:prstGeom prst="rect">
-            <a:avLst/>
-          </a:prstGeom>
-          <a:noFill/>
-        </p:spPr>
-        <p:txBody>
-          <a:bodyPr wrap="square">
-            <a:spAutoFit/>
-          </a:bodyPr>
-          <a:lstStyle/>
-          <a:p>
-            <a:pPr algn="l">
-              <a:defRPr sz="1800" b="0" i="0">
-                <a:solidFill>
-                  <a:srgbClr val="9494B0"/>
-                </a:solidFill>
-                <a:latin typeface="Segoe UI"/>
-              </a:defRPr>
-            </a:pPr>
-            <a:r>
-              <a:t>Unified event schema for heterogeneous data sources</a:t>
-            </a:r>
-          </a:p>
-        </p:txBody>
-      </p:sp>
-      <p:sp>
-        <p:nvSpPr>
-          <p:cNvPr id="18" name="TextBox 17"/>
-          <p:cNvSpPr txBox="1"/>
-          <p:nvPr/>
-        </p:nvSpPr>
-        <p:spPr>
-          <a:xfrm>
-            <a:off x="731520" y="4937760"/>
-            <a:ext cx="10698480" cy="457200"/>
-          </a:xfrm>
-          <a:prstGeom prst="rect">
-            <a:avLst/>
-          </a:prstGeom>
-          <a:noFill/>
-        </p:spPr>
-        <p:txBody>
-          <a:bodyPr wrap="square">
-            <a:spAutoFit/>
-          </a:bodyPr>
-          <a:lstStyle/>
-          <a:p>
-            <a:pPr algn="l">
-              <a:defRPr sz="2200" b="1" i="0">
-                <a:solidFill>
-                  <a:srgbClr val="8B5CF6"/>
-                </a:solidFill>
-                <a:latin typeface="Segoe UI"/>
-              </a:defRPr>
-            </a:pPr>
-            <a:r>
-              <a:t>Future Enhancements</a:t>
-            </a:r>
-          </a:p>
-        </p:txBody>
-      </p:sp>
-      <p:sp>
-        <p:nvSpPr>
-          <p:cNvPr id="19" name="TextBox 18"/>
-          <p:cNvSpPr txBox="1"/>
-          <p:nvPr/>
-        </p:nvSpPr>
-        <p:spPr>
-          <a:xfrm>
-            <a:off x="914400" y="5394960"/>
-            <a:ext cx="2286000" cy="320040"/>
-          </a:xfrm>
-          <a:prstGeom prst="rect">
-            <a:avLst/>
-          </a:prstGeom>
-          <a:noFill/>
-        </p:spPr>
-        <p:txBody>
-          <a:bodyPr wrap="square">
-            <a:spAutoFit/>
-          </a:bodyPr>
-          <a:lstStyle/>
-          <a:p>
-            <a:pPr algn="l">
-              <a:defRPr sz="1800" b="1" i="0">
-                <a:solidFill>
-                  <a:srgbClr val="FFFFFF"/>
-                </a:solidFill>
-                <a:latin typeface="Segoe UI"/>
-              </a:defRPr>
-            </a:pPr>
-            <a:r>
-              <a:t>→ Machine Learning:</a:t>
-            </a:r>
-          </a:p>
-        </p:txBody>
-      </p:sp>
-      <p:sp>
-        <p:nvSpPr>
-          <p:cNvPr id="20" name="TextBox 19"/>
-          <p:cNvSpPr txBox="1"/>
-          <p:nvPr/>
-        </p:nvSpPr>
-        <p:spPr>
-          <a:xfrm>
-            <a:off x="3200400" y="5394960"/>
-            <a:ext cx="7315200" cy="320040"/>
-          </a:xfrm>
-          <a:prstGeom prst="rect">
-            <a:avLst/>
-          </a:prstGeom>
-          <a:noFill/>
-        </p:spPr>
-        <p:txBody>
-          <a:bodyPr wrap="square">
-            <a:spAutoFit/>
-          </a:bodyPr>
-          <a:lstStyle/>
-          <a:p>
-            <a:pPr algn="l">
-              <a:defRPr sz="1800" b="0" i="0">
-                <a:solidFill>
-                  <a:srgbClr val="6B6B80"/>
-                </a:solidFill>
-                <a:latin typeface="Segoe UI"/>
-              </a:defRPr>
-            </a:pPr>
-            <a:r>
-              <a:t>Predictive maintenance and anomaly detection</a:t>
-            </a:r>
-          </a:p>
-        </p:txBody>
-      </p:sp>
-      <p:sp>
-        <p:nvSpPr>
-          <p:cNvPr id="21" name="TextBox 20"/>
-          <p:cNvSpPr txBox="1"/>
-          <p:nvPr/>
-        </p:nvSpPr>
-        <p:spPr>
-          <a:xfrm>
-            <a:off x="914400" y="5760720"/>
-            <a:ext cx="2286000" cy="320040"/>
-          </a:xfrm>
-          <a:prstGeom prst="rect">
-            <a:avLst/>
-          </a:prstGeom>
-          <a:noFill/>
-        </p:spPr>
-        <p:txBody>
-          <a:bodyPr wrap="square">
-            <a:spAutoFit/>
-          </a:bodyPr>
-          <a:lstStyle/>
-          <a:p>
-            <a:pPr algn="l">
-              <a:defRPr sz="1800" b="1" i="0">
-                <a:solidFill>
-                  <a:srgbClr val="FFFFFF"/>
-                </a:solidFill>
-                <a:latin typeface="Segoe UI"/>
-              </a:defRPr>
-            </a:pPr>
-            <a:r>
-              <a:t>→ Mobile App:</a:t>
-            </a:r>
-          </a:p>
-        </p:txBody>
-      </p:sp>
-      <p:sp>
-        <p:nvSpPr>
-          <p:cNvPr id="22" name="TextBox 21"/>
-          <p:cNvSpPr txBox="1"/>
-          <p:nvPr/>
-        </p:nvSpPr>
-        <p:spPr>
-          <a:xfrm>
-            <a:off x="3200400" y="5760720"/>
-            <a:ext cx="7315200" cy="320040"/>
-          </a:xfrm>
-          <a:prstGeom prst="rect">
-            <a:avLst/>
-          </a:prstGeom>
-          <a:noFill/>
-        </p:spPr>
-        <p:txBody>
-          <a:bodyPr wrap="square">
-            <a:spAutoFit/>
-          </a:bodyPr>
-          <a:lstStyle/>
-          <a:p>
-            <a:pPr algn="l">
-              <a:defRPr sz="1800" b="0" i="0">
-                <a:solidFill>
-                  <a:srgbClr val="6B6B80"/>
-                </a:solidFill>
-                <a:latin typeface="Segoe UI"/>
-              </a:defRPr>
-            </a:pPr>
-            <a:r>
-              <a:t>Remote monitoring and push notifications</a:t>
-            </a:r>
-          </a:p>
-        </p:txBody>
-      </p:sp>
-      <p:sp>
-        <p:nvSpPr>
-          <p:cNvPr id="23" name="TextBox 22"/>
-          <p:cNvSpPr txBox="1"/>
-          <p:nvPr/>
-        </p:nvSpPr>
-        <p:spPr>
-          <a:xfrm>
-            <a:off x="914400" y="6126480"/>
-            <a:ext cx="2286000" cy="320040"/>
-          </a:xfrm>
-          <a:prstGeom prst="rect">
-            <a:avLst/>
-          </a:prstGeom>
-          <a:noFill/>
-        </p:spPr>
-        <p:txBody>
-          <a:bodyPr wrap="square">
-            <a:spAutoFit/>
-          </a:bodyPr>
-          <a:lstStyle/>
-          <a:p>
-            <a:pPr algn="l">
-              <a:defRPr sz="1800" b="1" i="0">
-                <a:solidFill>
-                  <a:srgbClr val="FFFFFF"/>
-                </a:solidFill>
-                <a:latin typeface="Segoe UI"/>
-              </a:defRPr>
-            </a:pPr>
-            <a:r>
-              <a:t>→ Advanced Alerting:</a:t>
-            </a:r>
-          </a:p>
-        </p:txBody>
-      </p:sp>
-      <p:sp>
-        <p:nvSpPr>
-          <p:cNvPr id="24" name="TextBox 23"/>
-          <p:cNvSpPr txBox="1"/>
-          <p:nvPr/>
-        </p:nvSpPr>
-        <p:spPr>
-          <a:xfrm>
-            <a:off x="3200400" y="6126480"/>
-            <a:ext cx="7315200" cy="320040"/>
-          </a:xfrm>
-          <a:prstGeom prst="rect">
-            <a:avLst/>
-          </a:prstGeom>
-          <a:noFill/>
-        </p:spPr>
-        <p:txBody>
-          <a:bodyPr wrap="square">
-            <a:spAutoFit/>
-          </a:bodyPr>
-          <a:lstStyle/>
-          <a:p>
-            <a:pPr algn="l">
-              <a:defRPr sz="1800" b="0" i="0">
-                <a:solidFill>
-                  <a:srgbClr val="6B6B80"/>
-                </a:solidFill>
-                <a:latin typeface="Segoe UI"/>
-              </a:defRPr>
-            </a:pPr>
-            <a:r>
-              <a:t>Email/SMS notifications for critical events</a:t>
-            </a:r>
-          </a:p>
-        </p:txBody>
-      </p:sp>
-      <p:sp>
-        <p:nvSpPr>
-          <p:cNvPr id="25" name="TextBox 24"/>
-          <p:cNvSpPr txBox="1"/>
-          <p:nvPr/>
-        </p:nvSpPr>
-        <p:spPr>
-          <a:xfrm>
-            <a:off x="11155680" y="6309360"/>
-            <a:ext cx="731520" cy="274320"/>
-          </a:xfrm>
-          <a:prstGeom prst="rect">
-            <a:avLst/>
-          </a:prstGeom>
-          <a:noFill/>
-        </p:spPr>
-        <p:txBody>
-          <a:bodyPr wrap="square">
-            <a:spAutoFit/>
-          </a:bodyPr>
-          <a:lstStyle/>
-          <a:p>
-            <a:pPr algn="r">
-              <a:defRPr sz="1400" b="0" i="0">
-                <a:solidFill>
-                  <a:srgbClr val="6B6B80"/>
-                </a:solidFill>
-                <a:latin typeface="Segoe UI"/>
-              </a:defRPr>
-            </a:pPr>
-            <a:r>
-              <a:t>21/22</a:t>
-            </a:r>
+            <a:endParaRPr/>
           </a:p>
         </p:txBody>
       </p:sp>
@@ -12807,7 +13103,7 @@
 </file>
 
 <file path=ppt/slides/slide22.xml><?xml version="1.0" encoding="utf-8"?>
-<p:sld xmlns:a="http://schemas.openxmlformats.org/drawingml/2006/main" xmlns:p="http://schemas.openxmlformats.org/presentationml/2006/main" xmlns:r="http://schemas.openxmlformats.org/officeDocument/2006/relationships">
+<p:sld xmlns:a="http://schemas.openxmlformats.org/drawingml/2006/main" xmlns:r="http://schemas.openxmlformats.org/officeDocument/2006/relationships" xmlns:p="http://schemas.openxmlformats.org/presentationml/2006/main">
   <p:cSld>
     <p:spTree>
       <p:nvGrpSpPr>
@@ -12815,7 +13111,14 @@
         <p:cNvGrpSpPr/>
         <p:nvPr/>
       </p:nvGrpSpPr>
-      <p:grpSpPr/>
+      <p:grpSpPr>
+        <a:xfrm>
+          <a:off x="0" y="0"/>
+          <a:ext cx="0" cy="0"/>
+          <a:chOff x="0" y="0"/>
+          <a:chExt cx="0" cy="0"/>
+        </a:xfrm>
+      </p:grpSpPr>
       <p:sp>
         <p:nvSpPr>
           <p:cNvPr id="2" name="Rectangle 1"/>
@@ -12856,6 +13159,7 @@
           <a:lstStyle/>
           <a:p>
             <a:pPr algn="ctr"/>
+            <a:endParaRPr/>
           </a:p>
         </p:txBody>
       </p:sp>
@@ -12899,6 +13203,7 @@
           <a:lstStyle/>
           <a:p>
             <a:pPr algn="ctr"/>
+            <a:endParaRPr/>
           </a:p>
         </p:txBody>
       </p:sp>
@@ -12934,42 +13239,6 @@
             </a:pPr>
             <a:r>
               <a:t>Thank You</a:t>
-            </a:r>
-          </a:p>
-        </p:txBody>
-      </p:sp>
-      <p:sp>
-        <p:nvSpPr>
-          <p:cNvPr id="5" name="TextBox 4"/>
-          <p:cNvSpPr txBox="1"/>
-          <p:nvPr/>
-        </p:nvSpPr>
-        <p:spPr>
-          <a:xfrm>
-            <a:off x="731520" y="3474720"/>
-            <a:ext cx="10698480" cy="548640"/>
-          </a:xfrm>
-          <a:prstGeom prst="rect">
-            <a:avLst/>
-          </a:prstGeom>
-          <a:noFill/>
-        </p:spPr>
-        <p:txBody>
-          <a:bodyPr wrap="square">
-            <a:spAutoFit/>
-          </a:bodyPr>
-          <a:lstStyle/>
-          <a:p>
-            <a:pPr algn="ctr">
-              <a:defRPr sz="3200" b="0" i="0">
-                <a:solidFill>
-                  <a:srgbClr val="00D4FF"/>
-                </a:solidFill>
-                <a:latin typeface="Segoe UI"/>
-              </a:defRPr>
-            </a:pPr>
-            <a:r>
-              <a:t>Questions?</a:t>
             </a:r>
           </a:p>
         </p:txBody>
@@ -13014,6 +13283,7 @@
           <a:lstStyle/>
           <a:p>
             <a:pPr algn="ctr"/>
+            <a:endParaRPr/>
           </a:p>
         </p:txBody>
       </p:sp>
@@ -13062,7 +13332,7 @@
         <p:spPr>
           <a:xfrm>
             <a:off x="731520" y="5760720"/>
-            <a:ext cx="10698480" cy="365760"/>
+            <a:ext cx="10698480" cy="338554"/>
           </a:xfrm>
           <a:prstGeom prst="rect">
             <a:avLst/>
@@ -13084,8 +13354,22 @@
               </a:defRPr>
             </a:pPr>
             <a:r>
-              <a:t>Laboratory of Advanced Programming – Hackathon Exam 2024/2025</a:t>
-            </a:r>
+              <a:rPr dirty="0"/>
+              <a:t>Laboratory of Advanced Programming – Hackathon Exam 202</a:t>
+            </a:r>
+            <a:r>
+              <a:rPr lang="it-IT" dirty="0"/>
+              <a:t>5</a:t>
+            </a:r>
+            <a:r>
+              <a:rPr dirty="0"/>
+              <a:t>/202</a:t>
+            </a:r>
+            <a:r>
+              <a:rPr lang="it-IT" dirty="0"/>
+              <a:t>6</a:t>
+            </a:r>
+            <a:endParaRPr dirty="0"/>
           </a:p>
         </p:txBody>
       </p:sp>
@@ -13134,7 +13418,7 @@
 </file>
 
 <file path=ppt/slides/slide3.xml><?xml version="1.0" encoding="utf-8"?>
-<p:sld xmlns:a="http://schemas.openxmlformats.org/drawingml/2006/main" xmlns:p="http://schemas.openxmlformats.org/presentationml/2006/main" xmlns:r="http://schemas.openxmlformats.org/officeDocument/2006/relationships">
+<p:sld xmlns:a="http://schemas.openxmlformats.org/drawingml/2006/main" xmlns:r="http://schemas.openxmlformats.org/officeDocument/2006/relationships" xmlns:p="http://schemas.openxmlformats.org/presentationml/2006/main">
   <p:cSld>
     <p:spTree>
       <p:nvGrpSpPr>
@@ -13142,7 +13426,14 @@
         <p:cNvGrpSpPr/>
         <p:nvPr/>
       </p:nvGrpSpPr>
-      <p:grpSpPr/>
+      <p:grpSpPr>
+        <a:xfrm>
+          <a:off x="0" y="0"/>
+          <a:ext cx="0" cy="0"/>
+          <a:chOff x="0" y="0"/>
+          <a:chExt cx="0" cy="0"/>
+        </a:xfrm>
+      </p:grpSpPr>
       <p:sp>
         <p:nvSpPr>
           <p:cNvPr id="2" name="Rectangle 1"/>
@@ -13183,6 +13474,7 @@
           <a:lstStyle/>
           <a:p>
             <a:pPr algn="ctr"/>
+            <a:endParaRPr/>
           </a:p>
         </p:txBody>
       </p:sp>
@@ -13230,7 +13522,7 @@
         </p:nvSpPr>
         <p:spPr>
           <a:xfrm>
-            <a:off x="731520" y="1234440"/>
+            <a:off x="621792" y="594360"/>
             <a:ext cx="109728" cy="640080"/>
           </a:xfrm>
           <a:prstGeom prst="rect">
@@ -13262,6 +13554,7 @@
           <a:lstStyle/>
           <a:p>
             <a:pPr algn="ctr"/>
+            <a:endParaRPr/>
           </a:p>
         </p:txBody>
       </p:sp>
@@ -13273,7 +13566,7 @@
         </p:nvSpPr>
         <p:spPr>
           <a:xfrm>
-            <a:off x="731520" y="1737360"/>
+            <a:off x="731520" y="1645920"/>
             <a:ext cx="10698480" cy="914400"/>
           </a:xfrm>
           <a:prstGeom prst="rect">
@@ -13296,6 +13589,7 @@
               </a:defRPr>
             </a:pPr>
             <a:r>
+              <a:rPr dirty="0"/>
               <a:t>A Mars habitat's automation stack has partially failed, leaving devices operating with incompatible protocols.</a:t>
             </a:r>
           </a:p>
@@ -13343,6 +13637,7 @@
           <a:lstStyle/>
           <a:p>
             <a:pPr algn="ctr"/>
+            <a:endParaRPr/>
           </a:p>
         </p:txBody>
       </p:sp>
@@ -13386,6 +13681,7 @@
           <a:lstStyle/>
           <a:p>
             <a:pPr algn="ctr"/>
+            <a:endParaRPr/>
           </a:p>
         </p:txBody>
       </p:sp>
@@ -13503,6 +13799,7 @@
           <a:lstStyle/>
           <a:p>
             <a:pPr algn="ctr"/>
+            <a:endParaRPr/>
           </a:p>
         </p:txBody>
       </p:sp>
@@ -13546,6 +13843,7 @@
           <a:lstStyle/>
           <a:p>
             <a:pPr algn="ctr"/>
+            <a:endParaRPr/>
           </a:p>
         </p:txBody>
       </p:sp>
@@ -13663,6 +13961,7 @@
           <a:lstStyle/>
           <a:p>
             <a:pPr algn="ctr"/>
+            <a:endParaRPr/>
           </a:p>
         </p:txBody>
       </p:sp>
@@ -13706,6 +14005,7 @@
           <a:lstStyle/>
           <a:p>
             <a:pPr algn="ctr"/>
+            <a:endParaRPr/>
           </a:p>
         </p:txBody>
       </p:sp>
@@ -13823,6 +14123,7 @@
           <a:lstStyle/>
           <a:p>
             <a:pPr algn="ctr"/>
+            <a:endParaRPr/>
           </a:p>
         </p:txBody>
       </p:sp>
@@ -13866,6 +14167,7 @@
           <a:lstStyle/>
           <a:p>
             <a:pPr algn="ctr"/>
+            <a:endParaRPr/>
           </a:p>
         </p:txBody>
       </p:sp>
@@ -13986,7 +14288,7 @@
 </file>
 
 <file path=ppt/slides/slide4.xml><?xml version="1.0" encoding="utf-8"?>
-<p:sld xmlns:a="http://schemas.openxmlformats.org/drawingml/2006/main" xmlns:p="http://schemas.openxmlformats.org/presentationml/2006/main" xmlns:r="http://schemas.openxmlformats.org/officeDocument/2006/relationships">
+<p:sld xmlns:a="http://schemas.openxmlformats.org/drawingml/2006/main" xmlns:r="http://schemas.openxmlformats.org/officeDocument/2006/relationships" xmlns:p="http://schemas.openxmlformats.org/presentationml/2006/main">
   <p:cSld>
     <p:spTree>
       <p:nvGrpSpPr>
@@ -13994,7 +14296,14 @@
         <p:cNvGrpSpPr/>
         <p:nvPr/>
       </p:nvGrpSpPr>
-      <p:grpSpPr/>
+      <p:grpSpPr>
+        <a:xfrm>
+          <a:off x="0" y="0"/>
+          <a:ext cx="0" cy="0"/>
+          <a:chOff x="0" y="0"/>
+          <a:chExt cx="0" cy="0"/>
+        </a:xfrm>
+      </p:grpSpPr>
       <p:sp>
         <p:nvSpPr>
           <p:cNvPr id="2" name="Rectangle 1"/>
@@ -14035,6 +14344,7 @@
           <a:lstStyle/>
           <a:p>
             <a:pPr algn="ctr"/>
+            <a:endParaRPr/>
           </a:p>
         </p:txBody>
       </p:sp>
@@ -14069,6 +14379,7 @@
               </a:defRPr>
             </a:pPr>
             <a:r>
+              <a:rPr dirty="0"/>
               <a:t>Our Solution</a:t>
             </a:r>
           </a:p>
@@ -14082,7 +14393,7 @@
         </p:nvSpPr>
         <p:spPr>
           <a:xfrm>
-            <a:off x="731520" y="1234440"/>
+            <a:off x="621792" y="594360"/>
             <a:ext cx="109728" cy="640080"/>
           </a:xfrm>
           <a:prstGeom prst="rect">
@@ -14114,6 +14425,7 @@
           <a:lstStyle/>
           <a:p>
             <a:pPr algn="ctr"/>
+            <a:endParaRPr/>
           </a:p>
         </p:txBody>
       </p:sp>
@@ -14193,6 +14505,7 @@
           <a:lstStyle/>
           <a:p>
             <a:pPr algn="ctr"/>
+            <a:endParaRPr/>
           </a:p>
         </p:txBody>
       </p:sp>
@@ -14308,6 +14621,7 @@
           <a:lstStyle/>
           <a:p>
             <a:pPr algn="ctr"/>
+            <a:endParaRPr/>
           </a:p>
         </p:txBody>
       </p:sp>
@@ -14423,6 +14737,7 @@
           <a:lstStyle/>
           <a:p>
             <a:pPr algn="ctr"/>
+            <a:endParaRPr/>
           </a:p>
         </p:txBody>
       </p:sp>
@@ -14538,6 +14853,7 @@
           <a:lstStyle/>
           <a:p>
             <a:pPr algn="ctr"/>
+            <a:endParaRPr/>
           </a:p>
         </p:txBody>
       </p:sp>
@@ -14658,7 +14974,7 @@
 </file>
 
 <file path=ppt/slides/slide5.xml><?xml version="1.0" encoding="utf-8"?>
-<p:sld xmlns:a="http://schemas.openxmlformats.org/drawingml/2006/main" xmlns:p="http://schemas.openxmlformats.org/presentationml/2006/main" xmlns:r="http://schemas.openxmlformats.org/officeDocument/2006/relationships">
+<p:sld xmlns:a="http://schemas.openxmlformats.org/drawingml/2006/main" xmlns:r="http://schemas.openxmlformats.org/officeDocument/2006/relationships" xmlns:p="http://schemas.openxmlformats.org/presentationml/2006/main">
   <p:cSld>
     <p:spTree>
       <p:nvGrpSpPr>
@@ -14666,7 +14982,14 @@
         <p:cNvGrpSpPr/>
         <p:nvPr/>
       </p:nvGrpSpPr>
-      <p:grpSpPr/>
+      <p:grpSpPr>
+        <a:xfrm>
+          <a:off x="0" y="0"/>
+          <a:ext cx="0" cy="0"/>
+          <a:chOff x="0" y="0"/>
+          <a:chExt cx="0" cy="0"/>
+        </a:xfrm>
+      </p:grpSpPr>
       <p:sp>
         <p:nvSpPr>
           <p:cNvPr id="2" name="Rectangle 1"/>
@@ -14707,6 +15030,7 @@
           <a:lstStyle/>
           <a:p>
             <a:pPr algn="ctr"/>
+            <a:endParaRPr/>
           </a:p>
         </p:txBody>
       </p:sp>
@@ -14718,7 +15042,7 @@
         </p:nvSpPr>
         <p:spPr>
           <a:xfrm>
-            <a:off x="731520" y="365760"/>
+            <a:off x="731520" y="259367"/>
             <a:ext cx="10698480" cy="640080"/>
           </a:xfrm>
           <a:prstGeom prst="rect">
@@ -14741,6 +15065,7 @@
               </a:defRPr>
             </a:pPr>
             <a:r>
+              <a:rPr dirty="0"/>
               <a:t>System Architecture</a:t>
             </a:r>
           </a:p>
@@ -14754,8 +15079,8 @@
         </p:nvSpPr>
         <p:spPr>
           <a:xfrm>
-            <a:off x="731520" y="960120"/>
-            <a:ext cx="109728" cy="457200"/>
+            <a:off x="652272" y="421543"/>
+            <a:ext cx="109728" cy="640080"/>
           </a:xfrm>
           <a:prstGeom prst="rect">
             <a:avLst/>
@@ -14786,6 +15111,7 @@
           <a:lstStyle/>
           <a:p>
             <a:pPr algn="ctr"/>
+            <a:endParaRPr/>
           </a:p>
         </p:txBody>
       </p:sp>
@@ -14799,18 +15125,25 @@
         </p:nvPicPr>
         <p:blipFill>
           <a:blip r:embed="rId2"/>
+          <a:srcRect l="7144" t="5452" r="5402" b="4789"/>
           <a:stretch>
             <a:fillRect/>
           </a:stretch>
         </p:blipFill>
         <p:spPr>
           <a:xfrm>
-            <a:off x="457200" y="1371600"/>
-            <a:ext cx="11247120" cy="14575500"/>
-          </a:xfrm>
-          <a:prstGeom prst="rect">
-            <a:avLst/>
-          </a:prstGeom>
+            <a:off x="3692106" y="1185844"/>
+            <a:ext cx="4129177" cy="5492151"/>
+          </a:xfrm>
+          <a:prstGeom prst="rect">
+            <a:avLst/>
+          </a:prstGeom>
+          <a:ln>
+            <a:noFill/>
+          </a:ln>
+          <a:effectLst>
+            <a:softEdge rad="112500"/>
+          </a:effectLst>
         </p:spPr>
       </p:pic>
       <p:sp>
@@ -14858,7 +15191,7 @@
 </file>
 
 <file path=ppt/slides/slide6.xml><?xml version="1.0" encoding="utf-8"?>
-<p:sld xmlns:a="http://schemas.openxmlformats.org/drawingml/2006/main" xmlns:p="http://schemas.openxmlformats.org/presentationml/2006/main" xmlns:r="http://schemas.openxmlformats.org/officeDocument/2006/relationships">
+<p:sld xmlns:a="http://schemas.openxmlformats.org/drawingml/2006/main" xmlns:r="http://schemas.openxmlformats.org/officeDocument/2006/relationships" xmlns:p="http://schemas.openxmlformats.org/presentationml/2006/main">
   <p:cSld>
     <p:spTree>
       <p:nvGrpSpPr>
@@ -14866,7 +15199,14 @@
         <p:cNvGrpSpPr/>
         <p:nvPr/>
       </p:nvGrpSpPr>
-      <p:grpSpPr/>
+      <p:grpSpPr>
+        <a:xfrm>
+          <a:off x="0" y="0"/>
+          <a:ext cx="0" cy="0"/>
+          <a:chOff x="0" y="0"/>
+          <a:chExt cx="0" cy="0"/>
+        </a:xfrm>
+      </p:grpSpPr>
       <p:sp>
         <p:nvSpPr>
           <p:cNvPr id="2" name="Rectangle 1"/>
@@ -14907,6 +15247,7 @@
           <a:lstStyle/>
           <a:p>
             <a:pPr algn="ctr"/>
+            <a:endParaRPr/>
           </a:p>
         </p:txBody>
       </p:sp>
@@ -14943,49 +15284,6 @@
             <a:r>
               <a:t>Microservices Architecture</a:t>
             </a:r>
-          </a:p>
-        </p:txBody>
-      </p:sp>
-      <p:sp>
-        <p:nvSpPr>
-          <p:cNvPr id="4" name="Rectangle 3"/>
-          <p:cNvSpPr/>
-          <p:nvPr/>
-        </p:nvSpPr>
-        <p:spPr>
-          <a:xfrm>
-            <a:off x="731520" y="960120"/>
-            <a:ext cx="109728" cy="457200"/>
-          </a:xfrm>
-          <a:prstGeom prst="rect">
-            <a:avLst/>
-          </a:prstGeom>
-          <a:solidFill>
-            <a:srgbClr val="00D4FF"/>
-          </a:solidFill>
-          <a:ln>
-            <a:noFill/>
-          </a:ln>
-        </p:spPr>
-        <p:style>
-          <a:lnRef idx="1">
-            <a:schemeClr val="accent1"/>
-          </a:lnRef>
-          <a:fillRef idx="3">
-            <a:schemeClr val="accent1"/>
-          </a:fillRef>
-          <a:effectRef idx="2">
-            <a:schemeClr val="accent1"/>
-          </a:effectRef>
-          <a:fontRef idx="minor">
-            <a:schemeClr val="lt1"/>
-          </a:fontRef>
-        </p:style>
-        <p:txBody>
-          <a:bodyPr rtlCol="0" anchor="ctr"/>
-          <a:lstStyle/>
-          <a:p>
-            <a:pPr algn="ctr"/>
           </a:p>
         </p:txBody>
       </p:sp>
@@ -15031,6 +15329,7 @@
           <a:lstStyle/>
           <a:p>
             <a:pPr algn="ctr"/>
+            <a:endParaRPr/>
           </a:p>
         </p:txBody>
       </p:sp>
@@ -15074,6 +15373,7 @@
           <a:lstStyle/>
           <a:p>
             <a:pPr algn="ctr"/>
+            <a:endParaRPr/>
           </a:p>
         </p:txBody>
       </p:sp>
@@ -15231,6 +15531,7 @@
           <a:lstStyle/>
           <a:p>
             <a:pPr algn="ctr"/>
+            <a:endParaRPr/>
           </a:p>
         </p:txBody>
       </p:sp>
@@ -15274,6 +15575,7 @@
           <a:lstStyle/>
           <a:p>
             <a:pPr algn="ctr"/>
+            <a:endParaRPr/>
           </a:p>
         </p:txBody>
       </p:sp>
@@ -15431,6 +15733,7 @@
           <a:lstStyle/>
           <a:p>
             <a:pPr algn="ctr"/>
+            <a:endParaRPr/>
           </a:p>
         </p:txBody>
       </p:sp>
@@ -15474,6 +15777,7 @@
           <a:lstStyle/>
           <a:p>
             <a:pPr algn="ctr"/>
+            <a:endParaRPr/>
           </a:p>
         </p:txBody>
       </p:sp>
@@ -15631,6 +15935,7 @@
           <a:lstStyle/>
           <a:p>
             <a:pPr algn="ctr"/>
+            <a:endParaRPr/>
           </a:p>
         </p:txBody>
       </p:sp>
@@ -15674,6 +15979,7 @@
           <a:lstStyle/>
           <a:p>
             <a:pPr algn="ctr"/>
+            <a:endParaRPr/>
           </a:p>
         </p:txBody>
       </p:sp>
@@ -15831,6 +16137,7 @@
           <a:lstStyle/>
           <a:p>
             <a:pPr algn="ctr"/>
+            <a:endParaRPr/>
           </a:p>
         </p:txBody>
       </p:sp>
@@ -15874,6 +16181,7 @@
           <a:lstStyle/>
           <a:p>
             <a:pPr algn="ctr"/>
+            <a:endParaRPr/>
           </a:p>
         </p:txBody>
       </p:sp>
@@ -16031,6 +16339,7 @@
           <a:lstStyle/>
           <a:p>
             <a:pPr algn="ctr"/>
+            <a:endParaRPr/>
           </a:p>
         </p:txBody>
       </p:sp>
@@ -16074,6 +16383,7 @@
           <a:lstStyle/>
           <a:p>
             <a:pPr algn="ctr"/>
+            <a:endParaRPr/>
           </a:p>
         </p:txBody>
       </p:sp>
@@ -16222,6 +16532,56 @@
             <a:r>
               <a:t>6/22</a:t>
             </a:r>
+          </a:p>
+        </p:txBody>
+      </p:sp>
+      <p:sp>
+        <p:nvSpPr>
+          <p:cNvPr id="36" name="Rectangle 35">
+            <a:extLst>
+              <a:ext uri="{FF2B5EF4-FFF2-40B4-BE49-F238E27FC236}">
+                <a16:creationId xmlns:a16="http://schemas.microsoft.com/office/drawing/2014/main" id="{0FBDABBD-6981-32E1-150A-E160302EF1E4}"/>
+              </a:ext>
+            </a:extLst>
+          </p:cNvPr>
+          <p:cNvSpPr/>
+          <p:nvPr/>
+        </p:nvSpPr>
+        <p:spPr>
+          <a:xfrm>
+            <a:off x="652272" y="548640"/>
+            <a:ext cx="109728" cy="640080"/>
+          </a:xfrm>
+          <a:prstGeom prst="rect">
+            <a:avLst/>
+          </a:prstGeom>
+          <a:solidFill>
+            <a:srgbClr val="00D4FF"/>
+          </a:solidFill>
+          <a:ln>
+            <a:noFill/>
+          </a:ln>
+        </p:spPr>
+        <p:style>
+          <a:lnRef idx="1">
+            <a:schemeClr val="accent1"/>
+          </a:lnRef>
+          <a:fillRef idx="3">
+            <a:schemeClr val="accent1"/>
+          </a:fillRef>
+          <a:effectRef idx="2">
+            <a:schemeClr val="accent1"/>
+          </a:effectRef>
+          <a:fontRef idx="minor">
+            <a:schemeClr val="lt1"/>
+          </a:fontRef>
+        </p:style>
+        <p:txBody>
+          <a:bodyPr rtlCol="0" anchor="ctr"/>
+          <a:lstStyle/>
+          <a:p>
+            <a:pPr algn="ctr"/>
+            <a:endParaRPr/>
           </a:p>
         </p:txBody>
       </p:sp>
@@ -16234,7 +16594,7 @@
 </file>
 
 <file path=ppt/slides/slide7.xml><?xml version="1.0" encoding="utf-8"?>
-<p:sld xmlns:a="http://schemas.openxmlformats.org/drawingml/2006/main" xmlns:p="http://schemas.openxmlformats.org/presentationml/2006/main" xmlns:r="http://schemas.openxmlformats.org/officeDocument/2006/relationships">
+<p:sld xmlns:a="http://schemas.openxmlformats.org/drawingml/2006/main" xmlns:r="http://schemas.openxmlformats.org/officeDocument/2006/relationships" xmlns:p="http://schemas.openxmlformats.org/presentationml/2006/main">
   <p:cSld>
     <p:spTree>
       <p:nvGrpSpPr>
@@ -16242,7 +16602,14 @@
         <p:cNvGrpSpPr/>
         <p:nvPr/>
       </p:nvGrpSpPr>
-      <p:grpSpPr/>
+      <p:grpSpPr>
+        <a:xfrm>
+          <a:off x="0" y="0"/>
+          <a:ext cx="0" cy="0"/>
+          <a:chOff x="0" y="0"/>
+          <a:chExt cx="0" cy="0"/>
+        </a:xfrm>
+      </p:grpSpPr>
       <p:sp>
         <p:nvSpPr>
           <p:cNvPr id="2" name="Rectangle 1"/>
@@ -16283,6 +16650,7 @@
           <a:lstStyle/>
           <a:p>
             <a:pPr algn="ctr"/>
+            <a:endParaRPr/>
           </a:p>
         </p:txBody>
       </p:sp>
@@ -16324,56 +16692,13 @@
       </p:sp>
       <p:sp>
         <p:nvSpPr>
-          <p:cNvPr id="4" name="Rectangle 3"/>
-          <p:cNvSpPr/>
-          <p:nvPr/>
-        </p:nvSpPr>
-        <p:spPr>
-          <a:xfrm>
-            <a:off x="731520" y="960120"/>
-            <a:ext cx="109728" cy="457200"/>
-          </a:xfrm>
-          <a:prstGeom prst="rect">
-            <a:avLst/>
-          </a:prstGeom>
-          <a:solidFill>
-            <a:srgbClr val="00D4FF"/>
-          </a:solidFill>
-          <a:ln>
-            <a:noFill/>
-          </a:ln>
-        </p:spPr>
-        <p:style>
-          <a:lnRef idx="1">
-            <a:schemeClr val="accent1"/>
-          </a:lnRef>
-          <a:fillRef idx="3">
-            <a:schemeClr val="accent1"/>
-          </a:fillRef>
-          <a:effectRef idx="2">
-            <a:schemeClr val="accent1"/>
-          </a:effectRef>
-          <a:fontRef idx="minor">
-            <a:schemeClr val="lt1"/>
-          </a:fontRef>
-        </p:style>
-        <p:txBody>
-          <a:bodyPr rtlCol="0" anchor="ctr"/>
-          <a:lstStyle/>
-          <a:p>
-            <a:pPr algn="ctr"/>
-          </a:p>
-        </p:txBody>
-      </p:sp>
-      <p:sp>
-        <p:nvSpPr>
           <p:cNvPr id="5" name="Rounded Rectangle 4"/>
           <p:cNvSpPr/>
           <p:nvPr/>
         </p:nvSpPr>
         <p:spPr>
           <a:xfrm>
-            <a:off x="731520" y="1371600"/>
+            <a:off x="731520" y="1463039"/>
             <a:ext cx="5029200" cy="2103120"/>
           </a:xfrm>
           <a:prstGeom prst="roundRect">
@@ -16407,6 +16732,7 @@
           <a:lstStyle/>
           <a:p>
             <a:pPr algn="ctr"/>
+            <a:endParaRPr/>
           </a:p>
         </p:txBody>
       </p:sp>
@@ -16441,6 +16767,7 @@
               </a:defRPr>
             </a:pPr>
             <a:r>
+              <a:rPr sz="2400" dirty="0"/>
               <a:t>RabbitMQ Message Broker</a:t>
             </a:r>
           </a:p>
@@ -16454,7 +16781,7 @@
         </p:nvSpPr>
         <p:spPr>
           <a:xfrm>
-            <a:off x="914400" y="2103120"/>
+            <a:off x="914400" y="1920239"/>
             <a:ext cx="4663440" cy="1188720"/>
           </a:xfrm>
           <a:prstGeom prst="rect">
@@ -16506,7 +16833,7 @@
         </p:nvSpPr>
         <p:spPr>
           <a:xfrm>
-            <a:off x="6400800" y="1371600"/>
+            <a:off x="6431282" y="1463039"/>
             <a:ext cx="5029200" cy="2103120"/>
           </a:xfrm>
           <a:prstGeom prst="roundRect">
@@ -16540,6 +16867,7 @@
           <a:lstStyle/>
           <a:p>
             <a:pPr algn="ctr"/>
+            <a:endParaRPr/>
           </a:p>
         </p:txBody>
       </p:sp>
@@ -16574,6 +16902,7 @@
               </a:defRPr>
             </a:pPr>
             <a:r>
+              <a:rPr sz="2400" dirty="0"/>
               <a:t>PostgreSQL Database</a:t>
             </a:r>
           </a:p>
@@ -16587,7 +16916,7 @@
         </p:nvSpPr>
         <p:spPr>
           <a:xfrm>
-            <a:off x="6583680" y="2103120"/>
+            <a:off x="6583680" y="1920239"/>
             <a:ext cx="4663440" cy="1188720"/>
           </a:xfrm>
           <a:prstGeom prst="rect">
@@ -16610,22 +16939,59 @@
               </a:defRPr>
             </a:pPr>
             <a:r>
+              <a:rPr dirty="0"/>
               <a:t>• PostgreSQL 16 (port 5433)</a:t>
             </a:r>
-            <a:br/>
-            <a:r>
-              <a:t>• automation_rules table</a:t>
-            </a:r>
-            <a:br/>
-            <a:r>
-              <a:t>• sensor_readings history</a:t>
-            </a:r>
-            <a:br/>
-            <a:r>
-              <a:t>• actuator_commands audit</a:t>
-            </a:r>
-            <a:br/>
-            <a:r>
+            <a:br>
+              <a:rPr dirty="0"/>
+            </a:br>
+            <a:r>
+              <a:rPr dirty="0"/>
+              <a:t>• </a:t>
+            </a:r>
+            <a:r>
+              <a:rPr dirty="0" err="1"/>
+              <a:t>automation_rules</a:t>
+            </a:r>
+            <a:r>
+              <a:rPr dirty="0"/>
+              <a:t> table</a:t>
+            </a:r>
+            <a:br>
+              <a:rPr dirty="0"/>
+            </a:br>
+            <a:r>
+              <a:rPr dirty="0"/>
+              <a:t>• </a:t>
+            </a:r>
+            <a:r>
+              <a:rPr dirty="0" err="1"/>
+              <a:t>sensor_readings</a:t>
+            </a:r>
+            <a:r>
+              <a:rPr dirty="0"/>
+              <a:t> history</a:t>
+            </a:r>
+            <a:br>
+              <a:rPr dirty="0"/>
+            </a:br>
+            <a:r>
+              <a:rPr dirty="0"/>
+              <a:t>• </a:t>
+            </a:r>
+            <a:r>
+              <a:rPr dirty="0" err="1"/>
+              <a:t>actuator_commands</a:t>
+            </a:r>
+            <a:r>
+              <a:rPr dirty="0"/>
+              <a:t> audit</a:t>
+            </a:r>
+            <a:br>
+              <a:rPr dirty="0"/>
+            </a:br>
+            <a:r>
+              <a:rPr dirty="0"/>
               <a:t>• Persistent volume storage</a:t>
             </a:r>
           </a:p>
@@ -16639,8 +17005,8 @@
         </p:nvSpPr>
         <p:spPr>
           <a:xfrm>
-            <a:off x="731520" y="3749039"/>
-            <a:ext cx="10698480" cy="2286000"/>
+            <a:off x="731520" y="4023359"/>
+            <a:ext cx="10698480" cy="2011680"/>
           </a:xfrm>
           <a:prstGeom prst="roundRect">
             <a:avLst/>
@@ -16673,6 +17039,7 @@
           <a:lstStyle/>
           <a:p>
             <a:pPr algn="ctr"/>
+            <a:endParaRPr/>
           </a:p>
         </p:txBody>
       </p:sp>
@@ -16684,7 +17051,7 @@
         </p:nvSpPr>
         <p:spPr>
           <a:xfrm>
-            <a:off x="914400" y="3931920"/>
+            <a:off x="914400" y="4218891"/>
             <a:ext cx="10332720" cy="457200"/>
           </a:xfrm>
           <a:prstGeom prst="rect">
@@ -16707,6 +17074,7 @@
               </a:defRPr>
             </a:pPr>
             <a:r>
+              <a:rPr dirty="0"/>
               <a:t>Unified Event Schema</a:t>
             </a:r>
           </a:p>
@@ -16720,7 +17088,7 @@
         </p:nvSpPr>
         <p:spPr>
           <a:xfrm>
-            <a:off x="914400" y="4434840"/>
+            <a:off x="944880" y="4754879"/>
             <a:ext cx="10332720" cy="548640"/>
           </a:xfrm>
           <a:prstGeom prst="rect">
@@ -16743,7 +17111,32 @@
               </a:defRPr>
             </a:pPr>
             <a:r>
-              <a:t>{ event_id, sensor_id, timestamp, metric, value, unit, source, status, raw_schema }</a:t>
+              <a:rPr dirty="0"/>
+              <a:t>{ </a:t>
+            </a:r>
+            <a:r>
+              <a:rPr dirty="0" err="1"/>
+              <a:t>event_id</a:t>
+            </a:r>
+            <a:r>
+              <a:rPr dirty="0"/>
+              <a:t>, </a:t>
+            </a:r>
+            <a:r>
+              <a:rPr dirty="0" err="1"/>
+              <a:t>sensor_id</a:t>
+            </a:r>
+            <a:r>
+              <a:rPr dirty="0"/>
+              <a:t>, timestamp, metric, value, unit, source, status, </a:t>
+            </a:r>
+            <a:r>
+              <a:rPr dirty="0" err="1"/>
+              <a:t>raw_schema</a:t>
+            </a:r>
+            <a:r>
+              <a:rPr dirty="0"/>
+              <a:t> }</a:t>
             </a:r>
           </a:p>
         </p:txBody>
@@ -16756,7 +17149,7 @@
         </p:nvSpPr>
         <p:spPr>
           <a:xfrm>
-            <a:off x="914400" y="5074920"/>
+            <a:off x="914400" y="5303519"/>
             <a:ext cx="10332720" cy="731520"/>
           </a:xfrm>
           <a:prstGeom prst="rect">
@@ -16779,6 +17172,7 @@
               </a:defRPr>
             </a:pPr>
             <a:r>
+              <a:rPr dirty="0"/>
               <a:t>All sensor data normalized to a single format • REST polls + SSE streams → unified events</a:t>
             </a:r>
           </a:p>
@@ -16817,6 +17211,56 @@
             <a:r>
               <a:t>7/22</a:t>
             </a:r>
+          </a:p>
+        </p:txBody>
+      </p:sp>
+      <p:sp>
+        <p:nvSpPr>
+          <p:cNvPr id="16" name="Rectangle 15">
+            <a:extLst>
+              <a:ext uri="{FF2B5EF4-FFF2-40B4-BE49-F238E27FC236}">
+                <a16:creationId xmlns:a16="http://schemas.microsoft.com/office/drawing/2014/main" id="{D05E48C4-FB15-3214-3D88-1376312EB933}"/>
+              </a:ext>
+            </a:extLst>
+          </p:cNvPr>
+          <p:cNvSpPr/>
+          <p:nvPr/>
+        </p:nvSpPr>
+        <p:spPr>
+          <a:xfrm>
+            <a:off x="652272" y="502920"/>
+            <a:ext cx="109728" cy="640080"/>
+          </a:xfrm>
+          <a:prstGeom prst="rect">
+            <a:avLst/>
+          </a:prstGeom>
+          <a:solidFill>
+            <a:srgbClr val="00D4FF"/>
+          </a:solidFill>
+          <a:ln>
+            <a:noFill/>
+          </a:ln>
+        </p:spPr>
+        <p:style>
+          <a:lnRef idx="1">
+            <a:schemeClr val="accent1"/>
+          </a:lnRef>
+          <a:fillRef idx="3">
+            <a:schemeClr val="accent1"/>
+          </a:fillRef>
+          <a:effectRef idx="2">
+            <a:schemeClr val="accent1"/>
+          </a:effectRef>
+          <a:fontRef idx="minor">
+            <a:schemeClr val="lt1"/>
+          </a:fontRef>
+        </p:style>
+        <p:txBody>
+          <a:bodyPr rtlCol="0" anchor="ctr"/>
+          <a:lstStyle/>
+          <a:p>
+            <a:pPr algn="ctr"/>
+            <a:endParaRPr/>
           </a:p>
         </p:txBody>
       </p:sp>
@@ -16829,7 +17273,7 @@
 </file>
 
 <file path=ppt/slides/slide8.xml><?xml version="1.0" encoding="utf-8"?>
-<p:sld xmlns:a="http://schemas.openxmlformats.org/drawingml/2006/main" xmlns:p="http://schemas.openxmlformats.org/presentationml/2006/main" xmlns:r="http://schemas.openxmlformats.org/officeDocument/2006/relationships">
+<p:sld xmlns:a="http://schemas.openxmlformats.org/drawingml/2006/main" xmlns:r="http://schemas.openxmlformats.org/officeDocument/2006/relationships" xmlns:p="http://schemas.openxmlformats.org/presentationml/2006/main">
   <p:cSld>
     <p:spTree>
       <p:nvGrpSpPr>
@@ -16837,7 +17281,14 @@
         <p:cNvGrpSpPr/>
         <p:nvPr/>
       </p:nvGrpSpPr>
-      <p:grpSpPr/>
+      <p:grpSpPr>
+        <a:xfrm>
+          <a:off x="0" y="0"/>
+          <a:ext cx="0" cy="0"/>
+          <a:chOff x="0" y="0"/>
+          <a:chExt cx="0" cy="0"/>
+        </a:xfrm>
+      </p:grpSpPr>
       <p:sp>
         <p:nvSpPr>
           <p:cNvPr id="2" name="Rectangle 1"/>
@@ -16878,6 +17329,7 @@
           <a:lstStyle/>
           <a:p>
             <a:pPr algn="ctr"/>
+            <a:endParaRPr/>
           </a:p>
         </p:txBody>
       </p:sp>
@@ -16919,49 +17371,6 @@
       </p:sp>
       <p:sp>
         <p:nvSpPr>
-          <p:cNvPr id="4" name="Rectangle 3"/>
-          <p:cNvSpPr/>
-          <p:nvPr/>
-        </p:nvSpPr>
-        <p:spPr>
-          <a:xfrm>
-            <a:off x="731520" y="960120"/>
-            <a:ext cx="109728" cy="457200"/>
-          </a:xfrm>
-          <a:prstGeom prst="rect">
-            <a:avLst/>
-          </a:prstGeom>
-          <a:solidFill>
-            <a:srgbClr val="00D4FF"/>
-          </a:solidFill>
-          <a:ln>
-            <a:noFill/>
-          </a:ln>
-        </p:spPr>
-        <p:style>
-          <a:lnRef idx="1">
-            <a:schemeClr val="accent1"/>
-          </a:lnRef>
-          <a:fillRef idx="3">
-            <a:schemeClr val="accent1"/>
-          </a:fillRef>
-          <a:effectRef idx="2">
-            <a:schemeClr val="accent1"/>
-          </a:effectRef>
-          <a:fontRef idx="minor">
-            <a:schemeClr val="lt1"/>
-          </a:fontRef>
-        </p:style>
-        <p:txBody>
-          <a:bodyPr rtlCol="0" anchor="ctr"/>
-          <a:lstStyle/>
-          <a:p>
-            <a:pPr algn="ctr"/>
-          </a:p>
-        </p:txBody>
-      </p:sp>
-      <p:sp>
-        <p:nvSpPr>
           <p:cNvPr id="5" name="TextBox 4"/>
           <p:cNvSpPr txBox="1"/>
           <p:nvPr/>
@@ -16991,6 +17400,7 @@
               </a:defRPr>
             </a:pPr>
             <a:r>
+              <a:rPr dirty="0"/>
               <a:t>REST Sensors (Polling)</a:t>
             </a:r>
           </a:p>
@@ -17614,6 +18024,7 @@
           <a:lstStyle/>
           <a:p>
             <a:pPr algn="ctr"/>
+            <a:endParaRPr/>
           </a:p>
         </p:txBody>
       </p:sp>
@@ -17726,6 +18137,56 @@
             <a:r>
               <a:t>8/22</a:t>
             </a:r>
+          </a:p>
+        </p:txBody>
+      </p:sp>
+      <p:sp>
+        <p:nvSpPr>
+          <p:cNvPr id="26" name="Rectangle 25">
+            <a:extLst>
+              <a:ext uri="{FF2B5EF4-FFF2-40B4-BE49-F238E27FC236}">
+                <a16:creationId xmlns:a16="http://schemas.microsoft.com/office/drawing/2014/main" id="{3CD4780E-EC49-5945-D7AD-6E460B29B796}"/>
+              </a:ext>
+            </a:extLst>
+          </p:cNvPr>
+          <p:cNvSpPr/>
+          <p:nvPr/>
+        </p:nvSpPr>
+        <p:spPr>
+          <a:xfrm>
+            <a:off x="652272" y="489204"/>
+            <a:ext cx="109728" cy="640080"/>
+          </a:xfrm>
+          <a:prstGeom prst="rect">
+            <a:avLst/>
+          </a:prstGeom>
+          <a:solidFill>
+            <a:srgbClr val="00D4FF"/>
+          </a:solidFill>
+          <a:ln>
+            <a:noFill/>
+          </a:ln>
+        </p:spPr>
+        <p:style>
+          <a:lnRef idx="1">
+            <a:schemeClr val="accent1"/>
+          </a:lnRef>
+          <a:fillRef idx="3">
+            <a:schemeClr val="accent1"/>
+          </a:fillRef>
+          <a:effectRef idx="2">
+            <a:schemeClr val="accent1"/>
+          </a:effectRef>
+          <a:fontRef idx="minor">
+            <a:schemeClr val="lt1"/>
+          </a:fontRef>
+        </p:style>
+        <p:txBody>
+          <a:bodyPr rtlCol="0" anchor="ctr"/>
+          <a:lstStyle/>
+          <a:p>
+            <a:pPr algn="ctr"/>
+            <a:endParaRPr/>
           </a:p>
         </p:txBody>
       </p:sp>
@@ -17738,7 +18199,7 @@
 </file>
 
 <file path=ppt/slides/slide9.xml><?xml version="1.0" encoding="utf-8"?>
-<p:sld xmlns:a="http://schemas.openxmlformats.org/drawingml/2006/main" xmlns:p="http://schemas.openxmlformats.org/presentationml/2006/main" xmlns:r="http://schemas.openxmlformats.org/officeDocument/2006/relationships">
+<p:sld xmlns:a="http://schemas.openxmlformats.org/drawingml/2006/main" xmlns:r="http://schemas.openxmlformats.org/officeDocument/2006/relationships" xmlns:p="http://schemas.openxmlformats.org/presentationml/2006/main">
   <p:cSld>
     <p:spTree>
       <p:nvGrpSpPr>
@@ -17746,7 +18207,14 @@
         <p:cNvGrpSpPr/>
         <p:nvPr/>
       </p:nvGrpSpPr>
-      <p:grpSpPr/>
+      <p:grpSpPr>
+        <a:xfrm>
+          <a:off x="0" y="0"/>
+          <a:ext cx="0" cy="0"/>
+          <a:chOff x="0" y="0"/>
+          <a:chExt cx="0" cy="0"/>
+        </a:xfrm>
+      </p:grpSpPr>
       <p:sp>
         <p:nvSpPr>
           <p:cNvPr id="2" name="Rectangle 1"/>
@@ -17787,6 +18255,7 @@
           <a:lstStyle/>
           <a:p>
             <a:pPr algn="ctr"/>
+            <a:endParaRPr/>
           </a:p>
         </p:txBody>
       </p:sp>
@@ -17828,16 +18297,52 @@
       </p:sp>
       <p:sp>
         <p:nvSpPr>
-          <p:cNvPr id="4" name="Rectangle 3"/>
+          <p:cNvPr id="5" name="TextBox 4"/>
+          <p:cNvSpPr txBox="1"/>
+          <p:nvPr/>
+        </p:nvSpPr>
+        <p:spPr>
+          <a:xfrm>
+            <a:off x="731520" y="1280160"/>
+            <a:ext cx="10698480" cy="457200"/>
+          </a:xfrm>
+          <a:prstGeom prst="rect">
+            <a:avLst/>
+          </a:prstGeom>
+          <a:noFill/>
+        </p:spPr>
+        <p:txBody>
+          <a:bodyPr wrap="square">
+            <a:spAutoFit/>
+          </a:bodyPr>
+          <a:lstStyle/>
+          <a:p>
+            <a:pPr algn="l">
+              <a:defRPr sz="2600" b="1" i="0">
+                <a:solidFill>
+                  <a:srgbClr val="00D4FF"/>
+                </a:solidFill>
+                <a:latin typeface="Segoe UI"/>
+              </a:defRPr>
+            </a:pPr>
+            <a:r>
+              <a:t>Event-Driven Rule Processing</a:t>
+            </a:r>
+          </a:p>
+        </p:txBody>
+      </p:sp>
+      <p:sp>
+        <p:nvSpPr>
+          <p:cNvPr id="6" name="Oval 5"/>
           <p:cNvSpPr/>
           <p:nvPr/>
         </p:nvSpPr>
         <p:spPr>
           <a:xfrm>
-            <a:off x="731520" y="960120"/>
-            <a:ext cx="109728" cy="457200"/>
-          </a:xfrm>
-          <a:prstGeom prst="rect">
+            <a:off x="1051560" y="1920240"/>
+            <a:ext cx="548640" cy="548640"/>
+          </a:xfrm>
+          <a:prstGeom prst="ellipse">
             <a:avLst/>
           </a:prstGeom>
           <a:solidFill>
@@ -17866,54 +18371,175 @@
           <a:lstStyle/>
           <a:p>
             <a:pPr algn="ctr"/>
-          </a:p>
-        </p:txBody>
-      </p:sp>
-      <p:sp>
-        <p:nvSpPr>
-          <p:cNvPr id="5" name="TextBox 4"/>
-          <p:cNvSpPr txBox="1"/>
-          <p:nvPr/>
-        </p:nvSpPr>
-        <p:spPr>
-          <a:xfrm>
-            <a:off x="731520" y="1280160"/>
-            <a:ext cx="10698480" cy="457200"/>
-          </a:xfrm>
-          <a:prstGeom prst="rect">
-            <a:avLst/>
-          </a:prstGeom>
-          <a:noFill/>
-        </p:spPr>
-        <p:txBody>
-          <a:bodyPr wrap="square">
-            <a:spAutoFit/>
-          </a:bodyPr>
-          <a:lstStyle/>
-          <a:p>
-            <a:pPr algn="l">
-              <a:defRPr sz="2600" b="1" i="0">
-                <a:solidFill>
-                  <a:srgbClr val="00D4FF"/>
-                </a:solidFill>
-                <a:latin typeface="Segoe UI"/>
-              </a:defRPr>
-            </a:pPr>
-            <a:r>
-              <a:t>Event-Driven Rule Processing</a:t>
-            </a:r>
-          </a:p>
-        </p:txBody>
-      </p:sp>
-      <p:sp>
-        <p:nvSpPr>
-          <p:cNvPr id="6" name="Oval 5"/>
+            <a:endParaRPr/>
+          </a:p>
+        </p:txBody>
+      </p:sp>
+      <p:sp>
+        <p:nvSpPr>
+          <p:cNvPr id="7" name="TextBox 6"/>
+          <p:cNvSpPr txBox="1"/>
+          <p:nvPr/>
+        </p:nvSpPr>
+        <p:spPr>
+          <a:xfrm>
+            <a:off x="1051560" y="1965960"/>
+            <a:ext cx="548640" cy="457200"/>
+          </a:xfrm>
+          <a:prstGeom prst="rect">
+            <a:avLst/>
+          </a:prstGeom>
+          <a:noFill/>
+        </p:spPr>
+        <p:txBody>
+          <a:bodyPr wrap="square">
+            <a:spAutoFit/>
+          </a:bodyPr>
+          <a:lstStyle/>
+          <a:p>
+            <a:pPr algn="ctr">
+              <a:defRPr sz="2200" b="1" i="0">
+                <a:solidFill>
+                  <a:srgbClr val="0A0A0A"/>
+                </a:solidFill>
+                <a:latin typeface="Segoe UI"/>
+              </a:defRPr>
+            </a:pPr>
+            <a:r>
+              <a:t>1</a:t>
+            </a:r>
+          </a:p>
+        </p:txBody>
+      </p:sp>
+      <p:sp>
+        <p:nvSpPr>
+          <p:cNvPr id="8" name="TextBox 7"/>
+          <p:cNvSpPr txBox="1"/>
+          <p:nvPr/>
+        </p:nvSpPr>
+        <p:spPr>
+          <a:xfrm>
+            <a:off x="731520" y="2560320"/>
+            <a:ext cx="1645920" cy="365760"/>
+          </a:xfrm>
+          <a:prstGeom prst="rect">
+            <a:avLst/>
+          </a:prstGeom>
+          <a:noFill/>
+        </p:spPr>
+        <p:txBody>
+          <a:bodyPr wrap="square">
+            <a:spAutoFit/>
+          </a:bodyPr>
+          <a:lstStyle/>
+          <a:p>
+            <a:pPr algn="ctr">
+              <a:defRPr sz="1800" b="1" i="0">
+                <a:solidFill>
+                  <a:srgbClr val="FFFFFF"/>
+                </a:solidFill>
+                <a:latin typeface="Segoe UI"/>
+              </a:defRPr>
+            </a:pPr>
+            <a:r>
+              <a:t>Receive</a:t>
+            </a:r>
+          </a:p>
+        </p:txBody>
+      </p:sp>
+      <p:sp>
+        <p:nvSpPr>
+          <p:cNvPr id="9" name="TextBox 8"/>
+          <p:cNvSpPr txBox="1"/>
+          <p:nvPr/>
+        </p:nvSpPr>
+        <p:spPr>
+          <a:xfrm>
+            <a:off x="731520" y="2926080"/>
+            <a:ext cx="1645920" cy="640080"/>
+          </a:xfrm>
+          <a:prstGeom prst="rect">
+            <a:avLst/>
+          </a:prstGeom>
+          <a:noFill/>
+        </p:spPr>
+        <p:txBody>
+          <a:bodyPr wrap="square">
+            <a:spAutoFit/>
+          </a:bodyPr>
+          <a:lstStyle/>
+          <a:p>
+            <a:pPr algn="ctr">
+              <a:defRPr sz="1600" b="0" i="0">
+                <a:solidFill>
+                  <a:srgbClr val="6B6B80"/>
+                </a:solidFill>
+                <a:latin typeface="Segoe UI"/>
+              </a:defRPr>
+            </a:pPr>
+            <a:r>
+              <a:t>RabbitMQ</a:t>
+            </a:r>
+            <a:br/>
+            <a:r>
+              <a:t>event</a:t>
+            </a:r>
+          </a:p>
+        </p:txBody>
+      </p:sp>
+      <p:sp>
+        <p:nvSpPr>
+          <p:cNvPr id="10" name="Right Arrow 9"/>
           <p:cNvSpPr/>
           <p:nvPr/>
         </p:nvSpPr>
         <p:spPr>
           <a:xfrm>
-            <a:off x="1051560" y="1920240"/>
+            <a:off x="2423160" y="2103120"/>
+            <a:ext cx="365760" cy="228600"/>
+          </a:xfrm>
+          <a:prstGeom prst="rightArrow">
+            <a:avLst/>
+          </a:prstGeom>
+          <a:solidFill>
+            <a:srgbClr val="8B5CF6"/>
+          </a:solidFill>
+          <a:ln>
+            <a:noFill/>
+          </a:ln>
+        </p:spPr>
+        <p:style>
+          <a:lnRef idx="1">
+            <a:schemeClr val="accent1"/>
+          </a:lnRef>
+          <a:fillRef idx="3">
+            <a:schemeClr val="accent1"/>
+          </a:fillRef>
+          <a:effectRef idx="2">
+            <a:schemeClr val="accent1"/>
+          </a:effectRef>
+          <a:fontRef idx="minor">
+            <a:schemeClr val="lt1"/>
+          </a:fontRef>
+        </p:style>
+        <p:txBody>
+          <a:bodyPr rtlCol="0" anchor="ctr"/>
+          <a:lstStyle/>
+          <a:p>
+            <a:pPr algn="ctr"/>
+            <a:endParaRPr/>
+          </a:p>
+        </p:txBody>
+      </p:sp>
+      <p:sp>
+        <p:nvSpPr>
+          <p:cNvPr id="11" name="Oval 10"/>
+          <p:cNvSpPr/>
+          <p:nvPr/>
+        </p:nvSpPr>
+        <p:spPr>
+          <a:xfrm>
+            <a:off x="3337560" y="1920240"/>
             <a:ext cx="548640" cy="548640"/>
           </a:xfrm>
           <a:prstGeom prst="ellipse">
@@ -17945,18 +18571,19 @@
           <a:lstStyle/>
           <a:p>
             <a:pPr algn="ctr"/>
-          </a:p>
-        </p:txBody>
-      </p:sp>
-      <p:sp>
-        <p:nvSpPr>
-          <p:cNvPr id="7" name="TextBox 6"/>
-          <p:cNvSpPr txBox="1"/>
-          <p:nvPr/>
-        </p:nvSpPr>
-        <p:spPr>
-          <a:xfrm>
-            <a:off x="1051560" y="1965960"/>
+            <a:endParaRPr/>
+          </a:p>
+        </p:txBody>
+      </p:sp>
+      <p:sp>
+        <p:nvSpPr>
+          <p:cNvPr id="12" name="TextBox 11"/>
+          <p:cNvSpPr txBox="1"/>
+          <p:nvPr/>
+        </p:nvSpPr>
+        <p:spPr>
+          <a:xfrm>
+            <a:off x="3337560" y="1965960"/>
             <a:ext cx="548640" cy="457200"/>
           </a:xfrm>
           <a:prstGeom prst="rect">
@@ -17979,20 +18606,20 @@
               </a:defRPr>
             </a:pPr>
             <a:r>
-              <a:t>1</a:t>
-            </a:r>
-          </a:p>
-        </p:txBody>
-      </p:sp>
-      <p:sp>
-        <p:nvSpPr>
-          <p:cNvPr id="8" name="TextBox 7"/>
-          <p:cNvSpPr txBox="1"/>
-          <p:nvPr/>
-        </p:nvSpPr>
-        <p:spPr>
-          <a:xfrm>
-            <a:off x="731520" y="2560320"/>
+              <a:t>2</a:t>
+            </a:r>
+          </a:p>
+        </p:txBody>
+      </p:sp>
+      <p:sp>
+        <p:nvSpPr>
+          <p:cNvPr id="13" name="TextBox 12"/>
+          <p:cNvSpPr txBox="1"/>
+          <p:nvPr/>
+        </p:nvSpPr>
+        <p:spPr>
+          <a:xfrm>
+            <a:off x="3017520" y="2560320"/>
             <a:ext cx="1645920" cy="365760"/>
           </a:xfrm>
           <a:prstGeom prst="rect">
@@ -18015,20 +18642,20 @@
               </a:defRPr>
             </a:pPr>
             <a:r>
-              <a:t>Receive</a:t>
-            </a:r>
-          </a:p>
-        </p:txBody>
-      </p:sp>
-      <p:sp>
-        <p:nvSpPr>
-          <p:cNvPr id="9" name="TextBox 8"/>
-          <p:cNvSpPr txBox="1"/>
-          <p:nvPr/>
-        </p:nvSpPr>
-        <p:spPr>
-          <a:xfrm>
-            <a:off x="731520" y="2926080"/>
+              <a:t>Parse</a:t>
+            </a:r>
+          </a:p>
+        </p:txBody>
+      </p:sp>
+      <p:sp>
+        <p:nvSpPr>
+          <p:cNvPr id="14" name="TextBox 13"/>
+          <p:cNvSpPr txBox="1"/>
+          <p:nvPr/>
+        </p:nvSpPr>
+        <p:spPr>
+          <a:xfrm>
+            <a:off x="3017520" y="2926080"/>
             <a:ext cx="1645920" cy="640080"/>
           </a:xfrm>
           <a:prstGeom prst="rect">
@@ -18051,24 +18678,24 @@
               </a:defRPr>
             </a:pPr>
             <a:r>
-              <a:t>RabbitMQ</a:t>
+              <a:t>Extract</a:t>
             </a:r>
             <a:br/>
             <a:r>
-              <a:t>event</a:t>
-            </a:r>
-          </a:p>
-        </p:txBody>
-      </p:sp>
-      <p:sp>
-        <p:nvSpPr>
-          <p:cNvPr id="10" name="Right Arrow 9"/>
+              <a:t>sensor_id</a:t>
+            </a:r>
+          </a:p>
+        </p:txBody>
+      </p:sp>
+      <p:sp>
+        <p:nvSpPr>
+          <p:cNvPr id="15" name="Right Arrow 14"/>
           <p:cNvSpPr/>
           <p:nvPr/>
         </p:nvSpPr>
         <p:spPr>
           <a:xfrm>
-            <a:off x="2423160" y="2103120"/>
+            <a:off x="4709160" y="2103120"/>
             <a:ext cx="365760" cy="228600"/>
           </a:xfrm>
           <a:prstGeom prst="rightArrow">
@@ -18100,18 +18727,19 @@
           <a:lstStyle/>
           <a:p>
             <a:pPr algn="ctr"/>
-          </a:p>
-        </p:txBody>
-      </p:sp>
-      <p:sp>
-        <p:nvSpPr>
-          <p:cNvPr id="11" name="Oval 10"/>
+            <a:endParaRPr/>
+          </a:p>
+        </p:txBody>
+      </p:sp>
+      <p:sp>
+        <p:nvSpPr>
+          <p:cNvPr id="16" name="Oval 15"/>
           <p:cNvSpPr/>
           <p:nvPr/>
         </p:nvSpPr>
         <p:spPr>
           <a:xfrm>
-            <a:off x="3337560" y="1920240"/>
+            <a:off x="5623559" y="1920240"/>
             <a:ext cx="548640" cy="548640"/>
           </a:xfrm>
           <a:prstGeom prst="ellipse">
@@ -18143,18 +18771,19 @@
           <a:lstStyle/>
           <a:p>
             <a:pPr algn="ctr"/>
-          </a:p>
-        </p:txBody>
-      </p:sp>
-      <p:sp>
-        <p:nvSpPr>
-          <p:cNvPr id="12" name="TextBox 11"/>
-          <p:cNvSpPr txBox="1"/>
-          <p:nvPr/>
-        </p:nvSpPr>
-        <p:spPr>
-          <a:xfrm>
-            <a:off x="3337560" y="1965960"/>
+            <a:endParaRPr/>
+          </a:p>
+        </p:txBody>
+      </p:sp>
+      <p:sp>
+        <p:nvSpPr>
+          <p:cNvPr id="17" name="TextBox 16"/>
+          <p:cNvSpPr txBox="1"/>
+          <p:nvPr/>
+        </p:nvSpPr>
+        <p:spPr>
+          <a:xfrm>
+            <a:off x="5623559" y="1965960"/>
             <a:ext cx="548640" cy="457200"/>
           </a:xfrm>
           <a:prstGeom prst="rect">
@@ -18177,20 +18806,20 @@
               </a:defRPr>
             </a:pPr>
             <a:r>
-              <a:t>2</a:t>
-            </a:r>
-          </a:p>
-        </p:txBody>
-      </p:sp>
-      <p:sp>
-        <p:nvSpPr>
-          <p:cNvPr id="13" name="TextBox 12"/>
-          <p:cNvSpPr txBox="1"/>
-          <p:nvPr/>
-        </p:nvSpPr>
-        <p:spPr>
-          <a:xfrm>
-            <a:off x="3017520" y="2560320"/>
+              <a:t>3</a:t>
+            </a:r>
+          </a:p>
+        </p:txBody>
+      </p:sp>
+      <p:sp>
+        <p:nvSpPr>
+          <p:cNvPr id="18" name="TextBox 17"/>
+          <p:cNvSpPr txBox="1"/>
+          <p:nvPr/>
+        </p:nvSpPr>
+        <p:spPr>
+          <a:xfrm>
+            <a:off x="5303520" y="2560320"/>
             <a:ext cx="1645920" cy="365760"/>
           </a:xfrm>
           <a:prstGeom prst="rect">
@@ -18213,20 +18842,20 @@
               </a:defRPr>
             </a:pPr>
             <a:r>
-              <a:t>Parse</a:t>
-            </a:r>
-          </a:p>
-        </p:txBody>
-      </p:sp>
-      <p:sp>
-        <p:nvSpPr>
-          <p:cNvPr id="14" name="TextBox 13"/>
-          <p:cNvSpPr txBox="1"/>
-          <p:nvPr/>
-        </p:nvSpPr>
-        <p:spPr>
-          <a:xfrm>
-            <a:off x="3017520" y="2926080"/>
+              <a:t>Match</a:t>
+            </a:r>
+          </a:p>
+        </p:txBody>
+      </p:sp>
+      <p:sp>
+        <p:nvSpPr>
+          <p:cNvPr id="19" name="TextBox 18"/>
+          <p:cNvSpPr txBox="1"/>
+          <p:nvPr/>
+        </p:nvSpPr>
+        <p:spPr>
+          <a:xfrm>
+            <a:off x="5303520" y="2926080"/>
             <a:ext cx="1645920" cy="640080"/>
           </a:xfrm>
           <a:prstGeom prst="rect">
@@ -18249,24 +18878,20 @@
               </a:defRPr>
             </a:pPr>
             <a:r>
-              <a:t>Extract</a:t>
-            </a:r>
-            <a:br/>
-            <a:r>
-              <a:t>sensor_id</a:t>
-            </a:r>
-          </a:p>
-        </p:txBody>
-      </p:sp>
-      <p:sp>
-        <p:nvSpPr>
-          <p:cNvPr id="15" name="Right Arrow 14"/>
+              <a:t>Find rules</a:t>
+            </a:r>
+          </a:p>
+        </p:txBody>
+      </p:sp>
+      <p:sp>
+        <p:nvSpPr>
+          <p:cNvPr id="20" name="Right Arrow 19"/>
           <p:cNvSpPr/>
           <p:nvPr/>
         </p:nvSpPr>
         <p:spPr>
           <a:xfrm>
-            <a:off x="4709160" y="2103120"/>
+            <a:off x="6995160" y="2103120"/>
             <a:ext cx="365760" cy="228600"/>
           </a:xfrm>
           <a:prstGeom prst="rightArrow">
@@ -18298,18 +18923,19 @@
           <a:lstStyle/>
           <a:p>
             <a:pPr algn="ctr"/>
-          </a:p>
-        </p:txBody>
-      </p:sp>
-      <p:sp>
-        <p:nvSpPr>
-          <p:cNvPr id="16" name="Oval 15"/>
+            <a:endParaRPr/>
+          </a:p>
+        </p:txBody>
+      </p:sp>
+      <p:sp>
+        <p:nvSpPr>
+          <p:cNvPr id="21" name="Oval 20"/>
           <p:cNvSpPr/>
           <p:nvPr/>
         </p:nvSpPr>
         <p:spPr>
           <a:xfrm>
-            <a:off x="5623559" y="1920240"/>
+            <a:off x="7909560" y="1920240"/>
             <a:ext cx="548640" cy="548640"/>
           </a:xfrm>
           <a:prstGeom prst="ellipse">
@@ -18341,18 +18967,19 @@
           <a:lstStyle/>
           <a:p>
             <a:pPr algn="ctr"/>
-          </a:p>
-        </p:txBody>
-      </p:sp>
-      <p:sp>
-        <p:nvSpPr>
-          <p:cNvPr id="17" name="TextBox 16"/>
-          <p:cNvSpPr txBox="1"/>
-          <p:nvPr/>
-        </p:nvSpPr>
-        <p:spPr>
-          <a:xfrm>
-            <a:off x="5623559" y="1965960"/>
+            <a:endParaRPr/>
+          </a:p>
+        </p:txBody>
+      </p:sp>
+      <p:sp>
+        <p:nvSpPr>
+          <p:cNvPr id="22" name="TextBox 21"/>
+          <p:cNvSpPr txBox="1"/>
+          <p:nvPr/>
+        </p:nvSpPr>
+        <p:spPr>
+          <a:xfrm>
+            <a:off x="7909560" y="1965960"/>
             <a:ext cx="548640" cy="457200"/>
           </a:xfrm>
           <a:prstGeom prst="rect">
@@ -18375,20 +19002,20 @@
               </a:defRPr>
             </a:pPr>
             <a:r>
-              <a:t>3</a:t>
-            </a:r>
-          </a:p>
-        </p:txBody>
-      </p:sp>
-      <p:sp>
-        <p:nvSpPr>
-          <p:cNvPr id="18" name="TextBox 17"/>
-          <p:cNvSpPr txBox="1"/>
-          <p:nvPr/>
-        </p:nvSpPr>
-        <p:spPr>
-          <a:xfrm>
-            <a:off x="5303520" y="2560320"/>
+              <a:t>4</a:t>
+            </a:r>
+          </a:p>
+        </p:txBody>
+      </p:sp>
+      <p:sp>
+        <p:nvSpPr>
+          <p:cNvPr id="23" name="TextBox 22"/>
+          <p:cNvSpPr txBox="1"/>
+          <p:nvPr/>
+        </p:nvSpPr>
+        <p:spPr>
+          <a:xfrm>
+            <a:off x="7589520" y="2560320"/>
             <a:ext cx="1645920" cy="365760"/>
           </a:xfrm>
           <a:prstGeom prst="rect">
@@ -18411,20 +19038,20 @@
               </a:defRPr>
             </a:pPr>
             <a:r>
-              <a:t>Match</a:t>
-            </a:r>
-          </a:p>
-        </p:txBody>
-      </p:sp>
-      <p:sp>
-        <p:nvSpPr>
-          <p:cNvPr id="19" name="TextBox 18"/>
-          <p:cNvSpPr txBox="1"/>
-          <p:nvPr/>
-        </p:nvSpPr>
-        <p:spPr>
-          <a:xfrm>
-            <a:off x="5303520" y="2926080"/>
+              <a:t>Evaluate</a:t>
+            </a:r>
+          </a:p>
+        </p:txBody>
+      </p:sp>
+      <p:sp>
+        <p:nvSpPr>
+          <p:cNvPr id="24" name="TextBox 23"/>
+          <p:cNvSpPr txBox="1"/>
+          <p:nvPr/>
+        </p:nvSpPr>
+        <p:spPr>
+          <a:xfrm>
+            <a:off x="7589520" y="2926080"/>
             <a:ext cx="1645920" cy="640080"/>
           </a:xfrm>
           <a:prstGeom prst="rect">
@@ -18447,20 +19074,24 @@
               </a:defRPr>
             </a:pPr>
             <a:r>
-              <a:t>Find rules</a:t>
-            </a:r>
-          </a:p>
-        </p:txBody>
-      </p:sp>
-      <p:sp>
-        <p:nvSpPr>
-          <p:cNvPr id="20" name="Right Arrow 19"/>
+              <a:t>Check</a:t>
+            </a:r>
+            <a:br/>
+            <a:r>
+              <a:t>condition</a:t>
+            </a:r>
+          </a:p>
+        </p:txBody>
+      </p:sp>
+      <p:sp>
+        <p:nvSpPr>
+          <p:cNvPr id="25" name="Right Arrow 24"/>
           <p:cNvSpPr/>
           <p:nvPr/>
         </p:nvSpPr>
         <p:spPr>
           <a:xfrm>
-            <a:off x="6995160" y="2103120"/>
+            <a:off x="9281160" y="2103120"/>
             <a:ext cx="365760" cy="228600"/>
           </a:xfrm>
           <a:prstGeom prst="rightArrow">
@@ -18492,18 +19123,19 @@
           <a:lstStyle/>
           <a:p>
             <a:pPr algn="ctr"/>
-          </a:p>
-        </p:txBody>
-      </p:sp>
-      <p:sp>
-        <p:nvSpPr>
-          <p:cNvPr id="21" name="Oval 20"/>
+            <a:endParaRPr/>
+          </a:p>
+        </p:txBody>
+      </p:sp>
+      <p:sp>
+        <p:nvSpPr>
+          <p:cNvPr id="26" name="Oval 25"/>
           <p:cNvSpPr/>
           <p:nvPr/>
         </p:nvSpPr>
         <p:spPr>
           <a:xfrm>
-            <a:off x="7909560" y="1920240"/>
+            <a:off x="10195560" y="1920240"/>
             <a:ext cx="548640" cy="548640"/>
           </a:xfrm>
           <a:prstGeom prst="ellipse">
@@ -18535,204 +19167,7 @@
           <a:lstStyle/>
           <a:p>
             <a:pPr algn="ctr"/>
-          </a:p>
-        </p:txBody>
-      </p:sp>
-      <p:sp>
-        <p:nvSpPr>
-          <p:cNvPr id="22" name="TextBox 21"/>
-          <p:cNvSpPr txBox="1"/>
-          <p:nvPr/>
-        </p:nvSpPr>
-        <p:spPr>
-          <a:xfrm>
-            <a:off x="7909560" y="1965960"/>
-            <a:ext cx="548640" cy="457200"/>
-          </a:xfrm>
-          <a:prstGeom prst="rect">
-            <a:avLst/>
-          </a:prstGeom>
-          <a:noFill/>
-        </p:spPr>
-        <p:txBody>
-          <a:bodyPr wrap="square">
-            <a:spAutoFit/>
-          </a:bodyPr>
-          <a:lstStyle/>
-          <a:p>
-            <a:pPr algn="ctr">
-              <a:defRPr sz="2200" b="1" i="0">
-                <a:solidFill>
-                  <a:srgbClr val="0A0A0A"/>
-                </a:solidFill>
-                <a:latin typeface="Segoe UI"/>
-              </a:defRPr>
-            </a:pPr>
-            <a:r>
-              <a:t>4</a:t>
-            </a:r>
-          </a:p>
-        </p:txBody>
-      </p:sp>
-      <p:sp>
-        <p:nvSpPr>
-          <p:cNvPr id="23" name="TextBox 22"/>
-          <p:cNvSpPr txBox="1"/>
-          <p:nvPr/>
-        </p:nvSpPr>
-        <p:spPr>
-          <a:xfrm>
-            <a:off x="7589520" y="2560320"/>
-            <a:ext cx="1645920" cy="365760"/>
-          </a:xfrm>
-          <a:prstGeom prst="rect">
-            <a:avLst/>
-          </a:prstGeom>
-          <a:noFill/>
-        </p:spPr>
-        <p:txBody>
-          <a:bodyPr wrap="square">
-            <a:spAutoFit/>
-          </a:bodyPr>
-          <a:lstStyle/>
-          <a:p>
-            <a:pPr algn="ctr">
-              <a:defRPr sz="1800" b="1" i="0">
-                <a:solidFill>
-                  <a:srgbClr val="FFFFFF"/>
-                </a:solidFill>
-                <a:latin typeface="Segoe UI"/>
-              </a:defRPr>
-            </a:pPr>
-            <a:r>
-              <a:t>Evaluate</a:t>
-            </a:r>
-          </a:p>
-        </p:txBody>
-      </p:sp>
-      <p:sp>
-        <p:nvSpPr>
-          <p:cNvPr id="24" name="TextBox 23"/>
-          <p:cNvSpPr txBox="1"/>
-          <p:nvPr/>
-        </p:nvSpPr>
-        <p:spPr>
-          <a:xfrm>
-            <a:off x="7589520" y="2926080"/>
-            <a:ext cx="1645920" cy="640080"/>
-          </a:xfrm>
-          <a:prstGeom prst="rect">
-            <a:avLst/>
-          </a:prstGeom>
-          <a:noFill/>
-        </p:spPr>
-        <p:txBody>
-          <a:bodyPr wrap="square">
-            <a:spAutoFit/>
-          </a:bodyPr>
-          <a:lstStyle/>
-          <a:p>
-            <a:pPr algn="ctr">
-              <a:defRPr sz="1600" b="0" i="0">
-                <a:solidFill>
-                  <a:srgbClr val="6B6B80"/>
-                </a:solidFill>
-                <a:latin typeface="Segoe UI"/>
-              </a:defRPr>
-            </a:pPr>
-            <a:r>
-              <a:t>Check</a:t>
-            </a:r>
-            <a:br/>
-            <a:r>
-              <a:t>condition</a:t>
-            </a:r>
-          </a:p>
-        </p:txBody>
-      </p:sp>
-      <p:sp>
-        <p:nvSpPr>
-          <p:cNvPr id="25" name="Right Arrow 24"/>
-          <p:cNvSpPr/>
-          <p:nvPr/>
-        </p:nvSpPr>
-        <p:spPr>
-          <a:xfrm>
-            <a:off x="9281160" y="2103120"/>
-            <a:ext cx="365760" cy="228600"/>
-          </a:xfrm>
-          <a:prstGeom prst="rightArrow">
-            <a:avLst/>
-          </a:prstGeom>
-          <a:solidFill>
-            <a:srgbClr val="8B5CF6"/>
-          </a:solidFill>
-          <a:ln>
-            <a:noFill/>
-          </a:ln>
-        </p:spPr>
-        <p:style>
-          <a:lnRef idx="1">
-            <a:schemeClr val="accent1"/>
-          </a:lnRef>
-          <a:fillRef idx="3">
-            <a:schemeClr val="accent1"/>
-          </a:fillRef>
-          <a:effectRef idx="2">
-            <a:schemeClr val="accent1"/>
-          </a:effectRef>
-          <a:fontRef idx="minor">
-            <a:schemeClr val="lt1"/>
-          </a:fontRef>
-        </p:style>
-        <p:txBody>
-          <a:bodyPr rtlCol="0" anchor="ctr"/>
-          <a:lstStyle/>
-          <a:p>
-            <a:pPr algn="ctr"/>
-          </a:p>
-        </p:txBody>
-      </p:sp>
-      <p:sp>
-        <p:nvSpPr>
-          <p:cNvPr id="26" name="Oval 25"/>
-          <p:cNvSpPr/>
-          <p:nvPr/>
-        </p:nvSpPr>
-        <p:spPr>
-          <a:xfrm>
-            <a:off x="10195560" y="1920240"/>
-            <a:ext cx="548640" cy="548640"/>
-          </a:xfrm>
-          <a:prstGeom prst="ellipse">
-            <a:avLst/>
-          </a:prstGeom>
-          <a:solidFill>
-            <a:srgbClr val="00D4FF"/>
-          </a:solidFill>
-          <a:ln>
-            <a:noFill/>
-          </a:ln>
-        </p:spPr>
-        <p:style>
-          <a:lnRef idx="1">
-            <a:schemeClr val="accent1"/>
-          </a:lnRef>
-          <a:fillRef idx="3">
-            <a:schemeClr val="accent1"/>
-          </a:fillRef>
-          <a:effectRef idx="2">
-            <a:schemeClr val="accent1"/>
-          </a:effectRef>
-          <a:fontRef idx="minor">
-            <a:schemeClr val="lt1"/>
-          </a:fontRef>
-        </p:style>
-        <p:txBody>
-          <a:bodyPr rtlCol="0" anchor="ctr"/>
-          <a:lstStyle/>
-          <a:p>
-            <a:pPr algn="ctr"/>
+            <a:endParaRPr/>
           </a:p>
         </p:txBody>
       </p:sp>
@@ -18890,6 +19325,7 @@
           <a:lstStyle/>
           <a:p>
             <a:pPr algn="ctr"/>
+            <a:endParaRPr/>
           </a:p>
         </p:txBody>
       </p:sp>
@@ -19034,6 +19470,56 @@
             <a:r>
               <a:t>9/22</a:t>
             </a:r>
+          </a:p>
+        </p:txBody>
+      </p:sp>
+      <p:sp>
+        <p:nvSpPr>
+          <p:cNvPr id="35" name="Rectangle 34">
+            <a:extLst>
+              <a:ext uri="{FF2B5EF4-FFF2-40B4-BE49-F238E27FC236}">
+                <a16:creationId xmlns:a16="http://schemas.microsoft.com/office/drawing/2014/main" id="{135547D3-F1EC-3B70-BD37-6DE490F9F26D}"/>
+              </a:ext>
+            </a:extLst>
+          </p:cNvPr>
+          <p:cNvSpPr/>
+          <p:nvPr/>
+        </p:nvSpPr>
+        <p:spPr>
+          <a:xfrm>
+            <a:off x="621792" y="548640"/>
+            <a:ext cx="109728" cy="640080"/>
+          </a:xfrm>
+          <a:prstGeom prst="rect">
+            <a:avLst/>
+          </a:prstGeom>
+          <a:solidFill>
+            <a:srgbClr val="00D4FF"/>
+          </a:solidFill>
+          <a:ln>
+            <a:noFill/>
+          </a:ln>
+        </p:spPr>
+        <p:style>
+          <a:lnRef idx="1">
+            <a:schemeClr val="accent1"/>
+          </a:lnRef>
+          <a:fillRef idx="3">
+            <a:schemeClr val="accent1"/>
+          </a:fillRef>
+          <a:effectRef idx="2">
+            <a:schemeClr val="accent1"/>
+          </a:effectRef>
+          <a:fontRef idx="minor">
+            <a:schemeClr val="lt1"/>
+          </a:fontRef>
+        </p:style>
+        <p:txBody>
+          <a:bodyPr rtlCol="0" anchor="ctr"/>
+          <a:lstStyle/>
+          <a:p>
+            <a:pPr algn="ctr"/>
+            <a:endParaRPr/>
           </a:p>
         </p:txBody>
       </p:sp>

--- a/booklets/slides/Mars_Habitat_Presentation.pptx
+++ b/booklets/slides/Mars_Habitat_Presentation.pptx
@@ -3849,8 +3849,8 @@
         </p:nvSpPr>
         <p:spPr>
           <a:xfrm>
-            <a:off x="6492240" y="1737360"/>
-            <a:ext cx="4572000" cy="320040"/>
+            <a:off x="6492239" y="1737360"/>
+            <a:ext cx="5353125" cy="369332"/>
           </a:xfrm>
           <a:prstGeom prst="rect">
             <a:avLst/>
@@ -3872,6 +3872,7 @@
               </a:defRPr>
             </a:pPr>
             <a:r>
+              <a:rPr dirty="0"/>
               <a:t>REST sensors dashboard with real-time updates</a:t>
             </a:r>
           </a:p>
@@ -13729,7 +13730,7 @@
         </p:nvSpPr>
         <p:spPr>
           <a:xfrm>
-            <a:off x="1005840" y="3749040"/>
+            <a:off x="1005840" y="3676276"/>
             <a:ext cx="4663440" cy="640080"/>
           </a:xfrm>
           <a:prstGeom prst="rect">
@@ -13752,6 +13753,7 @@
               </a:defRPr>
             </a:pPr>
             <a:r>
+              <a:rPr dirty="0"/>
               <a:t>REST sensors, SSE streams, WebSocket telemetry</a:t>
             </a:r>
           </a:p>
@@ -13891,7 +13893,7 @@
         </p:nvSpPr>
         <p:spPr>
           <a:xfrm>
-            <a:off x="6492240" y="3749040"/>
+            <a:off x="6492240" y="3664324"/>
             <a:ext cx="4663440" cy="640080"/>
           </a:xfrm>
           <a:prstGeom prst="rect">
@@ -13914,6 +13916,7 @@
               </a:defRPr>
             </a:pPr>
             <a:r>
+              <a:rPr dirty="0"/>
               <a:t>Different payload schemas requiring normalization</a:t>
             </a:r>
           </a:p>
@@ -14053,7 +14056,7 @@
         </p:nvSpPr>
         <p:spPr>
           <a:xfrm>
-            <a:off x="1005840" y="5486400"/>
+            <a:off x="1005840" y="5396005"/>
             <a:ext cx="4663440" cy="640080"/>
           </a:xfrm>
           <a:prstGeom prst="rect">
@@ -14076,6 +14079,7 @@
               </a:defRPr>
             </a:pPr>
             <a:r>
+              <a:rPr dirty="0"/>
               <a:t>Immediate response to environmental changes</a:t>
             </a:r>
           </a:p>
@@ -14215,7 +14219,7 @@
         </p:nvSpPr>
         <p:spPr>
           <a:xfrm>
-            <a:off x="6492240" y="5486400"/>
+            <a:off x="6492240" y="5349240"/>
             <a:ext cx="4663440" cy="640080"/>
           </a:xfrm>
           <a:prstGeom prst="rect">
@@ -14238,6 +14242,7 @@
               </a:defRPr>
             </a:pPr>
             <a:r>
+              <a:rPr dirty="0"/>
               <a:t>Rules-based actuator control for habitat safety</a:t>
             </a:r>
           </a:p>
@@ -15624,7 +15629,7 @@
         <p:spPr>
           <a:xfrm>
             <a:off x="4389120" y="1554480"/>
-            <a:ext cx="2011680" cy="457200"/>
+            <a:ext cx="2011680" cy="769441"/>
           </a:xfrm>
           <a:prstGeom prst="rect">
             <a:avLst/>
@@ -15646,7 +15651,16 @@
               </a:defRPr>
             </a:pPr>
             <a:r>
-              <a:t>Automation Engine</a:t>
+              <a:rPr dirty="0" err="1"/>
+              <a:t>Automatio</a:t>
+            </a:r>
+            <a:r>
+              <a:rPr lang="it-IT" dirty="0"/>
+              <a:t>n </a:t>
+            </a:r>
+            <a:r>
+              <a:rPr dirty="0"/>
+              <a:t>Engine</a:t>
             </a:r>
           </a:p>
         </p:txBody>
@@ -15659,7 +15673,7 @@
         </p:nvSpPr>
         <p:spPr>
           <a:xfrm>
-            <a:off x="4389120" y="2103120"/>
+            <a:off x="4389120" y="2300344"/>
             <a:ext cx="2834640" cy="1371600"/>
           </a:xfrm>
           <a:prstGeom prst="rect">
@@ -15682,10 +15696,14 @@
               </a:defRPr>
             </a:pPr>
             <a:r>
+              <a:rPr dirty="0"/>
               <a:t>Rule evaluation</a:t>
             </a:r>
-            <a:br/>
-            <a:r>
+            <a:br>
+              <a:rPr dirty="0"/>
+            </a:br>
+            <a:r>
+              <a:rPr dirty="0"/>
               <a:t>Event-driven triggers</a:t>
             </a:r>
           </a:p>
@@ -15861,7 +15879,7 @@
         </p:nvSpPr>
         <p:spPr>
           <a:xfrm>
-            <a:off x="7863840" y="2103120"/>
+            <a:off x="7863840" y="2377440"/>
             <a:ext cx="2834640" cy="1371600"/>
           </a:xfrm>
           <a:prstGeom prst="rect">
@@ -15884,10 +15902,14 @@
               </a:defRPr>
             </a:pPr>
             <a:r>
+              <a:rPr dirty="0"/>
               <a:t>CRUD API for automation</a:t>
             </a:r>
-            <a:br/>
-            <a:r>
+            <a:br>
+              <a:rPr dirty="0"/>
+            </a:br>
+            <a:r>
+              <a:rPr dirty="0"/>
               <a:t>rules persistence</a:t>
             </a:r>
           </a:p>
@@ -16265,7 +16287,7 @@
         </p:nvSpPr>
         <p:spPr>
           <a:xfrm>
-            <a:off x="4389120" y="4572000"/>
+            <a:off x="4389120" y="4768596"/>
             <a:ext cx="2834640" cy="1371600"/>
           </a:xfrm>
           <a:prstGeom prst="rect">
@@ -16288,10 +16310,14 @@
               </a:defRPr>
             </a:pPr>
             <a:r>
+              <a:rPr dirty="0"/>
               <a:t>Device command execution</a:t>
             </a:r>
-            <a:br/>
-            <a:r>
+            <a:br>
+              <a:rPr dirty="0"/>
+            </a:br>
+            <a:r>
+              <a:rPr dirty="0"/>
               <a:t>Audit logging</a:t>
             </a:r>
           </a:p>

--- a/booklets/slides/Mars_Habitat_Presentation.pptx
+++ b/booklets/slides/Mars_Habitat_Presentation.pptx
@@ -5,32 +5,32 @@
     <p:sldMasterId id="2147483648" r:id="rId1"/>
   </p:sldMasterIdLst>
   <p:sldIdLst>
-    <p:sldId id="256" r:id="rId7"/>
-    <p:sldId id="257" r:id="rId8"/>
-    <p:sldId id="258" r:id="rId9"/>
-    <p:sldId id="259" r:id="rId10"/>
-    <p:sldId id="260" r:id="rId11"/>
-    <p:sldId id="261" r:id="rId12"/>
-    <p:sldId id="262" r:id="rId13"/>
-    <p:sldId id="263" r:id="rId14"/>
-    <p:sldId id="264" r:id="rId15"/>
-    <p:sldId id="265" r:id="rId16"/>
-    <p:sldId id="266" r:id="rId17"/>
-    <p:sldId id="267" r:id="rId18"/>
-    <p:sldId id="268" r:id="rId19"/>
-    <p:sldId id="269" r:id="rId20"/>
-    <p:sldId id="270" r:id="rId21"/>
-    <p:sldId id="271" r:id="rId22"/>
-    <p:sldId id="272" r:id="rId23"/>
-    <p:sldId id="273" r:id="rId24"/>
-    <p:sldId id="274" r:id="rId25"/>
-    <p:sldId id="275" r:id="rId26"/>
-    <p:sldId id="276" r:id="rId27"/>
-    <p:sldId id="277" r:id="rId28"/>
-    <p:sldId id="278" r:id="rId29"/>
-    <p:sldId id="279" r:id="rId30"/>
+    <p:sldId id="256" r:id="rId2"/>
+    <p:sldId id="257" r:id="rId3"/>
+    <p:sldId id="258" r:id="rId4"/>
+    <p:sldId id="259" r:id="rId5"/>
+    <p:sldId id="260" r:id="rId6"/>
+    <p:sldId id="261" r:id="rId7"/>
+    <p:sldId id="262" r:id="rId8"/>
+    <p:sldId id="263" r:id="rId9"/>
+    <p:sldId id="264" r:id="rId10"/>
+    <p:sldId id="265" r:id="rId11"/>
+    <p:sldId id="266" r:id="rId12"/>
+    <p:sldId id="267" r:id="rId13"/>
+    <p:sldId id="280" r:id="rId14"/>
+    <p:sldId id="281" r:id="rId15"/>
+    <p:sldId id="282" r:id="rId16"/>
+    <p:sldId id="283" r:id="rId17"/>
+    <p:sldId id="284" r:id="rId18"/>
+    <p:sldId id="285" r:id="rId19"/>
+    <p:sldId id="274" r:id="rId20"/>
+    <p:sldId id="275" r:id="rId21"/>
+    <p:sldId id="276" r:id="rId22"/>
+    <p:sldId id="277" r:id="rId23"/>
+    <p:sldId id="278" r:id="rId24"/>
+    <p:sldId id="279" r:id="rId25"/>
   </p:sldIdLst>
-  <p:sldSz cx="12191695" cy="6858000" type="screen4x3"/>
+  <p:sldSz cx="12192000" cy="6858000"/>
   <p:notesSz cx="6858000" cy="9144000"/>
   <p:defaultTextStyle>
     <a:defPPr>
@@ -127,6 +127,22 @@
       </a:defRPr>
     </a:lvl9pPr>
   </p:defaultTextStyle>
+  <p:extLst>
+    <p:ext uri="{EFAFB233-063F-42B5-8137-9DF3F51BA10A}">
+      <p15:sldGuideLst xmlns:p15="http://schemas.microsoft.com/office/powerpoint/2012/main">
+        <p15:guide id="1" orient="horz" pos="2160">
+          <p15:clr>
+            <a:srgbClr val="A4A3A4"/>
+          </p15:clr>
+        </p15:guide>
+        <p15:guide id="2" pos="2880">
+          <p15:clr>
+            <a:srgbClr val="A4A3A4"/>
+          </p15:clr>
+        </p15:guide>
+      </p15:sldGuideLst>
+    </p:ext>
+  </p:extLst>
 </p:presentation>
 </file>
 
@@ -168,10 +184,9 @@
           <a:lstStyle/>
           <a:p>
             <a:r>
-              <a:rPr lang="en-US" smtClean="0"/>
+              <a:rPr lang="en-US"/>
               <a:t>Click to edit Master title style</a:t>
             </a:r>
-            <a:endParaRPr lang="en-US"/>
           </a:p>
         </p:txBody>
       </p:sp>
@@ -287,10 +302,9 @@
           </a:lstStyle>
           <a:p>
             <a:r>
-              <a:rPr lang="en-US" smtClean="0"/>
+              <a:rPr lang="en-US"/>
               <a:t>Click to edit Master subtitle style</a:t>
             </a:r>
-            <a:endParaRPr lang="en-US"/>
           </a:p>
         </p:txBody>
       </p:sp>
@@ -311,7 +325,7 @@
           <a:p>
             <a:fld id="{5BCAD085-E8A6-8845-BD4E-CB4CCA059FC4}" type="datetimeFigureOut">
               <a:rPr lang="en-US" smtClean="0"/>
-              <a:t>1/27/13</a:t>
+              <a:t>3/10/2026</a:t>
             </a:fld>
             <a:endParaRPr lang="en-US"/>
           </a:p>
@@ -405,10 +419,9 @@
           <a:lstStyle/>
           <a:p>
             <a:r>
-              <a:rPr lang="en-US" smtClean="0"/>
+              <a:rPr lang="en-US"/>
               <a:t>Click to edit Master title style</a:t>
             </a:r>
-            <a:endParaRPr lang="en-US"/>
           </a:p>
         </p:txBody>
       </p:sp>
@@ -429,38 +442,37 @@
           <a:p>
             <a:pPr lvl="0"/>
             <a:r>
-              <a:rPr lang="en-US" smtClean="0"/>
+              <a:rPr lang="en-US"/>
               <a:t>Click to edit Master text styles</a:t>
             </a:r>
           </a:p>
           <a:p>
             <a:pPr lvl="1"/>
             <a:r>
-              <a:rPr lang="en-US" smtClean="0"/>
+              <a:rPr lang="en-US"/>
               <a:t>Second level</a:t>
             </a:r>
           </a:p>
           <a:p>
             <a:pPr lvl="2"/>
             <a:r>
-              <a:rPr lang="en-US" smtClean="0"/>
+              <a:rPr lang="en-US"/>
               <a:t>Third level</a:t>
             </a:r>
           </a:p>
           <a:p>
             <a:pPr lvl="3"/>
             <a:r>
-              <a:rPr lang="en-US" smtClean="0"/>
+              <a:rPr lang="en-US"/>
               <a:t>Fourth level</a:t>
             </a:r>
           </a:p>
           <a:p>
             <a:pPr lvl="4"/>
             <a:r>
-              <a:rPr lang="en-US" smtClean="0"/>
+              <a:rPr lang="en-US"/>
               <a:t>Fifth level</a:t>
             </a:r>
-            <a:endParaRPr lang="en-US"/>
           </a:p>
         </p:txBody>
       </p:sp>
@@ -481,7 +493,7 @@
           <a:p>
             <a:fld id="{5BCAD085-E8A6-8845-BD4E-CB4CCA059FC4}" type="datetimeFigureOut">
               <a:rPr lang="en-US" smtClean="0"/>
-              <a:t>1/27/13</a:t>
+              <a:t>3/10/2026</a:t>
             </a:fld>
             <a:endParaRPr lang="en-US"/>
           </a:p>
@@ -580,10 +592,9 @@
           <a:lstStyle/>
           <a:p>
             <a:r>
-              <a:rPr lang="en-US" smtClean="0"/>
+              <a:rPr lang="en-US"/>
               <a:t>Click to edit Master title style</a:t>
             </a:r>
-            <a:endParaRPr lang="en-US"/>
           </a:p>
         </p:txBody>
       </p:sp>
@@ -609,38 +620,37 @@
           <a:p>
             <a:pPr lvl="0"/>
             <a:r>
-              <a:rPr lang="en-US" smtClean="0"/>
+              <a:rPr lang="en-US"/>
               <a:t>Click to edit Master text styles</a:t>
             </a:r>
           </a:p>
           <a:p>
             <a:pPr lvl="1"/>
             <a:r>
-              <a:rPr lang="en-US" smtClean="0"/>
+              <a:rPr lang="en-US"/>
               <a:t>Second level</a:t>
             </a:r>
           </a:p>
           <a:p>
             <a:pPr lvl="2"/>
             <a:r>
-              <a:rPr lang="en-US" smtClean="0"/>
+              <a:rPr lang="en-US"/>
               <a:t>Third level</a:t>
             </a:r>
           </a:p>
           <a:p>
             <a:pPr lvl="3"/>
             <a:r>
-              <a:rPr lang="en-US" smtClean="0"/>
+              <a:rPr lang="en-US"/>
               <a:t>Fourth level</a:t>
             </a:r>
           </a:p>
           <a:p>
             <a:pPr lvl="4"/>
             <a:r>
-              <a:rPr lang="en-US" smtClean="0"/>
+              <a:rPr lang="en-US"/>
               <a:t>Fifth level</a:t>
             </a:r>
-            <a:endParaRPr lang="en-US"/>
           </a:p>
         </p:txBody>
       </p:sp>
@@ -661,7 +671,7 @@
           <a:p>
             <a:fld id="{5BCAD085-E8A6-8845-BD4E-CB4CCA059FC4}" type="datetimeFigureOut">
               <a:rPr lang="en-US" smtClean="0"/>
-              <a:t>1/27/13</a:t>
+              <a:t>3/10/2026</a:t>
             </a:fld>
             <a:endParaRPr lang="en-US"/>
           </a:p>
@@ -755,10 +765,9 @@
           <a:lstStyle/>
           <a:p>
             <a:r>
-              <a:rPr lang="en-US" smtClean="0"/>
+              <a:rPr lang="en-US"/>
               <a:t>Click to edit Master title style</a:t>
             </a:r>
-            <a:endParaRPr lang="en-US"/>
           </a:p>
         </p:txBody>
       </p:sp>
@@ -779,38 +788,37 @@
           <a:p>
             <a:pPr lvl="0"/>
             <a:r>
-              <a:rPr lang="en-US" smtClean="0"/>
+              <a:rPr lang="en-US"/>
               <a:t>Click to edit Master text styles</a:t>
             </a:r>
           </a:p>
           <a:p>
             <a:pPr lvl="1"/>
             <a:r>
-              <a:rPr lang="en-US" smtClean="0"/>
+              <a:rPr lang="en-US"/>
               <a:t>Second level</a:t>
             </a:r>
           </a:p>
           <a:p>
             <a:pPr lvl="2"/>
             <a:r>
-              <a:rPr lang="en-US" smtClean="0"/>
+              <a:rPr lang="en-US"/>
               <a:t>Third level</a:t>
             </a:r>
           </a:p>
           <a:p>
             <a:pPr lvl="3"/>
             <a:r>
-              <a:rPr lang="en-US" smtClean="0"/>
+              <a:rPr lang="en-US"/>
               <a:t>Fourth level</a:t>
             </a:r>
           </a:p>
           <a:p>
             <a:pPr lvl="4"/>
             <a:r>
-              <a:rPr lang="en-US" smtClean="0"/>
+              <a:rPr lang="en-US"/>
               <a:t>Fifth level</a:t>
             </a:r>
-            <a:endParaRPr lang="en-US"/>
           </a:p>
         </p:txBody>
       </p:sp>
@@ -831,7 +839,7 @@
           <a:p>
             <a:fld id="{5BCAD085-E8A6-8845-BD4E-CB4CCA059FC4}" type="datetimeFigureOut">
               <a:rPr lang="en-US" smtClean="0"/>
-              <a:t>1/27/13</a:t>
+              <a:t>3/10/2026</a:t>
             </a:fld>
             <a:endParaRPr lang="en-US"/>
           </a:p>
@@ -934,10 +942,9 @@
           </a:lstStyle>
           <a:p>
             <a:r>
-              <a:rPr lang="en-US" smtClean="0"/>
+              <a:rPr lang="en-US"/>
               <a:t>Click to edit Master title style</a:t>
             </a:r>
-            <a:endParaRPr lang="en-US"/>
           </a:p>
         </p:txBody>
       </p:sp>
@@ -1054,7 +1061,7 @@
           <a:p>
             <a:pPr lvl="0"/>
             <a:r>
-              <a:rPr lang="en-US" smtClean="0"/>
+              <a:rPr lang="en-US"/>
               <a:t>Click to edit Master text styles</a:t>
             </a:r>
           </a:p>
@@ -1077,7 +1084,7 @@
           <a:p>
             <a:fld id="{5BCAD085-E8A6-8845-BD4E-CB4CCA059FC4}" type="datetimeFigureOut">
               <a:rPr lang="en-US" smtClean="0"/>
-              <a:t>1/27/13</a:t>
+              <a:t>3/10/2026</a:t>
             </a:fld>
             <a:endParaRPr lang="en-US"/>
           </a:p>
@@ -1171,10 +1178,9 @@
           <a:lstStyle/>
           <a:p>
             <a:r>
-              <a:rPr lang="en-US" smtClean="0"/>
+              <a:rPr lang="en-US"/>
               <a:t>Click to edit Master title style</a:t>
             </a:r>
-            <a:endParaRPr lang="en-US"/>
           </a:p>
         </p:txBody>
       </p:sp>
@@ -1228,38 +1234,37 @@
           <a:p>
             <a:pPr lvl="0"/>
             <a:r>
-              <a:rPr lang="en-US" smtClean="0"/>
+              <a:rPr lang="en-US"/>
               <a:t>Click to edit Master text styles</a:t>
             </a:r>
           </a:p>
           <a:p>
             <a:pPr lvl="1"/>
             <a:r>
-              <a:rPr lang="en-US" smtClean="0"/>
+              <a:rPr lang="en-US"/>
               <a:t>Second level</a:t>
             </a:r>
           </a:p>
           <a:p>
             <a:pPr lvl="2"/>
             <a:r>
-              <a:rPr lang="en-US" smtClean="0"/>
+              <a:rPr lang="en-US"/>
               <a:t>Third level</a:t>
             </a:r>
           </a:p>
           <a:p>
             <a:pPr lvl="3"/>
             <a:r>
-              <a:rPr lang="en-US" smtClean="0"/>
+              <a:rPr lang="en-US"/>
               <a:t>Fourth level</a:t>
             </a:r>
           </a:p>
           <a:p>
             <a:pPr lvl="4"/>
             <a:r>
-              <a:rPr lang="en-US" smtClean="0"/>
+              <a:rPr lang="en-US"/>
               <a:t>Fifth level</a:t>
             </a:r>
-            <a:endParaRPr lang="en-US"/>
           </a:p>
         </p:txBody>
       </p:sp>
@@ -1313,38 +1318,37 @@
           <a:p>
             <a:pPr lvl="0"/>
             <a:r>
-              <a:rPr lang="en-US" smtClean="0"/>
+              <a:rPr lang="en-US"/>
               <a:t>Click to edit Master text styles</a:t>
             </a:r>
           </a:p>
           <a:p>
             <a:pPr lvl="1"/>
             <a:r>
-              <a:rPr lang="en-US" smtClean="0"/>
+              <a:rPr lang="en-US"/>
               <a:t>Second level</a:t>
             </a:r>
           </a:p>
           <a:p>
             <a:pPr lvl="2"/>
             <a:r>
-              <a:rPr lang="en-US" smtClean="0"/>
+              <a:rPr lang="en-US"/>
               <a:t>Third level</a:t>
             </a:r>
           </a:p>
           <a:p>
             <a:pPr lvl="3"/>
             <a:r>
-              <a:rPr lang="en-US" smtClean="0"/>
+              <a:rPr lang="en-US"/>
               <a:t>Fourth level</a:t>
             </a:r>
           </a:p>
           <a:p>
             <a:pPr lvl="4"/>
             <a:r>
-              <a:rPr lang="en-US" smtClean="0"/>
+              <a:rPr lang="en-US"/>
               <a:t>Fifth level</a:t>
             </a:r>
-            <a:endParaRPr lang="en-US"/>
           </a:p>
         </p:txBody>
       </p:sp>
@@ -1365,7 +1369,7 @@
           <a:p>
             <a:fld id="{5BCAD085-E8A6-8845-BD4E-CB4CCA059FC4}" type="datetimeFigureOut">
               <a:rPr lang="en-US" smtClean="0"/>
-              <a:t>1/27/13</a:t>
+              <a:t>3/10/2026</a:t>
             </a:fld>
             <a:endParaRPr lang="en-US"/>
           </a:p>
@@ -1463,10 +1467,9 @@
           </a:lstStyle>
           <a:p>
             <a:r>
-              <a:rPr lang="en-US" smtClean="0"/>
+              <a:rPr lang="en-US"/>
               <a:t>Click to edit Master title style</a:t>
             </a:r>
-            <a:endParaRPr lang="en-US"/>
           </a:p>
         </p:txBody>
       </p:sp>
@@ -1529,7 +1532,7 @@
           <a:p>
             <a:pPr lvl="0"/>
             <a:r>
-              <a:rPr lang="en-US" smtClean="0"/>
+              <a:rPr lang="en-US"/>
               <a:t>Click to edit Master text styles</a:t>
             </a:r>
           </a:p>
@@ -1585,38 +1588,37 @@
           <a:p>
             <a:pPr lvl="0"/>
             <a:r>
-              <a:rPr lang="en-US" smtClean="0"/>
+              <a:rPr lang="en-US"/>
               <a:t>Click to edit Master text styles</a:t>
             </a:r>
           </a:p>
           <a:p>
             <a:pPr lvl="1"/>
             <a:r>
-              <a:rPr lang="en-US" smtClean="0"/>
+              <a:rPr lang="en-US"/>
               <a:t>Second level</a:t>
             </a:r>
           </a:p>
           <a:p>
             <a:pPr lvl="2"/>
             <a:r>
-              <a:rPr lang="en-US" smtClean="0"/>
+              <a:rPr lang="en-US"/>
               <a:t>Third level</a:t>
             </a:r>
           </a:p>
           <a:p>
             <a:pPr lvl="3"/>
             <a:r>
-              <a:rPr lang="en-US" smtClean="0"/>
+              <a:rPr lang="en-US"/>
               <a:t>Fourth level</a:t>
             </a:r>
           </a:p>
           <a:p>
             <a:pPr lvl="4"/>
             <a:r>
-              <a:rPr lang="en-US" smtClean="0"/>
+              <a:rPr lang="en-US"/>
               <a:t>Fifth level</a:t>
             </a:r>
-            <a:endParaRPr lang="en-US"/>
           </a:p>
         </p:txBody>
       </p:sp>
@@ -1679,7 +1681,7 @@
           <a:p>
             <a:pPr lvl="0"/>
             <a:r>
-              <a:rPr lang="en-US" smtClean="0"/>
+              <a:rPr lang="en-US"/>
               <a:t>Click to edit Master text styles</a:t>
             </a:r>
           </a:p>
@@ -1735,38 +1737,37 @@
           <a:p>
             <a:pPr lvl="0"/>
             <a:r>
-              <a:rPr lang="en-US" smtClean="0"/>
+              <a:rPr lang="en-US"/>
               <a:t>Click to edit Master text styles</a:t>
             </a:r>
           </a:p>
           <a:p>
             <a:pPr lvl="1"/>
             <a:r>
-              <a:rPr lang="en-US" smtClean="0"/>
+              <a:rPr lang="en-US"/>
               <a:t>Second level</a:t>
             </a:r>
           </a:p>
           <a:p>
             <a:pPr lvl="2"/>
             <a:r>
-              <a:rPr lang="en-US" smtClean="0"/>
+              <a:rPr lang="en-US"/>
               <a:t>Third level</a:t>
             </a:r>
           </a:p>
           <a:p>
             <a:pPr lvl="3"/>
             <a:r>
-              <a:rPr lang="en-US" smtClean="0"/>
+              <a:rPr lang="en-US"/>
               <a:t>Fourth level</a:t>
             </a:r>
           </a:p>
           <a:p>
             <a:pPr lvl="4"/>
             <a:r>
-              <a:rPr lang="en-US" smtClean="0"/>
+              <a:rPr lang="en-US"/>
               <a:t>Fifth level</a:t>
             </a:r>
-            <a:endParaRPr lang="en-US"/>
           </a:p>
         </p:txBody>
       </p:sp>
@@ -1787,7 +1788,7 @@
           <a:p>
             <a:fld id="{5BCAD085-E8A6-8845-BD4E-CB4CCA059FC4}" type="datetimeFigureOut">
               <a:rPr lang="en-US" smtClean="0"/>
-              <a:t>1/27/13</a:t>
+              <a:t>3/10/2026</a:t>
             </a:fld>
             <a:endParaRPr lang="en-US"/>
           </a:p>
@@ -1881,10 +1882,9 @@
           <a:lstStyle/>
           <a:p>
             <a:r>
-              <a:rPr lang="en-US" smtClean="0"/>
+              <a:rPr lang="en-US"/>
               <a:t>Click to edit Master title style</a:t>
             </a:r>
-            <a:endParaRPr lang="en-US"/>
           </a:p>
         </p:txBody>
       </p:sp>
@@ -1905,7 +1905,7 @@
           <a:p>
             <a:fld id="{5BCAD085-E8A6-8845-BD4E-CB4CCA059FC4}" type="datetimeFigureOut">
               <a:rPr lang="en-US" smtClean="0"/>
-              <a:t>1/27/13</a:t>
+              <a:t>3/10/2026</a:t>
             </a:fld>
             <a:endParaRPr lang="en-US"/>
           </a:p>
@@ -2000,7 +2000,7 @@
           <a:p>
             <a:fld id="{5BCAD085-E8A6-8845-BD4E-CB4CCA059FC4}" type="datetimeFigureOut">
               <a:rPr lang="en-US" smtClean="0"/>
-              <a:t>1/27/13</a:t>
+              <a:t>3/10/2026</a:t>
             </a:fld>
             <a:endParaRPr lang="en-US"/>
           </a:p>
@@ -2103,10 +2103,9 @@
           </a:lstStyle>
           <a:p>
             <a:r>
-              <a:rPr lang="en-US" smtClean="0"/>
+              <a:rPr lang="en-US"/>
               <a:t>Click to edit Master title style</a:t>
             </a:r>
-            <a:endParaRPr lang="en-US"/>
           </a:p>
         </p:txBody>
       </p:sp>
@@ -2160,38 +2159,37 @@
           <a:p>
             <a:pPr lvl="0"/>
             <a:r>
-              <a:rPr lang="en-US" smtClean="0"/>
+              <a:rPr lang="en-US"/>
               <a:t>Click to edit Master text styles</a:t>
             </a:r>
           </a:p>
           <a:p>
             <a:pPr lvl="1"/>
             <a:r>
-              <a:rPr lang="en-US" smtClean="0"/>
+              <a:rPr lang="en-US"/>
               <a:t>Second level</a:t>
             </a:r>
           </a:p>
           <a:p>
             <a:pPr lvl="2"/>
             <a:r>
-              <a:rPr lang="en-US" smtClean="0"/>
+              <a:rPr lang="en-US"/>
               <a:t>Third level</a:t>
             </a:r>
           </a:p>
           <a:p>
             <a:pPr lvl="3"/>
             <a:r>
-              <a:rPr lang="en-US" smtClean="0"/>
+              <a:rPr lang="en-US"/>
               <a:t>Fourth level</a:t>
             </a:r>
           </a:p>
           <a:p>
             <a:pPr lvl="4"/>
             <a:r>
-              <a:rPr lang="en-US" smtClean="0"/>
+              <a:rPr lang="en-US"/>
               <a:t>Fifth level</a:t>
             </a:r>
-            <a:endParaRPr lang="en-US"/>
           </a:p>
         </p:txBody>
       </p:sp>
@@ -2254,7 +2252,7 @@
           <a:p>
             <a:pPr lvl="0"/>
             <a:r>
-              <a:rPr lang="en-US" smtClean="0"/>
+              <a:rPr lang="en-US"/>
               <a:t>Click to edit Master text styles</a:t>
             </a:r>
           </a:p>
@@ -2277,7 +2275,7 @@
           <a:p>
             <a:fld id="{5BCAD085-E8A6-8845-BD4E-CB4CCA059FC4}" type="datetimeFigureOut">
               <a:rPr lang="en-US" smtClean="0"/>
-              <a:t>1/27/13</a:t>
+              <a:t>3/10/2026</a:t>
             </a:fld>
             <a:endParaRPr lang="en-US"/>
           </a:p>
@@ -2380,10 +2378,9 @@
           </a:lstStyle>
           <a:p>
             <a:r>
-              <a:rPr lang="en-US" smtClean="0"/>
+              <a:rPr lang="en-US"/>
               <a:t>Click to edit Master title style</a:t>
             </a:r>
-            <a:endParaRPr lang="en-US"/>
           </a:p>
         </p:txBody>
       </p:sp>
@@ -2507,7 +2504,7 @@
           <a:p>
             <a:pPr lvl="0"/>
             <a:r>
-              <a:rPr lang="en-US" smtClean="0"/>
+              <a:rPr lang="en-US"/>
               <a:t>Click to edit Master text styles</a:t>
             </a:r>
           </a:p>
@@ -2530,7 +2527,7 @@
           <a:p>
             <a:fld id="{5BCAD085-E8A6-8845-BD4E-CB4CCA059FC4}" type="datetimeFigureOut">
               <a:rPr lang="en-US" smtClean="0"/>
-              <a:t>1/27/13</a:t>
+              <a:t>3/10/2026</a:t>
             </a:fld>
             <a:endParaRPr lang="en-US"/>
           </a:p>
@@ -2639,10 +2636,9 @@
           <a:lstStyle/>
           <a:p>
             <a:r>
-              <a:rPr lang="en-US" smtClean="0"/>
+              <a:rPr lang="en-US"/>
               <a:t>Click to edit Master title style</a:t>
             </a:r>
-            <a:endParaRPr lang="en-US"/>
           </a:p>
         </p:txBody>
       </p:sp>
@@ -2673,38 +2669,37 @@
           <a:p>
             <a:pPr lvl="0"/>
             <a:r>
-              <a:rPr lang="en-US" smtClean="0"/>
+              <a:rPr lang="en-US"/>
               <a:t>Click to edit Master text styles</a:t>
             </a:r>
           </a:p>
           <a:p>
             <a:pPr lvl="1"/>
             <a:r>
-              <a:rPr lang="en-US" smtClean="0"/>
+              <a:rPr lang="en-US"/>
               <a:t>Second level</a:t>
             </a:r>
           </a:p>
           <a:p>
             <a:pPr lvl="2"/>
             <a:r>
-              <a:rPr lang="en-US" smtClean="0"/>
+              <a:rPr lang="en-US"/>
               <a:t>Third level</a:t>
             </a:r>
           </a:p>
           <a:p>
             <a:pPr lvl="3"/>
             <a:r>
-              <a:rPr lang="en-US" smtClean="0"/>
+              <a:rPr lang="en-US"/>
               <a:t>Fourth level</a:t>
             </a:r>
           </a:p>
           <a:p>
             <a:pPr lvl="4"/>
             <a:r>
-              <a:rPr lang="en-US" smtClean="0"/>
+              <a:rPr lang="en-US"/>
               <a:t>Fifth level</a:t>
             </a:r>
-            <a:endParaRPr lang="en-US"/>
           </a:p>
         </p:txBody>
       </p:sp>
@@ -2743,7 +2738,7 @@
           <a:p>
             <a:fld id="{5BCAD085-E8A6-8845-BD4E-CB4CCA059FC4}" type="datetimeFigureOut">
               <a:rPr lang="en-US" smtClean="0"/>
-              <a:t>1/27/13</a:t>
+              <a:t>3/10/2026</a:t>
             </a:fld>
             <a:endParaRPr lang="en-US"/>
           </a:p>
@@ -3102,7 +3097,7 @@
 </file>
 
 <file path=ppt/slides/slide1.xml><?xml version="1.0" encoding="utf-8"?>
-<p:sld xmlns:a="http://schemas.openxmlformats.org/drawingml/2006/main" xmlns:p="http://schemas.openxmlformats.org/presentationml/2006/main" xmlns:r="http://schemas.openxmlformats.org/officeDocument/2006/relationships">
+<p:sld xmlns:a="http://schemas.openxmlformats.org/drawingml/2006/main" xmlns:r="http://schemas.openxmlformats.org/officeDocument/2006/relationships" xmlns:p="http://schemas.openxmlformats.org/presentationml/2006/main">
   <p:cSld>
     <p:spTree>
       <p:nvGrpSpPr>
@@ -3110,7 +3105,14 @@
         <p:cNvGrpSpPr/>
         <p:nvPr/>
       </p:nvGrpSpPr>
-      <p:grpSpPr/>
+      <p:grpSpPr>
+        <a:xfrm>
+          <a:off x="0" y="0"/>
+          <a:ext cx="0" cy="0"/>
+          <a:chOff x="0" y="0"/>
+          <a:chExt cx="0" cy="0"/>
+        </a:xfrm>
+      </p:grpSpPr>
       <p:sp>
         <p:nvSpPr>
           <p:cNvPr id="2" name="Rectangle 1"/>
@@ -3151,6 +3153,7 @@
           <a:lstStyle/>
           <a:p>
             <a:pPr algn="ctr"/>
+            <a:endParaRPr/>
           </a:p>
         </p:txBody>
       </p:sp>
@@ -3194,6 +3197,7 @@
           <a:lstStyle/>
           <a:p>
             <a:pPr algn="ctr"/>
+            <a:endParaRPr/>
           </a:p>
         </p:txBody>
       </p:sp>
@@ -3205,7 +3209,7 @@
         </p:nvSpPr>
         <p:spPr>
           <a:xfrm>
-            <a:off x="731520" y="1828800"/>
+            <a:off x="731520" y="1213223"/>
             <a:ext cx="10698480" cy="1371600"/>
           </a:xfrm>
           <a:prstGeom prst="rect">
@@ -3228,6 +3232,7 @@
               </a:defRPr>
             </a:pPr>
             <a:r>
+              <a:rPr dirty="0"/>
               <a:t>Mars Habitat Automation Platform</a:t>
             </a:r>
           </a:p>
@@ -3241,7 +3246,7 @@
         </p:nvSpPr>
         <p:spPr>
           <a:xfrm>
-            <a:off x="731520" y="3200400"/>
+            <a:off x="731520" y="3477710"/>
             <a:ext cx="10698480" cy="731520"/>
           </a:xfrm>
           <a:prstGeom prst="rect">
@@ -3264,6 +3269,7 @@
               </a:defRPr>
             </a:pPr>
             <a:r>
+              <a:rPr dirty="0"/>
               <a:t>Distributed Event-Driven System for Habitat Monitoring &amp; Control</a:t>
             </a:r>
           </a:p>
@@ -3277,7 +3283,7 @@
         </p:nvSpPr>
         <p:spPr>
           <a:xfrm>
-            <a:off x="4572000" y="4023360"/>
+            <a:off x="4572000" y="4710056"/>
             <a:ext cx="3017520" cy="36576"/>
           </a:xfrm>
           <a:prstGeom prst="rect">
@@ -3309,6 +3315,7 @@
           <a:lstStyle/>
           <a:p>
             <a:pPr algn="ctr"/>
+            <a:endParaRPr/>
           </a:p>
         </p:txBody>
       </p:sp>
@@ -3320,7 +3327,7 @@
         </p:nvSpPr>
         <p:spPr>
           <a:xfrm>
-            <a:off x="731520" y="4846320"/>
+            <a:off x="746607" y="5076415"/>
             <a:ext cx="10698480" cy="548640"/>
           </a:xfrm>
           <a:prstGeom prst="rect">
@@ -3343,7 +3350,24 @@
               </a:defRPr>
             </a:pPr>
             <a:r>
-              <a:t>Deda Daniel  •  Macrì Francesco  •  Pagliarini Paolo  •  Torresi Flavio</a:t>
+              <a:rPr dirty="0"/>
+              <a:t>Deda Daniel  •  </a:t>
+            </a:r>
+            <a:r>
+              <a:rPr dirty="0" err="1"/>
+              <a:t>Macrì</a:t>
+            </a:r>
+            <a:r>
+              <a:rPr dirty="0"/>
+              <a:t> Francesco  •  Pagliarini Paolo  •  </a:t>
+            </a:r>
+            <a:r>
+              <a:rPr dirty="0" err="1"/>
+              <a:t>Torresi</a:t>
+            </a:r>
+            <a:r>
+              <a:rPr dirty="0"/>
+              <a:t> Flavio</a:t>
             </a:r>
           </a:p>
         </p:txBody>
@@ -3357,7 +3381,7 @@
         <p:spPr>
           <a:xfrm>
             <a:off x="731520" y="5760720"/>
-            <a:ext cx="10698480" cy="365760"/>
+            <a:ext cx="10698480" cy="338554"/>
           </a:xfrm>
           <a:prstGeom prst="rect">
             <a:avLst/>
@@ -3379,8 +3403,22 @@
               </a:defRPr>
             </a:pPr>
             <a:r>
-              <a:t>Laboratory of Advanced Programming – Hackathon Exam 2024/2025</a:t>
-            </a:r>
+              <a:rPr dirty="0"/>
+              <a:t>Laboratory of Advanced Programming – Hackathon Exam 202</a:t>
+            </a:r>
+            <a:r>
+              <a:rPr lang="it-IT" dirty="0"/>
+              <a:t>5</a:t>
+            </a:r>
+            <a:r>
+              <a:rPr dirty="0"/>
+              <a:t>/202</a:t>
+            </a:r>
+            <a:r>
+              <a:rPr lang="it-IT" dirty="0"/>
+              <a:t>6</a:t>
+            </a:r>
+            <a:endParaRPr dirty="0"/>
           </a:p>
         </p:txBody>
       </p:sp>
@@ -3393,7 +3431,7 @@
 </file>
 
 <file path=ppt/slides/slide10.xml><?xml version="1.0" encoding="utf-8"?>
-<p:sld xmlns:a="http://schemas.openxmlformats.org/drawingml/2006/main" xmlns:p="http://schemas.openxmlformats.org/presentationml/2006/main" xmlns:r="http://schemas.openxmlformats.org/officeDocument/2006/relationships">
+<p:sld xmlns:a="http://schemas.openxmlformats.org/drawingml/2006/main" xmlns:r="http://schemas.openxmlformats.org/officeDocument/2006/relationships" xmlns:p="http://schemas.openxmlformats.org/presentationml/2006/main">
   <p:cSld>
     <p:spTree>
       <p:nvGrpSpPr>
@@ -3401,7 +3439,14 @@
         <p:cNvGrpSpPr/>
         <p:nvPr/>
       </p:nvGrpSpPr>
-      <p:grpSpPr/>
+      <p:grpSpPr>
+        <a:xfrm>
+          <a:off x="0" y="0"/>
+          <a:ext cx="0" cy="0"/>
+          <a:chOff x="0" y="0"/>
+          <a:chExt cx="0" cy="0"/>
+        </a:xfrm>
+      </p:grpSpPr>
       <p:sp>
         <p:nvSpPr>
           <p:cNvPr id="2" name="Rectangle 1"/>
@@ -3442,6 +3487,7 @@
           <a:lstStyle/>
           <a:p>
             <a:pPr algn="ctr"/>
+            <a:endParaRPr/>
           </a:p>
         </p:txBody>
       </p:sp>
@@ -3476,6 +3522,7 @@
               </a:defRPr>
             </a:pPr>
             <a:r>
+              <a:rPr dirty="0"/>
               <a:t>In-Memory Cache &amp; Mapping</a:t>
             </a:r>
           </a:p>
@@ -3483,49 +3530,6 @@
       </p:sp>
       <p:sp>
         <p:nvSpPr>
-          <p:cNvPr id="4" name="Rectangle 3"/>
-          <p:cNvSpPr/>
-          <p:nvPr/>
-        </p:nvSpPr>
-        <p:spPr>
-          <a:xfrm>
-            <a:off x="731520" y="960120"/>
-            <a:ext cx="109728" cy="457200"/>
-          </a:xfrm>
-          <a:prstGeom prst="rect">
-            <a:avLst/>
-          </a:prstGeom>
-          <a:solidFill>
-            <a:srgbClr val="00D4FF"/>
-          </a:solidFill>
-          <a:ln>
-            <a:noFill/>
-          </a:ln>
-        </p:spPr>
-        <p:style>
-          <a:lnRef idx="1">
-            <a:schemeClr val="accent1"/>
-          </a:lnRef>
-          <a:fillRef idx="3">
-            <a:schemeClr val="accent1"/>
-          </a:fillRef>
-          <a:effectRef idx="2">
-            <a:schemeClr val="accent1"/>
-          </a:effectRef>
-          <a:fontRef idx="minor">
-            <a:schemeClr val="lt1"/>
-          </a:fontRef>
-        </p:style>
-        <p:txBody>
-          <a:bodyPr rtlCol="0" anchor="ctr"/>
-          <a:lstStyle/>
-          <a:p>
-            <a:pPr algn="ctr"/>
-          </a:p>
-        </p:txBody>
-      </p:sp>
-      <p:sp>
-        <p:nvSpPr>
           <p:cNvPr id="5" name="TextBox 4"/>
           <p:cNvSpPr txBox="1"/>
           <p:nvPr/>
@@ -3533,7 +3537,7 @@
         <p:spPr>
           <a:xfrm>
             <a:off x="731520" y="1371600"/>
-            <a:ext cx="10698480" cy="731520"/>
+            <a:ext cx="10698480" cy="892552"/>
           </a:xfrm>
           <a:prstGeom prst="rect">
             <a:avLst/>
@@ -3555,10 +3559,15 @@
               </a:defRPr>
             </a:pPr>
             <a:r>
+              <a:rPr dirty="0"/>
               <a:t>Ingestion service maintains the latest values for every sensor, exposed via GET /sensors/latest</a:t>
             </a:r>
-            <a:br/>
-            <a:r>
+            <a:r>
+              <a:rPr lang="it-IT" dirty="0"/>
+              <a:t> </a:t>
+            </a:r>
+            <a:r>
+              <a:rPr dirty="0"/>
               <a:t>to the frontend with real-time updates.</a:t>
             </a:r>
           </a:p>
@@ -3606,6 +3615,7 @@
           <a:lstStyle/>
           <a:p>
             <a:pPr algn="ctr"/>
+            <a:endParaRPr/>
           </a:p>
         </p:txBody>
       </p:sp>
@@ -4085,8 +4095,8 @@
         </p:nvSpPr>
         <p:spPr>
           <a:xfrm>
-            <a:off x="1097280" y="4773168"/>
-            <a:ext cx="3931920" cy="365760"/>
+            <a:off x="1097279" y="4773168"/>
+            <a:ext cx="5566485" cy="365760"/>
           </a:xfrm>
           <a:prstGeom prst="rect">
             <a:avLst/>
@@ -4108,7 +4118,16 @@
               </a:defRPr>
             </a:pPr>
             <a:r>
-              <a:t>topic.power.v1 / environment.v1</a:t>
+              <a:rPr dirty="0"/>
+              <a:t>topic.power.v1</a:t>
+            </a:r>
+            <a:r>
+              <a:rPr lang="it-IT" dirty="0"/>
+              <a:t>/</a:t>
+            </a:r>
+            <a:r>
+              <a:rPr dirty="0"/>
+              <a:t>environment.v1</a:t>
             </a:r>
           </a:p>
         </p:txBody>
@@ -4434,6 +4453,56 @@
             <a:r>
               <a:t>10/24</a:t>
             </a:r>
+          </a:p>
+        </p:txBody>
+      </p:sp>
+      <p:sp>
+        <p:nvSpPr>
+          <p:cNvPr id="30" name="Rectangle 29">
+            <a:extLst>
+              <a:ext uri="{FF2B5EF4-FFF2-40B4-BE49-F238E27FC236}">
+                <a16:creationId xmlns:a16="http://schemas.microsoft.com/office/drawing/2014/main" id="{CAAFA436-249D-89C4-AF36-88FA4F7CC618}"/>
+              </a:ext>
+            </a:extLst>
+          </p:cNvPr>
+          <p:cNvSpPr/>
+          <p:nvPr/>
+        </p:nvSpPr>
+        <p:spPr>
+          <a:xfrm>
+            <a:off x="650300" y="548640"/>
+            <a:ext cx="109728" cy="640080"/>
+          </a:xfrm>
+          <a:prstGeom prst="rect">
+            <a:avLst/>
+          </a:prstGeom>
+          <a:solidFill>
+            <a:srgbClr val="00D4FF"/>
+          </a:solidFill>
+          <a:ln>
+            <a:noFill/>
+          </a:ln>
+        </p:spPr>
+        <p:style>
+          <a:lnRef idx="1">
+            <a:schemeClr val="accent1"/>
+          </a:lnRef>
+          <a:fillRef idx="3">
+            <a:schemeClr val="accent1"/>
+          </a:fillRef>
+          <a:effectRef idx="2">
+            <a:schemeClr val="accent1"/>
+          </a:effectRef>
+          <a:fontRef idx="minor">
+            <a:schemeClr val="lt1"/>
+          </a:fontRef>
+        </p:style>
+        <p:txBody>
+          <a:bodyPr rtlCol="0" anchor="ctr"/>
+          <a:lstStyle/>
+          <a:p>
+            <a:pPr algn="ctr"/>
+            <a:endParaRPr/>
           </a:p>
         </p:txBody>
       </p:sp>
@@ -4446,7 +4515,7 @@
 </file>
 
 <file path=ppt/slides/slide11.xml><?xml version="1.0" encoding="utf-8"?>
-<p:sld xmlns:a="http://schemas.openxmlformats.org/drawingml/2006/main" xmlns:p="http://schemas.openxmlformats.org/presentationml/2006/main" xmlns:r="http://schemas.openxmlformats.org/officeDocument/2006/relationships">
+<p:sld xmlns:a="http://schemas.openxmlformats.org/drawingml/2006/main" xmlns:r="http://schemas.openxmlformats.org/officeDocument/2006/relationships" xmlns:p="http://schemas.openxmlformats.org/presentationml/2006/main">
   <p:cSld>
     <p:spTree>
       <p:nvGrpSpPr>
@@ -4454,7 +4523,14 @@
         <p:cNvGrpSpPr/>
         <p:nvPr/>
       </p:nvGrpSpPr>
-      <p:grpSpPr/>
+      <p:grpSpPr>
+        <a:xfrm>
+          <a:off x="0" y="0"/>
+          <a:ext cx="0" cy="0"/>
+          <a:chOff x="0" y="0"/>
+          <a:chExt cx="0" cy="0"/>
+        </a:xfrm>
+      </p:grpSpPr>
       <p:sp>
         <p:nvSpPr>
           <p:cNvPr id="2" name="Rectangle 1"/>
@@ -4495,6 +4571,7 @@
           <a:lstStyle/>
           <a:p>
             <a:pPr algn="ctr"/>
+            <a:endParaRPr/>
           </a:p>
         </p:txBody>
       </p:sp>
@@ -4536,16 +4613,52 @@
       </p:sp>
       <p:sp>
         <p:nvSpPr>
-          <p:cNvPr id="4" name="Rectangle 3"/>
+          <p:cNvPr id="5" name="TextBox 4"/>
+          <p:cNvSpPr txBox="1"/>
+          <p:nvPr/>
+        </p:nvSpPr>
+        <p:spPr>
+          <a:xfrm>
+            <a:off x="731520" y="1280160"/>
+            <a:ext cx="10698480" cy="457200"/>
+          </a:xfrm>
+          <a:prstGeom prst="rect">
+            <a:avLst/>
+          </a:prstGeom>
+          <a:noFill/>
+        </p:spPr>
+        <p:txBody>
+          <a:bodyPr wrap="square">
+            <a:spAutoFit/>
+          </a:bodyPr>
+          <a:lstStyle/>
+          <a:p>
+            <a:pPr algn="l">
+              <a:defRPr sz="2600" b="1" i="0">
+                <a:solidFill>
+                  <a:srgbClr val="00D4FF"/>
+                </a:solidFill>
+                <a:latin typeface="Segoe UI"/>
+              </a:defRPr>
+            </a:pPr>
+            <a:r>
+              <a:t>Event-Driven Rule Processing</a:t>
+            </a:r>
+          </a:p>
+        </p:txBody>
+      </p:sp>
+      <p:sp>
+        <p:nvSpPr>
+          <p:cNvPr id="6" name="Oval 5"/>
           <p:cNvSpPr/>
           <p:nvPr/>
         </p:nvSpPr>
         <p:spPr>
           <a:xfrm>
-            <a:off x="731520" y="960120"/>
-            <a:ext cx="109728" cy="457200"/>
-          </a:xfrm>
-          <a:prstGeom prst="rect">
+            <a:off x="1280160" y="1943100"/>
+            <a:ext cx="548640" cy="548640"/>
+          </a:xfrm>
+          <a:prstGeom prst="ellipse">
             <a:avLst/>
           </a:prstGeom>
           <a:solidFill>
@@ -4574,54 +4687,176 @@
           <a:lstStyle/>
           <a:p>
             <a:pPr algn="ctr"/>
-          </a:p>
-        </p:txBody>
-      </p:sp>
-      <p:sp>
-        <p:nvSpPr>
-          <p:cNvPr id="5" name="TextBox 4"/>
-          <p:cNvSpPr txBox="1"/>
-          <p:nvPr/>
-        </p:nvSpPr>
-        <p:spPr>
-          <a:xfrm>
-            <a:off x="731520" y="1280160"/>
-            <a:ext cx="10698480" cy="457200"/>
-          </a:xfrm>
-          <a:prstGeom prst="rect">
-            <a:avLst/>
-          </a:prstGeom>
-          <a:noFill/>
-        </p:spPr>
-        <p:txBody>
-          <a:bodyPr wrap="square">
-            <a:spAutoFit/>
-          </a:bodyPr>
-          <a:lstStyle/>
-          <a:p>
-            <a:pPr algn="l">
-              <a:defRPr sz="2600" b="1" i="0">
-                <a:solidFill>
-                  <a:srgbClr val="00D4FF"/>
-                </a:solidFill>
-                <a:latin typeface="Segoe UI"/>
-              </a:defRPr>
-            </a:pPr>
-            <a:r>
-              <a:t>Event-Driven Rule Processing</a:t>
-            </a:r>
-          </a:p>
-        </p:txBody>
-      </p:sp>
-      <p:sp>
-        <p:nvSpPr>
-          <p:cNvPr id="6" name="Oval 5"/>
+            <a:endParaRPr/>
+          </a:p>
+        </p:txBody>
+      </p:sp>
+      <p:sp>
+        <p:nvSpPr>
+          <p:cNvPr id="7" name="TextBox 6"/>
+          <p:cNvSpPr txBox="1"/>
+          <p:nvPr/>
+        </p:nvSpPr>
+        <p:spPr>
+          <a:xfrm>
+            <a:off x="1280160" y="1965960"/>
+            <a:ext cx="548640" cy="457200"/>
+          </a:xfrm>
+          <a:prstGeom prst="rect">
+            <a:avLst/>
+          </a:prstGeom>
+          <a:noFill/>
+        </p:spPr>
+        <p:txBody>
+          <a:bodyPr wrap="square">
+            <a:spAutoFit/>
+          </a:bodyPr>
+          <a:lstStyle/>
+          <a:p>
+            <a:pPr algn="ctr">
+              <a:defRPr sz="2200" b="1" i="0">
+                <a:solidFill>
+                  <a:srgbClr val="0A0A0A"/>
+                </a:solidFill>
+                <a:latin typeface="Segoe UI"/>
+              </a:defRPr>
+            </a:pPr>
+            <a:r>
+              <a:rPr dirty="0"/>
+              <a:t>1</a:t>
+            </a:r>
+          </a:p>
+        </p:txBody>
+      </p:sp>
+      <p:sp>
+        <p:nvSpPr>
+          <p:cNvPr id="8" name="TextBox 7"/>
+          <p:cNvSpPr txBox="1"/>
+          <p:nvPr/>
+        </p:nvSpPr>
+        <p:spPr>
+          <a:xfrm>
+            <a:off x="731520" y="2560320"/>
+            <a:ext cx="1645920" cy="365760"/>
+          </a:xfrm>
+          <a:prstGeom prst="rect">
+            <a:avLst/>
+          </a:prstGeom>
+          <a:noFill/>
+        </p:spPr>
+        <p:txBody>
+          <a:bodyPr wrap="square">
+            <a:spAutoFit/>
+          </a:bodyPr>
+          <a:lstStyle/>
+          <a:p>
+            <a:pPr algn="ctr">
+              <a:defRPr sz="1800" b="1" i="0">
+                <a:solidFill>
+                  <a:srgbClr val="FFFFFF"/>
+                </a:solidFill>
+                <a:latin typeface="Segoe UI"/>
+              </a:defRPr>
+            </a:pPr>
+            <a:r>
+              <a:t>Receive</a:t>
+            </a:r>
+          </a:p>
+        </p:txBody>
+      </p:sp>
+      <p:sp>
+        <p:nvSpPr>
+          <p:cNvPr id="9" name="TextBox 8"/>
+          <p:cNvSpPr txBox="1"/>
+          <p:nvPr/>
+        </p:nvSpPr>
+        <p:spPr>
+          <a:xfrm>
+            <a:off x="731520" y="2926080"/>
+            <a:ext cx="1645920" cy="640080"/>
+          </a:xfrm>
+          <a:prstGeom prst="rect">
+            <a:avLst/>
+          </a:prstGeom>
+          <a:noFill/>
+        </p:spPr>
+        <p:txBody>
+          <a:bodyPr wrap="square">
+            <a:spAutoFit/>
+          </a:bodyPr>
+          <a:lstStyle/>
+          <a:p>
+            <a:pPr algn="ctr">
+              <a:defRPr sz="1600" b="0" i="0">
+                <a:solidFill>
+                  <a:srgbClr val="6B6B80"/>
+                </a:solidFill>
+                <a:latin typeface="Segoe UI"/>
+              </a:defRPr>
+            </a:pPr>
+            <a:r>
+              <a:t>RabbitMQ</a:t>
+            </a:r>
+            <a:br/>
+            <a:r>
+              <a:t>event</a:t>
+            </a:r>
+          </a:p>
+        </p:txBody>
+      </p:sp>
+      <p:sp>
+        <p:nvSpPr>
+          <p:cNvPr id="10" name="Right Arrow 9"/>
           <p:cNvSpPr/>
           <p:nvPr/>
         </p:nvSpPr>
         <p:spPr>
           <a:xfrm>
-            <a:off x="1051560" y="1920240"/>
+            <a:off x="2423160" y="2103120"/>
+            <a:ext cx="365760" cy="228600"/>
+          </a:xfrm>
+          <a:prstGeom prst="rightArrow">
+            <a:avLst/>
+          </a:prstGeom>
+          <a:solidFill>
+            <a:srgbClr val="8B5CF6"/>
+          </a:solidFill>
+          <a:ln>
+            <a:noFill/>
+          </a:ln>
+        </p:spPr>
+        <p:style>
+          <a:lnRef idx="1">
+            <a:schemeClr val="accent1"/>
+          </a:lnRef>
+          <a:fillRef idx="3">
+            <a:schemeClr val="accent1"/>
+          </a:fillRef>
+          <a:effectRef idx="2">
+            <a:schemeClr val="accent1"/>
+          </a:effectRef>
+          <a:fontRef idx="minor">
+            <a:schemeClr val="lt1"/>
+          </a:fontRef>
+        </p:style>
+        <p:txBody>
+          <a:bodyPr rtlCol="0" anchor="ctr"/>
+          <a:lstStyle/>
+          <a:p>
+            <a:pPr algn="ctr"/>
+            <a:endParaRPr/>
+          </a:p>
+        </p:txBody>
+      </p:sp>
+      <p:sp>
+        <p:nvSpPr>
+          <p:cNvPr id="11" name="Oval 10"/>
+          <p:cNvSpPr/>
+          <p:nvPr/>
+        </p:nvSpPr>
+        <p:spPr>
+          <a:xfrm>
+            <a:off x="3566159" y="1920240"/>
             <a:ext cx="548640" cy="548640"/>
           </a:xfrm>
           <a:prstGeom prst="ellipse">
@@ -4653,18 +4888,19 @@
           <a:lstStyle/>
           <a:p>
             <a:pPr algn="ctr"/>
-          </a:p>
-        </p:txBody>
-      </p:sp>
-      <p:sp>
-        <p:nvSpPr>
-          <p:cNvPr id="7" name="TextBox 6"/>
-          <p:cNvSpPr txBox="1"/>
-          <p:nvPr/>
-        </p:nvSpPr>
-        <p:spPr>
-          <a:xfrm>
-            <a:off x="1051560" y="1965960"/>
+            <a:endParaRPr/>
+          </a:p>
+        </p:txBody>
+      </p:sp>
+      <p:sp>
+        <p:nvSpPr>
+          <p:cNvPr id="12" name="TextBox 11"/>
+          <p:cNvSpPr txBox="1"/>
+          <p:nvPr/>
+        </p:nvSpPr>
+        <p:spPr>
+          <a:xfrm>
+            <a:off x="3566159" y="1965960"/>
             <a:ext cx="548640" cy="457200"/>
           </a:xfrm>
           <a:prstGeom prst="rect">
@@ -4687,20 +4923,21 @@
               </a:defRPr>
             </a:pPr>
             <a:r>
-              <a:t>1</a:t>
-            </a:r>
-          </a:p>
-        </p:txBody>
-      </p:sp>
-      <p:sp>
-        <p:nvSpPr>
-          <p:cNvPr id="8" name="TextBox 7"/>
-          <p:cNvSpPr txBox="1"/>
-          <p:nvPr/>
-        </p:nvSpPr>
-        <p:spPr>
-          <a:xfrm>
-            <a:off x="731520" y="2560320"/>
+              <a:rPr dirty="0"/>
+              <a:t>2</a:t>
+            </a:r>
+          </a:p>
+        </p:txBody>
+      </p:sp>
+      <p:sp>
+        <p:nvSpPr>
+          <p:cNvPr id="13" name="TextBox 12"/>
+          <p:cNvSpPr txBox="1"/>
+          <p:nvPr/>
+        </p:nvSpPr>
+        <p:spPr>
+          <a:xfrm>
+            <a:off x="3017520" y="2560320"/>
             <a:ext cx="1645920" cy="365760"/>
           </a:xfrm>
           <a:prstGeom prst="rect">
@@ -4723,20 +4960,20 @@
               </a:defRPr>
             </a:pPr>
             <a:r>
-              <a:t>Receive</a:t>
-            </a:r>
-          </a:p>
-        </p:txBody>
-      </p:sp>
-      <p:sp>
-        <p:nvSpPr>
-          <p:cNvPr id="9" name="TextBox 8"/>
-          <p:cNvSpPr txBox="1"/>
-          <p:nvPr/>
-        </p:nvSpPr>
-        <p:spPr>
-          <a:xfrm>
-            <a:off x="731520" y="2926080"/>
+              <a:t>Parse</a:t>
+            </a:r>
+          </a:p>
+        </p:txBody>
+      </p:sp>
+      <p:sp>
+        <p:nvSpPr>
+          <p:cNvPr id="14" name="TextBox 13"/>
+          <p:cNvSpPr txBox="1"/>
+          <p:nvPr/>
+        </p:nvSpPr>
+        <p:spPr>
+          <a:xfrm>
+            <a:off x="3017520" y="2926080"/>
             <a:ext cx="1645920" cy="640080"/>
           </a:xfrm>
           <a:prstGeom prst="rect">
@@ -4759,24 +4996,24 @@
               </a:defRPr>
             </a:pPr>
             <a:r>
-              <a:t>RabbitMQ</a:t>
+              <a:t>Extract</a:t>
             </a:r>
             <a:br/>
             <a:r>
-              <a:t>event</a:t>
-            </a:r>
-          </a:p>
-        </p:txBody>
-      </p:sp>
-      <p:sp>
-        <p:nvSpPr>
-          <p:cNvPr id="10" name="Right Arrow 9"/>
+              <a:t>sensor_id</a:t>
+            </a:r>
+          </a:p>
+        </p:txBody>
+      </p:sp>
+      <p:sp>
+        <p:nvSpPr>
+          <p:cNvPr id="15" name="Right Arrow 14"/>
           <p:cNvSpPr/>
           <p:nvPr/>
         </p:nvSpPr>
         <p:spPr>
           <a:xfrm>
-            <a:off x="2423160" y="2103120"/>
+            <a:off x="4709160" y="2103120"/>
             <a:ext cx="365760" cy="228600"/>
           </a:xfrm>
           <a:prstGeom prst="rightArrow">
@@ -4808,18 +5045,19 @@
           <a:lstStyle/>
           <a:p>
             <a:pPr algn="ctr"/>
-          </a:p>
-        </p:txBody>
-      </p:sp>
-      <p:sp>
-        <p:nvSpPr>
-          <p:cNvPr id="11" name="Oval 10"/>
+            <a:endParaRPr/>
+          </a:p>
+        </p:txBody>
+      </p:sp>
+      <p:sp>
+        <p:nvSpPr>
+          <p:cNvPr id="16" name="Oval 15"/>
           <p:cNvSpPr/>
           <p:nvPr/>
         </p:nvSpPr>
         <p:spPr>
           <a:xfrm>
-            <a:off x="3337560" y="1920240"/>
+            <a:off x="5806439" y="1920240"/>
             <a:ext cx="548640" cy="548640"/>
           </a:xfrm>
           <a:prstGeom prst="ellipse">
@@ -4851,18 +5089,19 @@
           <a:lstStyle/>
           <a:p>
             <a:pPr algn="ctr"/>
-          </a:p>
-        </p:txBody>
-      </p:sp>
-      <p:sp>
-        <p:nvSpPr>
-          <p:cNvPr id="12" name="TextBox 11"/>
-          <p:cNvSpPr txBox="1"/>
-          <p:nvPr/>
-        </p:nvSpPr>
-        <p:spPr>
-          <a:xfrm>
-            <a:off x="3337560" y="1965960"/>
+            <a:endParaRPr/>
+          </a:p>
+        </p:txBody>
+      </p:sp>
+      <p:sp>
+        <p:nvSpPr>
+          <p:cNvPr id="17" name="TextBox 16"/>
+          <p:cNvSpPr txBox="1"/>
+          <p:nvPr/>
+        </p:nvSpPr>
+        <p:spPr>
+          <a:xfrm>
+            <a:off x="5827058" y="1965960"/>
             <a:ext cx="548640" cy="457200"/>
           </a:xfrm>
           <a:prstGeom prst="rect">
@@ -4885,20 +5124,21 @@
               </a:defRPr>
             </a:pPr>
             <a:r>
-              <a:t>2</a:t>
-            </a:r>
-          </a:p>
-        </p:txBody>
-      </p:sp>
-      <p:sp>
-        <p:nvSpPr>
-          <p:cNvPr id="13" name="TextBox 12"/>
-          <p:cNvSpPr txBox="1"/>
-          <p:nvPr/>
-        </p:nvSpPr>
-        <p:spPr>
-          <a:xfrm>
-            <a:off x="3017520" y="2560320"/>
+              <a:rPr dirty="0"/>
+              <a:t>3</a:t>
+            </a:r>
+          </a:p>
+        </p:txBody>
+      </p:sp>
+      <p:sp>
+        <p:nvSpPr>
+          <p:cNvPr id="18" name="TextBox 17"/>
+          <p:cNvSpPr txBox="1"/>
+          <p:nvPr/>
+        </p:nvSpPr>
+        <p:spPr>
+          <a:xfrm>
+            <a:off x="5303520" y="2560320"/>
             <a:ext cx="1645920" cy="365760"/>
           </a:xfrm>
           <a:prstGeom prst="rect">
@@ -4921,20 +5161,20 @@
               </a:defRPr>
             </a:pPr>
             <a:r>
-              <a:t>Parse</a:t>
-            </a:r>
-          </a:p>
-        </p:txBody>
-      </p:sp>
-      <p:sp>
-        <p:nvSpPr>
-          <p:cNvPr id="14" name="TextBox 13"/>
-          <p:cNvSpPr txBox="1"/>
-          <p:nvPr/>
-        </p:nvSpPr>
-        <p:spPr>
-          <a:xfrm>
-            <a:off x="3017520" y="2926080"/>
+              <a:t>Match</a:t>
+            </a:r>
+          </a:p>
+        </p:txBody>
+      </p:sp>
+      <p:sp>
+        <p:nvSpPr>
+          <p:cNvPr id="19" name="TextBox 18"/>
+          <p:cNvSpPr txBox="1"/>
+          <p:nvPr/>
+        </p:nvSpPr>
+        <p:spPr>
+          <a:xfrm>
+            <a:off x="5303520" y="2926080"/>
             <a:ext cx="1645920" cy="640080"/>
           </a:xfrm>
           <a:prstGeom prst="rect">
@@ -4957,24 +5197,20 @@
               </a:defRPr>
             </a:pPr>
             <a:r>
-              <a:t>Extract</a:t>
-            </a:r>
-            <a:br/>
-            <a:r>
-              <a:t>sensor_id</a:t>
-            </a:r>
-          </a:p>
-        </p:txBody>
-      </p:sp>
-      <p:sp>
-        <p:nvSpPr>
-          <p:cNvPr id="15" name="Right Arrow 14"/>
+              <a:t>Find rules</a:t>
+            </a:r>
+          </a:p>
+        </p:txBody>
+      </p:sp>
+      <p:sp>
+        <p:nvSpPr>
+          <p:cNvPr id="20" name="Right Arrow 19"/>
           <p:cNvSpPr/>
           <p:nvPr/>
         </p:nvSpPr>
         <p:spPr>
           <a:xfrm>
-            <a:off x="4709160" y="2103120"/>
+            <a:off x="6995160" y="2103120"/>
             <a:ext cx="365760" cy="228600"/>
           </a:xfrm>
           <a:prstGeom prst="rightArrow">
@@ -5006,18 +5242,19 @@
           <a:lstStyle/>
           <a:p>
             <a:pPr algn="ctr"/>
-          </a:p>
-        </p:txBody>
-      </p:sp>
-      <p:sp>
-        <p:nvSpPr>
-          <p:cNvPr id="16" name="Oval 15"/>
+            <a:endParaRPr/>
+          </a:p>
+        </p:txBody>
+      </p:sp>
+      <p:sp>
+        <p:nvSpPr>
+          <p:cNvPr id="21" name="Oval 20"/>
           <p:cNvSpPr/>
           <p:nvPr/>
         </p:nvSpPr>
         <p:spPr>
           <a:xfrm>
-            <a:off x="5623559" y="1920240"/>
+            <a:off x="8138160" y="1942204"/>
             <a:ext cx="548640" cy="548640"/>
           </a:xfrm>
           <a:prstGeom prst="ellipse">
@@ -5049,18 +5286,19 @@
           <a:lstStyle/>
           <a:p>
             <a:pPr algn="ctr"/>
-          </a:p>
-        </p:txBody>
-      </p:sp>
-      <p:sp>
-        <p:nvSpPr>
-          <p:cNvPr id="17" name="TextBox 16"/>
-          <p:cNvSpPr txBox="1"/>
-          <p:nvPr/>
-        </p:nvSpPr>
-        <p:spPr>
-          <a:xfrm>
-            <a:off x="5623559" y="1965960"/>
+            <a:endParaRPr/>
+          </a:p>
+        </p:txBody>
+      </p:sp>
+      <p:sp>
+        <p:nvSpPr>
+          <p:cNvPr id="22" name="TextBox 21"/>
+          <p:cNvSpPr txBox="1"/>
+          <p:nvPr/>
+        </p:nvSpPr>
+        <p:spPr>
+          <a:xfrm>
+            <a:off x="8138160" y="1985085"/>
             <a:ext cx="548640" cy="457200"/>
           </a:xfrm>
           <a:prstGeom prst="rect">
@@ -5083,20 +5321,21 @@
               </a:defRPr>
             </a:pPr>
             <a:r>
-              <a:t>3</a:t>
-            </a:r>
-          </a:p>
-        </p:txBody>
-      </p:sp>
-      <p:sp>
-        <p:nvSpPr>
-          <p:cNvPr id="18" name="TextBox 17"/>
-          <p:cNvSpPr txBox="1"/>
-          <p:nvPr/>
-        </p:nvSpPr>
-        <p:spPr>
-          <a:xfrm>
-            <a:off x="5303520" y="2560320"/>
+              <a:rPr dirty="0"/>
+              <a:t>4</a:t>
+            </a:r>
+          </a:p>
+        </p:txBody>
+      </p:sp>
+      <p:sp>
+        <p:nvSpPr>
+          <p:cNvPr id="23" name="TextBox 22"/>
+          <p:cNvSpPr txBox="1"/>
+          <p:nvPr/>
+        </p:nvSpPr>
+        <p:spPr>
+          <a:xfrm>
+            <a:off x="7589520" y="2560320"/>
             <a:ext cx="1645920" cy="365760"/>
           </a:xfrm>
           <a:prstGeom prst="rect">
@@ -5119,20 +5358,20 @@
               </a:defRPr>
             </a:pPr>
             <a:r>
-              <a:t>Match</a:t>
-            </a:r>
-          </a:p>
-        </p:txBody>
-      </p:sp>
-      <p:sp>
-        <p:nvSpPr>
-          <p:cNvPr id="19" name="TextBox 18"/>
-          <p:cNvSpPr txBox="1"/>
-          <p:nvPr/>
-        </p:nvSpPr>
-        <p:spPr>
-          <a:xfrm>
-            <a:off x="5303520" y="2926080"/>
+              <a:t>Evaluate</a:t>
+            </a:r>
+          </a:p>
+        </p:txBody>
+      </p:sp>
+      <p:sp>
+        <p:nvSpPr>
+          <p:cNvPr id="24" name="TextBox 23"/>
+          <p:cNvSpPr txBox="1"/>
+          <p:nvPr/>
+        </p:nvSpPr>
+        <p:spPr>
+          <a:xfrm>
+            <a:off x="7589520" y="2926080"/>
             <a:ext cx="1645920" cy="640080"/>
           </a:xfrm>
           <a:prstGeom prst="rect">
@@ -5155,20 +5394,24 @@
               </a:defRPr>
             </a:pPr>
             <a:r>
-              <a:t>Find rules</a:t>
-            </a:r>
-          </a:p>
-        </p:txBody>
-      </p:sp>
-      <p:sp>
-        <p:nvSpPr>
-          <p:cNvPr id="20" name="Right Arrow 19"/>
+              <a:t>Check</a:t>
+            </a:r>
+            <a:br/>
+            <a:r>
+              <a:t>condition</a:t>
+            </a:r>
+          </a:p>
+        </p:txBody>
+      </p:sp>
+      <p:sp>
+        <p:nvSpPr>
+          <p:cNvPr id="25" name="Right Arrow 24"/>
           <p:cNvSpPr/>
           <p:nvPr/>
         </p:nvSpPr>
         <p:spPr>
           <a:xfrm>
-            <a:off x="6995160" y="2103120"/>
+            <a:off x="9281160" y="2103120"/>
             <a:ext cx="365760" cy="228600"/>
           </a:xfrm>
           <a:prstGeom prst="rightArrow">
@@ -5200,18 +5443,19 @@
           <a:lstStyle/>
           <a:p>
             <a:pPr algn="ctr"/>
-          </a:p>
-        </p:txBody>
-      </p:sp>
-      <p:sp>
-        <p:nvSpPr>
-          <p:cNvPr id="21" name="Oval 20"/>
+            <a:endParaRPr/>
+          </a:p>
+        </p:txBody>
+      </p:sp>
+      <p:sp>
+        <p:nvSpPr>
+          <p:cNvPr id="26" name="Oval 25"/>
           <p:cNvSpPr/>
           <p:nvPr/>
         </p:nvSpPr>
         <p:spPr>
           <a:xfrm>
-            <a:off x="7909560" y="1920240"/>
+            <a:off x="10424159" y="1921435"/>
             <a:ext cx="548640" cy="548640"/>
           </a:xfrm>
           <a:prstGeom prst="ellipse">
@@ -5243,204 +5487,7 @@
           <a:lstStyle/>
           <a:p>
             <a:pPr algn="ctr"/>
-          </a:p>
-        </p:txBody>
-      </p:sp>
-      <p:sp>
-        <p:nvSpPr>
-          <p:cNvPr id="22" name="TextBox 21"/>
-          <p:cNvSpPr txBox="1"/>
-          <p:nvPr/>
-        </p:nvSpPr>
-        <p:spPr>
-          <a:xfrm>
-            <a:off x="7909560" y="1965960"/>
-            <a:ext cx="548640" cy="457200"/>
-          </a:xfrm>
-          <a:prstGeom prst="rect">
-            <a:avLst/>
-          </a:prstGeom>
-          <a:noFill/>
-        </p:spPr>
-        <p:txBody>
-          <a:bodyPr wrap="square">
-            <a:spAutoFit/>
-          </a:bodyPr>
-          <a:lstStyle/>
-          <a:p>
-            <a:pPr algn="ctr">
-              <a:defRPr sz="2200" b="1" i="0">
-                <a:solidFill>
-                  <a:srgbClr val="0A0A0A"/>
-                </a:solidFill>
-                <a:latin typeface="Segoe UI"/>
-              </a:defRPr>
-            </a:pPr>
-            <a:r>
-              <a:t>4</a:t>
-            </a:r>
-          </a:p>
-        </p:txBody>
-      </p:sp>
-      <p:sp>
-        <p:nvSpPr>
-          <p:cNvPr id="23" name="TextBox 22"/>
-          <p:cNvSpPr txBox="1"/>
-          <p:nvPr/>
-        </p:nvSpPr>
-        <p:spPr>
-          <a:xfrm>
-            <a:off x="7589520" y="2560320"/>
-            <a:ext cx="1645920" cy="365760"/>
-          </a:xfrm>
-          <a:prstGeom prst="rect">
-            <a:avLst/>
-          </a:prstGeom>
-          <a:noFill/>
-        </p:spPr>
-        <p:txBody>
-          <a:bodyPr wrap="square">
-            <a:spAutoFit/>
-          </a:bodyPr>
-          <a:lstStyle/>
-          <a:p>
-            <a:pPr algn="ctr">
-              <a:defRPr sz="1800" b="1" i="0">
-                <a:solidFill>
-                  <a:srgbClr val="FFFFFF"/>
-                </a:solidFill>
-                <a:latin typeface="Segoe UI"/>
-              </a:defRPr>
-            </a:pPr>
-            <a:r>
-              <a:t>Evaluate</a:t>
-            </a:r>
-          </a:p>
-        </p:txBody>
-      </p:sp>
-      <p:sp>
-        <p:nvSpPr>
-          <p:cNvPr id="24" name="TextBox 23"/>
-          <p:cNvSpPr txBox="1"/>
-          <p:nvPr/>
-        </p:nvSpPr>
-        <p:spPr>
-          <a:xfrm>
-            <a:off x="7589520" y="2926080"/>
-            <a:ext cx="1645920" cy="640080"/>
-          </a:xfrm>
-          <a:prstGeom prst="rect">
-            <a:avLst/>
-          </a:prstGeom>
-          <a:noFill/>
-        </p:spPr>
-        <p:txBody>
-          <a:bodyPr wrap="square">
-            <a:spAutoFit/>
-          </a:bodyPr>
-          <a:lstStyle/>
-          <a:p>
-            <a:pPr algn="ctr">
-              <a:defRPr sz="1600" b="0" i="0">
-                <a:solidFill>
-                  <a:srgbClr val="6B6B80"/>
-                </a:solidFill>
-                <a:latin typeface="Segoe UI"/>
-              </a:defRPr>
-            </a:pPr>
-            <a:r>
-              <a:t>Check</a:t>
-            </a:r>
-            <a:br/>
-            <a:r>
-              <a:t>condition</a:t>
-            </a:r>
-          </a:p>
-        </p:txBody>
-      </p:sp>
-      <p:sp>
-        <p:nvSpPr>
-          <p:cNvPr id="25" name="Right Arrow 24"/>
-          <p:cNvSpPr/>
-          <p:nvPr/>
-        </p:nvSpPr>
-        <p:spPr>
-          <a:xfrm>
-            <a:off x="9281160" y="2103120"/>
-            <a:ext cx="365760" cy="228600"/>
-          </a:xfrm>
-          <a:prstGeom prst="rightArrow">
-            <a:avLst/>
-          </a:prstGeom>
-          <a:solidFill>
-            <a:srgbClr val="8B5CF6"/>
-          </a:solidFill>
-          <a:ln>
-            <a:noFill/>
-          </a:ln>
-        </p:spPr>
-        <p:style>
-          <a:lnRef idx="1">
-            <a:schemeClr val="accent1"/>
-          </a:lnRef>
-          <a:fillRef idx="3">
-            <a:schemeClr val="accent1"/>
-          </a:fillRef>
-          <a:effectRef idx="2">
-            <a:schemeClr val="accent1"/>
-          </a:effectRef>
-          <a:fontRef idx="minor">
-            <a:schemeClr val="lt1"/>
-          </a:fontRef>
-        </p:style>
-        <p:txBody>
-          <a:bodyPr rtlCol="0" anchor="ctr"/>
-          <a:lstStyle/>
-          <a:p>
-            <a:pPr algn="ctr"/>
-          </a:p>
-        </p:txBody>
-      </p:sp>
-      <p:sp>
-        <p:nvSpPr>
-          <p:cNvPr id="26" name="Oval 25"/>
-          <p:cNvSpPr/>
-          <p:nvPr/>
-        </p:nvSpPr>
-        <p:spPr>
-          <a:xfrm>
-            <a:off x="10195560" y="1920240"/>
-            <a:ext cx="548640" cy="548640"/>
-          </a:xfrm>
-          <a:prstGeom prst="ellipse">
-            <a:avLst/>
-          </a:prstGeom>
-          <a:solidFill>
-            <a:srgbClr val="00D4FF"/>
-          </a:solidFill>
-          <a:ln>
-            <a:noFill/>
-          </a:ln>
-        </p:spPr>
-        <p:style>
-          <a:lnRef idx="1">
-            <a:schemeClr val="accent1"/>
-          </a:lnRef>
-          <a:fillRef idx="3">
-            <a:schemeClr val="accent1"/>
-          </a:fillRef>
-          <a:effectRef idx="2">
-            <a:schemeClr val="accent1"/>
-          </a:effectRef>
-          <a:fontRef idx="minor">
-            <a:schemeClr val="lt1"/>
-          </a:fontRef>
-        </p:style>
-        <p:txBody>
-          <a:bodyPr rtlCol="0" anchor="ctr"/>
-          <a:lstStyle/>
-          <a:p>
-            <a:pPr algn="ctr"/>
+            <a:endParaRPr/>
           </a:p>
         </p:txBody>
       </p:sp>
@@ -5452,7 +5499,7 @@
         </p:nvSpPr>
         <p:spPr>
           <a:xfrm>
-            <a:off x="10195560" y="1965960"/>
+            <a:off x="10424159" y="1965960"/>
             <a:ext cx="548640" cy="457200"/>
           </a:xfrm>
           <a:prstGeom prst="rect">
@@ -5598,6 +5645,7 @@
           <a:lstStyle/>
           <a:p>
             <a:pPr algn="ctr"/>
+            <a:endParaRPr/>
           </a:p>
         </p:txBody>
       </p:sp>
@@ -5742,6 +5790,56 @@
             <a:r>
               <a:t>11/24</a:t>
             </a:r>
+          </a:p>
+        </p:txBody>
+      </p:sp>
+      <p:sp>
+        <p:nvSpPr>
+          <p:cNvPr id="35" name="Rectangle 34">
+            <a:extLst>
+              <a:ext uri="{FF2B5EF4-FFF2-40B4-BE49-F238E27FC236}">
+                <a16:creationId xmlns:a16="http://schemas.microsoft.com/office/drawing/2014/main" id="{8D14571F-A54F-4297-F827-ACF10EDACD3E}"/>
+              </a:ext>
+            </a:extLst>
+          </p:cNvPr>
+          <p:cNvSpPr/>
+          <p:nvPr/>
+        </p:nvSpPr>
+        <p:spPr>
+          <a:xfrm>
+            <a:off x="652272" y="548640"/>
+            <a:ext cx="109728" cy="640080"/>
+          </a:xfrm>
+          <a:prstGeom prst="rect">
+            <a:avLst/>
+          </a:prstGeom>
+          <a:solidFill>
+            <a:srgbClr val="00D4FF"/>
+          </a:solidFill>
+          <a:ln>
+            <a:noFill/>
+          </a:ln>
+        </p:spPr>
+        <p:style>
+          <a:lnRef idx="1">
+            <a:schemeClr val="accent1"/>
+          </a:lnRef>
+          <a:fillRef idx="3">
+            <a:schemeClr val="accent1"/>
+          </a:fillRef>
+          <a:effectRef idx="2">
+            <a:schemeClr val="accent1"/>
+          </a:effectRef>
+          <a:fontRef idx="minor">
+            <a:schemeClr val="lt1"/>
+          </a:fontRef>
+        </p:style>
+        <p:txBody>
+          <a:bodyPr rtlCol="0" anchor="ctr"/>
+          <a:lstStyle/>
+          <a:p>
+            <a:pPr algn="ctr"/>
+            <a:endParaRPr/>
           </a:p>
         </p:txBody>
       </p:sp>
@@ -5754,7 +5852,7 @@
 </file>
 
 <file path=ppt/slides/slide12.xml><?xml version="1.0" encoding="utf-8"?>
-<p:sld xmlns:a="http://schemas.openxmlformats.org/drawingml/2006/main" xmlns:p="http://schemas.openxmlformats.org/presentationml/2006/main" xmlns:r="http://schemas.openxmlformats.org/officeDocument/2006/relationships">
+<p:sld xmlns:a="http://schemas.openxmlformats.org/drawingml/2006/main" xmlns:r="http://schemas.openxmlformats.org/officeDocument/2006/relationships" xmlns:p="http://schemas.openxmlformats.org/presentationml/2006/main">
   <p:cSld>
     <p:spTree>
       <p:nvGrpSpPr>
@@ -5762,7 +5860,14 @@
         <p:cNvGrpSpPr/>
         <p:nvPr/>
       </p:nvGrpSpPr>
-      <p:grpSpPr/>
+      <p:grpSpPr>
+        <a:xfrm>
+          <a:off x="0" y="0"/>
+          <a:ext cx="0" cy="0"/>
+          <a:chOff x="0" y="0"/>
+          <a:chExt cx="0" cy="0"/>
+        </a:xfrm>
+      </p:grpSpPr>
       <p:sp>
         <p:nvSpPr>
           <p:cNvPr id="2" name="Rectangle 1"/>
@@ -5803,6 +5908,7 @@
           <a:lstStyle/>
           <a:p>
             <a:pPr algn="ctr"/>
+            <a:endParaRPr/>
           </a:p>
         </p:txBody>
       </p:sp>
@@ -5844,49 +5950,6 @@
       </p:sp>
       <p:sp>
         <p:nvSpPr>
-          <p:cNvPr id="4" name="Rectangle 3"/>
-          <p:cNvSpPr/>
-          <p:nvPr/>
-        </p:nvSpPr>
-        <p:spPr>
-          <a:xfrm>
-            <a:off x="731520" y="960120"/>
-            <a:ext cx="109728" cy="457200"/>
-          </a:xfrm>
-          <a:prstGeom prst="rect">
-            <a:avLst/>
-          </a:prstGeom>
-          <a:solidFill>
-            <a:srgbClr val="00D4FF"/>
-          </a:solidFill>
-          <a:ln>
-            <a:noFill/>
-          </a:ln>
-        </p:spPr>
-        <p:style>
-          <a:lnRef idx="1">
-            <a:schemeClr val="accent1"/>
-          </a:lnRef>
-          <a:fillRef idx="3">
-            <a:schemeClr val="accent1"/>
-          </a:fillRef>
-          <a:effectRef idx="2">
-            <a:schemeClr val="accent1"/>
-          </a:effectRef>
-          <a:fontRef idx="minor">
-            <a:schemeClr val="lt1"/>
-          </a:fontRef>
-        </p:style>
-        <p:txBody>
-          <a:bodyPr rtlCol="0" anchor="ctr"/>
-          <a:lstStyle/>
-          <a:p>
-            <a:pPr algn="ctr"/>
-          </a:p>
-        </p:txBody>
-      </p:sp>
-      <p:sp>
-        <p:nvSpPr>
           <p:cNvPr id="5" name="TextBox 4"/>
           <p:cNvSpPr txBox="1"/>
           <p:nvPr/>
@@ -6132,6 +6195,7 @@
               </a:defRPr>
             </a:pPr>
             <a:r>
+              <a:rPr dirty="0"/>
               <a:t>• Radix UI Components</a:t>
             </a:r>
           </a:p>
@@ -6218,7 +6282,7 @@
         <p:spPr>
           <a:xfrm>
             <a:off x="6492240" y="1737360"/>
-            <a:ext cx="4572000" cy="320040"/>
+            <a:ext cx="5143948" cy="369332"/>
           </a:xfrm>
           <a:prstGeom prst="rect">
             <a:avLst/>
@@ -6240,6 +6304,7 @@
               </a:defRPr>
             </a:pPr>
             <a:r>
+              <a:rPr dirty="0"/>
               <a:t>REST sensors dashboard with real-time updates</a:t>
             </a:r>
           </a:p>
@@ -6398,7 +6463,7 @@
         <p:spPr>
           <a:xfrm>
             <a:off x="5029200" y="2971800"/>
-            <a:ext cx="1463040" cy="320040"/>
+            <a:ext cx="1849718" cy="369332"/>
           </a:xfrm>
           <a:prstGeom prst="rect">
             <a:avLst/>
@@ -6420,6 +6485,7 @@
               </a:defRPr>
             </a:pPr>
             <a:r>
+              <a:rPr dirty="0"/>
               <a:t>Rule Builder</a:t>
             </a:r>
           </a:p>
@@ -6647,6 +6713,7 @@
           <a:lstStyle/>
           <a:p>
             <a:pPr algn="ctr"/>
+            <a:endParaRPr/>
           </a:p>
         </p:txBody>
       </p:sp>
@@ -6694,7 +6761,7 @@
         </p:nvSpPr>
         <p:spPr>
           <a:xfrm>
-            <a:off x="914400" y="4937760"/>
+            <a:off x="929487" y="5029200"/>
             <a:ext cx="10332720" cy="914400"/>
           </a:xfrm>
           <a:prstGeom prst="rect">
@@ -6717,10 +6784,14 @@
               </a:defRPr>
             </a:pPr>
             <a:r>
+              <a:rPr dirty="0"/>
               <a:t>Server-Sent Events (SSE) for live notifications  •  Aggressive polling for sensor updates</a:t>
             </a:r>
-            <a:br/>
-            <a:r>
+            <a:br>
+              <a:rPr dirty="0"/>
+            </a:br>
+            <a:r>
+              <a:rPr dirty="0"/>
               <a:t>React state management for instant UI feedback  •  Recharts for live data visualization</a:t>
             </a:r>
           </a:p>
@@ -6759,6 +6830,56 @@
             <a:r>
               <a:t>12/24</a:t>
             </a:r>
+          </a:p>
+        </p:txBody>
+      </p:sp>
+      <p:sp>
+        <p:nvSpPr>
+          <p:cNvPr id="29" name="Rectangle 28">
+            <a:extLst>
+              <a:ext uri="{FF2B5EF4-FFF2-40B4-BE49-F238E27FC236}">
+                <a16:creationId xmlns:a16="http://schemas.microsoft.com/office/drawing/2014/main" id="{CBF0776B-8405-37F6-1920-E91D0E5BFDFC}"/>
+              </a:ext>
+            </a:extLst>
+          </p:cNvPr>
+          <p:cNvSpPr/>
+          <p:nvPr/>
+        </p:nvSpPr>
+        <p:spPr>
+          <a:xfrm>
+            <a:off x="652272" y="548640"/>
+            <a:ext cx="109728" cy="640080"/>
+          </a:xfrm>
+          <a:prstGeom prst="rect">
+            <a:avLst/>
+          </a:prstGeom>
+          <a:solidFill>
+            <a:srgbClr val="00D4FF"/>
+          </a:solidFill>
+          <a:ln>
+            <a:noFill/>
+          </a:ln>
+        </p:spPr>
+        <p:style>
+          <a:lnRef idx="1">
+            <a:schemeClr val="accent1"/>
+          </a:lnRef>
+          <a:fillRef idx="3">
+            <a:schemeClr val="accent1"/>
+          </a:fillRef>
+          <a:effectRef idx="2">
+            <a:schemeClr val="accent1"/>
+          </a:effectRef>
+          <a:fontRef idx="minor">
+            <a:schemeClr val="lt1"/>
+          </a:fontRef>
+        </p:style>
+        <p:txBody>
+          <a:bodyPr rtlCol="0" anchor="ctr"/>
+          <a:lstStyle/>
+          <a:p>
+            <a:pPr algn="ctr"/>
+            <a:endParaRPr/>
           </a:p>
         </p:txBody>
       </p:sp>
@@ -6771,7 +6892,7 @@
 </file>
 
 <file path=ppt/slides/slide13.xml><?xml version="1.0" encoding="utf-8"?>
-<p:sld xmlns:a="http://schemas.openxmlformats.org/drawingml/2006/main" xmlns:p="http://schemas.openxmlformats.org/presentationml/2006/main" xmlns:r="http://schemas.openxmlformats.org/officeDocument/2006/relationships">
+<p:sld xmlns:a="http://schemas.openxmlformats.org/drawingml/2006/main" xmlns:r="http://schemas.openxmlformats.org/officeDocument/2006/relationships" xmlns:p="http://schemas.openxmlformats.org/presentationml/2006/main">
   <p:cSld>
     <p:spTree>
       <p:nvGrpSpPr>
@@ -6779,7 +6900,14 @@
         <p:cNvGrpSpPr/>
         <p:nvPr/>
       </p:nvGrpSpPr>
-      <p:grpSpPr/>
+      <p:grpSpPr>
+        <a:xfrm>
+          <a:off x="0" y="0"/>
+          <a:ext cx="0" cy="0"/>
+          <a:chOff x="0" y="0"/>
+          <a:chExt cx="0" cy="0"/>
+        </a:xfrm>
+      </p:grpSpPr>
       <p:sp>
         <p:nvSpPr>
           <p:cNvPr id="2" name="Rectangle 1"/>
@@ -6819,7 +6947,37 @@
           <a:bodyPr rtlCol="0" anchor="ctr"/>
           <a:lstStyle/>
           <a:p>
-            <a:pPr algn="ctr"/>
+            <a:pPr marL="0" marR="0" lvl="0" indent="0" algn="ctr" defTabSz="457200" rtl="0" eaLnBrk="1" fontAlgn="auto" latinLnBrk="0" hangingPunct="1">
+              <a:lnSpc>
+                <a:spcPct val="100000"/>
+              </a:lnSpc>
+              <a:spcBef>
+                <a:spcPts val="0"/>
+              </a:spcBef>
+              <a:spcAft>
+                <a:spcPts val="0"/>
+              </a:spcAft>
+              <a:buClrTx/>
+              <a:buSzTx/>
+              <a:buFontTx/>
+              <a:buNone/>
+              <a:tabLst/>
+              <a:defRPr/>
+            </a:pPr>
+            <a:endParaRPr kumimoji="0" sz="1800" b="0" i="0" u="none" strike="noStrike" kern="1200" cap="none" spc="0" normalizeH="0" baseline="0" noProof="0">
+              <a:ln>
+                <a:noFill/>
+              </a:ln>
+              <a:solidFill>
+                <a:prstClr val="white"/>
+              </a:solidFill>
+              <a:effectLst/>
+              <a:uLnTx/>
+              <a:uFillTx/>
+              <a:latin typeface="Calibri"/>
+              <a:ea typeface="+mn-ea"/>
+              <a:cs typeface="+mn-cs"/>
+            </a:endParaRPr>
           </a:p>
         </p:txBody>
       </p:sp>
@@ -6845,7 +7003,21 @@
           </a:bodyPr>
           <a:lstStyle/>
           <a:p>
-            <a:pPr algn="l">
+            <a:pPr marL="0" marR="0" lvl="0" indent="0" algn="l" defTabSz="457200" rtl="0" eaLnBrk="1" fontAlgn="auto" latinLnBrk="0" hangingPunct="1">
+              <a:lnSpc>
+                <a:spcPct val="100000"/>
+              </a:lnSpc>
+              <a:spcBef>
+                <a:spcPts val="0"/>
+              </a:spcBef>
+              <a:spcAft>
+                <a:spcPts val="0"/>
+              </a:spcAft>
+              <a:buClrTx/>
+              <a:buSzTx/>
+              <a:buFontTx/>
+              <a:buNone/>
+              <a:tabLst/>
               <a:defRPr sz="4400" b="1" i="0">
                 <a:solidFill>
                   <a:srgbClr val="FFFFFF"/>
@@ -6854,6 +7026,20 @@
               </a:defRPr>
             </a:pPr>
             <a:r>
+              <a:rPr kumimoji="0" sz="4400" b="1" i="0" u="none" strike="noStrike" kern="1200" cap="none" spc="0" normalizeH="0" baseline="0" noProof="0">
+                <a:ln>
+                  <a:noFill/>
+                </a:ln>
+                <a:solidFill>
+                  <a:srgbClr val="FFFFFF"/>
+                </a:solidFill>
+                <a:effectLst/>
+                <a:uLnTx/>
+                <a:uFillTx/>
+                <a:latin typeface="Segoe UI"/>
+                <a:ea typeface="+mn-ea"/>
+                <a:cs typeface="+mn-cs"/>
+              </a:rPr>
               <a:t>Sensors Dashboard</a:t>
             </a:r>
           </a:p>
@@ -6861,56 +7047,13 @@
       </p:sp>
       <p:sp>
         <p:nvSpPr>
-          <p:cNvPr id="4" name="Rectangle 3"/>
-          <p:cNvSpPr/>
-          <p:nvPr/>
-        </p:nvSpPr>
-        <p:spPr>
-          <a:xfrm>
-            <a:off x="731520" y="777240"/>
-            <a:ext cx="91440" cy="365760"/>
-          </a:xfrm>
-          <a:prstGeom prst="rect">
-            <a:avLst/>
-          </a:prstGeom>
-          <a:solidFill>
-            <a:srgbClr val="00D4FF"/>
-          </a:solidFill>
-          <a:ln>
-            <a:noFill/>
-          </a:ln>
-        </p:spPr>
-        <p:style>
-          <a:lnRef idx="1">
-            <a:schemeClr val="accent1"/>
-          </a:lnRef>
-          <a:fillRef idx="3">
-            <a:schemeClr val="accent1"/>
-          </a:fillRef>
-          <a:effectRef idx="2">
-            <a:schemeClr val="accent1"/>
-          </a:effectRef>
-          <a:fontRef idx="minor">
-            <a:schemeClr val="lt1"/>
-          </a:fontRef>
-        </p:style>
-        <p:txBody>
-          <a:bodyPr rtlCol="0" anchor="ctr"/>
-          <a:lstStyle/>
-          <a:p>
-            <a:pPr algn="ctr"/>
-          </a:p>
-        </p:txBody>
-      </p:sp>
-      <p:sp>
-        <p:nvSpPr>
           <p:cNvPr id="5" name="TextBox 4"/>
           <p:cNvSpPr txBox="1"/>
           <p:nvPr/>
         </p:nvSpPr>
         <p:spPr>
           <a:xfrm>
-            <a:off x="1828800" y="274320"/>
+            <a:off x="776377" y="1041746"/>
             <a:ext cx="9144000" cy="457200"/>
           </a:xfrm>
           <a:prstGeom prst="rect">
@@ -6924,7 +7067,21 @@
           </a:bodyPr>
           <a:lstStyle/>
           <a:p>
-            <a:pPr algn="l">
+            <a:pPr marL="0" marR="0" lvl="0" indent="0" algn="l" defTabSz="457200" rtl="0" eaLnBrk="1" fontAlgn="auto" latinLnBrk="0" hangingPunct="1">
+              <a:lnSpc>
+                <a:spcPct val="100000"/>
+              </a:lnSpc>
+              <a:spcBef>
+                <a:spcPts val="0"/>
+              </a:spcBef>
+              <a:spcAft>
+                <a:spcPts val="0"/>
+              </a:spcAft>
+              <a:buClrTx/>
+              <a:buSzTx/>
+              <a:buFontTx/>
+              <a:buNone/>
+              <a:tabLst/>
               <a:defRPr sz="1600" b="0" i="0">
                 <a:solidFill>
                   <a:srgbClr val="6B6B80"/>
@@ -6933,6 +7090,20 @@
               </a:defRPr>
             </a:pPr>
             <a:r>
+              <a:rPr kumimoji="0" sz="1600" b="0" i="0" u="none" strike="noStrike" kern="1200" cap="none" spc="0" normalizeH="0" baseline="0" noProof="0" dirty="0">
+                <a:ln>
+                  <a:noFill/>
+                </a:ln>
+                <a:solidFill>
+                  <a:srgbClr val="6B6B80"/>
+                </a:solidFill>
+                <a:effectLst/>
+                <a:uLnTx/>
+                <a:uFillTx/>
+                <a:latin typeface="Segoe UI"/>
+                <a:ea typeface="+mn-ea"/>
+                <a:cs typeface="+mn-cs"/>
+              </a:rPr>
               <a:t>Real-time REST sensor monitoring with status indicators</a:t>
             </a:r>
           </a:p>
@@ -6954,8 +7125,8 @@
         </p:blipFill>
         <p:spPr>
           <a:xfrm>
-            <a:off x="457200" y="1097280"/>
-            <a:ext cx="11247120" cy="5557171"/>
+            <a:off x="1567132" y="1739877"/>
+            <a:ext cx="8945592" cy="4419992"/>
           </a:xfrm>
           <a:prstGeom prst="rect">
             <a:avLst/>
@@ -6984,7 +7155,21 @@
           </a:bodyPr>
           <a:lstStyle/>
           <a:p>
-            <a:pPr algn="r">
+            <a:pPr marL="0" marR="0" lvl="0" indent="0" algn="r" defTabSz="457200" rtl="0" eaLnBrk="1" fontAlgn="auto" latinLnBrk="0" hangingPunct="1">
+              <a:lnSpc>
+                <a:spcPct val="100000"/>
+              </a:lnSpc>
+              <a:spcBef>
+                <a:spcPts val="0"/>
+              </a:spcBef>
+              <a:spcAft>
+                <a:spcPts val="0"/>
+              </a:spcAft>
+              <a:buClrTx/>
+              <a:buSzTx/>
+              <a:buFontTx/>
+              <a:buNone/>
+              <a:tabLst/>
               <a:defRPr sz="1400" b="0" i="0">
                 <a:solidFill>
                   <a:srgbClr val="6B6B80"/>
@@ -6993,8 +7178,101 @@
               </a:defRPr>
             </a:pPr>
             <a:r>
-              <a:t>13/24</a:t>
-            </a:r>
+              <a:rPr kumimoji="0" sz="1400" b="0" i="0" u="none" strike="noStrike" kern="1200" cap="none" spc="0" normalizeH="0" baseline="0" noProof="0">
+                <a:ln>
+                  <a:noFill/>
+                </a:ln>
+                <a:solidFill>
+                  <a:srgbClr val="6B6B80"/>
+                </a:solidFill>
+                <a:effectLst/>
+                <a:uLnTx/>
+                <a:uFillTx/>
+                <a:latin typeface="Segoe UI"/>
+                <a:ea typeface="+mn-ea"/>
+                <a:cs typeface="+mn-cs"/>
+              </a:rPr>
+              <a:t>11/22</a:t>
+            </a:r>
+          </a:p>
+        </p:txBody>
+      </p:sp>
+      <p:sp>
+        <p:nvSpPr>
+          <p:cNvPr id="8" name="Rectangle 7">
+            <a:extLst>
+              <a:ext uri="{FF2B5EF4-FFF2-40B4-BE49-F238E27FC236}">
+                <a16:creationId xmlns:a16="http://schemas.microsoft.com/office/drawing/2014/main" id="{6541D0D0-24FF-96D2-BAFE-5BA9FF26F664}"/>
+              </a:ext>
+            </a:extLst>
+          </p:cNvPr>
+          <p:cNvSpPr/>
+          <p:nvPr/>
+        </p:nvSpPr>
+        <p:spPr>
+          <a:xfrm>
+            <a:off x="621792" y="411480"/>
+            <a:ext cx="109728" cy="640080"/>
+          </a:xfrm>
+          <a:prstGeom prst="rect">
+            <a:avLst/>
+          </a:prstGeom>
+          <a:solidFill>
+            <a:srgbClr val="00D4FF"/>
+          </a:solidFill>
+          <a:ln>
+            <a:noFill/>
+          </a:ln>
+        </p:spPr>
+        <p:style>
+          <a:lnRef idx="1">
+            <a:schemeClr val="accent1"/>
+          </a:lnRef>
+          <a:fillRef idx="3">
+            <a:schemeClr val="accent1"/>
+          </a:fillRef>
+          <a:effectRef idx="2">
+            <a:schemeClr val="accent1"/>
+          </a:effectRef>
+          <a:fontRef idx="minor">
+            <a:schemeClr val="lt1"/>
+          </a:fontRef>
+        </p:style>
+        <p:txBody>
+          <a:bodyPr rtlCol="0" anchor="ctr"/>
+          <a:lstStyle/>
+          <a:p>
+            <a:pPr marL="0" marR="0" lvl="0" indent="0" algn="ctr" defTabSz="457200" rtl="0" eaLnBrk="1" fontAlgn="auto" latinLnBrk="0" hangingPunct="1">
+              <a:lnSpc>
+                <a:spcPct val="100000"/>
+              </a:lnSpc>
+              <a:spcBef>
+                <a:spcPts val="0"/>
+              </a:spcBef>
+              <a:spcAft>
+                <a:spcPts val="0"/>
+              </a:spcAft>
+              <a:buClrTx/>
+              <a:buSzTx/>
+              <a:buFontTx/>
+              <a:buNone/>
+              <a:tabLst/>
+              <a:defRPr/>
+            </a:pPr>
+            <a:endParaRPr kumimoji="0" sz="1800" b="0" i="0" u="none" strike="noStrike" kern="1200" cap="none" spc="0" normalizeH="0" baseline="0" noProof="0">
+              <a:ln>
+                <a:noFill/>
+              </a:ln>
+              <a:solidFill>
+                <a:prstClr val="white"/>
+              </a:solidFill>
+              <a:effectLst/>
+              <a:uLnTx/>
+              <a:uFillTx/>
+              <a:latin typeface="Calibri"/>
+              <a:ea typeface="+mn-ea"/>
+              <a:cs typeface="+mn-cs"/>
+            </a:endParaRPr>
           </a:p>
         </p:txBody>
       </p:sp>
@@ -7007,7 +7285,7 @@
 </file>
 
 <file path=ppt/slides/slide14.xml><?xml version="1.0" encoding="utf-8"?>
-<p:sld xmlns:a="http://schemas.openxmlformats.org/drawingml/2006/main" xmlns:p="http://schemas.openxmlformats.org/presentationml/2006/main" xmlns:r="http://schemas.openxmlformats.org/officeDocument/2006/relationships">
+<p:sld xmlns:a="http://schemas.openxmlformats.org/drawingml/2006/main" xmlns:r="http://schemas.openxmlformats.org/officeDocument/2006/relationships" xmlns:p="http://schemas.openxmlformats.org/presentationml/2006/main">
   <p:cSld>
     <p:spTree>
       <p:nvGrpSpPr>
@@ -7015,7 +7293,14 @@
         <p:cNvGrpSpPr/>
         <p:nvPr/>
       </p:nvGrpSpPr>
-      <p:grpSpPr/>
+      <p:grpSpPr>
+        <a:xfrm>
+          <a:off x="0" y="0"/>
+          <a:ext cx="0" cy="0"/>
+          <a:chOff x="0" y="0"/>
+          <a:chExt cx="0" cy="0"/>
+        </a:xfrm>
+      </p:grpSpPr>
       <p:sp>
         <p:nvSpPr>
           <p:cNvPr id="2" name="Rectangle 1"/>
@@ -7055,7 +7340,37 @@
           <a:bodyPr rtlCol="0" anchor="ctr"/>
           <a:lstStyle/>
           <a:p>
-            <a:pPr algn="ctr"/>
+            <a:pPr marL="0" marR="0" lvl="0" indent="0" algn="ctr" defTabSz="457200" rtl="0" eaLnBrk="1" fontAlgn="auto" latinLnBrk="0" hangingPunct="1">
+              <a:lnSpc>
+                <a:spcPct val="100000"/>
+              </a:lnSpc>
+              <a:spcBef>
+                <a:spcPts val="0"/>
+              </a:spcBef>
+              <a:spcAft>
+                <a:spcPts val="0"/>
+              </a:spcAft>
+              <a:buClrTx/>
+              <a:buSzTx/>
+              <a:buFontTx/>
+              <a:buNone/>
+              <a:tabLst/>
+              <a:defRPr/>
+            </a:pPr>
+            <a:endParaRPr kumimoji="0" sz="1800" b="0" i="0" u="none" strike="noStrike" kern="1200" cap="none" spc="0" normalizeH="0" baseline="0" noProof="0">
+              <a:ln>
+                <a:noFill/>
+              </a:ln>
+              <a:solidFill>
+                <a:prstClr val="white"/>
+              </a:solidFill>
+              <a:effectLst/>
+              <a:uLnTx/>
+              <a:uFillTx/>
+              <a:latin typeface="Calibri"/>
+              <a:ea typeface="+mn-ea"/>
+              <a:cs typeface="+mn-cs"/>
+            </a:endParaRPr>
           </a:p>
         </p:txBody>
       </p:sp>
@@ -7081,7 +7396,21 @@
           </a:bodyPr>
           <a:lstStyle/>
           <a:p>
-            <a:pPr algn="l">
+            <a:pPr marL="0" marR="0" lvl="0" indent="0" algn="l" defTabSz="457200" rtl="0" eaLnBrk="1" fontAlgn="auto" latinLnBrk="0" hangingPunct="1">
+              <a:lnSpc>
+                <a:spcPct val="100000"/>
+              </a:lnSpc>
+              <a:spcBef>
+                <a:spcPts val="0"/>
+              </a:spcBef>
+              <a:spcAft>
+                <a:spcPts val="0"/>
+              </a:spcAft>
+              <a:buClrTx/>
+              <a:buSzTx/>
+              <a:buFontTx/>
+              <a:buNone/>
+              <a:tabLst/>
               <a:defRPr sz="4400" b="1" i="0">
                 <a:solidFill>
                   <a:srgbClr val="FFFFFF"/>
@@ -7090,6 +7419,20 @@
               </a:defRPr>
             </a:pPr>
             <a:r>
+              <a:rPr kumimoji="0" sz="4400" b="1" i="0" u="none" strike="noStrike" kern="1200" cap="none" spc="0" normalizeH="0" baseline="0" noProof="0">
+                <a:ln>
+                  <a:noFill/>
+                </a:ln>
+                <a:solidFill>
+                  <a:srgbClr val="FFFFFF"/>
+                </a:solidFill>
+                <a:effectLst/>
+                <a:uLnTx/>
+                <a:uFillTx/>
+                <a:latin typeface="Segoe UI"/>
+                <a:ea typeface="+mn-ea"/>
+                <a:cs typeface="+mn-cs"/>
+              </a:rPr>
               <a:t>Telemetry Streaming</a:t>
             </a:r>
           </a:p>
@@ -7097,56 +7440,13 @@
       </p:sp>
       <p:sp>
         <p:nvSpPr>
-          <p:cNvPr id="4" name="Rectangle 3"/>
-          <p:cNvSpPr/>
-          <p:nvPr/>
-        </p:nvSpPr>
-        <p:spPr>
-          <a:xfrm>
-            <a:off x="731520" y="777240"/>
-            <a:ext cx="91440" cy="365760"/>
-          </a:xfrm>
-          <a:prstGeom prst="rect">
-            <a:avLst/>
-          </a:prstGeom>
-          <a:solidFill>
-            <a:srgbClr val="00D4FF"/>
-          </a:solidFill>
-          <a:ln>
-            <a:noFill/>
-          </a:ln>
-        </p:spPr>
-        <p:style>
-          <a:lnRef idx="1">
-            <a:schemeClr val="accent1"/>
-          </a:lnRef>
-          <a:fillRef idx="3">
-            <a:schemeClr val="accent1"/>
-          </a:fillRef>
-          <a:effectRef idx="2">
-            <a:schemeClr val="accent1"/>
-          </a:effectRef>
-          <a:fontRef idx="minor">
-            <a:schemeClr val="lt1"/>
-          </a:fontRef>
-        </p:style>
-        <p:txBody>
-          <a:bodyPr rtlCol="0" anchor="ctr"/>
-          <a:lstStyle/>
-          <a:p>
-            <a:pPr algn="ctr"/>
-          </a:p>
-        </p:txBody>
-      </p:sp>
-      <p:sp>
-        <p:nvSpPr>
           <p:cNvPr id="5" name="TextBox 4"/>
           <p:cNvSpPr txBox="1"/>
           <p:nvPr/>
         </p:nvSpPr>
         <p:spPr>
           <a:xfrm>
-            <a:off x="2560320" y="274320"/>
+            <a:off x="731520" y="1005840"/>
             <a:ext cx="9144000" cy="457200"/>
           </a:xfrm>
           <a:prstGeom prst="rect">
@@ -7160,7 +7460,21 @@
           </a:bodyPr>
           <a:lstStyle/>
           <a:p>
-            <a:pPr algn="l">
+            <a:pPr marL="0" marR="0" lvl="0" indent="0" algn="l" defTabSz="457200" rtl="0" eaLnBrk="1" fontAlgn="auto" latinLnBrk="0" hangingPunct="1">
+              <a:lnSpc>
+                <a:spcPct val="100000"/>
+              </a:lnSpc>
+              <a:spcBef>
+                <a:spcPts val="0"/>
+              </a:spcBef>
+              <a:spcAft>
+                <a:spcPts val="0"/>
+              </a:spcAft>
+              <a:buClrTx/>
+              <a:buSzTx/>
+              <a:buFontTx/>
+              <a:buNone/>
+              <a:tabLst/>
               <a:defRPr sz="1600" b="0" i="0">
                 <a:solidFill>
                   <a:srgbClr val="6B6B80"/>
@@ -7169,6 +7483,20 @@
               </a:defRPr>
             </a:pPr>
             <a:r>
+              <a:rPr kumimoji="0" sz="1600" b="0" i="0" u="none" strike="noStrike" kern="1200" cap="none" spc="0" normalizeH="0" baseline="0" noProof="0" dirty="0">
+                <a:ln>
+                  <a:noFill/>
+                </a:ln>
+                <a:solidFill>
+                  <a:srgbClr val="6B6B80"/>
+                </a:solidFill>
+                <a:effectLst/>
+                <a:uLnTx/>
+                <a:uFillTx/>
+                <a:latin typeface="Segoe UI"/>
+                <a:ea typeface="+mn-ea"/>
+                <a:cs typeface="+mn-cs"/>
+              </a:rPr>
               <a:t>SSE-powered live data visualization</a:t>
             </a:r>
           </a:p>
@@ -7190,8 +7518,8 @@
         </p:blipFill>
         <p:spPr>
           <a:xfrm>
-            <a:off x="457200" y="1097280"/>
-            <a:ext cx="11247120" cy="5557171"/>
+            <a:off x="1623051" y="1740508"/>
+            <a:ext cx="8945592" cy="4419993"/>
           </a:xfrm>
           <a:prstGeom prst="rect">
             <a:avLst/>
@@ -7220,7 +7548,21 @@
           </a:bodyPr>
           <a:lstStyle/>
           <a:p>
-            <a:pPr algn="r">
+            <a:pPr marL="0" marR="0" lvl="0" indent="0" algn="r" defTabSz="457200" rtl="0" eaLnBrk="1" fontAlgn="auto" latinLnBrk="0" hangingPunct="1">
+              <a:lnSpc>
+                <a:spcPct val="100000"/>
+              </a:lnSpc>
+              <a:spcBef>
+                <a:spcPts val="0"/>
+              </a:spcBef>
+              <a:spcAft>
+                <a:spcPts val="0"/>
+              </a:spcAft>
+              <a:buClrTx/>
+              <a:buSzTx/>
+              <a:buFontTx/>
+              <a:buNone/>
+              <a:tabLst/>
               <a:defRPr sz="1400" b="0" i="0">
                 <a:solidFill>
                   <a:srgbClr val="6B6B80"/>
@@ -7229,8 +7571,101 @@
               </a:defRPr>
             </a:pPr>
             <a:r>
-              <a:t>14/24</a:t>
-            </a:r>
+              <a:rPr kumimoji="0" sz="1400" b="0" i="0" u="none" strike="noStrike" kern="1200" cap="none" spc="0" normalizeH="0" baseline="0" noProof="0">
+                <a:ln>
+                  <a:noFill/>
+                </a:ln>
+                <a:solidFill>
+                  <a:srgbClr val="6B6B80"/>
+                </a:solidFill>
+                <a:effectLst/>
+                <a:uLnTx/>
+                <a:uFillTx/>
+                <a:latin typeface="Segoe UI"/>
+                <a:ea typeface="+mn-ea"/>
+                <a:cs typeface="+mn-cs"/>
+              </a:rPr>
+              <a:t>12/22</a:t>
+            </a:r>
+          </a:p>
+        </p:txBody>
+      </p:sp>
+      <p:sp>
+        <p:nvSpPr>
+          <p:cNvPr id="8" name="Rectangle 7">
+            <a:extLst>
+              <a:ext uri="{FF2B5EF4-FFF2-40B4-BE49-F238E27FC236}">
+                <a16:creationId xmlns:a16="http://schemas.microsoft.com/office/drawing/2014/main" id="{5E921D5D-617A-23F4-22E1-3CBEF8E321D8}"/>
+              </a:ext>
+            </a:extLst>
+          </p:cNvPr>
+          <p:cNvSpPr/>
+          <p:nvPr/>
+        </p:nvSpPr>
+        <p:spPr>
+          <a:xfrm>
+            <a:off x="621792" y="411480"/>
+            <a:ext cx="109728" cy="640080"/>
+          </a:xfrm>
+          <a:prstGeom prst="rect">
+            <a:avLst/>
+          </a:prstGeom>
+          <a:solidFill>
+            <a:srgbClr val="00D4FF"/>
+          </a:solidFill>
+          <a:ln>
+            <a:noFill/>
+          </a:ln>
+        </p:spPr>
+        <p:style>
+          <a:lnRef idx="1">
+            <a:schemeClr val="accent1"/>
+          </a:lnRef>
+          <a:fillRef idx="3">
+            <a:schemeClr val="accent1"/>
+          </a:fillRef>
+          <a:effectRef idx="2">
+            <a:schemeClr val="accent1"/>
+          </a:effectRef>
+          <a:fontRef idx="minor">
+            <a:schemeClr val="lt1"/>
+          </a:fontRef>
+        </p:style>
+        <p:txBody>
+          <a:bodyPr rtlCol="0" anchor="ctr"/>
+          <a:lstStyle/>
+          <a:p>
+            <a:pPr marL="0" marR="0" lvl="0" indent="0" algn="ctr" defTabSz="457200" rtl="0" eaLnBrk="1" fontAlgn="auto" latinLnBrk="0" hangingPunct="1">
+              <a:lnSpc>
+                <a:spcPct val="100000"/>
+              </a:lnSpc>
+              <a:spcBef>
+                <a:spcPts val="0"/>
+              </a:spcBef>
+              <a:spcAft>
+                <a:spcPts val="0"/>
+              </a:spcAft>
+              <a:buClrTx/>
+              <a:buSzTx/>
+              <a:buFontTx/>
+              <a:buNone/>
+              <a:tabLst/>
+              <a:defRPr/>
+            </a:pPr>
+            <a:endParaRPr kumimoji="0" sz="1800" b="0" i="0" u="none" strike="noStrike" kern="1200" cap="none" spc="0" normalizeH="0" baseline="0" noProof="0">
+              <a:ln>
+                <a:noFill/>
+              </a:ln>
+              <a:solidFill>
+                <a:prstClr val="white"/>
+              </a:solidFill>
+              <a:effectLst/>
+              <a:uLnTx/>
+              <a:uFillTx/>
+              <a:latin typeface="Calibri"/>
+              <a:ea typeface="+mn-ea"/>
+              <a:cs typeface="+mn-cs"/>
+            </a:endParaRPr>
           </a:p>
         </p:txBody>
       </p:sp>
@@ -7243,7 +7678,7 @@
 </file>
 
 <file path=ppt/slides/slide15.xml><?xml version="1.0" encoding="utf-8"?>
-<p:sld xmlns:a="http://schemas.openxmlformats.org/drawingml/2006/main" xmlns:p="http://schemas.openxmlformats.org/presentationml/2006/main" xmlns:r="http://schemas.openxmlformats.org/officeDocument/2006/relationships">
+<p:sld xmlns:a="http://schemas.openxmlformats.org/drawingml/2006/main" xmlns:r="http://schemas.openxmlformats.org/officeDocument/2006/relationships" xmlns:p="http://schemas.openxmlformats.org/presentationml/2006/main">
   <p:cSld>
     <p:spTree>
       <p:nvGrpSpPr>
@@ -7251,7 +7686,14 @@
         <p:cNvGrpSpPr/>
         <p:nvPr/>
       </p:nvGrpSpPr>
-      <p:grpSpPr/>
+      <p:grpSpPr>
+        <a:xfrm>
+          <a:off x="0" y="0"/>
+          <a:ext cx="0" cy="0"/>
+          <a:chOff x="0" y="0"/>
+          <a:chExt cx="0" cy="0"/>
+        </a:xfrm>
+      </p:grpSpPr>
       <p:sp>
         <p:nvSpPr>
           <p:cNvPr id="2" name="Rectangle 1"/>
@@ -7291,7 +7733,37 @@
           <a:bodyPr rtlCol="0" anchor="ctr"/>
           <a:lstStyle/>
           <a:p>
-            <a:pPr algn="ctr"/>
+            <a:pPr marL="0" marR="0" lvl="0" indent="0" algn="ctr" defTabSz="457200" rtl="0" eaLnBrk="1" fontAlgn="auto" latinLnBrk="0" hangingPunct="1">
+              <a:lnSpc>
+                <a:spcPct val="100000"/>
+              </a:lnSpc>
+              <a:spcBef>
+                <a:spcPts val="0"/>
+              </a:spcBef>
+              <a:spcAft>
+                <a:spcPts val="0"/>
+              </a:spcAft>
+              <a:buClrTx/>
+              <a:buSzTx/>
+              <a:buFontTx/>
+              <a:buNone/>
+              <a:tabLst/>
+              <a:defRPr/>
+            </a:pPr>
+            <a:endParaRPr kumimoji="0" sz="1800" b="0" i="0" u="none" strike="noStrike" kern="1200" cap="none" spc="0" normalizeH="0" baseline="0" noProof="0">
+              <a:ln>
+                <a:noFill/>
+              </a:ln>
+              <a:solidFill>
+                <a:prstClr val="white"/>
+              </a:solidFill>
+              <a:effectLst/>
+              <a:uLnTx/>
+              <a:uFillTx/>
+              <a:latin typeface="Calibri"/>
+              <a:ea typeface="+mn-ea"/>
+              <a:cs typeface="+mn-cs"/>
+            </a:endParaRPr>
           </a:p>
         </p:txBody>
       </p:sp>
@@ -7317,7 +7789,21 @@
           </a:bodyPr>
           <a:lstStyle/>
           <a:p>
-            <a:pPr algn="l">
+            <a:pPr marL="0" marR="0" lvl="0" indent="0" algn="l" defTabSz="457200" rtl="0" eaLnBrk="1" fontAlgn="auto" latinLnBrk="0" hangingPunct="1">
+              <a:lnSpc>
+                <a:spcPct val="100000"/>
+              </a:lnSpc>
+              <a:spcBef>
+                <a:spcPts val="0"/>
+              </a:spcBef>
+              <a:spcAft>
+                <a:spcPts val="0"/>
+              </a:spcAft>
+              <a:buClrTx/>
+              <a:buSzTx/>
+              <a:buFontTx/>
+              <a:buNone/>
+              <a:tabLst/>
               <a:defRPr sz="4400" b="1" i="0">
                 <a:solidFill>
                   <a:srgbClr val="FFFFFF"/>
@@ -7326,6 +7812,20 @@
               </a:defRPr>
             </a:pPr>
             <a:r>
+              <a:rPr kumimoji="0" sz="4400" b="1" i="0" u="none" strike="noStrike" kern="1200" cap="none" spc="0" normalizeH="0" baseline="0" noProof="0">
+                <a:ln>
+                  <a:noFill/>
+                </a:ln>
+                <a:solidFill>
+                  <a:srgbClr val="FFFFFF"/>
+                </a:solidFill>
+                <a:effectLst/>
+                <a:uLnTx/>
+                <a:uFillTx/>
+                <a:latin typeface="Segoe UI"/>
+                <a:ea typeface="+mn-ea"/>
+                <a:cs typeface="+mn-cs"/>
+              </a:rPr>
               <a:t>Actuator Control</a:t>
             </a:r>
           </a:p>
@@ -7333,56 +7833,13 @@
       </p:sp>
       <p:sp>
         <p:nvSpPr>
-          <p:cNvPr id="4" name="Rectangle 3"/>
-          <p:cNvSpPr/>
-          <p:nvPr/>
-        </p:nvSpPr>
-        <p:spPr>
-          <a:xfrm>
-            <a:off x="731520" y="777240"/>
-            <a:ext cx="91440" cy="365760"/>
-          </a:xfrm>
-          <a:prstGeom prst="rect">
-            <a:avLst/>
-          </a:prstGeom>
-          <a:solidFill>
-            <a:srgbClr val="00D4FF"/>
-          </a:solidFill>
-          <a:ln>
-            <a:noFill/>
-          </a:ln>
-        </p:spPr>
-        <p:style>
-          <a:lnRef idx="1">
-            <a:schemeClr val="accent1"/>
-          </a:lnRef>
-          <a:fillRef idx="3">
-            <a:schemeClr val="accent1"/>
-          </a:fillRef>
-          <a:effectRef idx="2">
-            <a:schemeClr val="accent1"/>
-          </a:effectRef>
-          <a:fontRef idx="minor">
-            <a:schemeClr val="lt1"/>
-          </a:fontRef>
-        </p:style>
-        <p:txBody>
-          <a:bodyPr rtlCol="0" anchor="ctr"/>
-          <a:lstStyle/>
-          <a:p>
-            <a:pPr algn="ctr"/>
-          </a:p>
-        </p:txBody>
-      </p:sp>
-      <p:sp>
-        <p:nvSpPr>
           <p:cNvPr id="5" name="TextBox 4"/>
           <p:cNvSpPr txBox="1"/>
           <p:nvPr/>
         </p:nvSpPr>
         <p:spPr>
           <a:xfrm>
-            <a:off x="2286000" y="274320"/>
+            <a:off x="762000" y="993007"/>
             <a:ext cx="9144000" cy="457200"/>
           </a:xfrm>
           <a:prstGeom prst="rect">
@@ -7396,7 +7853,21 @@
           </a:bodyPr>
           <a:lstStyle/>
           <a:p>
-            <a:pPr algn="l">
+            <a:pPr marL="0" marR="0" lvl="0" indent="0" algn="l" defTabSz="457200" rtl="0" eaLnBrk="1" fontAlgn="auto" latinLnBrk="0" hangingPunct="1">
+              <a:lnSpc>
+                <a:spcPct val="100000"/>
+              </a:lnSpc>
+              <a:spcBef>
+                <a:spcPts val="0"/>
+              </a:spcBef>
+              <a:spcAft>
+                <a:spcPts val="0"/>
+              </a:spcAft>
+              <a:buClrTx/>
+              <a:buSzTx/>
+              <a:buFontTx/>
+              <a:buNone/>
+              <a:tabLst/>
               <a:defRPr sz="1600" b="0" i="0">
                 <a:solidFill>
                   <a:srgbClr val="6B6B80"/>
@@ -7405,6 +7876,20 @@
               </a:defRPr>
             </a:pPr>
             <a:r>
+              <a:rPr kumimoji="0" sz="1600" b="0" i="0" u="none" strike="noStrike" kern="1200" cap="none" spc="0" normalizeH="0" baseline="0" noProof="0" dirty="0">
+                <a:ln>
+                  <a:noFill/>
+                </a:ln>
+                <a:solidFill>
+                  <a:srgbClr val="6B6B80"/>
+                </a:solidFill>
+                <a:effectLst/>
+                <a:uLnTx/>
+                <a:uFillTx/>
+                <a:latin typeface="Segoe UI"/>
+                <a:ea typeface="+mn-ea"/>
+                <a:cs typeface="+mn-cs"/>
+              </a:rPr>
               <a:t>Manual control and command history audit trail</a:t>
             </a:r>
           </a:p>
@@ -7426,8 +7911,8 @@
         </p:blipFill>
         <p:spPr>
           <a:xfrm>
-            <a:off x="457200" y="1097280"/>
-            <a:ext cx="11247120" cy="5557171"/>
+            <a:off x="1602347" y="1620254"/>
+            <a:ext cx="8986999" cy="4440451"/>
           </a:xfrm>
           <a:prstGeom prst="rect">
             <a:avLst/>
@@ -7456,7 +7941,21 @@
           </a:bodyPr>
           <a:lstStyle/>
           <a:p>
-            <a:pPr algn="r">
+            <a:pPr marL="0" marR="0" lvl="0" indent="0" algn="r" defTabSz="457200" rtl="0" eaLnBrk="1" fontAlgn="auto" latinLnBrk="0" hangingPunct="1">
+              <a:lnSpc>
+                <a:spcPct val="100000"/>
+              </a:lnSpc>
+              <a:spcBef>
+                <a:spcPts val="0"/>
+              </a:spcBef>
+              <a:spcAft>
+                <a:spcPts val="0"/>
+              </a:spcAft>
+              <a:buClrTx/>
+              <a:buSzTx/>
+              <a:buFontTx/>
+              <a:buNone/>
+              <a:tabLst/>
               <a:defRPr sz="1400" b="0" i="0">
                 <a:solidFill>
                   <a:srgbClr val="6B6B80"/>
@@ -7465,8 +7964,101 @@
               </a:defRPr>
             </a:pPr>
             <a:r>
-              <a:t>15/24</a:t>
-            </a:r>
+              <a:rPr kumimoji="0" sz="1400" b="0" i="0" u="none" strike="noStrike" kern="1200" cap="none" spc="0" normalizeH="0" baseline="0" noProof="0">
+                <a:ln>
+                  <a:noFill/>
+                </a:ln>
+                <a:solidFill>
+                  <a:srgbClr val="6B6B80"/>
+                </a:solidFill>
+                <a:effectLst/>
+                <a:uLnTx/>
+                <a:uFillTx/>
+                <a:latin typeface="Segoe UI"/>
+                <a:ea typeface="+mn-ea"/>
+                <a:cs typeface="+mn-cs"/>
+              </a:rPr>
+              <a:t>13/22</a:t>
+            </a:r>
+          </a:p>
+        </p:txBody>
+      </p:sp>
+      <p:sp>
+        <p:nvSpPr>
+          <p:cNvPr id="9" name="Rectangle 8">
+            <a:extLst>
+              <a:ext uri="{FF2B5EF4-FFF2-40B4-BE49-F238E27FC236}">
+                <a16:creationId xmlns:a16="http://schemas.microsoft.com/office/drawing/2014/main" id="{EDDCB29E-FE9A-00E1-0344-19BAD6A6D021}"/>
+              </a:ext>
+            </a:extLst>
+          </p:cNvPr>
+          <p:cNvSpPr/>
+          <p:nvPr/>
+        </p:nvSpPr>
+        <p:spPr>
+          <a:xfrm>
+            <a:off x="652272" y="389626"/>
+            <a:ext cx="109728" cy="640080"/>
+          </a:xfrm>
+          <a:prstGeom prst="rect">
+            <a:avLst/>
+          </a:prstGeom>
+          <a:solidFill>
+            <a:srgbClr val="00D4FF"/>
+          </a:solidFill>
+          <a:ln>
+            <a:noFill/>
+          </a:ln>
+        </p:spPr>
+        <p:style>
+          <a:lnRef idx="1">
+            <a:schemeClr val="accent1"/>
+          </a:lnRef>
+          <a:fillRef idx="3">
+            <a:schemeClr val="accent1"/>
+          </a:fillRef>
+          <a:effectRef idx="2">
+            <a:schemeClr val="accent1"/>
+          </a:effectRef>
+          <a:fontRef idx="minor">
+            <a:schemeClr val="lt1"/>
+          </a:fontRef>
+        </p:style>
+        <p:txBody>
+          <a:bodyPr rtlCol="0" anchor="ctr"/>
+          <a:lstStyle/>
+          <a:p>
+            <a:pPr marL="0" marR="0" lvl="0" indent="0" algn="ctr" defTabSz="457200" rtl="0" eaLnBrk="1" fontAlgn="auto" latinLnBrk="0" hangingPunct="1">
+              <a:lnSpc>
+                <a:spcPct val="100000"/>
+              </a:lnSpc>
+              <a:spcBef>
+                <a:spcPts val="0"/>
+              </a:spcBef>
+              <a:spcAft>
+                <a:spcPts val="0"/>
+              </a:spcAft>
+              <a:buClrTx/>
+              <a:buSzTx/>
+              <a:buFontTx/>
+              <a:buNone/>
+              <a:tabLst/>
+              <a:defRPr/>
+            </a:pPr>
+            <a:endParaRPr kumimoji="0" sz="1800" b="0" i="0" u="none" strike="noStrike" kern="1200" cap="none" spc="0" normalizeH="0" baseline="0" noProof="0">
+              <a:ln>
+                <a:noFill/>
+              </a:ln>
+              <a:solidFill>
+                <a:prstClr val="white"/>
+              </a:solidFill>
+              <a:effectLst/>
+              <a:uLnTx/>
+              <a:uFillTx/>
+              <a:latin typeface="Calibri"/>
+              <a:ea typeface="+mn-ea"/>
+              <a:cs typeface="+mn-cs"/>
+            </a:endParaRPr>
           </a:p>
         </p:txBody>
       </p:sp>
@@ -7479,7 +8071,7 @@
 </file>
 
 <file path=ppt/slides/slide16.xml><?xml version="1.0" encoding="utf-8"?>
-<p:sld xmlns:a="http://schemas.openxmlformats.org/drawingml/2006/main" xmlns:p="http://schemas.openxmlformats.org/presentationml/2006/main" xmlns:r="http://schemas.openxmlformats.org/officeDocument/2006/relationships">
+<p:sld xmlns:a="http://schemas.openxmlformats.org/drawingml/2006/main" xmlns:r="http://schemas.openxmlformats.org/officeDocument/2006/relationships" xmlns:p="http://schemas.openxmlformats.org/presentationml/2006/main">
   <p:cSld>
     <p:spTree>
       <p:nvGrpSpPr>
@@ -7487,7 +8079,14 @@
         <p:cNvGrpSpPr/>
         <p:nvPr/>
       </p:nvGrpSpPr>
-      <p:grpSpPr/>
+      <p:grpSpPr>
+        <a:xfrm>
+          <a:off x="0" y="0"/>
+          <a:ext cx="0" cy="0"/>
+          <a:chOff x="0" y="0"/>
+          <a:chExt cx="0" cy="0"/>
+        </a:xfrm>
+      </p:grpSpPr>
       <p:sp>
         <p:nvSpPr>
           <p:cNvPr id="2" name="Rectangle 1"/>
@@ -7527,7 +8126,37 @@
           <a:bodyPr rtlCol="0" anchor="ctr"/>
           <a:lstStyle/>
           <a:p>
-            <a:pPr algn="ctr"/>
+            <a:pPr marL="0" marR="0" lvl="0" indent="0" algn="ctr" defTabSz="457200" rtl="0" eaLnBrk="1" fontAlgn="auto" latinLnBrk="0" hangingPunct="1">
+              <a:lnSpc>
+                <a:spcPct val="100000"/>
+              </a:lnSpc>
+              <a:spcBef>
+                <a:spcPts val="0"/>
+              </a:spcBef>
+              <a:spcAft>
+                <a:spcPts val="0"/>
+              </a:spcAft>
+              <a:buClrTx/>
+              <a:buSzTx/>
+              <a:buFontTx/>
+              <a:buNone/>
+              <a:tabLst/>
+              <a:defRPr/>
+            </a:pPr>
+            <a:endParaRPr kumimoji="0" sz="1800" b="0" i="0" u="none" strike="noStrike" kern="1200" cap="none" spc="0" normalizeH="0" baseline="0" noProof="0">
+              <a:ln>
+                <a:noFill/>
+              </a:ln>
+              <a:solidFill>
+                <a:prstClr val="white"/>
+              </a:solidFill>
+              <a:effectLst/>
+              <a:uLnTx/>
+              <a:uFillTx/>
+              <a:latin typeface="Calibri"/>
+              <a:ea typeface="+mn-ea"/>
+              <a:cs typeface="+mn-cs"/>
+            </a:endParaRPr>
           </a:p>
         </p:txBody>
       </p:sp>
@@ -7553,7 +8182,21 @@
           </a:bodyPr>
           <a:lstStyle/>
           <a:p>
-            <a:pPr algn="l">
+            <a:pPr marL="0" marR="0" lvl="0" indent="0" algn="l" defTabSz="457200" rtl="0" eaLnBrk="1" fontAlgn="auto" latinLnBrk="0" hangingPunct="1">
+              <a:lnSpc>
+                <a:spcPct val="100000"/>
+              </a:lnSpc>
+              <a:spcBef>
+                <a:spcPts val="0"/>
+              </a:spcBef>
+              <a:spcAft>
+                <a:spcPts val="0"/>
+              </a:spcAft>
+              <a:buClrTx/>
+              <a:buSzTx/>
+              <a:buFontTx/>
+              <a:buNone/>
+              <a:tabLst/>
               <a:defRPr sz="4400" b="1" i="0">
                 <a:solidFill>
                   <a:srgbClr val="FFFFFF"/>
@@ -7562,6 +8205,20 @@
               </a:defRPr>
             </a:pPr>
             <a:r>
+              <a:rPr kumimoji="0" sz="4400" b="1" i="0" u="none" strike="noStrike" kern="1200" cap="none" spc="0" normalizeH="0" baseline="0" noProof="0">
+                <a:ln>
+                  <a:noFill/>
+                </a:ln>
+                <a:solidFill>
+                  <a:srgbClr val="FFFFFF"/>
+                </a:solidFill>
+                <a:effectLst/>
+                <a:uLnTx/>
+                <a:uFillTx/>
+                <a:latin typeface="Segoe UI"/>
+                <a:ea typeface="+mn-ea"/>
+                <a:cs typeface="+mn-cs"/>
+              </a:rPr>
               <a:t>Rule Builder</a:t>
             </a:r>
           </a:p>
@@ -7569,56 +8226,13 @@
       </p:sp>
       <p:sp>
         <p:nvSpPr>
-          <p:cNvPr id="4" name="Rectangle 3"/>
-          <p:cNvSpPr/>
-          <p:nvPr/>
-        </p:nvSpPr>
-        <p:spPr>
-          <a:xfrm>
-            <a:off x="731520" y="777240"/>
-            <a:ext cx="91440" cy="365760"/>
-          </a:xfrm>
-          <a:prstGeom prst="rect">
-            <a:avLst/>
-          </a:prstGeom>
-          <a:solidFill>
-            <a:srgbClr val="00D4FF"/>
-          </a:solidFill>
-          <a:ln>
-            <a:noFill/>
-          </a:ln>
-        </p:spPr>
-        <p:style>
-          <a:lnRef idx="1">
-            <a:schemeClr val="accent1"/>
-          </a:lnRef>
-          <a:fillRef idx="3">
-            <a:schemeClr val="accent1"/>
-          </a:fillRef>
-          <a:effectRef idx="2">
-            <a:schemeClr val="accent1"/>
-          </a:effectRef>
-          <a:fontRef idx="minor">
-            <a:schemeClr val="lt1"/>
-          </a:fontRef>
-        </p:style>
-        <p:txBody>
-          <a:bodyPr rtlCol="0" anchor="ctr"/>
-          <a:lstStyle/>
-          <a:p>
-            <a:pPr algn="ctr"/>
-          </a:p>
-        </p:txBody>
-      </p:sp>
-      <p:sp>
-        <p:nvSpPr>
           <p:cNvPr id="5" name="TextBox 4"/>
           <p:cNvSpPr txBox="1"/>
           <p:nvPr/>
         </p:nvSpPr>
         <p:spPr>
           <a:xfrm>
-            <a:off x="2103120" y="274320"/>
+            <a:off x="762000" y="1005840"/>
             <a:ext cx="9144000" cy="457200"/>
           </a:xfrm>
           <a:prstGeom prst="rect">
@@ -7632,7 +8246,21 @@
           </a:bodyPr>
           <a:lstStyle/>
           <a:p>
-            <a:pPr algn="l">
+            <a:pPr marL="0" marR="0" lvl="0" indent="0" algn="l" defTabSz="457200" rtl="0" eaLnBrk="1" fontAlgn="auto" latinLnBrk="0" hangingPunct="1">
+              <a:lnSpc>
+                <a:spcPct val="100000"/>
+              </a:lnSpc>
+              <a:spcBef>
+                <a:spcPts val="0"/>
+              </a:spcBef>
+              <a:spcAft>
+                <a:spcPts val="0"/>
+              </a:spcAft>
+              <a:buClrTx/>
+              <a:buSzTx/>
+              <a:buFontTx/>
+              <a:buNone/>
+              <a:tabLst/>
               <a:defRPr sz="1600" b="0" i="0">
                 <a:solidFill>
                   <a:srgbClr val="6B6B80"/>
@@ -7641,6 +8269,20 @@
               </a:defRPr>
             </a:pPr>
             <a:r>
+              <a:rPr kumimoji="0" sz="1600" b="0" i="0" u="none" strike="noStrike" kern="1200" cap="none" spc="0" normalizeH="0" baseline="0" noProof="0" dirty="0">
+                <a:ln>
+                  <a:noFill/>
+                </a:ln>
+                <a:solidFill>
+                  <a:srgbClr val="6B6B80"/>
+                </a:solidFill>
+                <a:effectLst/>
+                <a:uLnTx/>
+                <a:uFillTx/>
+                <a:latin typeface="Segoe UI"/>
+                <a:ea typeface="+mn-ea"/>
+                <a:cs typeface="+mn-cs"/>
+              </a:rPr>
               <a:t>Create IF-THEN automation rules visually</a:t>
             </a:r>
           </a:p>
@@ -7662,8 +8304,8 @@
         </p:blipFill>
         <p:spPr>
           <a:xfrm>
-            <a:off x="457200" y="1097280"/>
-            <a:ext cx="11247120" cy="6595967"/>
+            <a:off x="2214823" y="1564421"/>
+            <a:ext cx="7762048" cy="4552118"/>
           </a:xfrm>
           <a:prstGeom prst="rect">
             <a:avLst/>
@@ -7692,7 +8334,21 @@
           </a:bodyPr>
           <a:lstStyle/>
           <a:p>
-            <a:pPr algn="r">
+            <a:pPr marL="0" marR="0" lvl="0" indent="0" algn="r" defTabSz="457200" rtl="0" eaLnBrk="1" fontAlgn="auto" latinLnBrk="0" hangingPunct="1">
+              <a:lnSpc>
+                <a:spcPct val="100000"/>
+              </a:lnSpc>
+              <a:spcBef>
+                <a:spcPts val="0"/>
+              </a:spcBef>
+              <a:spcAft>
+                <a:spcPts val="0"/>
+              </a:spcAft>
+              <a:buClrTx/>
+              <a:buSzTx/>
+              <a:buFontTx/>
+              <a:buNone/>
+              <a:tabLst/>
               <a:defRPr sz="1400" b="0" i="0">
                 <a:solidFill>
                   <a:srgbClr val="6B6B80"/>
@@ -7701,8 +8357,101 @@
               </a:defRPr>
             </a:pPr>
             <a:r>
-              <a:t>16/24</a:t>
-            </a:r>
+              <a:rPr kumimoji="0" sz="1400" b="0" i="0" u="none" strike="noStrike" kern="1200" cap="none" spc="0" normalizeH="0" baseline="0" noProof="0">
+                <a:ln>
+                  <a:noFill/>
+                </a:ln>
+                <a:solidFill>
+                  <a:srgbClr val="6B6B80"/>
+                </a:solidFill>
+                <a:effectLst/>
+                <a:uLnTx/>
+                <a:uFillTx/>
+                <a:latin typeface="Segoe UI"/>
+                <a:ea typeface="+mn-ea"/>
+                <a:cs typeface="+mn-cs"/>
+              </a:rPr>
+              <a:t>14/22</a:t>
+            </a:r>
+          </a:p>
+        </p:txBody>
+      </p:sp>
+      <p:sp>
+        <p:nvSpPr>
+          <p:cNvPr id="9" name="Rectangle 8">
+            <a:extLst>
+              <a:ext uri="{FF2B5EF4-FFF2-40B4-BE49-F238E27FC236}">
+                <a16:creationId xmlns:a16="http://schemas.microsoft.com/office/drawing/2014/main" id="{48D09FF2-4829-9520-B9A3-8836607E3D01}"/>
+              </a:ext>
+            </a:extLst>
+          </p:cNvPr>
+          <p:cNvSpPr/>
+          <p:nvPr/>
+        </p:nvSpPr>
+        <p:spPr>
+          <a:xfrm>
+            <a:off x="652272" y="411480"/>
+            <a:ext cx="109728" cy="640080"/>
+          </a:xfrm>
+          <a:prstGeom prst="rect">
+            <a:avLst/>
+          </a:prstGeom>
+          <a:solidFill>
+            <a:srgbClr val="00D4FF"/>
+          </a:solidFill>
+          <a:ln>
+            <a:noFill/>
+          </a:ln>
+        </p:spPr>
+        <p:style>
+          <a:lnRef idx="1">
+            <a:schemeClr val="accent1"/>
+          </a:lnRef>
+          <a:fillRef idx="3">
+            <a:schemeClr val="accent1"/>
+          </a:fillRef>
+          <a:effectRef idx="2">
+            <a:schemeClr val="accent1"/>
+          </a:effectRef>
+          <a:fontRef idx="minor">
+            <a:schemeClr val="lt1"/>
+          </a:fontRef>
+        </p:style>
+        <p:txBody>
+          <a:bodyPr rtlCol="0" anchor="ctr"/>
+          <a:lstStyle/>
+          <a:p>
+            <a:pPr marL="0" marR="0" lvl="0" indent="0" algn="ctr" defTabSz="457200" rtl="0" eaLnBrk="1" fontAlgn="auto" latinLnBrk="0" hangingPunct="1">
+              <a:lnSpc>
+                <a:spcPct val="100000"/>
+              </a:lnSpc>
+              <a:spcBef>
+                <a:spcPts val="0"/>
+              </a:spcBef>
+              <a:spcAft>
+                <a:spcPts val="0"/>
+              </a:spcAft>
+              <a:buClrTx/>
+              <a:buSzTx/>
+              <a:buFontTx/>
+              <a:buNone/>
+              <a:tabLst/>
+              <a:defRPr/>
+            </a:pPr>
+            <a:endParaRPr kumimoji="0" sz="1800" b="0" i="0" u="none" strike="noStrike" kern="1200" cap="none" spc="0" normalizeH="0" baseline="0" noProof="0">
+              <a:ln>
+                <a:noFill/>
+              </a:ln>
+              <a:solidFill>
+                <a:prstClr val="white"/>
+              </a:solidFill>
+              <a:effectLst/>
+              <a:uLnTx/>
+              <a:uFillTx/>
+              <a:latin typeface="Calibri"/>
+              <a:ea typeface="+mn-ea"/>
+              <a:cs typeface="+mn-cs"/>
+            </a:endParaRPr>
           </a:p>
         </p:txBody>
       </p:sp>
@@ -7715,7 +8464,7 @@
 </file>
 
 <file path=ppt/slides/slide17.xml><?xml version="1.0" encoding="utf-8"?>
-<p:sld xmlns:a="http://schemas.openxmlformats.org/drawingml/2006/main" xmlns:p="http://schemas.openxmlformats.org/presentationml/2006/main" xmlns:r="http://schemas.openxmlformats.org/officeDocument/2006/relationships">
+<p:sld xmlns:a="http://schemas.openxmlformats.org/drawingml/2006/main" xmlns:r="http://schemas.openxmlformats.org/officeDocument/2006/relationships" xmlns:p="http://schemas.openxmlformats.org/presentationml/2006/main">
   <p:cSld>
     <p:spTree>
       <p:nvGrpSpPr>
@@ -7723,7 +8472,14 @@
         <p:cNvGrpSpPr/>
         <p:nvPr/>
       </p:nvGrpSpPr>
-      <p:grpSpPr/>
+      <p:grpSpPr>
+        <a:xfrm>
+          <a:off x="0" y="0"/>
+          <a:ext cx="0" cy="0"/>
+          <a:chOff x="0" y="0"/>
+          <a:chExt cx="0" cy="0"/>
+        </a:xfrm>
+      </p:grpSpPr>
       <p:sp>
         <p:nvSpPr>
           <p:cNvPr id="2" name="Rectangle 1"/>
@@ -7763,7 +8519,37 @@
           <a:bodyPr rtlCol="0" anchor="ctr"/>
           <a:lstStyle/>
           <a:p>
-            <a:pPr algn="ctr"/>
+            <a:pPr marL="0" marR="0" lvl="0" indent="0" algn="ctr" defTabSz="457200" rtl="0" eaLnBrk="1" fontAlgn="auto" latinLnBrk="0" hangingPunct="1">
+              <a:lnSpc>
+                <a:spcPct val="100000"/>
+              </a:lnSpc>
+              <a:spcBef>
+                <a:spcPts val="0"/>
+              </a:spcBef>
+              <a:spcAft>
+                <a:spcPts val="0"/>
+              </a:spcAft>
+              <a:buClrTx/>
+              <a:buSzTx/>
+              <a:buFontTx/>
+              <a:buNone/>
+              <a:tabLst/>
+              <a:defRPr/>
+            </a:pPr>
+            <a:endParaRPr kumimoji="0" sz="1800" b="0" i="0" u="none" strike="noStrike" kern="1200" cap="none" spc="0" normalizeH="0" baseline="0" noProof="0">
+              <a:ln>
+                <a:noFill/>
+              </a:ln>
+              <a:solidFill>
+                <a:prstClr val="white"/>
+              </a:solidFill>
+              <a:effectLst/>
+              <a:uLnTx/>
+              <a:uFillTx/>
+              <a:latin typeface="Calibri"/>
+              <a:ea typeface="+mn-ea"/>
+              <a:cs typeface="+mn-cs"/>
+            </a:endParaRPr>
           </a:p>
         </p:txBody>
       </p:sp>
@@ -7789,7 +8575,21 @@
           </a:bodyPr>
           <a:lstStyle/>
           <a:p>
-            <a:pPr algn="l">
+            <a:pPr marL="0" marR="0" lvl="0" indent="0" algn="l" defTabSz="457200" rtl="0" eaLnBrk="1" fontAlgn="auto" latinLnBrk="0" hangingPunct="1">
+              <a:lnSpc>
+                <a:spcPct val="100000"/>
+              </a:lnSpc>
+              <a:spcBef>
+                <a:spcPts val="0"/>
+              </a:spcBef>
+              <a:spcAft>
+                <a:spcPts val="0"/>
+              </a:spcAft>
+              <a:buClrTx/>
+              <a:buSzTx/>
+              <a:buFontTx/>
+              <a:buNone/>
+              <a:tabLst/>
               <a:defRPr sz="4400" b="1" i="0">
                 <a:solidFill>
                   <a:srgbClr val="FFFFFF"/>
@@ -7798,6 +8598,20 @@
               </a:defRPr>
             </a:pPr>
             <a:r>
+              <a:rPr kumimoji="0" sz="4400" b="1" i="0" u="none" strike="noStrike" kern="1200" cap="none" spc="0" normalizeH="0" baseline="0" noProof="0">
+                <a:ln>
+                  <a:noFill/>
+                </a:ln>
+                <a:solidFill>
+                  <a:srgbClr val="FFFFFF"/>
+                </a:solidFill>
+                <a:effectLst/>
+                <a:uLnTx/>
+                <a:uFillTx/>
+                <a:latin typeface="Segoe UI"/>
+                <a:ea typeface="+mn-ea"/>
+                <a:cs typeface="+mn-cs"/>
+              </a:rPr>
               <a:t>Rules Management</a:t>
             </a:r>
           </a:p>
@@ -7805,56 +8619,13 @@
       </p:sp>
       <p:sp>
         <p:nvSpPr>
-          <p:cNvPr id="4" name="Rectangle 3"/>
-          <p:cNvSpPr/>
-          <p:nvPr/>
-        </p:nvSpPr>
-        <p:spPr>
-          <a:xfrm>
-            <a:off x="731520" y="777240"/>
-            <a:ext cx="91440" cy="365760"/>
-          </a:xfrm>
-          <a:prstGeom prst="rect">
-            <a:avLst/>
-          </a:prstGeom>
-          <a:solidFill>
-            <a:srgbClr val="00D4FF"/>
-          </a:solidFill>
-          <a:ln>
-            <a:noFill/>
-          </a:ln>
-        </p:spPr>
-        <p:style>
-          <a:lnRef idx="1">
-            <a:schemeClr val="accent1"/>
-          </a:lnRef>
-          <a:fillRef idx="3">
-            <a:schemeClr val="accent1"/>
-          </a:fillRef>
-          <a:effectRef idx="2">
-            <a:schemeClr val="accent1"/>
-          </a:effectRef>
-          <a:fontRef idx="minor">
-            <a:schemeClr val="lt1"/>
-          </a:fontRef>
-        </p:style>
-        <p:txBody>
-          <a:bodyPr rtlCol="0" anchor="ctr"/>
-          <a:lstStyle/>
-          <a:p>
-            <a:pPr algn="ctr"/>
-          </a:p>
-        </p:txBody>
-      </p:sp>
-      <p:sp>
-        <p:nvSpPr>
           <p:cNvPr id="5" name="TextBox 4"/>
           <p:cNvSpPr txBox="1"/>
           <p:nvPr/>
         </p:nvSpPr>
         <p:spPr>
           <a:xfrm>
-            <a:off x="2560320" y="274320"/>
+            <a:off x="786384" y="915838"/>
             <a:ext cx="9144000" cy="457200"/>
           </a:xfrm>
           <a:prstGeom prst="rect">
@@ -7868,7 +8639,21 @@
           </a:bodyPr>
           <a:lstStyle/>
           <a:p>
-            <a:pPr algn="l">
+            <a:pPr marL="0" marR="0" lvl="0" indent="0" algn="l" defTabSz="457200" rtl="0" eaLnBrk="1" fontAlgn="auto" latinLnBrk="0" hangingPunct="1">
+              <a:lnSpc>
+                <a:spcPct val="100000"/>
+              </a:lnSpc>
+              <a:spcBef>
+                <a:spcPts val="0"/>
+              </a:spcBef>
+              <a:spcAft>
+                <a:spcPts val="0"/>
+              </a:spcAft>
+              <a:buClrTx/>
+              <a:buSzTx/>
+              <a:buFontTx/>
+              <a:buNone/>
+              <a:tabLst/>
               <a:defRPr sz="1600" b="0" i="0">
                 <a:solidFill>
                   <a:srgbClr val="6B6B80"/>
@@ -7877,6 +8662,20 @@
               </a:defRPr>
             </a:pPr>
             <a:r>
+              <a:rPr kumimoji="0" sz="1600" b="0" i="0" u="none" strike="noStrike" kern="1200" cap="none" spc="0" normalizeH="0" baseline="0" noProof="0" dirty="0">
+                <a:ln>
+                  <a:noFill/>
+                </a:ln>
+                <a:solidFill>
+                  <a:srgbClr val="6B6B80"/>
+                </a:solidFill>
+                <a:effectLst/>
+                <a:uLnTx/>
+                <a:uFillTx/>
+                <a:latin typeface="Segoe UI"/>
+                <a:ea typeface="+mn-ea"/>
+                <a:cs typeface="+mn-cs"/>
+              </a:rPr>
               <a:t>List, toggle, edit, and delete automation rules</a:t>
             </a:r>
           </a:p>
@@ -7898,8 +8697,8 @@
         </p:blipFill>
         <p:spPr>
           <a:xfrm>
-            <a:off x="457200" y="1097280"/>
-            <a:ext cx="11247120" cy="4686300"/>
+            <a:off x="1424643" y="1894145"/>
+            <a:ext cx="9342408" cy="3892670"/>
           </a:xfrm>
           <a:prstGeom prst="rect">
             <a:avLst/>
@@ -7928,7 +8727,21 @@
           </a:bodyPr>
           <a:lstStyle/>
           <a:p>
-            <a:pPr algn="r">
+            <a:pPr marL="0" marR="0" lvl="0" indent="0" algn="r" defTabSz="457200" rtl="0" eaLnBrk="1" fontAlgn="auto" latinLnBrk="0" hangingPunct="1">
+              <a:lnSpc>
+                <a:spcPct val="100000"/>
+              </a:lnSpc>
+              <a:spcBef>
+                <a:spcPts val="0"/>
+              </a:spcBef>
+              <a:spcAft>
+                <a:spcPts val="0"/>
+              </a:spcAft>
+              <a:buClrTx/>
+              <a:buSzTx/>
+              <a:buFontTx/>
+              <a:buNone/>
+              <a:tabLst/>
               <a:defRPr sz="1400" b="0" i="0">
                 <a:solidFill>
                   <a:srgbClr val="6B6B80"/>
@@ -7937,8 +8750,101 @@
               </a:defRPr>
             </a:pPr>
             <a:r>
-              <a:t>17/24</a:t>
-            </a:r>
+              <a:rPr kumimoji="0" sz="1400" b="0" i="0" u="none" strike="noStrike" kern="1200" cap="none" spc="0" normalizeH="0" baseline="0" noProof="0">
+                <a:ln>
+                  <a:noFill/>
+                </a:ln>
+                <a:solidFill>
+                  <a:srgbClr val="6B6B80"/>
+                </a:solidFill>
+                <a:effectLst/>
+                <a:uLnTx/>
+                <a:uFillTx/>
+                <a:latin typeface="Segoe UI"/>
+                <a:ea typeface="+mn-ea"/>
+                <a:cs typeface="+mn-cs"/>
+              </a:rPr>
+              <a:t>15/22</a:t>
+            </a:r>
+          </a:p>
+        </p:txBody>
+      </p:sp>
+      <p:sp>
+        <p:nvSpPr>
+          <p:cNvPr id="8" name="Rectangle 7">
+            <a:extLst>
+              <a:ext uri="{FF2B5EF4-FFF2-40B4-BE49-F238E27FC236}">
+                <a16:creationId xmlns:a16="http://schemas.microsoft.com/office/drawing/2014/main" id="{93C6DF6F-1D9F-B856-4F6B-3A19BF0CCC83}"/>
+              </a:ext>
+            </a:extLst>
+          </p:cNvPr>
+          <p:cNvSpPr/>
+          <p:nvPr/>
+        </p:nvSpPr>
+        <p:spPr>
+          <a:xfrm>
+            <a:off x="676656" y="400050"/>
+            <a:ext cx="109728" cy="640080"/>
+          </a:xfrm>
+          <a:prstGeom prst="rect">
+            <a:avLst/>
+          </a:prstGeom>
+          <a:solidFill>
+            <a:srgbClr val="00D4FF"/>
+          </a:solidFill>
+          <a:ln>
+            <a:noFill/>
+          </a:ln>
+        </p:spPr>
+        <p:style>
+          <a:lnRef idx="1">
+            <a:schemeClr val="accent1"/>
+          </a:lnRef>
+          <a:fillRef idx="3">
+            <a:schemeClr val="accent1"/>
+          </a:fillRef>
+          <a:effectRef idx="2">
+            <a:schemeClr val="accent1"/>
+          </a:effectRef>
+          <a:fontRef idx="minor">
+            <a:schemeClr val="lt1"/>
+          </a:fontRef>
+        </p:style>
+        <p:txBody>
+          <a:bodyPr rtlCol="0" anchor="ctr"/>
+          <a:lstStyle/>
+          <a:p>
+            <a:pPr marL="0" marR="0" lvl="0" indent="0" algn="ctr" defTabSz="457200" rtl="0" eaLnBrk="1" fontAlgn="auto" latinLnBrk="0" hangingPunct="1">
+              <a:lnSpc>
+                <a:spcPct val="100000"/>
+              </a:lnSpc>
+              <a:spcBef>
+                <a:spcPts val="0"/>
+              </a:spcBef>
+              <a:spcAft>
+                <a:spcPts val="0"/>
+              </a:spcAft>
+              <a:buClrTx/>
+              <a:buSzTx/>
+              <a:buFontTx/>
+              <a:buNone/>
+              <a:tabLst/>
+              <a:defRPr/>
+            </a:pPr>
+            <a:endParaRPr kumimoji="0" sz="1800" b="0" i="0" u="none" strike="noStrike" kern="1200" cap="none" spc="0" normalizeH="0" baseline="0" noProof="0">
+              <a:ln>
+                <a:noFill/>
+              </a:ln>
+              <a:solidFill>
+                <a:prstClr val="white"/>
+              </a:solidFill>
+              <a:effectLst/>
+              <a:uLnTx/>
+              <a:uFillTx/>
+              <a:latin typeface="Calibri"/>
+              <a:ea typeface="+mn-ea"/>
+              <a:cs typeface="+mn-cs"/>
+            </a:endParaRPr>
           </a:p>
         </p:txBody>
       </p:sp>
@@ -7951,7 +8857,7 @@
 </file>
 
 <file path=ppt/slides/slide18.xml><?xml version="1.0" encoding="utf-8"?>
-<p:sld xmlns:a="http://schemas.openxmlformats.org/drawingml/2006/main" xmlns:p="http://schemas.openxmlformats.org/presentationml/2006/main" xmlns:r="http://schemas.openxmlformats.org/officeDocument/2006/relationships">
+<p:sld xmlns:a="http://schemas.openxmlformats.org/drawingml/2006/main" xmlns:r="http://schemas.openxmlformats.org/officeDocument/2006/relationships" xmlns:p="http://schemas.openxmlformats.org/presentationml/2006/main">
   <p:cSld>
     <p:spTree>
       <p:nvGrpSpPr>
@@ -7959,7 +8865,14 @@
         <p:cNvGrpSpPr/>
         <p:nvPr/>
       </p:nvGrpSpPr>
-      <p:grpSpPr/>
+      <p:grpSpPr>
+        <a:xfrm>
+          <a:off x="0" y="0"/>
+          <a:ext cx="0" cy="0"/>
+          <a:chOff x="0" y="0"/>
+          <a:chExt cx="0" cy="0"/>
+        </a:xfrm>
+      </p:grpSpPr>
       <p:sp>
         <p:nvSpPr>
           <p:cNvPr id="2" name="Rectangle 1"/>
@@ -7999,7 +8912,37 @@
           <a:bodyPr rtlCol="0" anchor="ctr"/>
           <a:lstStyle/>
           <a:p>
-            <a:pPr algn="ctr"/>
+            <a:pPr marL="0" marR="0" lvl="0" indent="0" algn="ctr" defTabSz="457200" rtl="0" eaLnBrk="1" fontAlgn="auto" latinLnBrk="0" hangingPunct="1">
+              <a:lnSpc>
+                <a:spcPct val="100000"/>
+              </a:lnSpc>
+              <a:spcBef>
+                <a:spcPts val="0"/>
+              </a:spcBef>
+              <a:spcAft>
+                <a:spcPts val="0"/>
+              </a:spcAft>
+              <a:buClrTx/>
+              <a:buSzTx/>
+              <a:buFontTx/>
+              <a:buNone/>
+              <a:tabLst/>
+              <a:defRPr/>
+            </a:pPr>
+            <a:endParaRPr kumimoji="0" sz="1800" b="0" i="0" u="none" strike="noStrike" kern="1200" cap="none" spc="0" normalizeH="0" baseline="0" noProof="0">
+              <a:ln>
+                <a:noFill/>
+              </a:ln>
+              <a:solidFill>
+                <a:prstClr val="white"/>
+              </a:solidFill>
+              <a:effectLst/>
+              <a:uLnTx/>
+              <a:uFillTx/>
+              <a:latin typeface="Calibri"/>
+              <a:ea typeface="+mn-ea"/>
+              <a:cs typeface="+mn-cs"/>
+            </a:endParaRPr>
           </a:p>
         </p:txBody>
       </p:sp>
@@ -8025,7 +8968,21 @@
           </a:bodyPr>
           <a:lstStyle/>
           <a:p>
-            <a:pPr algn="l">
+            <a:pPr marL="0" marR="0" lvl="0" indent="0" algn="l" defTabSz="457200" rtl="0" eaLnBrk="1" fontAlgn="auto" latinLnBrk="0" hangingPunct="1">
+              <a:lnSpc>
+                <a:spcPct val="100000"/>
+              </a:lnSpc>
+              <a:spcBef>
+                <a:spcPts val="0"/>
+              </a:spcBef>
+              <a:spcAft>
+                <a:spcPts val="0"/>
+              </a:spcAft>
+              <a:buClrTx/>
+              <a:buSzTx/>
+              <a:buFontTx/>
+              <a:buNone/>
+              <a:tabLst/>
               <a:defRPr sz="4400" b="1" i="0">
                 <a:solidFill>
                   <a:srgbClr val="FFFFFF"/>
@@ -8034,6 +8991,20 @@
               </a:defRPr>
             </a:pPr>
             <a:r>
+              <a:rPr kumimoji="0" sz="4400" b="1" i="0" u="none" strike="noStrike" kern="1200" cap="none" spc="0" normalizeH="0" baseline="0" noProof="0">
+                <a:ln>
+                  <a:noFill/>
+                </a:ln>
+                <a:solidFill>
+                  <a:srgbClr val="FFFFFF"/>
+                </a:solidFill>
+                <a:effectLst/>
+                <a:uLnTx/>
+                <a:uFillTx/>
+                <a:latin typeface="Segoe UI"/>
+                <a:ea typeface="+mn-ea"/>
+                <a:cs typeface="+mn-cs"/>
+              </a:rPr>
               <a:t>System Status</a:t>
             </a:r>
           </a:p>
@@ -8041,56 +9012,13 @@
       </p:sp>
       <p:sp>
         <p:nvSpPr>
-          <p:cNvPr id="4" name="Rectangle 3"/>
-          <p:cNvSpPr/>
-          <p:nvPr/>
-        </p:nvSpPr>
-        <p:spPr>
-          <a:xfrm>
-            <a:off x="731520" y="777240"/>
-            <a:ext cx="91440" cy="365760"/>
-          </a:xfrm>
-          <a:prstGeom prst="rect">
-            <a:avLst/>
-          </a:prstGeom>
-          <a:solidFill>
-            <a:srgbClr val="00D4FF"/>
-          </a:solidFill>
-          <a:ln>
-            <a:noFill/>
-          </a:ln>
-        </p:spPr>
-        <p:style>
-          <a:lnRef idx="1">
-            <a:schemeClr val="accent1"/>
-          </a:lnRef>
-          <a:fillRef idx="3">
-            <a:schemeClr val="accent1"/>
-          </a:fillRef>
-          <a:effectRef idx="2">
-            <a:schemeClr val="accent1"/>
-          </a:effectRef>
-          <a:fontRef idx="minor">
-            <a:schemeClr val="lt1"/>
-          </a:fontRef>
-        </p:style>
-        <p:txBody>
-          <a:bodyPr rtlCol="0" anchor="ctr"/>
-          <a:lstStyle/>
-          <a:p>
-            <a:pPr algn="ctr"/>
-          </a:p>
-        </p:txBody>
-      </p:sp>
-      <p:sp>
-        <p:nvSpPr>
           <p:cNvPr id="5" name="TextBox 4"/>
           <p:cNvSpPr txBox="1"/>
           <p:nvPr/>
         </p:nvSpPr>
         <p:spPr>
           <a:xfrm>
-            <a:off x="2103120" y="274320"/>
+            <a:off x="731520" y="960120"/>
             <a:ext cx="9144000" cy="457200"/>
           </a:xfrm>
           <a:prstGeom prst="rect">
@@ -8104,7 +9032,21 @@
           </a:bodyPr>
           <a:lstStyle/>
           <a:p>
-            <a:pPr algn="l">
+            <a:pPr marL="0" marR="0" lvl="0" indent="0" algn="l" defTabSz="457200" rtl="0" eaLnBrk="1" fontAlgn="auto" latinLnBrk="0" hangingPunct="1">
+              <a:lnSpc>
+                <a:spcPct val="100000"/>
+              </a:lnSpc>
+              <a:spcBef>
+                <a:spcPts val="0"/>
+              </a:spcBef>
+              <a:spcAft>
+                <a:spcPts val="0"/>
+              </a:spcAft>
+              <a:buClrTx/>
+              <a:buSzTx/>
+              <a:buFontTx/>
+              <a:buNone/>
+              <a:tabLst/>
               <a:defRPr sz="1600" b="0" i="0">
                 <a:solidFill>
                   <a:srgbClr val="6B6B80"/>
@@ -8113,6 +9055,20 @@
               </a:defRPr>
             </a:pPr>
             <a:r>
+              <a:rPr kumimoji="0" sz="1600" b="0" i="0" u="none" strike="noStrike" kern="1200" cap="none" spc="0" normalizeH="0" baseline="0" noProof="0" dirty="0">
+                <a:ln>
+                  <a:noFill/>
+                </a:ln>
+                <a:solidFill>
+                  <a:srgbClr val="6B6B80"/>
+                </a:solidFill>
+                <a:effectLst/>
+                <a:uLnTx/>
+                <a:uFillTx/>
+                <a:latin typeface="Segoe UI"/>
+                <a:ea typeface="+mn-ea"/>
+                <a:cs typeface="+mn-cs"/>
+              </a:rPr>
               <a:t>Health monitoring and notification center</a:t>
             </a:r>
           </a:p>
@@ -8134,8 +9090,8 @@
         </p:blipFill>
         <p:spPr>
           <a:xfrm>
-            <a:off x="457200" y="1097280"/>
-            <a:ext cx="11247120" cy="6689693"/>
+            <a:off x="2214976" y="1541144"/>
+            <a:ext cx="7731568" cy="4598672"/>
           </a:xfrm>
           <a:prstGeom prst="rect">
             <a:avLst/>
@@ -8164,7 +9120,21 @@
           </a:bodyPr>
           <a:lstStyle/>
           <a:p>
-            <a:pPr algn="r">
+            <a:pPr marL="0" marR="0" lvl="0" indent="0" algn="r" defTabSz="457200" rtl="0" eaLnBrk="1" fontAlgn="auto" latinLnBrk="0" hangingPunct="1">
+              <a:lnSpc>
+                <a:spcPct val="100000"/>
+              </a:lnSpc>
+              <a:spcBef>
+                <a:spcPts val="0"/>
+              </a:spcBef>
+              <a:spcAft>
+                <a:spcPts val="0"/>
+              </a:spcAft>
+              <a:buClrTx/>
+              <a:buSzTx/>
+              <a:buFontTx/>
+              <a:buNone/>
+              <a:tabLst/>
               <a:defRPr sz="1400" b="0" i="0">
                 <a:solidFill>
                   <a:srgbClr val="6B6B80"/>
@@ -8173,8 +9143,101 @@
               </a:defRPr>
             </a:pPr>
             <a:r>
-              <a:t>18/24</a:t>
-            </a:r>
+              <a:rPr kumimoji="0" sz="1400" b="0" i="0" u="none" strike="noStrike" kern="1200" cap="none" spc="0" normalizeH="0" baseline="0" noProof="0">
+                <a:ln>
+                  <a:noFill/>
+                </a:ln>
+                <a:solidFill>
+                  <a:srgbClr val="6B6B80"/>
+                </a:solidFill>
+                <a:effectLst/>
+                <a:uLnTx/>
+                <a:uFillTx/>
+                <a:latin typeface="Segoe UI"/>
+                <a:ea typeface="+mn-ea"/>
+                <a:cs typeface="+mn-cs"/>
+              </a:rPr>
+              <a:t>16/22</a:t>
+            </a:r>
+          </a:p>
+        </p:txBody>
+      </p:sp>
+      <p:sp>
+        <p:nvSpPr>
+          <p:cNvPr id="9" name="Rectangle 8">
+            <a:extLst>
+              <a:ext uri="{FF2B5EF4-FFF2-40B4-BE49-F238E27FC236}">
+                <a16:creationId xmlns:a16="http://schemas.microsoft.com/office/drawing/2014/main" id="{2AAE04EB-28EB-14E2-A774-BE3FBAB4045C}"/>
+              </a:ext>
+            </a:extLst>
+          </p:cNvPr>
+          <p:cNvSpPr/>
+          <p:nvPr/>
+        </p:nvSpPr>
+        <p:spPr>
+          <a:xfrm>
+            <a:off x="621792" y="411480"/>
+            <a:ext cx="109728" cy="640080"/>
+          </a:xfrm>
+          <a:prstGeom prst="rect">
+            <a:avLst/>
+          </a:prstGeom>
+          <a:solidFill>
+            <a:srgbClr val="00D4FF"/>
+          </a:solidFill>
+          <a:ln>
+            <a:noFill/>
+          </a:ln>
+        </p:spPr>
+        <p:style>
+          <a:lnRef idx="1">
+            <a:schemeClr val="accent1"/>
+          </a:lnRef>
+          <a:fillRef idx="3">
+            <a:schemeClr val="accent1"/>
+          </a:fillRef>
+          <a:effectRef idx="2">
+            <a:schemeClr val="accent1"/>
+          </a:effectRef>
+          <a:fontRef idx="minor">
+            <a:schemeClr val="lt1"/>
+          </a:fontRef>
+        </p:style>
+        <p:txBody>
+          <a:bodyPr rtlCol="0" anchor="ctr"/>
+          <a:lstStyle/>
+          <a:p>
+            <a:pPr marL="0" marR="0" lvl="0" indent="0" algn="ctr" defTabSz="457200" rtl="0" eaLnBrk="1" fontAlgn="auto" latinLnBrk="0" hangingPunct="1">
+              <a:lnSpc>
+                <a:spcPct val="100000"/>
+              </a:lnSpc>
+              <a:spcBef>
+                <a:spcPts val="0"/>
+              </a:spcBef>
+              <a:spcAft>
+                <a:spcPts val="0"/>
+              </a:spcAft>
+              <a:buClrTx/>
+              <a:buSzTx/>
+              <a:buFontTx/>
+              <a:buNone/>
+              <a:tabLst/>
+              <a:defRPr/>
+            </a:pPr>
+            <a:endParaRPr kumimoji="0" sz="1800" b="0" i="0" u="none" strike="noStrike" kern="1200" cap="none" spc="0" normalizeH="0" baseline="0" noProof="0">
+              <a:ln>
+                <a:noFill/>
+              </a:ln>
+              <a:solidFill>
+                <a:prstClr val="white"/>
+              </a:solidFill>
+              <a:effectLst/>
+              <a:uLnTx/>
+              <a:uFillTx/>
+              <a:latin typeface="Calibri"/>
+              <a:ea typeface="+mn-ea"/>
+              <a:cs typeface="+mn-cs"/>
+            </a:endParaRPr>
           </a:p>
         </p:txBody>
       </p:sp>
@@ -8187,7 +9250,7 @@
 </file>
 
 <file path=ppt/slides/slide19.xml><?xml version="1.0" encoding="utf-8"?>
-<p:sld xmlns:a="http://schemas.openxmlformats.org/drawingml/2006/main" xmlns:p="http://schemas.openxmlformats.org/presentationml/2006/main" xmlns:r="http://schemas.openxmlformats.org/officeDocument/2006/relationships">
+<p:sld xmlns:a="http://schemas.openxmlformats.org/drawingml/2006/main" xmlns:r="http://schemas.openxmlformats.org/officeDocument/2006/relationships" xmlns:p="http://schemas.openxmlformats.org/presentationml/2006/main">
   <p:cSld>
     <p:spTree>
       <p:nvGrpSpPr>
@@ -8195,7 +9258,14 @@
         <p:cNvGrpSpPr/>
         <p:nvPr/>
       </p:nvGrpSpPr>
-      <p:grpSpPr/>
+      <p:grpSpPr>
+        <a:xfrm>
+          <a:off x="0" y="0"/>
+          <a:ext cx="0" cy="0"/>
+          <a:chOff x="0" y="0"/>
+          <a:chExt cx="0" cy="0"/>
+        </a:xfrm>
+      </p:grpSpPr>
       <p:sp>
         <p:nvSpPr>
           <p:cNvPr id="2" name="Rectangle 1"/>
@@ -8236,6 +9306,7 @@
           <a:lstStyle/>
           <a:p>
             <a:pPr algn="ctr"/>
+            <a:endParaRPr/>
           </a:p>
         </p:txBody>
       </p:sp>
@@ -8272,49 +9343,6 @@
             <a:r>
               <a:t>Database Design</a:t>
             </a:r>
-          </a:p>
-        </p:txBody>
-      </p:sp>
-      <p:sp>
-        <p:nvSpPr>
-          <p:cNvPr id="4" name="Rectangle 3"/>
-          <p:cNvSpPr/>
-          <p:nvPr/>
-        </p:nvSpPr>
-        <p:spPr>
-          <a:xfrm>
-            <a:off x="731520" y="960120"/>
-            <a:ext cx="109728" cy="457200"/>
-          </a:xfrm>
-          <a:prstGeom prst="rect">
-            <a:avLst/>
-          </a:prstGeom>
-          <a:solidFill>
-            <a:srgbClr val="00D4FF"/>
-          </a:solidFill>
-          <a:ln>
-            <a:noFill/>
-          </a:ln>
-        </p:spPr>
-        <p:style>
-          <a:lnRef idx="1">
-            <a:schemeClr val="accent1"/>
-          </a:lnRef>
-          <a:fillRef idx="3">
-            <a:schemeClr val="accent1"/>
-          </a:fillRef>
-          <a:effectRef idx="2">
-            <a:schemeClr val="accent1"/>
-          </a:effectRef>
-          <a:fontRef idx="minor">
-            <a:schemeClr val="lt1"/>
-          </a:fontRef>
-        </p:style>
-        <p:txBody>
-          <a:bodyPr rtlCol="0" anchor="ctr"/>
-          <a:lstStyle/>
-          <a:p>
-            <a:pPr algn="ctr"/>
           </a:p>
         </p:txBody>
       </p:sp>
@@ -8360,6 +9388,7 @@
           <a:lstStyle/>
           <a:p>
             <a:pPr algn="ctr"/>
+            <a:endParaRPr/>
           </a:p>
         </p:txBody>
       </p:sp>
@@ -8439,6 +9468,7 @@
           <a:lstStyle/>
           <a:p>
             <a:pPr algn="ctr"/>
+            <a:endParaRPr/>
           </a:p>
         </p:txBody>
       </p:sp>
@@ -8581,8 +9611,22 @@
               </a:defRPr>
             </a:pPr>
             <a:r>
-              <a:t>• threshold_value, threshold_unit</a:t>
-            </a:r>
+              <a:rPr dirty="0"/>
+              <a:t>• </a:t>
+            </a:r>
+            <a:r>
+              <a:rPr dirty="0" err="1"/>
+              <a:t>threshold_value</a:t>
+            </a:r>
+            <a:r>
+              <a:rPr dirty="0"/>
+              <a:t>, </a:t>
+            </a:r>
+            <a:r>
+              <a:rPr dirty="0" err="1"/>
+              <a:t>threshold_unit</a:t>
+            </a:r>
+            <a:endParaRPr dirty="0"/>
           </a:p>
         </p:txBody>
       </p:sp>
@@ -8736,6 +9780,7 @@
           <a:lstStyle/>
           <a:p>
             <a:pPr algn="ctr"/>
+            <a:endParaRPr/>
           </a:p>
         </p:txBody>
       </p:sp>
@@ -8815,6 +9860,7 @@
           <a:lstStyle/>
           <a:p>
             <a:pPr algn="ctr"/>
+            <a:endParaRPr/>
           </a:p>
         </p:txBody>
       </p:sp>
@@ -9112,6 +10158,7 @@
           <a:lstStyle/>
           <a:p>
             <a:pPr algn="ctr"/>
+            <a:endParaRPr/>
           </a:p>
         </p:txBody>
       </p:sp>
@@ -9191,6 +10238,7 @@
           <a:lstStyle/>
           <a:p>
             <a:pPr algn="ctr"/>
+            <a:endParaRPr/>
           </a:p>
         </p:txBody>
       </p:sp>
@@ -9479,6 +10527,85 @@
             <a:r>
               <a:t>19/24</a:t>
             </a:r>
+          </a:p>
+        </p:txBody>
+      </p:sp>
+      <p:sp>
+        <p:nvSpPr>
+          <p:cNvPr id="36" name="Rectangle 35">
+            <a:extLst>
+              <a:ext uri="{FF2B5EF4-FFF2-40B4-BE49-F238E27FC236}">
+                <a16:creationId xmlns:a16="http://schemas.microsoft.com/office/drawing/2014/main" id="{DF1AE673-D8C1-8D9F-7E7E-17E40AC8A8F3}"/>
+              </a:ext>
+            </a:extLst>
+          </p:cNvPr>
+          <p:cNvSpPr/>
+          <p:nvPr/>
+        </p:nvSpPr>
+        <p:spPr>
+          <a:xfrm>
+            <a:off x="640080" y="530352"/>
+            <a:ext cx="109728" cy="640080"/>
+          </a:xfrm>
+          <a:prstGeom prst="rect">
+            <a:avLst/>
+          </a:prstGeom>
+          <a:solidFill>
+            <a:srgbClr val="00D4FF"/>
+          </a:solidFill>
+          <a:ln>
+            <a:noFill/>
+          </a:ln>
+        </p:spPr>
+        <p:style>
+          <a:lnRef idx="1">
+            <a:schemeClr val="accent1"/>
+          </a:lnRef>
+          <a:fillRef idx="3">
+            <a:schemeClr val="accent1"/>
+          </a:fillRef>
+          <a:effectRef idx="2">
+            <a:schemeClr val="accent1"/>
+          </a:effectRef>
+          <a:fontRef idx="minor">
+            <a:schemeClr val="lt1"/>
+          </a:fontRef>
+        </p:style>
+        <p:txBody>
+          <a:bodyPr rtlCol="0" anchor="ctr"/>
+          <a:lstStyle/>
+          <a:p>
+            <a:pPr marL="0" marR="0" lvl="0" indent="0" algn="ctr" defTabSz="457200" rtl="0" eaLnBrk="1" fontAlgn="auto" latinLnBrk="0" hangingPunct="1">
+              <a:lnSpc>
+                <a:spcPct val="100000"/>
+              </a:lnSpc>
+              <a:spcBef>
+                <a:spcPts val="0"/>
+              </a:spcBef>
+              <a:spcAft>
+                <a:spcPts val="0"/>
+              </a:spcAft>
+              <a:buClrTx/>
+              <a:buSzTx/>
+              <a:buFontTx/>
+              <a:buNone/>
+              <a:tabLst/>
+              <a:defRPr/>
+            </a:pPr>
+            <a:endParaRPr kumimoji="0" sz="1800" b="0" i="0" u="none" strike="noStrike" kern="1200" cap="none" spc="0" normalizeH="0" baseline="0" noProof="0">
+              <a:ln>
+                <a:noFill/>
+              </a:ln>
+              <a:solidFill>
+                <a:prstClr val="white"/>
+              </a:solidFill>
+              <a:effectLst/>
+              <a:uLnTx/>
+              <a:uFillTx/>
+              <a:latin typeface="Calibri"/>
+              <a:ea typeface="+mn-ea"/>
+              <a:cs typeface="+mn-cs"/>
+            </a:endParaRPr>
           </a:p>
         </p:txBody>
       </p:sp>
@@ -9491,7 +10618,7 @@
 </file>
 
 <file path=ppt/slides/slide2.xml><?xml version="1.0" encoding="utf-8"?>
-<p:sld xmlns:a="http://schemas.openxmlformats.org/drawingml/2006/main" xmlns:p="http://schemas.openxmlformats.org/presentationml/2006/main" xmlns:r="http://schemas.openxmlformats.org/officeDocument/2006/relationships">
+<p:sld xmlns:a="http://schemas.openxmlformats.org/drawingml/2006/main" xmlns:r="http://schemas.openxmlformats.org/officeDocument/2006/relationships" xmlns:p="http://schemas.openxmlformats.org/presentationml/2006/main">
   <p:cSld>
     <p:spTree>
       <p:nvGrpSpPr>
@@ -9499,7 +10626,14 @@
         <p:cNvGrpSpPr/>
         <p:nvPr/>
       </p:nvGrpSpPr>
-      <p:grpSpPr/>
+      <p:grpSpPr>
+        <a:xfrm>
+          <a:off x="0" y="0"/>
+          <a:ext cx="0" cy="0"/>
+          <a:chOff x="0" y="0"/>
+          <a:chExt cx="0" cy="0"/>
+        </a:xfrm>
+      </p:grpSpPr>
       <p:sp>
         <p:nvSpPr>
           <p:cNvPr id="2" name="Rectangle 1"/>
@@ -9540,6 +10674,7 @@
           <a:lstStyle/>
           <a:p>
             <a:pPr algn="ctr"/>
+            <a:endParaRPr/>
           </a:p>
         </p:txBody>
       </p:sp>
@@ -9587,7 +10722,7 @@
         </p:nvSpPr>
         <p:spPr>
           <a:xfrm>
-            <a:off x="731520" y="1234440"/>
+            <a:off x="652272" y="662940"/>
             <a:ext cx="109728" cy="640080"/>
           </a:xfrm>
           <a:prstGeom prst="rect">
@@ -9619,6 +10754,7 @@
           <a:lstStyle/>
           <a:p>
             <a:pPr algn="ctr"/>
+            <a:endParaRPr/>
           </a:p>
         </p:txBody>
       </p:sp>
@@ -10423,7 +11559,7 @@
 </file>
 
 <file path=ppt/slides/slide20.xml><?xml version="1.0" encoding="utf-8"?>
-<p:sld xmlns:a="http://schemas.openxmlformats.org/drawingml/2006/main" xmlns:p="http://schemas.openxmlformats.org/presentationml/2006/main" xmlns:r="http://schemas.openxmlformats.org/officeDocument/2006/relationships">
+<p:sld xmlns:a="http://schemas.openxmlformats.org/drawingml/2006/main" xmlns:r="http://schemas.openxmlformats.org/officeDocument/2006/relationships" xmlns:p="http://schemas.openxmlformats.org/presentationml/2006/main">
   <p:cSld>
     <p:spTree>
       <p:nvGrpSpPr>
@@ -10431,7 +11567,14 @@
         <p:cNvGrpSpPr/>
         <p:nvPr/>
       </p:nvGrpSpPr>
-      <p:grpSpPr/>
+      <p:grpSpPr>
+        <a:xfrm>
+          <a:off x="0" y="0"/>
+          <a:ext cx="0" cy="0"/>
+          <a:chOff x="0" y="0"/>
+          <a:chExt cx="0" cy="0"/>
+        </a:xfrm>
+      </p:grpSpPr>
       <p:sp>
         <p:nvSpPr>
           <p:cNvPr id="2" name="Rectangle 1"/>
@@ -10472,6 +11615,7 @@
           <a:lstStyle/>
           <a:p>
             <a:pPr algn="ctr"/>
+            <a:endParaRPr/>
           </a:p>
         </p:txBody>
       </p:sp>
@@ -10508,49 +11652,6 @@
             <a:r>
               <a:t>Data Flow Architecture</a:t>
             </a:r>
-          </a:p>
-        </p:txBody>
-      </p:sp>
-      <p:sp>
-        <p:nvSpPr>
-          <p:cNvPr id="4" name="Rectangle 3"/>
-          <p:cNvSpPr/>
-          <p:nvPr/>
-        </p:nvSpPr>
-        <p:spPr>
-          <a:xfrm>
-            <a:off x="731520" y="960120"/>
-            <a:ext cx="109728" cy="457200"/>
-          </a:xfrm>
-          <a:prstGeom prst="rect">
-            <a:avLst/>
-          </a:prstGeom>
-          <a:solidFill>
-            <a:srgbClr val="00D4FF"/>
-          </a:solidFill>
-          <a:ln>
-            <a:noFill/>
-          </a:ln>
-        </p:spPr>
-        <p:style>
-          <a:lnRef idx="1">
-            <a:schemeClr val="accent1"/>
-          </a:lnRef>
-          <a:fillRef idx="3">
-            <a:schemeClr val="accent1"/>
-          </a:fillRef>
-          <a:effectRef idx="2">
-            <a:schemeClr val="accent1"/>
-          </a:effectRef>
-          <a:fontRef idx="minor">
-            <a:schemeClr val="lt1"/>
-          </a:fontRef>
-        </p:style>
-        <p:txBody>
-          <a:bodyPr rtlCol="0" anchor="ctr"/>
-          <a:lstStyle/>
-          <a:p>
-            <a:pPr algn="ctr"/>
           </a:p>
         </p:txBody>
       </p:sp>
@@ -10596,6 +11697,7 @@
           <a:lstStyle/>
           <a:p>
             <a:pPr algn="ctr"/>
+            <a:endParaRPr/>
           </a:p>
         </p:txBody>
       </p:sp>
@@ -10643,7 +11745,7 @@
         </p:nvSpPr>
         <p:spPr>
           <a:xfrm>
-            <a:off x="640080" y="3108960"/>
+            <a:off x="609905" y="2933251"/>
             <a:ext cx="1828800" cy="640080"/>
           </a:xfrm>
           <a:prstGeom prst="rect">
@@ -10666,10 +11768,14 @@
               </a:defRPr>
             </a:pPr>
             <a:r>
+              <a:rPr dirty="0"/>
               <a:t>REST API</a:t>
             </a:r>
-            <a:br/>
-            <a:r>
+            <a:br>
+              <a:rPr dirty="0"/>
+            </a:br>
+            <a:r>
+              <a:rPr dirty="0"/>
               <a:t>SSE Streams</a:t>
             </a:r>
           </a:p>
@@ -10715,6 +11821,7 @@
           <a:lstStyle/>
           <a:p>
             <a:pPr algn="ctr"/>
+            <a:endParaRPr/>
           </a:p>
         </p:txBody>
       </p:sp>
@@ -10760,6 +11867,7 @@
           <a:lstStyle/>
           <a:p>
             <a:pPr algn="ctr"/>
+            <a:endParaRPr/>
           </a:p>
         </p:txBody>
       </p:sp>
@@ -10807,7 +11915,7 @@
         </p:nvSpPr>
         <p:spPr>
           <a:xfrm>
-            <a:off x="2926080" y="3108960"/>
+            <a:off x="2895904" y="2933251"/>
             <a:ext cx="1828800" cy="640080"/>
           </a:xfrm>
           <a:prstGeom prst="rect">
@@ -10830,10 +11938,14 @@
               </a:defRPr>
             </a:pPr>
             <a:r>
+              <a:rPr dirty="0"/>
               <a:t>Normalize</a:t>
             </a:r>
-            <a:br/>
-            <a:r>
+            <a:br>
+              <a:rPr dirty="0"/>
+            </a:br>
+            <a:r>
+              <a:rPr dirty="0"/>
               <a:t>Events</a:t>
             </a:r>
           </a:p>
@@ -10879,6 +11991,7 @@
           <a:lstStyle/>
           <a:p>
             <a:pPr algn="ctr"/>
+            <a:endParaRPr/>
           </a:p>
         </p:txBody>
       </p:sp>
@@ -10924,6 +12037,7 @@
           <a:lstStyle/>
           <a:p>
             <a:pPr algn="ctr"/>
+            <a:endParaRPr/>
           </a:p>
         </p:txBody>
       </p:sp>
@@ -10971,7 +12085,7 @@
         </p:nvSpPr>
         <p:spPr>
           <a:xfrm>
-            <a:off x="5212079" y="3108960"/>
+            <a:off x="5212079" y="2926079"/>
             <a:ext cx="1828800" cy="640080"/>
           </a:xfrm>
           <a:prstGeom prst="rect">
@@ -11043,6 +12157,7 @@
           <a:lstStyle/>
           <a:p>
             <a:pPr algn="ctr"/>
+            <a:endParaRPr/>
           </a:p>
         </p:txBody>
       </p:sp>
@@ -11088,6 +12203,7 @@
           <a:lstStyle/>
           <a:p>
             <a:pPr algn="ctr"/>
+            <a:endParaRPr/>
           </a:p>
         </p:txBody>
       </p:sp>
@@ -11135,7 +12251,7 @@
         </p:nvSpPr>
         <p:spPr>
           <a:xfrm>
-            <a:off x="7498079" y="3108960"/>
+            <a:off x="7498079" y="2926079"/>
             <a:ext cx="1828800" cy="640080"/>
           </a:xfrm>
           <a:prstGeom prst="rect">
@@ -11158,10 +12274,14 @@
               </a:defRPr>
             </a:pPr>
             <a:r>
+              <a:rPr dirty="0"/>
               <a:t>Process &amp;</a:t>
             </a:r>
-            <a:br/>
-            <a:r>
+            <a:br>
+              <a:rPr dirty="0"/>
+            </a:br>
+            <a:r>
+              <a:rPr dirty="0"/>
               <a:t>Store</a:t>
             </a:r>
           </a:p>
@@ -11207,6 +12327,7 @@
           <a:lstStyle/>
           <a:p>
             <a:pPr algn="ctr"/>
+            <a:endParaRPr/>
           </a:p>
         </p:txBody>
       </p:sp>
@@ -11252,6 +12373,7 @@
           <a:lstStyle/>
           <a:p>
             <a:pPr algn="ctr"/>
+            <a:endParaRPr/>
           </a:p>
         </p:txBody>
       </p:sp>
@@ -11299,7 +12421,7 @@
         </p:nvSpPr>
         <p:spPr>
           <a:xfrm>
-            <a:off x="9784080" y="3108960"/>
+            <a:off x="9784080" y="2926079"/>
             <a:ext cx="1828800" cy="640080"/>
           </a:xfrm>
           <a:prstGeom prst="rect">
@@ -11322,10 +12444,14 @@
               </a:defRPr>
             </a:pPr>
             <a:r>
+              <a:rPr dirty="0"/>
               <a:t>Display &amp;</a:t>
             </a:r>
-            <a:br/>
-            <a:r>
+            <a:br>
+              <a:rPr dirty="0"/>
+            </a:br>
+            <a:r>
+              <a:rPr dirty="0"/>
               <a:t>Control</a:t>
             </a:r>
           </a:p>
@@ -11407,6 +12533,7 @@
           <a:lstStyle/>
           <a:p>
             <a:pPr algn="ctr"/>
+            <a:endParaRPr/>
           </a:p>
         </p:txBody>
       </p:sp>
@@ -11522,6 +12649,7 @@
           <a:lstStyle/>
           <a:p>
             <a:pPr algn="ctr"/>
+            <a:endParaRPr/>
           </a:p>
         </p:txBody>
       </p:sp>
@@ -11637,6 +12765,7 @@
           <a:lstStyle/>
           <a:p>
             <a:pPr algn="ctr"/>
+            <a:endParaRPr/>
           </a:p>
         </p:txBody>
       </p:sp>
@@ -11745,6 +12874,85 @@
             <a:r>
               <a:t>20/24</a:t>
             </a:r>
+          </a:p>
+        </p:txBody>
+      </p:sp>
+      <p:sp>
+        <p:nvSpPr>
+          <p:cNvPr id="35" name="Rectangle 34">
+            <a:extLst>
+              <a:ext uri="{FF2B5EF4-FFF2-40B4-BE49-F238E27FC236}">
+                <a16:creationId xmlns:a16="http://schemas.microsoft.com/office/drawing/2014/main" id="{6C869547-A03F-39C9-2C6D-9FF51C6018CF}"/>
+              </a:ext>
+            </a:extLst>
+          </p:cNvPr>
+          <p:cNvSpPr/>
+          <p:nvPr/>
+        </p:nvSpPr>
+        <p:spPr>
+          <a:xfrm>
+            <a:off x="613963" y="548640"/>
+            <a:ext cx="109728" cy="640080"/>
+          </a:xfrm>
+          <a:prstGeom prst="rect">
+            <a:avLst/>
+          </a:prstGeom>
+          <a:solidFill>
+            <a:srgbClr val="00D4FF"/>
+          </a:solidFill>
+          <a:ln>
+            <a:noFill/>
+          </a:ln>
+        </p:spPr>
+        <p:style>
+          <a:lnRef idx="1">
+            <a:schemeClr val="accent1"/>
+          </a:lnRef>
+          <a:fillRef idx="3">
+            <a:schemeClr val="accent1"/>
+          </a:fillRef>
+          <a:effectRef idx="2">
+            <a:schemeClr val="accent1"/>
+          </a:effectRef>
+          <a:fontRef idx="minor">
+            <a:schemeClr val="lt1"/>
+          </a:fontRef>
+        </p:style>
+        <p:txBody>
+          <a:bodyPr rtlCol="0" anchor="ctr"/>
+          <a:lstStyle/>
+          <a:p>
+            <a:pPr marL="0" marR="0" lvl="0" indent="0" algn="ctr" defTabSz="457200" rtl="0" eaLnBrk="1" fontAlgn="auto" latinLnBrk="0" hangingPunct="1">
+              <a:lnSpc>
+                <a:spcPct val="100000"/>
+              </a:lnSpc>
+              <a:spcBef>
+                <a:spcPts val="0"/>
+              </a:spcBef>
+              <a:spcAft>
+                <a:spcPts val="0"/>
+              </a:spcAft>
+              <a:buClrTx/>
+              <a:buSzTx/>
+              <a:buFontTx/>
+              <a:buNone/>
+              <a:tabLst/>
+              <a:defRPr/>
+            </a:pPr>
+            <a:endParaRPr kumimoji="0" sz="1800" b="0" i="0" u="none" strike="noStrike" kern="1200" cap="none" spc="0" normalizeH="0" baseline="0" noProof="0">
+              <a:ln>
+                <a:noFill/>
+              </a:ln>
+              <a:solidFill>
+                <a:prstClr val="white"/>
+              </a:solidFill>
+              <a:effectLst/>
+              <a:uLnTx/>
+              <a:uFillTx/>
+              <a:latin typeface="Calibri"/>
+              <a:ea typeface="+mn-ea"/>
+              <a:cs typeface="+mn-cs"/>
+            </a:endParaRPr>
           </a:p>
         </p:txBody>
       </p:sp>
@@ -11757,7 +12965,7 @@
 </file>
 
 <file path=ppt/slides/slide21.xml><?xml version="1.0" encoding="utf-8"?>
-<p:sld xmlns:a="http://schemas.openxmlformats.org/drawingml/2006/main" xmlns:p="http://schemas.openxmlformats.org/presentationml/2006/main" xmlns:r="http://schemas.openxmlformats.org/officeDocument/2006/relationships">
+<p:sld xmlns:a="http://schemas.openxmlformats.org/drawingml/2006/main" xmlns:r="http://schemas.openxmlformats.org/officeDocument/2006/relationships" xmlns:p="http://schemas.openxmlformats.org/presentationml/2006/main">
   <p:cSld>
     <p:spTree>
       <p:nvGrpSpPr>
@@ -11765,7 +12973,14 @@
         <p:cNvGrpSpPr/>
         <p:nvPr/>
       </p:nvGrpSpPr>
-      <p:grpSpPr/>
+      <p:grpSpPr>
+        <a:xfrm>
+          <a:off x="0" y="0"/>
+          <a:ext cx="0" cy="0"/>
+          <a:chOff x="0" y="0"/>
+          <a:chExt cx="0" cy="0"/>
+        </a:xfrm>
+      </p:grpSpPr>
       <p:sp>
         <p:nvSpPr>
           <p:cNvPr id="2" name="Rectangle 1"/>
@@ -11806,6 +13021,7 @@
           <a:lstStyle/>
           <a:p>
             <a:pPr algn="ctr"/>
+            <a:endParaRPr/>
           </a:p>
         </p:txBody>
       </p:sp>
@@ -11842,49 +13058,6 @@
             <a:r>
               <a:t>Technology Stack</a:t>
             </a:r>
-          </a:p>
-        </p:txBody>
-      </p:sp>
-      <p:sp>
-        <p:nvSpPr>
-          <p:cNvPr id="4" name="Rectangle 3"/>
-          <p:cNvSpPr/>
-          <p:nvPr/>
-        </p:nvSpPr>
-        <p:spPr>
-          <a:xfrm>
-            <a:off x="731520" y="960120"/>
-            <a:ext cx="109728" cy="457200"/>
-          </a:xfrm>
-          <a:prstGeom prst="rect">
-            <a:avLst/>
-          </a:prstGeom>
-          <a:solidFill>
-            <a:srgbClr val="00D4FF"/>
-          </a:solidFill>
-          <a:ln>
-            <a:noFill/>
-          </a:ln>
-        </p:spPr>
-        <p:style>
-          <a:lnRef idx="1">
-            <a:schemeClr val="accent1"/>
-          </a:lnRef>
-          <a:fillRef idx="3">
-            <a:schemeClr val="accent1"/>
-          </a:fillRef>
-          <a:effectRef idx="2">
-            <a:schemeClr val="accent1"/>
-          </a:effectRef>
-          <a:fontRef idx="minor">
-            <a:schemeClr val="lt1"/>
-          </a:fontRef>
-        </p:style>
-        <p:txBody>
-          <a:bodyPr rtlCol="0" anchor="ctr"/>
-          <a:lstStyle/>
-          <a:p>
-            <a:pPr algn="ctr"/>
           </a:p>
         </p:txBody>
       </p:sp>
@@ -11930,6 +13103,7 @@
           <a:lstStyle/>
           <a:p>
             <a:pPr algn="ctr"/>
+            <a:endParaRPr/>
           </a:p>
         </p:txBody>
       </p:sp>
@@ -11941,7 +13115,7 @@
         </p:nvSpPr>
         <p:spPr>
           <a:xfrm>
-            <a:off x="640080" y="1554480"/>
+            <a:off x="731520" y="1554480"/>
             <a:ext cx="3108960" cy="457200"/>
           </a:xfrm>
           <a:prstGeom prst="rect">
@@ -11964,6 +13138,7 @@
               </a:defRPr>
             </a:pPr>
             <a:r>
+              <a:rPr dirty="0"/>
               <a:t>Backend Services</a:t>
             </a:r>
           </a:p>
@@ -12263,6 +13438,7 @@
           <a:lstStyle/>
           <a:p>
             <a:pPr algn="ctr"/>
+            <a:endParaRPr/>
           </a:p>
         </p:txBody>
       </p:sp>
@@ -12274,7 +13450,7 @@
         </p:nvSpPr>
         <p:spPr>
           <a:xfrm>
-            <a:off x="4526280" y="1554480"/>
+            <a:off x="4617720" y="1554480"/>
             <a:ext cx="3108960" cy="457200"/>
           </a:xfrm>
           <a:prstGeom prst="rect">
@@ -12297,6 +13473,7 @@
               </a:defRPr>
             </a:pPr>
             <a:r>
+              <a:rPr dirty="0"/>
               <a:t>Frontend</a:t>
             </a:r>
           </a:p>
@@ -12596,6 +13773,7 @@
           <a:lstStyle/>
           <a:p>
             <a:pPr algn="ctr"/>
+            <a:endParaRPr/>
           </a:p>
         </p:txBody>
       </p:sp>
@@ -12607,7 +13785,7 @@
         </p:nvSpPr>
         <p:spPr>
           <a:xfrm>
-            <a:off x="8412480" y="1554480"/>
+            <a:off x="8503920" y="1554480"/>
             <a:ext cx="3108960" cy="457200"/>
           </a:xfrm>
           <a:prstGeom prst="rect">
@@ -12630,6 +13808,7 @@
               </a:defRPr>
             </a:pPr>
             <a:r>
+              <a:rPr dirty="0"/>
               <a:t>Infrastructure</a:t>
             </a:r>
           </a:p>
@@ -12900,6 +14079,85 @@
             <a:r>
               <a:t>21/24</a:t>
             </a:r>
+          </a:p>
+        </p:txBody>
+      </p:sp>
+      <p:sp>
+        <p:nvSpPr>
+          <p:cNvPr id="32" name="Rectangle 31">
+            <a:extLst>
+              <a:ext uri="{FF2B5EF4-FFF2-40B4-BE49-F238E27FC236}">
+                <a16:creationId xmlns:a16="http://schemas.microsoft.com/office/drawing/2014/main" id="{1ECB7B39-9E37-EE14-4678-33D5CF5311D9}"/>
+              </a:ext>
+            </a:extLst>
+          </p:cNvPr>
+          <p:cNvSpPr/>
+          <p:nvPr/>
+        </p:nvSpPr>
+        <p:spPr>
+          <a:xfrm>
+            <a:off x="621792" y="548640"/>
+            <a:ext cx="109728" cy="640080"/>
+          </a:xfrm>
+          <a:prstGeom prst="rect">
+            <a:avLst/>
+          </a:prstGeom>
+          <a:solidFill>
+            <a:srgbClr val="00D4FF"/>
+          </a:solidFill>
+          <a:ln>
+            <a:noFill/>
+          </a:ln>
+        </p:spPr>
+        <p:style>
+          <a:lnRef idx="1">
+            <a:schemeClr val="accent1"/>
+          </a:lnRef>
+          <a:fillRef idx="3">
+            <a:schemeClr val="accent1"/>
+          </a:fillRef>
+          <a:effectRef idx="2">
+            <a:schemeClr val="accent1"/>
+          </a:effectRef>
+          <a:fontRef idx="minor">
+            <a:schemeClr val="lt1"/>
+          </a:fontRef>
+        </p:style>
+        <p:txBody>
+          <a:bodyPr rtlCol="0" anchor="ctr"/>
+          <a:lstStyle/>
+          <a:p>
+            <a:pPr marL="0" marR="0" lvl="0" indent="0" algn="ctr" defTabSz="457200" rtl="0" eaLnBrk="1" fontAlgn="auto" latinLnBrk="0" hangingPunct="1">
+              <a:lnSpc>
+                <a:spcPct val="100000"/>
+              </a:lnSpc>
+              <a:spcBef>
+                <a:spcPts val="0"/>
+              </a:spcBef>
+              <a:spcAft>
+                <a:spcPts val="0"/>
+              </a:spcAft>
+              <a:buClrTx/>
+              <a:buSzTx/>
+              <a:buFontTx/>
+              <a:buNone/>
+              <a:tabLst/>
+              <a:defRPr/>
+            </a:pPr>
+            <a:endParaRPr kumimoji="0" sz="1800" b="0" i="0" u="none" strike="noStrike" kern="1200" cap="none" spc="0" normalizeH="0" baseline="0" noProof="0">
+              <a:ln>
+                <a:noFill/>
+              </a:ln>
+              <a:solidFill>
+                <a:prstClr val="white"/>
+              </a:solidFill>
+              <a:effectLst/>
+              <a:uLnTx/>
+              <a:uFillTx/>
+              <a:latin typeface="Calibri"/>
+              <a:ea typeface="+mn-ea"/>
+              <a:cs typeface="+mn-cs"/>
+            </a:endParaRPr>
           </a:p>
         </p:txBody>
       </p:sp>
@@ -12912,7 +14170,7 @@
 </file>
 
 <file path=ppt/slides/slide22.xml><?xml version="1.0" encoding="utf-8"?>
-<p:sld xmlns:a="http://schemas.openxmlformats.org/drawingml/2006/main" xmlns:p="http://schemas.openxmlformats.org/presentationml/2006/main" xmlns:r="http://schemas.openxmlformats.org/officeDocument/2006/relationships">
+<p:sld xmlns:a="http://schemas.openxmlformats.org/drawingml/2006/main" xmlns:r="http://schemas.openxmlformats.org/officeDocument/2006/relationships" xmlns:p="http://schemas.openxmlformats.org/presentationml/2006/main">
   <p:cSld>
     <p:spTree>
       <p:nvGrpSpPr>
@@ -12920,7 +14178,14 @@
         <p:cNvGrpSpPr/>
         <p:nvPr/>
       </p:nvGrpSpPr>
-      <p:grpSpPr/>
+      <p:grpSpPr>
+        <a:xfrm>
+          <a:off x="0" y="0"/>
+          <a:ext cx="0" cy="0"/>
+          <a:chOff x="0" y="0"/>
+          <a:chExt cx="0" cy="0"/>
+        </a:xfrm>
+      </p:grpSpPr>
       <p:sp>
         <p:nvSpPr>
           <p:cNvPr id="2" name="Rectangle 1"/>
@@ -12961,6 +14226,7 @@
           <a:lstStyle/>
           <a:p>
             <a:pPr algn="ctr"/>
+            <a:endParaRPr/>
           </a:p>
         </p:txBody>
       </p:sp>
@@ -12997,49 +14263,6 @@
             <a:r>
               <a:t>Key User Stories</a:t>
             </a:r>
-          </a:p>
-        </p:txBody>
-      </p:sp>
-      <p:sp>
-        <p:nvSpPr>
-          <p:cNvPr id="4" name="Rectangle 3"/>
-          <p:cNvSpPr/>
-          <p:nvPr/>
-        </p:nvSpPr>
-        <p:spPr>
-          <a:xfrm>
-            <a:off x="731520" y="960120"/>
-            <a:ext cx="109728" cy="457200"/>
-          </a:xfrm>
-          <a:prstGeom prst="rect">
-            <a:avLst/>
-          </a:prstGeom>
-          <a:solidFill>
-            <a:srgbClr val="00D4FF"/>
-          </a:solidFill>
-          <a:ln>
-            <a:noFill/>
-          </a:ln>
-        </p:spPr>
-        <p:style>
-          <a:lnRef idx="1">
-            <a:schemeClr val="accent1"/>
-          </a:lnRef>
-          <a:fillRef idx="3">
-            <a:schemeClr val="accent1"/>
-          </a:fillRef>
-          <a:effectRef idx="2">
-            <a:schemeClr val="accent1"/>
-          </a:effectRef>
-          <a:fontRef idx="minor">
-            <a:schemeClr val="lt1"/>
-          </a:fontRef>
-        </p:style>
-        <p:txBody>
-          <a:bodyPr rtlCol="0" anchor="ctr"/>
-          <a:lstStyle/>
-          <a:p>
-            <a:pPr algn="ctr"/>
           </a:p>
         </p:txBody>
       </p:sp>
@@ -13085,6 +14308,7 @@
           <a:lstStyle/>
           <a:p>
             <a:pPr algn="ctr"/>
+            <a:endParaRPr/>
           </a:p>
         </p:txBody>
       </p:sp>
@@ -13128,6 +14352,7 @@
           <a:lstStyle/>
           <a:p>
             <a:pPr algn="ctr"/>
+            <a:endParaRPr/>
           </a:p>
         </p:txBody>
       </p:sp>
@@ -13389,6 +14614,7 @@
           <a:lstStyle/>
           <a:p>
             <a:pPr algn="ctr"/>
+            <a:endParaRPr/>
           </a:p>
         </p:txBody>
       </p:sp>
@@ -13432,6 +14658,7 @@
           <a:lstStyle/>
           <a:p>
             <a:pPr algn="ctr"/>
+            <a:endParaRPr/>
           </a:p>
         </p:txBody>
       </p:sp>
@@ -13657,6 +14884,7 @@
           <a:lstStyle/>
           <a:p>
             <a:pPr algn="ctr"/>
+            <a:endParaRPr/>
           </a:p>
         </p:txBody>
       </p:sp>
@@ -13700,6 +14928,7 @@
           <a:lstStyle/>
           <a:p>
             <a:pPr algn="ctr"/>
+            <a:endParaRPr/>
           </a:p>
         </p:txBody>
       </p:sp>
@@ -13961,6 +15190,7 @@
           <a:lstStyle/>
           <a:p>
             <a:pPr algn="ctr"/>
+            <a:endParaRPr/>
           </a:p>
         </p:txBody>
       </p:sp>
@@ -14004,6 +15234,7 @@
           <a:lstStyle/>
           <a:p>
             <a:pPr algn="ctr"/>
+            <a:endParaRPr/>
           </a:p>
         </p:txBody>
       </p:sp>
@@ -14220,6 +15451,85 @@
             <a:r>
               <a:t>22/24</a:t>
             </a:r>
+          </a:p>
+        </p:txBody>
+      </p:sp>
+      <p:sp>
+        <p:nvSpPr>
+          <p:cNvPr id="36" name="Rectangle 35">
+            <a:extLst>
+              <a:ext uri="{FF2B5EF4-FFF2-40B4-BE49-F238E27FC236}">
+                <a16:creationId xmlns:a16="http://schemas.microsoft.com/office/drawing/2014/main" id="{0A2014A2-56FA-2B08-F1B6-567D966BCE38}"/>
+              </a:ext>
+            </a:extLst>
+          </p:cNvPr>
+          <p:cNvSpPr/>
+          <p:nvPr/>
+        </p:nvSpPr>
+        <p:spPr>
+          <a:xfrm>
+            <a:off x="652272" y="548640"/>
+            <a:ext cx="109728" cy="640080"/>
+          </a:xfrm>
+          <a:prstGeom prst="rect">
+            <a:avLst/>
+          </a:prstGeom>
+          <a:solidFill>
+            <a:srgbClr val="00D4FF"/>
+          </a:solidFill>
+          <a:ln>
+            <a:noFill/>
+          </a:ln>
+        </p:spPr>
+        <p:style>
+          <a:lnRef idx="1">
+            <a:schemeClr val="accent1"/>
+          </a:lnRef>
+          <a:fillRef idx="3">
+            <a:schemeClr val="accent1"/>
+          </a:fillRef>
+          <a:effectRef idx="2">
+            <a:schemeClr val="accent1"/>
+          </a:effectRef>
+          <a:fontRef idx="minor">
+            <a:schemeClr val="lt1"/>
+          </a:fontRef>
+        </p:style>
+        <p:txBody>
+          <a:bodyPr rtlCol="0" anchor="ctr"/>
+          <a:lstStyle/>
+          <a:p>
+            <a:pPr marL="0" marR="0" lvl="0" indent="0" algn="ctr" defTabSz="457200" rtl="0" eaLnBrk="1" fontAlgn="auto" latinLnBrk="0" hangingPunct="1">
+              <a:lnSpc>
+                <a:spcPct val="100000"/>
+              </a:lnSpc>
+              <a:spcBef>
+                <a:spcPts val="0"/>
+              </a:spcBef>
+              <a:spcAft>
+                <a:spcPts val="0"/>
+              </a:spcAft>
+              <a:buClrTx/>
+              <a:buSzTx/>
+              <a:buFontTx/>
+              <a:buNone/>
+              <a:tabLst/>
+              <a:defRPr/>
+            </a:pPr>
+            <a:endParaRPr kumimoji="0" sz="1800" b="0" i="0" u="none" strike="noStrike" kern="1200" cap="none" spc="0" normalizeH="0" baseline="0" noProof="0">
+              <a:ln>
+                <a:noFill/>
+              </a:ln>
+              <a:solidFill>
+                <a:prstClr val="white"/>
+              </a:solidFill>
+              <a:effectLst/>
+              <a:uLnTx/>
+              <a:uFillTx/>
+              <a:latin typeface="Calibri"/>
+              <a:ea typeface="+mn-ea"/>
+              <a:cs typeface="+mn-cs"/>
+            </a:endParaRPr>
           </a:p>
         </p:txBody>
       </p:sp>
@@ -14232,7 +15542,7 @@
 </file>
 
 <file path=ppt/slides/slide23.xml><?xml version="1.0" encoding="utf-8"?>
-<p:sld xmlns:a="http://schemas.openxmlformats.org/drawingml/2006/main" xmlns:p="http://schemas.openxmlformats.org/presentationml/2006/main" xmlns:r="http://schemas.openxmlformats.org/officeDocument/2006/relationships">
+<p:sld xmlns:a="http://schemas.openxmlformats.org/drawingml/2006/main" xmlns:r="http://schemas.openxmlformats.org/officeDocument/2006/relationships" xmlns:p="http://schemas.openxmlformats.org/presentationml/2006/main">
   <p:cSld>
     <p:spTree>
       <p:nvGrpSpPr>
@@ -14240,7 +15550,14 @@
         <p:cNvGrpSpPr/>
         <p:nvPr/>
       </p:nvGrpSpPr>
-      <p:grpSpPr/>
+      <p:grpSpPr>
+        <a:xfrm>
+          <a:off x="0" y="0"/>
+          <a:ext cx="0" cy="0"/>
+          <a:chOff x="0" y="0"/>
+          <a:chExt cx="0" cy="0"/>
+        </a:xfrm>
+      </p:grpSpPr>
       <p:sp>
         <p:nvSpPr>
           <p:cNvPr id="2" name="Rectangle 1"/>
@@ -14281,6 +15598,7 @@
           <a:lstStyle/>
           <a:p>
             <a:pPr algn="ctr"/>
+            <a:endParaRPr/>
           </a:p>
         </p:txBody>
       </p:sp>
@@ -14322,14 +15640,827 @@
       </p:sp>
       <p:sp>
         <p:nvSpPr>
-          <p:cNvPr id="4" name="Rectangle 3"/>
+          <p:cNvPr id="5" name="TextBox 4"/>
+          <p:cNvSpPr txBox="1"/>
+          <p:nvPr/>
+        </p:nvSpPr>
+        <p:spPr>
+          <a:xfrm>
+            <a:off x="731520" y="1737360"/>
+            <a:ext cx="10698480" cy="457200"/>
+          </a:xfrm>
+          <a:prstGeom prst="rect">
+            <a:avLst/>
+          </a:prstGeom>
+          <a:noFill/>
+        </p:spPr>
+        <p:txBody>
+          <a:bodyPr wrap="square">
+            <a:spAutoFit/>
+          </a:bodyPr>
+          <a:lstStyle/>
+          <a:p>
+            <a:pPr algn="l">
+              <a:defRPr sz="2200" b="1" i="0">
+                <a:solidFill>
+                  <a:srgbClr val="10B981"/>
+                </a:solidFill>
+                <a:latin typeface="Segoe UI"/>
+              </a:defRPr>
+            </a:pPr>
+            <a:r>
+              <a:t>Project Achievements</a:t>
+            </a:r>
+          </a:p>
+        </p:txBody>
+      </p:sp>
+      <p:sp>
+        <p:nvSpPr>
+          <p:cNvPr id="6" name="Oval 5"/>
           <p:cNvSpPr/>
           <p:nvPr/>
         </p:nvSpPr>
         <p:spPr>
           <a:xfrm>
-            <a:off x="731520" y="1188720"/>
-            <a:ext cx="109728" cy="548640"/>
+            <a:off x="731520" y="2304288"/>
+            <a:ext cx="91440" cy="91440"/>
+          </a:xfrm>
+          <a:prstGeom prst="ellipse">
+            <a:avLst/>
+          </a:prstGeom>
+          <a:solidFill>
+            <a:srgbClr val="10B981"/>
+          </a:solidFill>
+          <a:ln>
+            <a:noFill/>
+          </a:ln>
+        </p:spPr>
+        <p:style>
+          <a:lnRef idx="1">
+            <a:schemeClr val="accent1"/>
+          </a:lnRef>
+          <a:fillRef idx="3">
+            <a:schemeClr val="accent1"/>
+          </a:fillRef>
+          <a:effectRef idx="2">
+            <a:schemeClr val="accent1"/>
+          </a:effectRef>
+          <a:fontRef idx="minor">
+            <a:schemeClr val="lt1"/>
+          </a:fontRef>
+        </p:style>
+        <p:txBody>
+          <a:bodyPr rtlCol="0" anchor="ctr"/>
+          <a:lstStyle/>
+          <a:p>
+            <a:pPr algn="ctr"/>
+            <a:endParaRPr/>
+          </a:p>
+        </p:txBody>
+      </p:sp>
+      <p:sp>
+        <p:nvSpPr>
+          <p:cNvPr id="7" name="TextBox 6"/>
+          <p:cNvSpPr txBox="1"/>
+          <p:nvPr/>
+        </p:nvSpPr>
+        <p:spPr>
+          <a:xfrm>
+            <a:off x="1005840" y="2194560"/>
+            <a:ext cx="10058400" cy="411480"/>
+          </a:xfrm>
+          <a:prstGeom prst="rect">
+            <a:avLst/>
+          </a:prstGeom>
+          <a:noFill/>
+        </p:spPr>
+        <p:txBody>
+          <a:bodyPr wrap="square">
+            <a:spAutoFit/>
+          </a:bodyPr>
+          <a:lstStyle/>
+          <a:p>
+            <a:pPr algn="l">
+              <a:defRPr sz="1800" b="0" i="0">
+                <a:solidFill>
+                  <a:srgbClr val="9494B0"/>
+                </a:solidFill>
+                <a:latin typeface="Segoe UI"/>
+              </a:defRPr>
+            </a:pPr>
+            <a:r>
+              <a:t>Distributed microservices architecture with event-driven communication</a:t>
+            </a:r>
+          </a:p>
+        </p:txBody>
+      </p:sp>
+      <p:sp>
+        <p:nvSpPr>
+          <p:cNvPr id="8" name="Oval 7"/>
+          <p:cNvSpPr/>
+          <p:nvPr/>
+        </p:nvSpPr>
+        <p:spPr>
+          <a:xfrm>
+            <a:off x="731520" y="2743200"/>
+            <a:ext cx="91440" cy="91440"/>
+          </a:xfrm>
+          <a:prstGeom prst="ellipse">
+            <a:avLst/>
+          </a:prstGeom>
+          <a:solidFill>
+            <a:srgbClr val="10B981"/>
+          </a:solidFill>
+          <a:ln>
+            <a:noFill/>
+          </a:ln>
+        </p:spPr>
+        <p:style>
+          <a:lnRef idx="1">
+            <a:schemeClr val="accent1"/>
+          </a:lnRef>
+          <a:fillRef idx="3">
+            <a:schemeClr val="accent1"/>
+          </a:fillRef>
+          <a:effectRef idx="2">
+            <a:schemeClr val="accent1"/>
+          </a:effectRef>
+          <a:fontRef idx="minor">
+            <a:schemeClr val="lt1"/>
+          </a:fontRef>
+        </p:style>
+        <p:txBody>
+          <a:bodyPr rtlCol="0" anchor="ctr"/>
+          <a:lstStyle/>
+          <a:p>
+            <a:pPr algn="ctr"/>
+            <a:endParaRPr/>
+          </a:p>
+        </p:txBody>
+      </p:sp>
+      <p:sp>
+        <p:nvSpPr>
+          <p:cNvPr id="9" name="TextBox 8"/>
+          <p:cNvSpPr txBox="1"/>
+          <p:nvPr/>
+        </p:nvSpPr>
+        <p:spPr>
+          <a:xfrm>
+            <a:off x="1005840" y="2633472"/>
+            <a:ext cx="10058400" cy="411480"/>
+          </a:xfrm>
+          <a:prstGeom prst="rect">
+            <a:avLst/>
+          </a:prstGeom>
+          <a:noFill/>
+        </p:spPr>
+        <p:txBody>
+          <a:bodyPr wrap="square">
+            <a:spAutoFit/>
+          </a:bodyPr>
+          <a:lstStyle/>
+          <a:p>
+            <a:pPr algn="l">
+              <a:defRPr sz="1800" b="0" i="0">
+                <a:solidFill>
+                  <a:srgbClr val="9494B0"/>
+                </a:solidFill>
+                <a:latin typeface="Segoe UI"/>
+              </a:defRPr>
+            </a:pPr>
+            <a:r>
+              <a:t>Real-time monitoring and control of simulated Mars habitat</a:t>
+            </a:r>
+          </a:p>
+        </p:txBody>
+      </p:sp>
+      <p:sp>
+        <p:nvSpPr>
+          <p:cNvPr id="10" name="Oval 9"/>
+          <p:cNvSpPr/>
+          <p:nvPr/>
+        </p:nvSpPr>
+        <p:spPr>
+          <a:xfrm>
+            <a:off x="731520" y="3182112"/>
+            <a:ext cx="91440" cy="91440"/>
+          </a:xfrm>
+          <a:prstGeom prst="ellipse">
+            <a:avLst/>
+          </a:prstGeom>
+          <a:solidFill>
+            <a:srgbClr val="10B981"/>
+          </a:solidFill>
+          <a:ln>
+            <a:noFill/>
+          </a:ln>
+        </p:spPr>
+        <p:style>
+          <a:lnRef idx="1">
+            <a:schemeClr val="accent1"/>
+          </a:lnRef>
+          <a:fillRef idx="3">
+            <a:schemeClr val="accent1"/>
+          </a:fillRef>
+          <a:effectRef idx="2">
+            <a:schemeClr val="accent1"/>
+          </a:effectRef>
+          <a:fontRef idx="minor">
+            <a:schemeClr val="lt1"/>
+          </a:fontRef>
+        </p:style>
+        <p:txBody>
+          <a:bodyPr rtlCol="0" anchor="ctr"/>
+          <a:lstStyle/>
+          <a:p>
+            <a:pPr algn="ctr"/>
+            <a:endParaRPr/>
+          </a:p>
+        </p:txBody>
+      </p:sp>
+      <p:sp>
+        <p:nvSpPr>
+          <p:cNvPr id="11" name="TextBox 10"/>
+          <p:cNvSpPr txBox="1"/>
+          <p:nvPr/>
+        </p:nvSpPr>
+        <p:spPr>
+          <a:xfrm>
+            <a:off x="1005840" y="3072384"/>
+            <a:ext cx="10058400" cy="411480"/>
+          </a:xfrm>
+          <a:prstGeom prst="rect">
+            <a:avLst/>
+          </a:prstGeom>
+          <a:noFill/>
+        </p:spPr>
+        <p:txBody>
+          <a:bodyPr wrap="square">
+            <a:spAutoFit/>
+          </a:bodyPr>
+          <a:lstStyle/>
+          <a:p>
+            <a:pPr algn="l">
+              <a:defRPr sz="1800" b="0" i="0">
+                <a:solidFill>
+                  <a:srgbClr val="9494B0"/>
+                </a:solidFill>
+                <a:latin typeface="Segoe UI"/>
+              </a:defRPr>
+            </a:pPr>
+            <a:r>
+              <a:t>IF-THEN automation rules with automatic actuator control</a:t>
+            </a:r>
+          </a:p>
+        </p:txBody>
+      </p:sp>
+      <p:sp>
+        <p:nvSpPr>
+          <p:cNvPr id="12" name="Oval 11"/>
+          <p:cNvSpPr/>
+          <p:nvPr/>
+        </p:nvSpPr>
+        <p:spPr>
+          <a:xfrm>
+            <a:off x="731520" y="3621024"/>
+            <a:ext cx="91440" cy="91440"/>
+          </a:xfrm>
+          <a:prstGeom prst="ellipse">
+            <a:avLst/>
+          </a:prstGeom>
+          <a:solidFill>
+            <a:srgbClr val="10B981"/>
+          </a:solidFill>
+          <a:ln>
+            <a:noFill/>
+          </a:ln>
+        </p:spPr>
+        <p:style>
+          <a:lnRef idx="1">
+            <a:schemeClr val="accent1"/>
+          </a:lnRef>
+          <a:fillRef idx="3">
+            <a:schemeClr val="accent1"/>
+          </a:fillRef>
+          <a:effectRef idx="2">
+            <a:schemeClr val="accent1"/>
+          </a:effectRef>
+          <a:fontRef idx="minor">
+            <a:schemeClr val="lt1"/>
+          </a:fontRef>
+        </p:style>
+        <p:txBody>
+          <a:bodyPr rtlCol="0" anchor="ctr"/>
+          <a:lstStyle/>
+          <a:p>
+            <a:pPr algn="ctr"/>
+            <a:endParaRPr/>
+          </a:p>
+        </p:txBody>
+      </p:sp>
+      <p:sp>
+        <p:nvSpPr>
+          <p:cNvPr id="13" name="TextBox 12"/>
+          <p:cNvSpPr txBox="1"/>
+          <p:nvPr/>
+        </p:nvSpPr>
+        <p:spPr>
+          <a:xfrm>
+            <a:off x="1005840" y="3511296"/>
+            <a:ext cx="10058400" cy="411480"/>
+          </a:xfrm>
+          <a:prstGeom prst="rect">
+            <a:avLst/>
+          </a:prstGeom>
+          <a:noFill/>
+        </p:spPr>
+        <p:txBody>
+          <a:bodyPr wrap="square">
+            <a:spAutoFit/>
+          </a:bodyPr>
+          <a:lstStyle/>
+          <a:p>
+            <a:pPr algn="l">
+              <a:defRPr sz="1800" b="0" i="0">
+                <a:solidFill>
+                  <a:srgbClr val="9494B0"/>
+                </a:solidFill>
+                <a:latin typeface="Segoe UI"/>
+              </a:defRPr>
+            </a:pPr>
+            <a:r>
+              <a:t>Modern React dashboard with SSE-based live updates</a:t>
+            </a:r>
+          </a:p>
+        </p:txBody>
+      </p:sp>
+      <p:sp>
+        <p:nvSpPr>
+          <p:cNvPr id="14" name="Oval 13"/>
+          <p:cNvSpPr/>
+          <p:nvPr/>
+        </p:nvSpPr>
+        <p:spPr>
+          <a:xfrm>
+            <a:off x="731520" y="4059936"/>
+            <a:ext cx="91440" cy="91440"/>
+          </a:xfrm>
+          <a:prstGeom prst="ellipse">
+            <a:avLst/>
+          </a:prstGeom>
+          <a:solidFill>
+            <a:srgbClr val="10B981"/>
+          </a:solidFill>
+          <a:ln>
+            <a:noFill/>
+          </a:ln>
+        </p:spPr>
+        <p:style>
+          <a:lnRef idx="1">
+            <a:schemeClr val="accent1"/>
+          </a:lnRef>
+          <a:fillRef idx="3">
+            <a:schemeClr val="accent1"/>
+          </a:fillRef>
+          <a:effectRef idx="2">
+            <a:schemeClr val="accent1"/>
+          </a:effectRef>
+          <a:fontRef idx="minor">
+            <a:schemeClr val="lt1"/>
+          </a:fontRef>
+        </p:style>
+        <p:txBody>
+          <a:bodyPr rtlCol="0" anchor="ctr"/>
+          <a:lstStyle/>
+          <a:p>
+            <a:pPr algn="ctr"/>
+            <a:endParaRPr/>
+          </a:p>
+        </p:txBody>
+      </p:sp>
+      <p:sp>
+        <p:nvSpPr>
+          <p:cNvPr id="15" name="TextBox 14"/>
+          <p:cNvSpPr txBox="1"/>
+          <p:nvPr/>
+        </p:nvSpPr>
+        <p:spPr>
+          <a:xfrm>
+            <a:off x="1005840" y="3950208"/>
+            <a:ext cx="10058400" cy="411480"/>
+          </a:xfrm>
+          <a:prstGeom prst="rect">
+            <a:avLst/>
+          </a:prstGeom>
+          <a:noFill/>
+        </p:spPr>
+        <p:txBody>
+          <a:bodyPr wrap="square">
+            <a:spAutoFit/>
+          </a:bodyPr>
+          <a:lstStyle/>
+          <a:p>
+            <a:pPr algn="l">
+              <a:defRPr sz="1800" b="0" i="0">
+                <a:solidFill>
+                  <a:srgbClr val="9494B0"/>
+                </a:solidFill>
+                <a:latin typeface="Segoe UI"/>
+              </a:defRPr>
+            </a:pPr>
+            <a:r>
+              <a:t>Containerized deployment with Docker Compose</a:t>
+            </a:r>
+          </a:p>
+        </p:txBody>
+      </p:sp>
+      <p:sp>
+        <p:nvSpPr>
+          <p:cNvPr id="16" name="Oval 15"/>
+          <p:cNvSpPr/>
+          <p:nvPr/>
+        </p:nvSpPr>
+        <p:spPr>
+          <a:xfrm>
+            <a:off x="731520" y="4498848"/>
+            <a:ext cx="91440" cy="91440"/>
+          </a:xfrm>
+          <a:prstGeom prst="ellipse">
+            <a:avLst/>
+          </a:prstGeom>
+          <a:solidFill>
+            <a:srgbClr val="10B981"/>
+          </a:solidFill>
+          <a:ln>
+            <a:noFill/>
+          </a:ln>
+        </p:spPr>
+        <p:style>
+          <a:lnRef idx="1">
+            <a:schemeClr val="accent1"/>
+          </a:lnRef>
+          <a:fillRef idx="3">
+            <a:schemeClr val="accent1"/>
+          </a:fillRef>
+          <a:effectRef idx="2">
+            <a:schemeClr val="accent1"/>
+          </a:effectRef>
+          <a:fontRef idx="minor">
+            <a:schemeClr val="lt1"/>
+          </a:fontRef>
+        </p:style>
+        <p:txBody>
+          <a:bodyPr rtlCol="0" anchor="ctr"/>
+          <a:lstStyle/>
+          <a:p>
+            <a:pPr algn="ctr"/>
+            <a:endParaRPr/>
+          </a:p>
+        </p:txBody>
+      </p:sp>
+      <p:sp>
+        <p:nvSpPr>
+          <p:cNvPr id="17" name="TextBox 16"/>
+          <p:cNvSpPr txBox="1"/>
+          <p:nvPr/>
+        </p:nvSpPr>
+        <p:spPr>
+          <a:xfrm>
+            <a:off x="1005840" y="4389120"/>
+            <a:ext cx="10058400" cy="411480"/>
+          </a:xfrm>
+          <a:prstGeom prst="rect">
+            <a:avLst/>
+          </a:prstGeom>
+          <a:noFill/>
+        </p:spPr>
+        <p:txBody>
+          <a:bodyPr wrap="square">
+            <a:spAutoFit/>
+          </a:bodyPr>
+          <a:lstStyle/>
+          <a:p>
+            <a:pPr algn="l">
+              <a:defRPr sz="1800" b="0" i="0">
+                <a:solidFill>
+                  <a:srgbClr val="9494B0"/>
+                </a:solidFill>
+                <a:latin typeface="Segoe UI"/>
+              </a:defRPr>
+            </a:pPr>
+            <a:r>
+              <a:t>Unified event schema for heterogeneous data sources</a:t>
+            </a:r>
+          </a:p>
+        </p:txBody>
+      </p:sp>
+      <p:sp>
+        <p:nvSpPr>
+          <p:cNvPr id="18" name="TextBox 17"/>
+          <p:cNvSpPr txBox="1"/>
+          <p:nvPr/>
+        </p:nvSpPr>
+        <p:spPr>
+          <a:xfrm>
+            <a:off x="731520" y="4937760"/>
+            <a:ext cx="10698480" cy="457200"/>
+          </a:xfrm>
+          <a:prstGeom prst="rect">
+            <a:avLst/>
+          </a:prstGeom>
+          <a:noFill/>
+        </p:spPr>
+        <p:txBody>
+          <a:bodyPr wrap="square">
+            <a:spAutoFit/>
+          </a:bodyPr>
+          <a:lstStyle/>
+          <a:p>
+            <a:pPr algn="l">
+              <a:defRPr sz="2200" b="1" i="0">
+                <a:solidFill>
+                  <a:srgbClr val="8B5CF6"/>
+                </a:solidFill>
+                <a:latin typeface="Segoe UI"/>
+              </a:defRPr>
+            </a:pPr>
+            <a:r>
+              <a:t>Future Enhancements</a:t>
+            </a:r>
+          </a:p>
+        </p:txBody>
+      </p:sp>
+      <p:sp>
+        <p:nvSpPr>
+          <p:cNvPr id="19" name="TextBox 18"/>
+          <p:cNvSpPr txBox="1"/>
+          <p:nvPr/>
+        </p:nvSpPr>
+        <p:spPr>
+          <a:xfrm>
+            <a:off x="914400" y="5394960"/>
+            <a:ext cx="2534024" cy="369332"/>
+          </a:xfrm>
+          <a:prstGeom prst="rect">
+            <a:avLst/>
+          </a:prstGeom>
+          <a:noFill/>
+        </p:spPr>
+        <p:txBody>
+          <a:bodyPr wrap="square">
+            <a:spAutoFit/>
+          </a:bodyPr>
+          <a:lstStyle/>
+          <a:p>
+            <a:pPr algn="l">
+              <a:defRPr sz="1800" b="1" i="0">
+                <a:solidFill>
+                  <a:srgbClr val="FFFFFF"/>
+                </a:solidFill>
+                <a:latin typeface="Segoe UI"/>
+              </a:defRPr>
+            </a:pPr>
+            <a:r>
+              <a:rPr dirty="0"/>
+              <a:t>→ Machine Learning:</a:t>
+            </a:r>
+          </a:p>
+        </p:txBody>
+      </p:sp>
+      <p:sp>
+        <p:nvSpPr>
+          <p:cNvPr id="20" name="TextBox 19"/>
+          <p:cNvSpPr txBox="1"/>
+          <p:nvPr/>
+        </p:nvSpPr>
+        <p:spPr>
+          <a:xfrm>
+            <a:off x="3448424" y="5426964"/>
+            <a:ext cx="7315200" cy="320040"/>
+          </a:xfrm>
+          <a:prstGeom prst="rect">
+            <a:avLst/>
+          </a:prstGeom>
+          <a:noFill/>
+        </p:spPr>
+        <p:txBody>
+          <a:bodyPr wrap="square">
+            <a:spAutoFit/>
+          </a:bodyPr>
+          <a:lstStyle/>
+          <a:p>
+            <a:pPr algn="l">
+              <a:defRPr sz="1800" b="0" i="0">
+                <a:solidFill>
+                  <a:srgbClr val="6B6B80"/>
+                </a:solidFill>
+                <a:latin typeface="Segoe UI"/>
+              </a:defRPr>
+            </a:pPr>
+            <a:r>
+              <a:t>Predictive maintenance and anomaly detection</a:t>
+            </a:r>
+          </a:p>
+        </p:txBody>
+      </p:sp>
+      <p:sp>
+        <p:nvSpPr>
+          <p:cNvPr id="21" name="TextBox 20"/>
+          <p:cNvSpPr txBox="1"/>
+          <p:nvPr/>
+        </p:nvSpPr>
+        <p:spPr>
+          <a:xfrm>
+            <a:off x="914400" y="5760720"/>
+            <a:ext cx="2286000" cy="320040"/>
+          </a:xfrm>
+          <a:prstGeom prst="rect">
+            <a:avLst/>
+          </a:prstGeom>
+          <a:noFill/>
+        </p:spPr>
+        <p:txBody>
+          <a:bodyPr wrap="square">
+            <a:spAutoFit/>
+          </a:bodyPr>
+          <a:lstStyle/>
+          <a:p>
+            <a:pPr algn="l">
+              <a:defRPr sz="1800" b="1" i="0">
+                <a:solidFill>
+                  <a:srgbClr val="FFFFFF"/>
+                </a:solidFill>
+                <a:latin typeface="Segoe UI"/>
+              </a:defRPr>
+            </a:pPr>
+            <a:r>
+              <a:t>→ Mobile App:</a:t>
+            </a:r>
+          </a:p>
+        </p:txBody>
+      </p:sp>
+      <p:sp>
+        <p:nvSpPr>
+          <p:cNvPr id="22" name="TextBox 21"/>
+          <p:cNvSpPr txBox="1"/>
+          <p:nvPr/>
+        </p:nvSpPr>
+        <p:spPr>
+          <a:xfrm>
+            <a:off x="3448424" y="5760720"/>
+            <a:ext cx="7315200" cy="320040"/>
+          </a:xfrm>
+          <a:prstGeom prst="rect">
+            <a:avLst/>
+          </a:prstGeom>
+          <a:noFill/>
+        </p:spPr>
+        <p:txBody>
+          <a:bodyPr wrap="square">
+            <a:spAutoFit/>
+          </a:bodyPr>
+          <a:lstStyle/>
+          <a:p>
+            <a:pPr algn="l">
+              <a:defRPr sz="1800" b="0" i="0">
+                <a:solidFill>
+                  <a:srgbClr val="6B6B80"/>
+                </a:solidFill>
+                <a:latin typeface="Segoe UI"/>
+              </a:defRPr>
+            </a:pPr>
+            <a:r>
+              <a:t>Remote monitoring and push notifications</a:t>
+            </a:r>
+          </a:p>
+        </p:txBody>
+      </p:sp>
+      <p:sp>
+        <p:nvSpPr>
+          <p:cNvPr id="23" name="TextBox 22"/>
+          <p:cNvSpPr txBox="1"/>
+          <p:nvPr/>
+        </p:nvSpPr>
+        <p:spPr>
+          <a:xfrm>
+            <a:off x="914400" y="6126480"/>
+            <a:ext cx="2617694" cy="369332"/>
+          </a:xfrm>
+          <a:prstGeom prst="rect">
+            <a:avLst/>
+          </a:prstGeom>
+          <a:noFill/>
+        </p:spPr>
+        <p:txBody>
+          <a:bodyPr wrap="square">
+            <a:spAutoFit/>
+          </a:bodyPr>
+          <a:lstStyle/>
+          <a:p>
+            <a:pPr algn="l">
+              <a:defRPr sz="1800" b="1" i="0">
+                <a:solidFill>
+                  <a:srgbClr val="FFFFFF"/>
+                </a:solidFill>
+                <a:latin typeface="Segoe UI"/>
+              </a:defRPr>
+            </a:pPr>
+            <a:r>
+              <a:rPr dirty="0"/>
+              <a:t>→ Advanced Alerting:</a:t>
+            </a:r>
+          </a:p>
+        </p:txBody>
+      </p:sp>
+      <p:sp>
+        <p:nvSpPr>
+          <p:cNvPr id="24" name="TextBox 23"/>
+          <p:cNvSpPr txBox="1"/>
+          <p:nvPr/>
+        </p:nvSpPr>
+        <p:spPr>
+          <a:xfrm>
+            <a:off x="3448424" y="6126480"/>
+            <a:ext cx="7315200" cy="320040"/>
+          </a:xfrm>
+          <a:prstGeom prst="rect">
+            <a:avLst/>
+          </a:prstGeom>
+          <a:noFill/>
+        </p:spPr>
+        <p:txBody>
+          <a:bodyPr wrap="square">
+            <a:spAutoFit/>
+          </a:bodyPr>
+          <a:lstStyle/>
+          <a:p>
+            <a:pPr algn="l">
+              <a:defRPr sz="1800" b="0" i="0">
+                <a:solidFill>
+                  <a:srgbClr val="6B6B80"/>
+                </a:solidFill>
+                <a:latin typeface="Segoe UI"/>
+              </a:defRPr>
+            </a:pPr>
+            <a:r>
+              <a:rPr dirty="0"/>
+              <a:t>Email/SMS notifications for critical events</a:t>
+            </a:r>
+          </a:p>
+        </p:txBody>
+      </p:sp>
+      <p:sp>
+        <p:nvSpPr>
+          <p:cNvPr id="25" name="TextBox 24"/>
+          <p:cNvSpPr txBox="1"/>
+          <p:nvPr/>
+        </p:nvSpPr>
+        <p:spPr>
+          <a:xfrm>
+            <a:off x="11155680" y="6309360"/>
+            <a:ext cx="731520" cy="274320"/>
+          </a:xfrm>
+          <a:prstGeom prst="rect">
+            <a:avLst/>
+          </a:prstGeom>
+          <a:noFill/>
+        </p:spPr>
+        <p:txBody>
+          <a:bodyPr wrap="square">
+            <a:spAutoFit/>
+          </a:bodyPr>
+          <a:lstStyle/>
+          <a:p>
+            <a:pPr algn="r">
+              <a:defRPr sz="1400" b="0" i="0">
+                <a:solidFill>
+                  <a:srgbClr val="6B6B80"/>
+                </a:solidFill>
+                <a:latin typeface="Segoe UI"/>
+              </a:defRPr>
+            </a:pPr>
+            <a:r>
+              <a:t>23/24</a:t>
+            </a:r>
+          </a:p>
+        </p:txBody>
+      </p:sp>
+      <p:sp>
+        <p:nvSpPr>
+          <p:cNvPr id="26" name="Rectangle 25">
+            <a:extLst>
+              <a:ext uri="{FF2B5EF4-FFF2-40B4-BE49-F238E27FC236}">
+                <a16:creationId xmlns:a16="http://schemas.microsoft.com/office/drawing/2014/main" id="{916C60D9-D197-7885-A5A7-C8D3F76D7444}"/>
+              </a:ext>
+            </a:extLst>
+          </p:cNvPr>
+          <p:cNvSpPr/>
+          <p:nvPr/>
+        </p:nvSpPr>
+        <p:spPr>
+          <a:xfrm>
+            <a:off x="640558" y="640080"/>
+            <a:ext cx="109728" cy="640080"/>
           </a:xfrm>
           <a:prstGeom prst="rect">
             <a:avLst/>
@@ -14359,805 +16490,37 @@
           <a:bodyPr rtlCol="0" anchor="ctr"/>
           <a:lstStyle/>
           <a:p>
-            <a:pPr algn="ctr"/>
-          </a:p>
-        </p:txBody>
-      </p:sp>
-      <p:sp>
-        <p:nvSpPr>
-          <p:cNvPr id="5" name="TextBox 4"/>
-          <p:cNvSpPr txBox="1"/>
-          <p:nvPr/>
-        </p:nvSpPr>
-        <p:spPr>
-          <a:xfrm>
-            <a:off x="731520" y="1737360"/>
-            <a:ext cx="10698480" cy="457200"/>
-          </a:xfrm>
-          <a:prstGeom prst="rect">
-            <a:avLst/>
-          </a:prstGeom>
-          <a:noFill/>
-        </p:spPr>
-        <p:txBody>
-          <a:bodyPr wrap="square">
-            <a:spAutoFit/>
-          </a:bodyPr>
-          <a:lstStyle/>
-          <a:p>
-            <a:pPr algn="l">
-              <a:defRPr sz="2200" b="1" i="0">
-                <a:solidFill>
-                  <a:srgbClr val="10B981"/>
-                </a:solidFill>
-                <a:latin typeface="Segoe UI"/>
-              </a:defRPr>
-            </a:pPr>
-            <a:r>
-              <a:t>Project Achievements</a:t>
-            </a:r>
-          </a:p>
-        </p:txBody>
-      </p:sp>
-      <p:sp>
-        <p:nvSpPr>
-          <p:cNvPr id="6" name="Oval 5"/>
-          <p:cNvSpPr/>
-          <p:nvPr/>
-        </p:nvSpPr>
-        <p:spPr>
-          <a:xfrm>
-            <a:off x="731520" y="2304288"/>
-            <a:ext cx="91440" cy="91440"/>
-          </a:xfrm>
-          <a:prstGeom prst="ellipse">
-            <a:avLst/>
-          </a:prstGeom>
-          <a:solidFill>
-            <a:srgbClr val="10B981"/>
-          </a:solidFill>
-          <a:ln>
-            <a:noFill/>
-          </a:ln>
-        </p:spPr>
-        <p:style>
-          <a:lnRef idx="1">
-            <a:schemeClr val="accent1"/>
-          </a:lnRef>
-          <a:fillRef idx="3">
-            <a:schemeClr val="accent1"/>
-          </a:fillRef>
-          <a:effectRef idx="2">
-            <a:schemeClr val="accent1"/>
-          </a:effectRef>
-          <a:fontRef idx="minor">
-            <a:schemeClr val="lt1"/>
-          </a:fontRef>
-        </p:style>
-        <p:txBody>
-          <a:bodyPr rtlCol="0" anchor="ctr"/>
-          <a:lstStyle/>
-          <a:p>
-            <a:pPr algn="ctr"/>
-          </a:p>
-        </p:txBody>
-      </p:sp>
-      <p:sp>
-        <p:nvSpPr>
-          <p:cNvPr id="7" name="TextBox 6"/>
-          <p:cNvSpPr txBox="1"/>
-          <p:nvPr/>
-        </p:nvSpPr>
-        <p:spPr>
-          <a:xfrm>
-            <a:off x="1005840" y="2194560"/>
-            <a:ext cx="10058400" cy="411480"/>
-          </a:xfrm>
-          <a:prstGeom prst="rect">
-            <a:avLst/>
-          </a:prstGeom>
-          <a:noFill/>
-        </p:spPr>
-        <p:txBody>
-          <a:bodyPr wrap="square">
-            <a:spAutoFit/>
-          </a:bodyPr>
-          <a:lstStyle/>
-          <a:p>
-            <a:pPr algn="l">
-              <a:defRPr sz="1800" b="0" i="0">
-                <a:solidFill>
-                  <a:srgbClr val="9494B0"/>
-                </a:solidFill>
-                <a:latin typeface="Segoe UI"/>
-              </a:defRPr>
-            </a:pPr>
-            <a:r>
-              <a:t>Distributed microservices architecture with event-driven communication</a:t>
-            </a:r>
-          </a:p>
-        </p:txBody>
-      </p:sp>
-      <p:sp>
-        <p:nvSpPr>
-          <p:cNvPr id="8" name="Oval 7"/>
-          <p:cNvSpPr/>
-          <p:nvPr/>
-        </p:nvSpPr>
-        <p:spPr>
-          <a:xfrm>
-            <a:off x="731520" y="2743200"/>
-            <a:ext cx="91440" cy="91440"/>
-          </a:xfrm>
-          <a:prstGeom prst="ellipse">
-            <a:avLst/>
-          </a:prstGeom>
-          <a:solidFill>
-            <a:srgbClr val="10B981"/>
-          </a:solidFill>
-          <a:ln>
-            <a:noFill/>
-          </a:ln>
-        </p:spPr>
-        <p:style>
-          <a:lnRef idx="1">
-            <a:schemeClr val="accent1"/>
-          </a:lnRef>
-          <a:fillRef idx="3">
-            <a:schemeClr val="accent1"/>
-          </a:fillRef>
-          <a:effectRef idx="2">
-            <a:schemeClr val="accent1"/>
-          </a:effectRef>
-          <a:fontRef idx="minor">
-            <a:schemeClr val="lt1"/>
-          </a:fontRef>
-        </p:style>
-        <p:txBody>
-          <a:bodyPr rtlCol="0" anchor="ctr"/>
-          <a:lstStyle/>
-          <a:p>
-            <a:pPr algn="ctr"/>
-          </a:p>
-        </p:txBody>
-      </p:sp>
-      <p:sp>
-        <p:nvSpPr>
-          <p:cNvPr id="9" name="TextBox 8"/>
-          <p:cNvSpPr txBox="1"/>
-          <p:nvPr/>
-        </p:nvSpPr>
-        <p:spPr>
-          <a:xfrm>
-            <a:off x="1005840" y="2633472"/>
-            <a:ext cx="10058400" cy="411480"/>
-          </a:xfrm>
-          <a:prstGeom prst="rect">
-            <a:avLst/>
-          </a:prstGeom>
-          <a:noFill/>
-        </p:spPr>
-        <p:txBody>
-          <a:bodyPr wrap="square">
-            <a:spAutoFit/>
-          </a:bodyPr>
-          <a:lstStyle/>
-          <a:p>
-            <a:pPr algn="l">
-              <a:defRPr sz="1800" b="0" i="0">
-                <a:solidFill>
-                  <a:srgbClr val="9494B0"/>
-                </a:solidFill>
-                <a:latin typeface="Segoe UI"/>
-              </a:defRPr>
-            </a:pPr>
-            <a:r>
-              <a:t>Real-time monitoring and control of simulated Mars habitat</a:t>
-            </a:r>
-          </a:p>
-        </p:txBody>
-      </p:sp>
-      <p:sp>
-        <p:nvSpPr>
-          <p:cNvPr id="10" name="Oval 9"/>
-          <p:cNvSpPr/>
-          <p:nvPr/>
-        </p:nvSpPr>
-        <p:spPr>
-          <a:xfrm>
-            <a:off x="731520" y="3182112"/>
-            <a:ext cx="91440" cy="91440"/>
-          </a:xfrm>
-          <a:prstGeom prst="ellipse">
-            <a:avLst/>
-          </a:prstGeom>
-          <a:solidFill>
-            <a:srgbClr val="10B981"/>
-          </a:solidFill>
-          <a:ln>
-            <a:noFill/>
-          </a:ln>
-        </p:spPr>
-        <p:style>
-          <a:lnRef idx="1">
-            <a:schemeClr val="accent1"/>
-          </a:lnRef>
-          <a:fillRef idx="3">
-            <a:schemeClr val="accent1"/>
-          </a:fillRef>
-          <a:effectRef idx="2">
-            <a:schemeClr val="accent1"/>
-          </a:effectRef>
-          <a:fontRef idx="minor">
-            <a:schemeClr val="lt1"/>
-          </a:fontRef>
-        </p:style>
-        <p:txBody>
-          <a:bodyPr rtlCol="0" anchor="ctr"/>
-          <a:lstStyle/>
-          <a:p>
-            <a:pPr algn="ctr"/>
-          </a:p>
-        </p:txBody>
-      </p:sp>
-      <p:sp>
-        <p:nvSpPr>
-          <p:cNvPr id="11" name="TextBox 10"/>
-          <p:cNvSpPr txBox="1"/>
-          <p:nvPr/>
-        </p:nvSpPr>
-        <p:spPr>
-          <a:xfrm>
-            <a:off x="1005840" y="3072384"/>
-            <a:ext cx="10058400" cy="411480"/>
-          </a:xfrm>
-          <a:prstGeom prst="rect">
-            <a:avLst/>
-          </a:prstGeom>
-          <a:noFill/>
-        </p:spPr>
-        <p:txBody>
-          <a:bodyPr wrap="square">
-            <a:spAutoFit/>
-          </a:bodyPr>
-          <a:lstStyle/>
-          <a:p>
-            <a:pPr algn="l">
-              <a:defRPr sz="1800" b="0" i="0">
-                <a:solidFill>
-                  <a:srgbClr val="9494B0"/>
-                </a:solidFill>
-                <a:latin typeface="Segoe UI"/>
-              </a:defRPr>
-            </a:pPr>
-            <a:r>
-              <a:t>IF-THEN automation rules with automatic actuator control</a:t>
-            </a:r>
-          </a:p>
-        </p:txBody>
-      </p:sp>
-      <p:sp>
-        <p:nvSpPr>
-          <p:cNvPr id="12" name="Oval 11"/>
-          <p:cNvSpPr/>
-          <p:nvPr/>
-        </p:nvSpPr>
-        <p:spPr>
-          <a:xfrm>
-            <a:off x="731520" y="3621024"/>
-            <a:ext cx="91440" cy="91440"/>
-          </a:xfrm>
-          <a:prstGeom prst="ellipse">
-            <a:avLst/>
-          </a:prstGeom>
-          <a:solidFill>
-            <a:srgbClr val="10B981"/>
-          </a:solidFill>
-          <a:ln>
-            <a:noFill/>
-          </a:ln>
-        </p:spPr>
-        <p:style>
-          <a:lnRef idx="1">
-            <a:schemeClr val="accent1"/>
-          </a:lnRef>
-          <a:fillRef idx="3">
-            <a:schemeClr val="accent1"/>
-          </a:fillRef>
-          <a:effectRef idx="2">
-            <a:schemeClr val="accent1"/>
-          </a:effectRef>
-          <a:fontRef idx="minor">
-            <a:schemeClr val="lt1"/>
-          </a:fontRef>
-        </p:style>
-        <p:txBody>
-          <a:bodyPr rtlCol="0" anchor="ctr"/>
-          <a:lstStyle/>
-          <a:p>
-            <a:pPr algn="ctr"/>
-          </a:p>
-        </p:txBody>
-      </p:sp>
-      <p:sp>
-        <p:nvSpPr>
-          <p:cNvPr id="13" name="TextBox 12"/>
-          <p:cNvSpPr txBox="1"/>
-          <p:nvPr/>
-        </p:nvSpPr>
-        <p:spPr>
-          <a:xfrm>
-            <a:off x="1005840" y="3511296"/>
-            <a:ext cx="10058400" cy="411480"/>
-          </a:xfrm>
-          <a:prstGeom prst="rect">
-            <a:avLst/>
-          </a:prstGeom>
-          <a:noFill/>
-        </p:spPr>
-        <p:txBody>
-          <a:bodyPr wrap="square">
-            <a:spAutoFit/>
-          </a:bodyPr>
-          <a:lstStyle/>
-          <a:p>
-            <a:pPr algn="l">
-              <a:defRPr sz="1800" b="0" i="0">
-                <a:solidFill>
-                  <a:srgbClr val="9494B0"/>
-                </a:solidFill>
-                <a:latin typeface="Segoe UI"/>
-              </a:defRPr>
-            </a:pPr>
-            <a:r>
-              <a:t>Modern React dashboard with SSE-based live updates</a:t>
-            </a:r>
-          </a:p>
-        </p:txBody>
-      </p:sp>
-      <p:sp>
-        <p:nvSpPr>
-          <p:cNvPr id="14" name="Oval 13"/>
-          <p:cNvSpPr/>
-          <p:nvPr/>
-        </p:nvSpPr>
-        <p:spPr>
-          <a:xfrm>
-            <a:off x="731520" y="4059936"/>
-            <a:ext cx="91440" cy="91440"/>
-          </a:xfrm>
-          <a:prstGeom prst="ellipse">
-            <a:avLst/>
-          </a:prstGeom>
-          <a:solidFill>
-            <a:srgbClr val="10B981"/>
-          </a:solidFill>
-          <a:ln>
-            <a:noFill/>
-          </a:ln>
-        </p:spPr>
-        <p:style>
-          <a:lnRef idx="1">
-            <a:schemeClr val="accent1"/>
-          </a:lnRef>
-          <a:fillRef idx="3">
-            <a:schemeClr val="accent1"/>
-          </a:fillRef>
-          <a:effectRef idx="2">
-            <a:schemeClr val="accent1"/>
-          </a:effectRef>
-          <a:fontRef idx="minor">
-            <a:schemeClr val="lt1"/>
-          </a:fontRef>
-        </p:style>
-        <p:txBody>
-          <a:bodyPr rtlCol="0" anchor="ctr"/>
-          <a:lstStyle/>
-          <a:p>
-            <a:pPr algn="ctr"/>
-          </a:p>
-        </p:txBody>
-      </p:sp>
-      <p:sp>
-        <p:nvSpPr>
-          <p:cNvPr id="15" name="TextBox 14"/>
-          <p:cNvSpPr txBox="1"/>
-          <p:nvPr/>
-        </p:nvSpPr>
-        <p:spPr>
-          <a:xfrm>
-            <a:off x="1005840" y="3950208"/>
-            <a:ext cx="10058400" cy="411480"/>
-          </a:xfrm>
-          <a:prstGeom prst="rect">
-            <a:avLst/>
-          </a:prstGeom>
-          <a:noFill/>
-        </p:spPr>
-        <p:txBody>
-          <a:bodyPr wrap="square">
-            <a:spAutoFit/>
-          </a:bodyPr>
-          <a:lstStyle/>
-          <a:p>
-            <a:pPr algn="l">
-              <a:defRPr sz="1800" b="0" i="0">
-                <a:solidFill>
-                  <a:srgbClr val="9494B0"/>
-                </a:solidFill>
-                <a:latin typeface="Segoe UI"/>
-              </a:defRPr>
-            </a:pPr>
-            <a:r>
-              <a:t>Containerized deployment with Docker Compose</a:t>
-            </a:r>
-          </a:p>
-        </p:txBody>
-      </p:sp>
-      <p:sp>
-        <p:nvSpPr>
-          <p:cNvPr id="16" name="Oval 15"/>
-          <p:cNvSpPr/>
-          <p:nvPr/>
-        </p:nvSpPr>
-        <p:spPr>
-          <a:xfrm>
-            <a:off x="731520" y="4498848"/>
-            <a:ext cx="91440" cy="91440"/>
-          </a:xfrm>
-          <a:prstGeom prst="ellipse">
-            <a:avLst/>
-          </a:prstGeom>
-          <a:solidFill>
-            <a:srgbClr val="10B981"/>
-          </a:solidFill>
-          <a:ln>
-            <a:noFill/>
-          </a:ln>
-        </p:spPr>
-        <p:style>
-          <a:lnRef idx="1">
-            <a:schemeClr val="accent1"/>
-          </a:lnRef>
-          <a:fillRef idx="3">
-            <a:schemeClr val="accent1"/>
-          </a:fillRef>
-          <a:effectRef idx="2">
-            <a:schemeClr val="accent1"/>
-          </a:effectRef>
-          <a:fontRef idx="minor">
-            <a:schemeClr val="lt1"/>
-          </a:fontRef>
-        </p:style>
-        <p:txBody>
-          <a:bodyPr rtlCol="0" anchor="ctr"/>
-          <a:lstStyle/>
-          <a:p>
-            <a:pPr algn="ctr"/>
-          </a:p>
-        </p:txBody>
-      </p:sp>
-      <p:sp>
-        <p:nvSpPr>
-          <p:cNvPr id="17" name="TextBox 16"/>
-          <p:cNvSpPr txBox="1"/>
-          <p:nvPr/>
-        </p:nvSpPr>
-        <p:spPr>
-          <a:xfrm>
-            <a:off x="1005840" y="4389120"/>
-            <a:ext cx="10058400" cy="411480"/>
-          </a:xfrm>
-          <a:prstGeom prst="rect">
-            <a:avLst/>
-          </a:prstGeom>
-          <a:noFill/>
-        </p:spPr>
-        <p:txBody>
-          <a:bodyPr wrap="square">
-            <a:spAutoFit/>
-          </a:bodyPr>
-          <a:lstStyle/>
-          <a:p>
-            <a:pPr algn="l">
-              <a:defRPr sz="1800" b="0" i="0">
-                <a:solidFill>
-                  <a:srgbClr val="9494B0"/>
-                </a:solidFill>
-                <a:latin typeface="Segoe UI"/>
-              </a:defRPr>
-            </a:pPr>
-            <a:r>
-              <a:t>Unified event schema for heterogeneous data sources</a:t>
-            </a:r>
-          </a:p>
-        </p:txBody>
-      </p:sp>
-      <p:sp>
-        <p:nvSpPr>
-          <p:cNvPr id="18" name="TextBox 17"/>
-          <p:cNvSpPr txBox="1"/>
-          <p:nvPr/>
-        </p:nvSpPr>
-        <p:spPr>
-          <a:xfrm>
-            <a:off x="731520" y="4937760"/>
-            <a:ext cx="10698480" cy="457200"/>
-          </a:xfrm>
-          <a:prstGeom prst="rect">
-            <a:avLst/>
-          </a:prstGeom>
-          <a:noFill/>
-        </p:spPr>
-        <p:txBody>
-          <a:bodyPr wrap="square">
-            <a:spAutoFit/>
-          </a:bodyPr>
-          <a:lstStyle/>
-          <a:p>
-            <a:pPr algn="l">
-              <a:defRPr sz="2200" b="1" i="0">
-                <a:solidFill>
-                  <a:srgbClr val="8B5CF6"/>
-                </a:solidFill>
-                <a:latin typeface="Segoe UI"/>
-              </a:defRPr>
-            </a:pPr>
-            <a:r>
-              <a:t>Future Enhancements</a:t>
-            </a:r>
-          </a:p>
-        </p:txBody>
-      </p:sp>
-      <p:sp>
-        <p:nvSpPr>
-          <p:cNvPr id="19" name="TextBox 18"/>
-          <p:cNvSpPr txBox="1"/>
-          <p:nvPr/>
-        </p:nvSpPr>
-        <p:spPr>
-          <a:xfrm>
-            <a:off x="914400" y="5394960"/>
-            <a:ext cx="2286000" cy="320040"/>
-          </a:xfrm>
-          <a:prstGeom prst="rect">
-            <a:avLst/>
-          </a:prstGeom>
-          <a:noFill/>
-        </p:spPr>
-        <p:txBody>
-          <a:bodyPr wrap="square">
-            <a:spAutoFit/>
-          </a:bodyPr>
-          <a:lstStyle/>
-          <a:p>
-            <a:pPr algn="l">
-              <a:defRPr sz="1800" b="1" i="0">
-                <a:solidFill>
-                  <a:srgbClr val="FFFFFF"/>
-                </a:solidFill>
-                <a:latin typeface="Segoe UI"/>
-              </a:defRPr>
-            </a:pPr>
-            <a:r>
-              <a:t>→ Machine Learning:</a:t>
-            </a:r>
-          </a:p>
-        </p:txBody>
-      </p:sp>
-      <p:sp>
-        <p:nvSpPr>
-          <p:cNvPr id="20" name="TextBox 19"/>
-          <p:cNvSpPr txBox="1"/>
-          <p:nvPr/>
-        </p:nvSpPr>
-        <p:spPr>
-          <a:xfrm>
-            <a:off x="3200400" y="5394960"/>
-            <a:ext cx="7315200" cy="320040"/>
-          </a:xfrm>
-          <a:prstGeom prst="rect">
-            <a:avLst/>
-          </a:prstGeom>
-          <a:noFill/>
-        </p:spPr>
-        <p:txBody>
-          <a:bodyPr wrap="square">
-            <a:spAutoFit/>
-          </a:bodyPr>
-          <a:lstStyle/>
-          <a:p>
-            <a:pPr algn="l">
-              <a:defRPr sz="1800" b="0" i="0">
-                <a:solidFill>
-                  <a:srgbClr val="6B6B80"/>
-                </a:solidFill>
-                <a:latin typeface="Segoe UI"/>
-              </a:defRPr>
-            </a:pPr>
-            <a:r>
-              <a:t>Predictive maintenance and anomaly detection</a:t>
-            </a:r>
-          </a:p>
-        </p:txBody>
-      </p:sp>
-      <p:sp>
-        <p:nvSpPr>
-          <p:cNvPr id="21" name="TextBox 20"/>
-          <p:cNvSpPr txBox="1"/>
-          <p:nvPr/>
-        </p:nvSpPr>
-        <p:spPr>
-          <a:xfrm>
-            <a:off x="914400" y="5760720"/>
-            <a:ext cx="2286000" cy="320040"/>
-          </a:xfrm>
-          <a:prstGeom prst="rect">
-            <a:avLst/>
-          </a:prstGeom>
-          <a:noFill/>
-        </p:spPr>
-        <p:txBody>
-          <a:bodyPr wrap="square">
-            <a:spAutoFit/>
-          </a:bodyPr>
-          <a:lstStyle/>
-          <a:p>
-            <a:pPr algn="l">
-              <a:defRPr sz="1800" b="1" i="0">
-                <a:solidFill>
-                  <a:srgbClr val="FFFFFF"/>
-                </a:solidFill>
-                <a:latin typeface="Segoe UI"/>
-              </a:defRPr>
-            </a:pPr>
-            <a:r>
-              <a:t>→ Mobile App:</a:t>
-            </a:r>
-          </a:p>
-        </p:txBody>
-      </p:sp>
-      <p:sp>
-        <p:nvSpPr>
-          <p:cNvPr id="22" name="TextBox 21"/>
-          <p:cNvSpPr txBox="1"/>
-          <p:nvPr/>
-        </p:nvSpPr>
-        <p:spPr>
-          <a:xfrm>
-            <a:off x="3200400" y="5760720"/>
-            <a:ext cx="7315200" cy="320040"/>
-          </a:xfrm>
-          <a:prstGeom prst="rect">
-            <a:avLst/>
-          </a:prstGeom>
-          <a:noFill/>
-        </p:spPr>
-        <p:txBody>
-          <a:bodyPr wrap="square">
-            <a:spAutoFit/>
-          </a:bodyPr>
-          <a:lstStyle/>
-          <a:p>
-            <a:pPr algn="l">
-              <a:defRPr sz="1800" b="0" i="0">
-                <a:solidFill>
-                  <a:srgbClr val="6B6B80"/>
-                </a:solidFill>
-                <a:latin typeface="Segoe UI"/>
-              </a:defRPr>
-            </a:pPr>
-            <a:r>
-              <a:t>Remote monitoring and push notifications</a:t>
-            </a:r>
-          </a:p>
-        </p:txBody>
-      </p:sp>
-      <p:sp>
-        <p:nvSpPr>
-          <p:cNvPr id="23" name="TextBox 22"/>
-          <p:cNvSpPr txBox="1"/>
-          <p:nvPr/>
-        </p:nvSpPr>
-        <p:spPr>
-          <a:xfrm>
-            <a:off x="914400" y="6126480"/>
-            <a:ext cx="2286000" cy="320040"/>
-          </a:xfrm>
-          <a:prstGeom prst="rect">
-            <a:avLst/>
-          </a:prstGeom>
-          <a:noFill/>
-        </p:spPr>
-        <p:txBody>
-          <a:bodyPr wrap="square">
-            <a:spAutoFit/>
-          </a:bodyPr>
-          <a:lstStyle/>
-          <a:p>
-            <a:pPr algn="l">
-              <a:defRPr sz="1800" b="1" i="0">
-                <a:solidFill>
-                  <a:srgbClr val="FFFFFF"/>
-                </a:solidFill>
-                <a:latin typeface="Segoe UI"/>
-              </a:defRPr>
-            </a:pPr>
-            <a:r>
-              <a:t>→ Advanced Alerting:</a:t>
-            </a:r>
-          </a:p>
-        </p:txBody>
-      </p:sp>
-      <p:sp>
-        <p:nvSpPr>
-          <p:cNvPr id="24" name="TextBox 23"/>
-          <p:cNvSpPr txBox="1"/>
-          <p:nvPr/>
-        </p:nvSpPr>
-        <p:spPr>
-          <a:xfrm>
-            <a:off x="3200400" y="6126480"/>
-            <a:ext cx="7315200" cy="320040"/>
-          </a:xfrm>
-          <a:prstGeom prst="rect">
-            <a:avLst/>
-          </a:prstGeom>
-          <a:noFill/>
-        </p:spPr>
-        <p:txBody>
-          <a:bodyPr wrap="square">
-            <a:spAutoFit/>
-          </a:bodyPr>
-          <a:lstStyle/>
-          <a:p>
-            <a:pPr algn="l">
-              <a:defRPr sz="1800" b="0" i="0">
-                <a:solidFill>
-                  <a:srgbClr val="6B6B80"/>
-                </a:solidFill>
-                <a:latin typeface="Segoe UI"/>
-              </a:defRPr>
-            </a:pPr>
-            <a:r>
-              <a:t>Email/SMS notifications for critical events</a:t>
-            </a:r>
-          </a:p>
-        </p:txBody>
-      </p:sp>
-      <p:sp>
-        <p:nvSpPr>
-          <p:cNvPr id="25" name="TextBox 24"/>
-          <p:cNvSpPr txBox="1"/>
-          <p:nvPr/>
-        </p:nvSpPr>
-        <p:spPr>
-          <a:xfrm>
-            <a:off x="11155680" y="6309360"/>
-            <a:ext cx="731520" cy="274320"/>
-          </a:xfrm>
-          <a:prstGeom prst="rect">
-            <a:avLst/>
-          </a:prstGeom>
-          <a:noFill/>
-        </p:spPr>
-        <p:txBody>
-          <a:bodyPr wrap="square">
-            <a:spAutoFit/>
-          </a:bodyPr>
-          <a:lstStyle/>
-          <a:p>
-            <a:pPr algn="r">
-              <a:defRPr sz="1400" b="0" i="0">
-                <a:solidFill>
-                  <a:srgbClr val="6B6B80"/>
-                </a:solidFill>
-                <a:latin typeface="Segoe UI"/>
-              </a:defRPr>
-            </a:pPr>
-            <a:r>
-              <a:t>23/24</a:t>
-            </a:r>
+            <a:pPr marL="0" marR="0" lvl="0" indent="0" algn="ctr" defTabSz="457200" rtl="0" eaLnBrk="1" fontAlgn="auto" latinLnBrk="0" hangingPunct="1">
+              <a:lnSpc>
+                <a:spcPct val="100000"/>
+              </a:lnSpc>
+              <a:spcBef>
+                <a:spcPts val="0"/>
+              </a:spcBef>
+              <a:spcAft>
+                <a:spcPts val="0"/>
+              </a:spcAft>
+              <a:buClrTx/>
+              <a:buSzTx/>
+              <a:buFontTx/>
+              <a:buNone/>
+              <a:tabLst/>
+              <a:defRPr/>
+            </a:pPr>
+            <a:endParaRPr kumimoji="0" sz="1800" b="0" i="0" u="none" strike="noStrike" kern="1200" cap="none" spc="0" normalizeH="0" baseline="0" noProof="0">
+              <a:ln>
+                <a:noFill/>
+              </a:ln>
+              <a:solidFill>
+                <a:prstClr val="white"/>
+              </a:solidFill>
+              <a:effectLst/>
+              <a:uLnTx/>
+              <a:uFillTx/>
+              <a:latin typeface="Calibri"/>
+              <a:ea typeface="+mn-ea"/>
+              <a:cs typeface="+mn-cs"/>
+            </a:endParaRPr>
           </a:p>
         </p:txBody>
       </p:sp>
@@ -15170,7 +16533,7 @@
 </file>
 
 <file path=ppt/slides/slide24.xml><?xml version="1.0" encoding="utf-8"?>
-<p:sld xmlns:a="http://schemas.openxmlformats.org/drawingml/2006/main" xmlns:p="http://schemas.openxmlformats.org/presentationml/2006/main" xmlns:r="http://schemas.openxmlformats.org/officeDocument/2006/relationships">
+<p:sld xmlns:a="http://schemas.openxmlformats.org/drawingml/2006/main" xmlns:r="http://schemas.openxmlformats.org/officeDocument/2006/relationships" xmlns:p="http://schemas.openxmlformats.org/presentationml/2006/main">
   <p:cSld>
     <p:spTree>
       <p:nvGrpSpPr>
@@ -15178,7 +16541,14 @@
         <p:cNvGrpSpPr/>
         <p:nvPr/>
       </p:nvGrpSpPr>
-      <p:grpSpPr/>
+      <p:grpSpPr>
+        <a:xfrm>
+          <a:off x="0" y="0"/>
+          <a:ext cx="0" cy="0"/>
+          <a:chOff x="0" y="0"/>
+          <a:chExt cx="0" cy="0"/>
+        </a:xfrm>
+      </p:grpSpPr>
       <p:sp>
         <p:nvSpPr>
           <p:cNvPr id="2" name="Rectangle 1"/>
@@ -15219,6 +16589,7 @@
           <a:lstStyle/>
           <a:p>
             <a:pPr algn="ctr"/>
+            <a:endParaRPr/>
           </a:p>
         </p:txBody>
       </p:sp>
@@ -15262,6 +16633,7 @@
           <a:lstStyle/>
           <a:p>
             <a:pPr algn="ctr"/>
+            <a:endParaRPr/>
           </a:p>
         </p:txBody>
       </p:sp>
@@ -15297,42 +16669,6 @@
             </a:pPr>
             <a:r>
               <a:t>Thank You</a:t>
-            </a:r>
-          </a:p>
-        </p:txBody>
-      </p:sp>
-      <p:sp>
-        <p:nvSpPr>
-          <p:cNvPr id="5" name="TextBox 4"/>
-          <p:cNvSpPr txBox="1"/>
-          <p:nvPr/>
-        </p:nvSpPr>
-        <p:spPr>
-          <a:xfrm>
-            <a:off x="731520" y="3474720"/>
-            <a:ext cx="10698480" cy="548640"/>
-          </a:xfrm>
-          <a:prstGeom prst="rect">
-            <a:avLst/>
-          </a:prstGeom>
-          <a:noFill/>
-        </p:spPr>
-        <p:txBody>
-          <a:bodyPr wrap="square">
-            <a:spAutoFit/>
-          </a:bodyPr>
-          <a:lstStyle/>
-          <a:p>
-            <a:pPr algn="ctr">
-              <a:defRPr sz="3200" b="0" i="0">
-                <a:solidFill>
-                  <a:srgbClr val="00D4FF"/>
-                </a:solidFill>
-                <a:latin typeface="Segoe UI"/>
-              </a:defRPr>
-            </a:pPr>
-            <a:r>
-              <a:t>Questions?</a:t>
             </a:r>
           </a:p>
         </p:txBody>
@@ -15377,6 +16713,7 @@
           <a:lstStyle/>
           <a:p>
             <a:pPr algn="ctr"/>
+            <a:endParaRPr/>
           </a:p>
         </p:txBody>
       </p:sp>
@@ -15425,7 +16762,7 @@
         <p:spPr>
           <a:xfrm>
             <a:off x="731520" y="5760720"/>
-            <a:ext cx="10698480" cy="365760"/>
+            <a:ext cx="10698480" cy="338554"/>
           </a:xfrm>
           <a:prstGeom prst="rect">
             <a:avLst/>
@@ -15447,8 +16784,22 @@
               </a:defRPr>
             </a:pPr>
             <a:r>
-              <a:t>Laboratory of Advanced Programming – Hackathon Exam 2024/2025</a:t>
-            </a:r>
+              <a:rPr dirty="0"/>
+              <a:t>Laboratory of Advanced Programming – Hackathon Exam 202</a:t>
+            </a:r>
+            <a:r>
+              <a:rPr lang="it-IT" dirty="0"/>
+              <a:t>5</a:t>
+            </a:r>
+            <a:r>
+              <a:rPr dirty="0"/>
+              <a:t>/202</a:t>
+            </a:r>
+            <a:r>
+              <a:rPr lang="it-IT"/>
+              <a:t>6</a:t>
+            </a:r>
+            <a:endParaRPr/>
           </a:p>
         </p:txBody>
       </p:sp>
@@ -15497,7 +16848,7 @@
 </file>
 
 <file path=ppt/slides/slide3.xml><?xml version="1.0" encoding="utf-8"?>
-<p:sld xmlns:a="http://schemas.openxmlformats.org/drawingml/2006/main" xmlns:p="http://schemas.openxmlformats.org/presentationml/2006/main" xmlns:r="http://schemas.openxmlformats.org/officeDocument/2006/relationships">
+<p:sld xmlns:a="http://schemas.openxmlformats.org/drawingml/2006/main" xmlns:r="http://schemas.openxmlformats.org/officeDocument/2006/relationships" xmlns:p="http://schemas.openxmlformats.org/presentationml/2006/main">
   <p:cSld>
     <p:spTree>
       <p:nvGrpSpPr>
@@ -15505,7 +16856,14 @@
         <p:cNvGrpSpPr/>
         <p:nvPr/>
       </p:nvGrpSpPr>
-      <p:grpSpPr/>
+      <p:grpSpPr>
+        <a:xfrm>
+          <a:off x="0" y="0"/>
+          <a:ext cx="0" cy="0"/>
+          <a:chOff x="0" y="0"/>
+          <a:chExt cx="0" cy="0"/>
+        </a:xfrm>
+      </p:grpSpPr>
       <p:sp>
         <p:nvSpPr>
           <p:cNvPr id="2" name="Rectangle 1"/>
@@ -15546,6 +16904,7 @@
           <a:lstStyle/>
           <a:p>
             <a:pPr algn="ctr"/>
+            <a:endParaRPr/>
           </a:p>
         </p:txBody>
       </p:sp>
@@ -15593,7 +16952,7 @@
         </p:nvSpPr>
         <p:spPr>
           <a:xfrm>
-            <a:off x="731520" y="1234440"/>
+            <a:off x="621792" y="548640"/>
             <a:ext cx="109728" cy="640080"/>
           </a:xfrm>
           <a:prstGeom prst="rect">
@@ -15625,6 +16984,7 @@
           <a:lstStyle/>
           <a:p>
             <a:pPr algn="ctr"/>
+            <a:endParaRPr/>
           </a:p>
         </p:txBody>
       </p:sp>
@@ -15636,7 +16996,7 @@
         </p:nvSpPr>
         <p:spPr>
           <a:xfrm>
-            <a:off x="731520" y="1737360"/>
+            <a:off x="731520" y="1610360"/>
             <a:ext cx="10698480" cy="914400"/>
           </a:xfrm>
           <a:prstGeom prst="rect">
@@ -15659,6 +17019,7 @@
               </a:defRPr>
             </a:pPr>
             <a:r>
+              <a:rPr dirty="0"/>
               <a:t>A Mars habitat's automation stack has partially failed, leaving devices operating with incompatible protocols.</a:t>
             </a:r>
           </a:p>
@@ -15706,6 +17067,7 @@
           <a:lstStyle/>
           <a:p>
             <a:pPr algn="ctr"/>
+            <a:endParaRPr/>
           </a:p>
         </p:txBody>
       </p:sp>
@@ -15749,6 +17111,7 @@
           <a:lstStyle/>
           <a:p>
             <a:pPr algn="ctr"/>
+            <a:endParaRPr/>
           </a:p>
         </p:txBody>
       </p:sp>
@@ -15796,7 +17159,7 @@
         </p:nvSpPr>
         <p:spPr>
           <a:xfrm>
-            <a:off x="1005840" y="3749040"/>
+            <a:off x="1005840" y="3657600"/>
             <a:ext cx="4663440" cy="640080"/>
           </a:xfrm>
           <a:prstGeom prst="rect">
@@ -15819,6 +17182,7 @@
               </a:defRPr>
             </a:pPr>
             <a:r>
+              <a:rPr dirty="0"/>
               <a:t>REST sensors, SSE streams, WebSocket telemetry</a:t>
             </a:r>
           </a:p>
@@ -15866,6 +17230,7 @@
           <a:lstStyle/>
           <a:p>
             <a:pPr algn="ctr"/>
+            <a:endParaRPr/>
           </a:p>
         </p:txBody>
       </p:sp>
@@ -15909,6 +17274,7 @@
           <a:lstStyle/>
           <a:p>
             <a:pPr algn="ctr"/>
+            <a:endParaRPr/>
           </a:p>
         </p:txBody>
       </p:sp>
@@ -15956,7 +17322,7 @@
         </p:nvSpPr>
         <p:spPr>
           <a:xfrm>
-            <a:off x="6492240" y="3749040"/>
+            <a:off x="6492240" y="3607696"/>
             <a:ext cx="4663440" cy="640080"/>
           </a:xfrm>
           <a:prstGeom prst="rect">
@@ -15979,6 +17345,7 @@
               </a:defRPr>
             </a:pPr>
             <a:r>
+              <a:rPr dirty="0"/>
               <a:t>Different payload schemas requiring normalization</a:t>
             </a:r>
           </a:p>
@@ -16026,6 +17393,7 @@
           <a:lstStyle/>
           <a:p>
             <a:pPr algn="ctr"/>
+            <a:endParaRPr/>
           </a:p>
         </p:txBody>
       </p:sp>
@@ -16069,6 +17437,7 @@
           <a:lstStyle/>
           <a:p>
             <a:pPr algn="ctr"/>
+            <a:endParaRPr/>
           </a:p>
         </p:txBody>
       </p:sp>
@@ -16116,7 +17485,7 @@
         </p:nvSpPr>
         <p:spPr>
           <a:xfrm>
-            <a:off x="1005840" y="5486400"/>
+            <a:off x="1005840" y="5422750"/>
             <a:ext cx="4663440" cy="640080"/>
           </a:xfrm>
           <a:prstGeom prst="rect">
@@ -16139,6 +17508,7 @@
               </a:defRPr>
             </a:pPr>
             <a:r>
+              <a:rPr dirty="0"/>
               <a:t>Immediate response to environmental changes</a:t>
             </a:r>
           </a:p>
@@ -16186,6 +17556,7 @@
           <a:lstStyle/>
           <a:p>
             <a:pPr algn="ctr"/>
+            <a:endParaRPr/>
           </a:p>
         </p:txBody>
       </p:sp>
@@ -16229,6 +17600,7 @@
           <a:lstStyle/>
           <a:p>
             <a:pPr algn="ctr"/>
+            <a:endParaRPr/>
           </a:p>
         </p:txBody>
       </p:sp>
@@ -16276,7 +17648,7 @@
         </p:nvSpPr>
         <p:spPr>
           <a:xfrm>
-            <a:off x="6492240" y="5486400"/>
+            <a:off x="6492240" y="5422750"/>
             <a:ext cx="4663440" cy="640080"/>
           </a:xfrm>
           <a:prstGeom prst="rect">
@@ -16299,6 +17671,7 @@
               </a:defRPr>
             </a:pPr>
             <a:r>
+              <a:rPr dirty="0"/>
               <a:t>Rules-based actuator control for habitat safety</a:t>
             </a:r>
           </a:p>
@@ -16349,7 +17722,7 @@
 </file>
 
 <file path=ppt/slides/slide4.xml><?xml version="1.0" encoding="utf-8"?>
-<p:sld xmlns:a="http://schemas.openxmlformats.org/drawingml/2006/main" xmlns:p="http://schemas.openxmlformats.org/presentationml/2006/main" xmlns:r="http://schemas.openxmlformats.org/officeDocument/2006/relationships">
+<p:sld xmlns:a="http://schemas.openxmlformats.org/drawingml/2006/main" xmlns:r="http://schemas.openxmlformats.org/officeDocument/2006/relationships" xmlns:p="http://schemas.openxmlformats.org/presentationml/2006/main">
   <p:cSld>
     <p:spTree>
       <p:nvGrpSpPr>
@@ -16357,7 +17730,14 @@
         <p:cNvGrpSpPr/>
         <p:nvPr/>
       </p:nvGrpSpPr>
-      <p:grpSpPr/>
+      <p:grpSpPr>
+        <a:xfrm>
+          <a:off x="0" y="0"/>
+          <a:ext cx="0" cy="0"/>
+          <a:chOff x="0" y="0"/>
+          <a:chExt cx="0" cy="0"/>
+        </a:xfrm>
+      </p:grpSpPr>
       <p:sp>
         <p:nvSpPr>
           <p:cNvPr id="2" name="Rectangle 1"/>
@@ -16398,6 +17778,7 @@
           <a:lstStyle/>
           <a:p>
             <a:pPr algn="ctr"/>
+            <a:endParaRPr/>
           </a:p>
         </p:txBody>
       </p:sp>
@@ -16445,7 +17826,7 @@
         </p:nvSpPr>
         <p:spPr>
           <a:xfrm>
-            <a:off x="731520" y="1234440"/>
+            <a:off x="621792" y="640080"/>
             <a:ext cx="109728" cy="640080"/>
           </a:xfrm>
           <a:prstGeom prst="rect">
@@ -16477,6 +17858,7 @@
           <a:lstStyle/>
           <a:p>
             <a:pPr algn="ctr"/>
+            <a:endParaRPr/>
           </a:p>
         </p:txBody>
       </p:sp>
@@ -16556,6 +17938,7 @@
           <a:lstStyle/>
           <a:p>
             <a:pPr algn="ctr"/>
+            <a:endParaRPr/>
           </a:p>
         </p:txBody>
       </p:sp>
@@ -16671,6 +18054,7 @@
           <a:lstStyle/>
           <a:p>
             <a:pPr algn="ctr"/>
+            <a:endParaRPr/>
           </a:p>
         </p:txBody>
       </p:sp>
@@ -16786,6 +18170,7 @@
           <a:lstStyle/>
           <a:p>
             <a:pPr algn="ctr"/>
+            <a:endParaRPr/>
           </a:p>
         </p:txBody>
       </p:sp>
@@ -16901,6 +18286,7 @@
           <a:lstStyle/>
           <a:p>
             <a:pPr algn="ctr"/>
+            <a:endParaRPr/>
           </a:p>
         </p:txBody>
       </p:sp>
@@ -17021,7 +18407,7 @@
 </file>
 
 <file path=ppt/slides/slide5.xml><?xml version="1.0" encoding="utf-8"?>
-<p:sld xmlns:a="http://schemas.openxmlformats.org/drawingml/2006/main" xmlns:p="http://schemas.openxmlformats.org/presentationml/2006/main" xmlns:r="http://schemas.openxmlformats.org/officeDocument/2006/relationships">
+<p:sld xmlns:a="http://schemas.openxmlformats.org/drawingml/2006/main" xmlns:r="http://schemas.openxmlformats.org/officeDocument/2006/relationships" xmlns:p="http://schemas.openxmlformats.org/presentationml/2006/main">
   <p:cSld>
     <p:spTree>
       <p:nvGrpSpPr>
@@ -17029,7 +18415,14 @@
         <p:cNvGrpSpPr/>
         <p:nvPr/>
       </p:nvGrpSpPr>
-      <p:grpSpPr/>
+      <p:grpSpPr>
+        <a:xfrm>
+          <a:off x="0" y="0"/>
+          <a:ext cx="0" cy="0"/>
+          <a:chOff x="0" y="0"/>
+          <a:chExt cx="0" cy="0"/>
+        </a:xfrm>
+      </p:grpSpPr>
       <p:sp>
         <p:nvSpPr>
           <p:cNvPr id="2" name="Rectangle 1"/>
@@ -17038,7 +18431,7 @@
         </p:nvSpPr>
         <p:spPr>
           <a:xfrm>
-            <a:off x="0" y="0"/>
+            <a:off x="305" y="0"/>
             <a:ext cx="12191695" cy="6858000"/>
           </a:xfrm>
           <a:prstGeom prst="rect">
@@ -17070,6 +18463,7 @@
           <a:lstStyle/>
           <a:p>
             <a:pPr algn="ctr"/>
+            <a:endParaRPr/>
           </a:p>
         </p:txBody>
       </p:sp>
@@ -17081,7 +18475,7 @@
         </p:nvSpPr>
         <p:spPr>
           <a:xfrm>
-            <a:off x="731520" y="365760"/>
+            <a:off x="746760" y="187468"/>
             <a:ext cx="10698480" cy="640080"/>
           </a:xfrm>
           <a:prstGeom prst="rect">
@@ -17104,21 +18498,95 @@
               </a:defRPr>
             </a:pPr>
             <a:r>
+              <a:rPr dirty="0"/>
               <a:t>System Architecture</a:t>
             </a:r>
           </a:p>
         </p:txBody>
       </p:sp>
-      <p:sp>
-        <p:nvSpPr>
-          <p:cNvPr id="4" name="Rectangle 3"/>
+      <p:pic>
+        <p:nvPicPr>
+          <p:cNvPr id="5" name="Picture 4" descr="Diagram.png"/>
+          <p:cNvPicPr>
+            <a:picLocks noChangeAspect="1"/>
+          </p:cNvPicPr>
+          <p:nvPr/>
+        </p:nvPicPr>
+        <p:blipFill>
+          <a:blip r:embed="rId2"/>
+          <a:srcRect l="7972" t="6760" r="8051" b="4808"/>
+          <a:stretch>
+            <a:fillRect/>
+          </a:stretch>
+        </p:blipFill>
+        <p:spPr>
+          <a:xfrm>
+            <a:off x="4145459" y="1060437"/>
+            <a:ext cx="3980329" cy="5431803"/>
+          </a:xfrm>
+          <a:prstGeom prst="rect">
+            <a:avLst/>
+          </a:prstGeom>
+          <a:ln>
+            <a:noFill/>
+          </a:ln>
+          <a:effectLst>
+            <a:softEdge rad="112500"/>
+          </a:effectLst>
+        </p:spPr>
+      </p:pic>
+      <p:sp>
+        <p:nvSpPr>
+          <p:cNvPr id="6" name="TextBox 5"/>
+          <p:cNvSpPr txBox="1"/>
+          <p:nvPr/>
+        </p:nvSpPr>
+        <p:spPr>
+          <a:xfrm>
+            <a:off x="11155680" y="6309360"/>
+            <a:ext cx="731520" cy="274320"/>
+          </a:xfrm>
+          <a:prstGeom prst="rect">
+            <a:avLst/>
+          </a:prstGeom>
+          <a:noFill/>
+        </p:spPr>
+        <p:txBody>
+          <a:bodyPr wrap="square">
+            <a:spAutoFit/>
+          </a:bodyPr>
+          <a:lstStyle/>
+          <a:p>
+            <a:pPr algn="r">
+              <a:defRPr sz="1400" b="0" i="0">
+                <a:solidFill>
+                  <a:srgbClr val="6B6B80"/>
+                </a:solidFill>
+                <a:latin typeface="Segoe UI"/>
+              </a:defRPr>
+            </a:pPr>
+            <a:r>
+              <a:t>5/24</a:t>
+            </a:r>
+          </a:p>
+        </p:txBody>
+      </p:sp>
+      <p:sp>
+        <p:nvSpPr>
+          <p:cNvPr id="7" name="Rectangle 6">
+            <a:extLst>
+              <a:ext uri="{FF2B5EF4-FFF2-40B4-BE49-F238E27FC236}">
+                <a16:creationId xmlns:a16="http://schemas.microsoft.com/office/drawing/2014/main" id="{BF12906B-7423-9780-71E2-C35D97D8ECE2}"/>
+              </a:ext>
+            </a:extLst>
+          </p:cNvPr>
           <p:cNvSpPr/>
           <p:nvPr/>
         </p:nvSpPr>
         <p:spPr>
           <a:xfrm>
-            <a:off x="731520" y="960120"/>
-            <a:ext cx="109728" cy="457200"/>
+            <a:off x="595436" y="387293"/>
+            <a:ext cx="109728" cy="640080"/>
           </a:xfrm>
           <a:prstGeom prst="rect">
             <a:avLst/>
@@ -17149,66 +18617,7 @@
           <a:lstStyle/>
           <a:p>
             <a:pPr algn="ctr"/>
-          </a:p>
-        </p:txBody>
-      </p:sp>
-      <p:pic>
-        <p:nvPicPr>
-          <p:cNvPr id="5" name="Picture 4" descr="Diagram.png"/>
-          <p:cNvPicPr>
-            <a:picLocks noChangeAspect="1"/>
-          </p:cNvPicPr>
-          <p:nvPr/>
-        </p:nvPicPr>
-        <p:blipFill>
-          <a:blip r:embed="rId2"/>
-          <a:stretch>
-            <a:fillRect/>
-          </a:stretch>
-        </p:blipFill>
-        <p:spPr>
-          <a:xfrm>
-            <a:off x="457200" y="1371600"/>
-            <a:ext cx="11247120" cy="14575500"/>
-          </a:xfrm>
-          <a:prstGeom prst="rect">
-            <a:avLst/>
-          </a:prstGeom>
-        </p:spPr>
-      </p:pic>
-      <p:sp>
-        <p:nvSpPr>
-          <p:cNvPr id="6" name="TextBox 5"/>
-          <p:cNvSpPr txBox="1"/>
-          <p:nvPr/>
-        </p:nvSpPr>
-        <p:spPr>
-          <a:xfrm>
-            <a:off x="11155680" y="6309360"/>
-            <a:ext cx="731520" cy="274320"/>
-          </a:xfrm>
-          <a:prstGeom prst="rect">
-            <a:avLst/>
-          </a:prstGeom>
-          <a:noFill/>
-        </p:spPr>
-        <p:txBody>
-          <a:bodyPr wrap="square">
-            <a:spAutoFit/>
-          </a:bodyPr>
-          <a:lstStyle/>
-          <a:p>
-            <a:pPr algn="r">
-              <a:defRPr sz="1400" b="0" i="0">
-                <a:solidFill>
-                  <a:srgbClr val="6B6B80"/>
-                </a:solidFill>
-                <a:latin typeface="Segoe UI"/>
-              </a:defRPr>
-            </a:pPr>
-            <a:r>
-              <a:t>5/24</a:t>
-            </a:r>
+            <a:endParaRPr/>
           </a:p>
         </p:txBody>
       </p:sp>
@@ -17221,7 +18630,7 @@
 </file>
 
 <file path=ppt/slides/slide6.xml><?xml version="1.0" encoding="utf-8"?>
-<p:sld xmlns:a="http://schemas.openxmlformats.org/drawingml/2006/main" xmlns:p="http://schemas.openxmlformats.org/presentationml/2006/main" xmlns:r="http://schemas.openxmlformats.org/officeDocument/2006/relationships">
+<p:sld xmlns:a="http://schemas.openxmlformats.org/drawingml/2006/main" xmlns:r="http://schemas.openxmlformats.org/officeDocument/2006/relationships" xmlns:p="http://schemas.openxmlformats.org/presentationml/2006/main">
   <p:cSld>
     <p:spTree>
       <p:nvGrpSpPr>
@@ -17229,7 +18638,14 @@
         <p:cNvGrpSpPr/>
         <p:nvPr/>
       </p:nvGrpSpPr>
-      <p:grpSpPr/>
+      <p:grpSpPr>
+        <a:xfrm>
+          <a:off x="0" y="0"/>
+          <a:ext cx="0" cy="0"/>
+          <a:chOff x="0" y="0"/>
+          <a:chExt cx="0" cy="0"/>
+        </a:xfrm>
+      </p:grpSpPr>
       <p:sp>
         <p:nvSpPr>
           <p:cNvPr id="2" name="Rectangle 1"/>
@@ -17270,6 +18686,7 @@
           <a:lstStyle/>
           <a:p>
             <a:pPr algn="ctr"/>
+            <a:endParaRPr/>
           </a:p>
         </p:txBody>
       </p:sp>
@@ -17304,51 +18721,9 @@
               </a:defRPr>
             </a:pPr>
             <a:r>
+              <a:rPr dirty="0"/>
               <a:t>Microservices Architecture</a:t>
             </a:r>
-          </a:p>
-        </p:txBody>
-      </p:sp>
-      <p:sp>
-        <p:nvSpPr>
-          <p:cNvPr id="4" name="Rectangle 3"/>
-          <p:cNvSpPr/>
-          <p:nvPr/>
-        </p:nvSpPr>
-        <p:spPr>
-          <a:xfrm>
-            <a:off x="731520" y="960120"/>
-            <a:ext cx="109728" cy="457200"/>
-          </a:xfrm>
-          <a:prstGeom prst="rect">
-            <a:avLst/>
-          </a:prstGeom>
-          <a:solidFill>
-            <a:srgbClr val="00D4FF"/>
-          </a:solidFill>
-          <a:ln>
-            <a:noFill/>
-          </a:ln>
-        </p:spPr>
-        <p:style>
-          <a:lnRef idx="1">
-            <a:schemeClr val="accent1"/>
-          </a:lnRef>
-          <a:fillRef idx="3">
-            <a:schemeClr val="accent1"/>
-          </a:fillRef>
-          <a:effectRef idx="2">
-            <a:schemeClr val="accent1"/>
-          </a:effectRef>
-          <a:fontRef idx="minor">
-            <a:schemeClr val="lt1"/>
-          </a:fontRef>
-        </p:style>
-        <p:txBody>
-          <a:bodyPr rtlCol="0" anchor="ctr"/>
-          <a:lstStyle/>
-          <a:p>
-            <a:pPr algn="ctr"/>
           </a:p>
         </p:txBody>
       </p:sp>
@@ -17394,6 +18769,7 @@
           <a:lstStyle/>
           <a:p>
             <a:pPr algn="ctr"/>
+            <a:endParaRPr/>
           </a:p>
         </p:txBody>
       </p:sp>
@@ -17437,6 +18813,7 @@
           <a:lstStyle/>
           <a:p>
             <a:pPr algn="ctr"/>
+            <a:endParaRPr/>
           </a:p>
         </p:txBody>
       </p:sp>
@@ -17594,6 +18971,7 @@
           <a:lstStyle/>
           <a:p>
             <a:pPr algn="ctr"/>
+            <a:endParaRPr/>
           </a:p>
         </p:txBody>
       </p:sp>
@@ -17637,6 +19015,7 @@
           <a:lstStyle/>
           <a:p>
             <a:pPr algn="ctr"/>
+            <a:endParaRPr/>
           </a:p>
         </p:txBody>
       </p:sp>
@@ -17720,7 +19099,7 @@
         </p:nvSpPr>
         <p:spPr>
           <a:xfrm>
-            <a:off x="4389120" y="2103120"/>
+            <a:off x="4389120" y="2286000"/>
             <a:ext cx="2834640" cy="1371600"/>
           </a:xfrm>
           <a:prstGeom prst="rect">
@@ -17743,10 +19122,14 @@
               </a:defRPr>
             </a:pPr>
             <a:r>
+              <a:rPr dirty="0"/>
               <a:t>Rule evaluation</a:t>
             </a:r>
-            <a:br/>
-            <a:r>
+            <a:br>
+              <a:rPr dirty="0"/>
+            </a:br>
+            <a:r>
+              <a:rPr dirty="0"/>
               <a:t>Event-driven triggers</a:t>
             </a:r>
           </a:p>
@@ -17794,6 +19177,7 @@
           <a:lstStyle/>
           <a:p>
             <a:pPr algn="ctr"/>
+            <a:endParaRPr/>
           </a:p>
         </p:txBody>
       </p:sp>
@@ -17837,6 +19221,7 @@
           <a:lstStyle/>
           <a:p>
             <a:pPr algn="ctr"/>
+            <a:endParaRPr/>
           </a:p>
         </p:txBody>
       </p:sp>
@@ -17920,7 +19305,7 @@
         </p:nvSpPr>
         <p:spPr>
           <a:xfrm>
-            <a:off x="7863840" y="2103120"/>
+            <a:off x="7863840" y="2318004"/>
             <a:ext cx="2834640" cy="1371600"/>
           </a:xfrm>
           <a:prstGeom prst="rect">
@@ -17943,10 +19328,14 @@
               </a:defRPr>
             </a:pPr>
             <a:r>
+              <a:rPr dirty="0"/>
               <a:t>CRUD API for automation</a:t>
             </a:r>
-            <a:br/>
-            <a:r>
+            <a:br>
+              <a:rPr dirty="0"/>
+            </a:br>
+            <a:r>
+              <a:rPr dirty="0"/>
               <a:t>rules persistence</a:t>
             </a:r>
           </a:p>
@@ -17994,6 +19383,7 @@
           <a:lstStyle/>
           <a:p>
             <a:pPr algn="ctr"/>
+            <a:endParaRPr/>
           </a:p>
         </p:txBody>
       </p:sp>
@@ -18037,6 +19427,7 @@
           <a:lstStyle/>
           <a:p>
             <a:pPr algn="ctr"/>
+            <a:endParaRPr/>
           </a:p>
         </p:txBody>
       </p:sp>
@@ -18194,6 +19585,7 @@
           <a:lstStyle/>
           <a:p>
             <a:pPr algn="ctr"/>
+            <a:endParaRPr/>
           </a:p>
         </p:txBody>
       </p:sp>
@@ -18237,6 +19629,7 @@
           <a:lstStyle/>
           <a:p>
             <a:pPr algn="ctr"/>
+            <a:endParaRPr/>
           </a:p>
         </p:txBody>
       </p:sp>
@@ -18320,7 +19713,7 @@
         </p:nvSpPr>
         <p:spPr>
           <a:xfrm>
-            <a:off x="4389120" y="4572000"/>
+            <a:off x="4389120" y="4754880"/>
             <a:ext cx="2834640" cy="1371600"/>
           </a:xfrm>
           <a:prstGeom prst="rect">
@@ -18343,10 +19736,14 @@
               </a:defRPr>
             </a:pPr>
             <a:r>
+              <a:rPr dirty="0"/>
               <a:t>Device command execution</a:t>
             </a:r>
-            <a:br/>
-            <a:r>
+            <a:br>
+              <a:rPr dirty="0"/>
+            </a:br>
+            <a:r>
+              <a:rPr dirty="0"/>
               <a:t>Audit logging</a:t>
             </a:r>
           </a:p>
@@ -18394,6 +19791,7 @@
           <a:lstStyle/>
           <a:p>
             <a:pPr algn="ctr"/>
+            <a:endParaRPr/>
           </a:p>
         </p:txBody>
       </p:sp>
@@ -18437,6 +19835,7 @@
           <a:lstStyle/>
           <a:p>
             <a:pPr algn="ctr"/>
+            <a:endParaRPr/>
           </a:p>
         </p:txBody>
       </p:sp>
@@ -18585,6 +19984,56 @@
             <a:r>
               <a:t>6/24</a:t>
             </a:r>
+          </a:p>
+        </p:txBody>
+      </p:sp>
+      <p:sp>
+        <p:nvSpPr>
+          <p:cNvPr id="36" name="Rectangle 35">
+            <a:extLst>
+              <a:ext uri="{FF2B5EF4-FFF2-40B4-BE49-F238E27FC236}">
+                <a16:creationId xmlns:a16="http://schemas.microsoft.com/office/drawing/2014/main" id="{4F4AED95-871E-C1F3-7A7C-91F5E0DCA9D0}"/>
+              </a:ext>
+            </a:extLst>
+          </p:cNvPr>
+          <p:cNvSpPr/>
+          <p:nvPr/>
+        </p:nvSpPr>
+        <p:spPr>
+          <a:xfrm>
+            <a:off x="652272" y="548640"/>
+            <a:ext cx="109728" cy="640080"/>
+          </a:xfrm>
+          <a:prstGeom prst="rect">
+            <a:avLst/>
+          </a:prstGeom>
+          <a:solidFill>
+            <a:srgbClr val="00D4FF"/>
+          </a:solidFill>
+          <a:ln>
+            <a:noFill/>
+          </a:ln>
+        </p:spPr>
+        <p:style>
+          <a:lnRef idx="1">
+            <a:schemeClr val="accent1"/>
+          </a:lnRef>
+          <a:fillRef idx="3">
+            <a:schemeClr val="accent1"/>
+          </a:fillRef>
+          <a:effectRef idx="2">
+            <a:schemeClr val="accent1"/>
+          </a:effectRef>
+          <a:fontRef idx="minor">
+            <a:schemeClr val="lt1"/>
+          </a:fontRef>
+        </p:style>
+        <p:txBody>
+          <a:bodyPr rtlCol="0" anchor="ctr"/>
+          <a:lstStyle/>
+          <a:p>
+            <a:pPr algn="ctr"/>
+            <a:endParaRPr/>
           </a:p>
         </p:txBody>
       </p:sp>
@@ -18597,7 +20046,7 @@
 </file>
 
 <file path=ppt/slides/slide7.xml><?xml version="1.0" encoding="utf-8"?>
-<p:sld xmlns:a="http://schemas.openxmlformats.org/drawingml/2006/main" xmlns:p="http://schemas.openxmlformats.org/presentationml/2006/main" xmlns:r="http://schemas.openxmlformats.org/officeDocument/2006/relationships">
+<p:sld xmlns:a="http://schemas.openxmlformats.org/drawingml/2006/main" xmlns:r="http://schemas.openxmlformats.org/officeDocument/2006/relationships" xmlns:p="http://schemas.openxmlformats.org/presentationml/2006/main">
   <p:cSld>
     <p:spTree>
       <p:nvGrpSpPr>
@@ -18605,7 +20054,14 @@
         <p:cNvGrpSpPr/>
         <p:nvPr/>
       </p:nvGrpSpPr>
-      <p:grpSpPr/>
+      <p:grpSpPr>
+        <a:xfrm>
+          <a:off x="0" y="0"/>
+          <a:ext cx="0" cy="0"/>
+          <a:chOff x="0" y="0"/>
+          <a:chExt cx="0" cy="0"/>
+        </a:xfrm>
+      </p:grpSpPr>
       <p:sp>
         <p:nvSpPr>
           <p:cNvPr id="2" name="Rectangle 1"/>
@@ -18646,6 +20102,7 @@
           <a:lstStyle/>
           <a:p>
             <a:pPr algn="ctr"/>
+            <a:endParaRPr/>
           </a:p>
         </p:txBody>
       </p:sp>
@@ -18687,57 +20144,14 @@
       </p:sp>
       <p:sp>
         <p:nvSpPr>
-          <p:cNvPr id="4" name="Rectangle 3"/>
-          <p:cNvSpPr/>
-          <p:nvPr/>
-        </p:nvSpPr>
-        <p:spPr>
-          <a:xfrm>
-            <a:off x="731520" y="960120"/>
-            <a:ext cx="109728" cy="457200"/>
-          </a:xfrm>
-          <a:prstGeom prst="rect">
-            <a:avLst/>
-          </a:prstGeom>
-          <a:solidFill>
-            <a:srgbClr val="00D4FF"/>
-          </a:solidFill>
-          <a:ln>
-            <a:noFill/>
-          </a:ln>
-        </p:spPr>
-        <p:style>
-          <a:lnRef idx="1">
-            <a:schemeClr val="accent1"/>
-          </a:lnRef>
-          <a:fillRef idx="3">
-            <a:schemeClr val="accent1"/>
-          </a:fillRef>
-          <a:effectRef idx="2">
-            <a:schemeClr val="accent1"/>
-          </a:effectRef>
-          <a:fontRef idx="minor">
-            <a:schemeClr val="lt1"/>
-          </a:fontRef>
-        </p:style>
-        <p:txBody>
-          <a:bodyPr rtlCol="0" anchor="ctr"/>
-          <a:lstStyle/>
-          <a:p>
-            <a:pPr algn="ctr"/>
-          </a:p>
-        </p:txBody>
-      </p:sp>
-      <p:sp>
-        <p:nvSpPr>
           <p:cNvPr id="5" name="Rounded Rectangle 4"/>
           <p:cNvSpPr/>
           <p:nvPr/>
         </p:nvSpPr>
         <p:spPr>
           <a:xfrm>
-            <a:off x="731520" y="1371600"/>
-            <a:ext cx="5029200" cy="2103120"/>
+            <a:off x="766781" y="1508759"/>
+            <a:ext cx="5029200" cy="2148839"/>
           </a:xfrm>
           <a:prstGeom prst="roundRect">
             <a:avLst/>
@@ -18770,6 +20184,7 @@
           <a:lstStyle/>
           <a:p>
             <a:pPr algn="ctr"/>
+            <a:endParaRPr/>
           </a:p>
         </p:txBody>
       </p:sp>
@@ -18869,8 +20284,8 @@
         </p:nvSpPr>
         <p:spPr>
           <a:xfrm>
-            <a:off x="6400800" y="1371600"/>
-            <a:ext cx="5029200" cy="2103120"/>
+            <a:off x="6400800" y="1508759"/>
+            <a:ext cx="5029200" cy="2148840"/>
           </a:xfrm>
           <a:prstGeom prst="roundRect">
             <a:avLst/>
@@ -18903,6 +20318,7 @@
           <a:lstStyle/>
           <a:p>
             <a:pPr algn="ctr"/>
+            <a:endParaRPr/>
           </a:p>
         </p:txBody>
       </p:sp>
@@ -19002,8 +20418,8 @@
         </p:nvSpPr>
         <p:spPr>
           <a:xfrm>
-            <a:off x="731520" y="3749039"/>
-            <a:ext cx="10698480" cy="2286000"/>
+            <a:off x="731520" y="3886199"/>
+            <a:ext cx="10698480" cy="2148839"/>
           </a:xfrm>
           <a:prstGeom prst="roundRect">
             <a:avLst/>
@@ -19036,6 +20452,7 @@
           <a:lstStyle/>
           <a:p>
             <a:pPr algn="ctr"/>
+            <a:endParaRPr/>
           </a:p>
         </p:txBody>
       </p:sp>
@@ -19047,7 +20464,7 @@
         </p:nvSpPr>
         <p:spPr>
           <a:xfrm>
-            <a:off x="914400" y="3931920"/>
+            <a:off x="914400" y="4045325"/>
             <a:ext cx="10332720" cy="457200"/>
           </a:xfrm>
           <a:prstGeom prst="rect">
@@ -19070,6 +20487,7 @@
               </a:defRPr>
             </a:pPr>
             <a:r>
+              <a:rPr dirty="0"/>
               <a:t>Unified Event Schema</a:t>
             </a:r>
           </a:p>
@@ -19083,7 +20501,7 @@
         </p:nvSpPr>
         <p:spPr>
           <a:xfrm>
-            <a:off x="914400" y="4434840"/>
+            <a:off x="914400" y="4663441"/>
             <a:ext cx="10332720" cy="548640"/>
           </a:xfrm>
           <a:prstGeom prst="rect">
@@ -19106,7 +20524,32 @@
               </a:defRPr>
             </a:pPr>
             <a:r>
-              <a:t>{ event_id, sensor_id, timestamp, metric, value, unit, source, status, raw_schema }</a:t>
+              <a:rPr dirty="0"/>
+              <a:t>{ </a:t>
+            </a:r>
+            <a:r>
+              <a:rPr dirty="0" err="1"/>
+              <a:t>event_id</a:t>
+            </a:r>
+            <a:r>
+              <a:rPr dirty="0"/>
+              <a:t>, </a:t>
+            </a:r>
+            <a:r>
+              <a:rPr dirty="0" err="1"/>
+              <a:t>sensor_id</a:t>
+            </a:r>
+            <a:r>
+              <a:rPr dirty="0"/>
+              <a:t>, timestamp, metric, value, unit, source, status, </a:t>
+            </a:r>
+            <a:r>
+              <a:rPr dirty="0" err="1"/>
+              <a:t>raw_schema</a:t>
+            </a:r>
+            <a:r>
+              <a:rPr dirty="0"/>
+              <a:t> }</a:t>
             </a:r>
           </a:p>
         </p:txBody>
@@ -19119,7 +20562,7 @@
         </p:nvSpPr>
         <p:spPr>
           <a:xfrm>
-            <a:off x="914400" y="5074920"/>
+            <a:off x="929487" y="5256010"/>
             <a:ext cx="10332720" cy="731520"/>
           </a:xfrm>
           <a:prstGeom prst="rect">
@@ -19142,6 +20585,7 @@
               </a:defRPr>
             </a:pPr>
             <a:r>
+              <a:rPr dirty="0"/>
               <a:t>All sensor data normalized to a single format • REST polls + SSE streams → unified events</a:t>
             </a:r>
           </a:p>
@@ -19180,6 +20624,56 @@
             <a:r>
               <a:t>7/24</a:t>
             </a:r>
+          </a:p>
+        </p:txBody>
+      </p:sp>
+      <p:sp>
+        <p:nvSpPr>
+          <p:cNvPr id="16" name="Rectangle 15">
+            <a:extLst>
+              <a:ext uri="{FF2B5EF4-FFF2-40B4-BE49-F238E27FC236}">
+                <a16:creationId xmlns:a16="http://schemas.microsoft.com/office/drawing/2014/main" id="{0E0C69B6-7133-61D9-E40C-02A9A48D5B3A}"/>
+              </a:ext>
+            </a:extLst>
+          </p:cNvPr>
+          <p:cNvSpPr/>
+          <p:nvPr/>
+        </p:nvSpPr>
+        <p:spPr>
+          <a:xfrm>
+            <a:off x="621792" y="548639"/>
+            <a:ext cx="109728" cy="640080"/>
+          </a:xfrm>
+          <a:prstGeom prst="rect">
+            <a:avLst/>
+          </a:prstGeom>
+          <a:solidFill>
+            <a:srgbClr val="00D4FF"/>
+          </a:solidFill>
+          <a:ln>
+            <a:noFill/>
+          </a:ln>
+        </p:spPr>
+        <p:style>
+          <a:lnRef idx="1">
+            <a:schemeClr val="accent1"/>
+          </a:lnRef>
+          <a:fillRef idx="3">
+            <a:schemeClr val="accent1"/>
+          </a:fillRef>
+          <a:effectRef idx="2">
+            <a:schemeClr val="accent1"/>
+          </a:effectRef>
+          <a:fontRef idx="minor">
+            <a:schemeClr val="lt1"/>
+          </a:fontRef>
+        </p:style>
+        <p:txBody>
+          <a:bodyPr rtlCol="0" anchor="ctr"/>
+          <a:lstStyle/>
+          <a:p>
+            <a:pPr algn="ctr"/>
+            <a:endParaRPr/>
           </a:p>
         </p:txBody>
       </p:sp>
@@ -19192,7 +20686,7 @@
 </file>
 
 <file path=ppt/slides/slide8.xml><?xml version="1.0" encoding="utf-8"?>
-<p:sld xmlns:a="http://schemas.openxmlformats.org/drawingml/2006/main" xmlns:p="http://schemas.openxmlformats.org/presentationml/2006/main" xmlns:r="http://schemas.openxmlformats.org/officeDocument/2006/relationships">
+<p:sld xmlns:a="http://schemas.openxmlformats.org/drawingml/2006/main" xmlns:r="http://schemas.openxmlformats.org/officeDocument/2006/relationships" xmlns:p="http://schemas.openxmlformats.org/presentationml/2006/main">
   <p:cSld>
     <p:spTree>
       <p:nvGrpSpPr>
@@ -19200,7 +20694,14 @@
         <p:cNvGrpSpPr/>
         <p:nvPr/>
       </p:nvGrpSpPr>
-      <p:grpSpPr/>
+      <p:grpSpPr>
+        <a:xfrm>
+          <a:off x="0" y="0"/>
+          <a:ext cx="0" cy="0"/>
+          <a:chOff x="0" y="0"/>
+          <a:chExt cx="0" cy="0"/>
+        </a:xfrm>
+      </p:grpSpPr>
       <p:sp>
         <p:nvSpPr>
           <p:cNvPr id="2" name="Rectangle 1"/>
@@ -19241,6 +20742,7 @@
           <a:lstStyle/>
           <a:p>
             <a:pPr algn="ctr"/>
+            <a:endParaRPr/>
           </a:p>
         </p:txBody>
       </p:sp>
@@ -19277,49 +20779,6 @@
             <a:r>
               <a:t>Data Ingestion Service</a:t>
             </a:r>
-          </a:p>
-        </p:txBody>
-      </p:sp>
-      <p:sp>
-        <p:nvSpPr>
-          <p:cNvPr id="4" name="Rectangle 3"/>
-          <p:cNvSpPr/>
-          <p:nvPr/>
-        </p:nvSpPr>
-        <p:spPr>
-          <a:xfrm>
-            <a:off x="731520" y="960120"/>
-            <a:ext cx="109728" cy="457200"/>
-          </a:xfrm>
-          <a:prstGeom prst="rect">
-            <a:avLst/>
-          </a:prstGeom>
-          <a:solidFill>
-            <a:srgbClr val="00D4FF"/>
-          </a:solidFill>
-          <a:ln>
-            <a:noFill/>
-          </a:ln>
-        </p:spPr>
-        <p:style>
-          <a:lnRef idx="1">
-            <a:schemeClr val="accent1"/>
-          </a:lnRef>
-          <a:fillRef idx="3">
-            <a:schemeClr val="accent1"/>
-          </a:fillRef>
-          <a:effectRef idx="2">
-            <a:schemeClr val="accent1"/>
-          </a:effectRef>
-          <a:fontRef idx="minor">
-            <a:schemeClr val="lt1"/>
-          </a:fontRef>
-        </p:style>
-        <p:txBody>
-          <a:bodyPr rtlCol="0" anchor="ctr"/>
-          <a:lstStyle/>
-          <a:p>
-            <a:pPr algn="ctr"/>
           </a:p>
         </p:txBody>
       </p:sp>
@@ -19977,6 +21436,7 @@
           <a:lstStyle/>
           <a:p>
             <a:pPr algn="ctr"/>
+            <a:endParaRPr/>
           </a:p>
         </p:txBody>
       </p:sp>
@@ -20089,6 +21549,56 @@
             <a:r>
               <a:t>8/24</a:t>
             </a:r>
+          </a:p>
+        </p:txBody>
+      </p:sp>
+      <p:sp>
+        <p:nvSpPr>
+          <p:cNvPr id="26" name="Rectangle 25">
+            <a:extLst>
+              <a:ext uri="{FF2B5EF4-FFF2-40B4-BE49-F238E27FC236}">
+                <a16:creationId xmlns:a16="http://schemas.microsoft.com/office/drawing/2014/main" id="{6DE85EBF-07D7-4BB8-9020-8D77FD7A6CC1}"/>
+              </a:ext>
+            </a:extLst>
+          </p:cNvPr>
+          <p:cNvSpPr/>
+          <p:nvPr/>
+        </p:nvSpPr>
+        <p:spPr>
+          <a:xfrm>
+            <a:off x="652272" y="548640"/>
+            <a:ext cx="109728" cy="640080"/>
+          </a:xfrm>
+          <a:prstGeom prst="rect">
+            <a:avLst/>
+          </a:prstGeom>
+          <a:solidFill>
+            <a:srgbClr val="00D4FF"/>
+          </a:solidFill>
+          <a:ln>
+            <a:noFill/>
+          </a:ln>
+        </p:spPr>
+        <p:style>
+          <a:lnRef idx="1">
+            <a:schemeClr val="accent1"/>
+          </a:lnRef>
+          <a:fillRef idx="3">
+            <a:schemeClr val="accent1"/>
+          </a:fillRef>
+          <a:effectRef idx="2">
+            <a:schemeClr val="accent1"/>
+          </a:effectRef>
+          <a:fontRef idx="minor">
+            <a:schemeClr val="lt1"/>
+          </a:fontRef>
+        </p:style>
+        <p:txBody>
+          <a:bodyPr rtlCol="0" anchor="ctr"/>
+          <a:lstStyle/>
+          <a:p>
+            <a:pPr algn="ctr"/>
+            <a:endParaRPr/>
           </a:p>
         </p:txBody>
       </p:sp>
@@ -20101,7 +21611,7 @@
 </file>
 
 <file path=ppt/slides/slide9.xml><?xml version="1.0" encoding="utf-8"?>
-<p:sld xmlns:a="http://schemas.openxmlformats.org/drawingml/2006/main" xmlns:p="http://schemas.openxmlformats.org/presentationml/2006/main" xmlns:r="http://schemas.openxmlformats.org/officeDocument/2006/relationships">
+<p:sld xmlns:a="http://schemas.openxmlformats.org/drawingml/2006/main" xmlns:r="http://schemas.openxmlformats.org/officeDocument/2006/relationships" xmlns:p="http://schemas.openxmlformats.org/presentationml/2006/main">
   <p:cSld>
     <p:spTree>
       <p:nvGrpSpPr>
@@ -20109,7 +21619,14 @@
         <p:cNvGrpSpPr/>
         <p:nvPr/>
       </p:nvGrpSpPr>
-      <p:grpSpPr/>
+      <p:grpSpPr>
+        <a:xfrm>
+          <a:off x="0" y="0"/>
+          <a:ext cx="0" cy="0"/>
+          <a:chOff x="0" y="0"/>
+          <a:chExt cx="0" cy="0"/>
+        </a:xfrm>
+      </p:grpSpPr>
       <p:sp>
         <p:nvSpPr>
           <p:cNvPr id="2" name="Rectangle 1"/>
@@ -20150,6 +21667,7 @@
           <a:lstStyle/>
           <a:p>
             <a:pPr algn="ctr"/>
+            <a:endParaRPr/>
           </a:p>
         </p:txBody>
       </p:sp>
@@ -20162,7 +21680,7 @@
         <p:spPr>
           <a:xfrm>
             <a:off x="731520" y="365760"/>
-            <a:ext cx="10698480" cy="640080"/>
+            <a:ext cx="10698480" cy="830997"/>
           </a:xfrm>
           <a:prstGeom prst="rect">
             <a:avLst/>
@@ -20184,51 +21702,17 @@
               </a:defRPr>
             </a:pPr>
             <a:r>
-              <a:t>Raw Data to JSON (Normalization)</a:t>
-            </a:r>
-          </a:p>
-        </p:txBody>
-      </p:sp>
-      <p:sp>
-        <p:nvSpPr>
-          <p:cNvPr id="4" name="Rectangle 3"/>
-          <p:cNvSpPr/>
-          <p:nvPr/>
-        </p:nvSpPr>
-        <p:spPr>
-          <a:xfrm>
-            <a:off x="731520" y="960120"/>
-            <a:ext cx="109728" cy="457200"/>
-          </a:xfrm>
-          <a:prstGeom prst="rect">
-            <a:avLst/>
-          </a:prstGeom>
-          <a:solidFill>
-            <a:srgbClr val="00D4FF"/>
-          </a:solidFill>
-          <a:ln>
-            <a:noFill/>
-          </a:ln>
-        </p:spPr>
-        <p:style>
-          <a:lnRef idx="1">
-            <a:schemeClr val="accent1"/>
-          </a:lnRef>
-          <a:fillRef idx="3">
-            <a:schemeClr val="accent1"/>
-          </a:fillRef>
-          <a:effectRef idx="2">
-            <a:schemeClr val="accent1"/>
-          </a:effectRef>
-          <a:fontRef idx="minor">
-            <a:schemeClr val="lt1"/>
-          </a:fontRef>
-        </p:style>
-        <p:txBody>
-          <a:bodyPr rtlCol="0" anchor="ctr"/>
-          <a:lstStyle/>
-          <a:p>
-            <a:pPr algn="ctr"/>
+              <a:rPr sz="4800" dirty="0"/>
+              <a:t>Raw Data to JSON</a:t>
+            </a:r>
+            <a:r>
+              <a:rPr lang="it-IT" sz="4800" dirty="0"/>
+              <a:t> </a:t>
+            </a:r>
+            <a:r>
+              <a:rPr sz="4800" dirty="0"/>
+              <a:t>(Normalization)</a:t>
+            </a:r>
           </a:p>
         </p:txBody>
       </p:sp>
@@ -20240,7 +21724,7 @@
         </p:nvSpPr>
         <p:spPr>
           <a:xfrm>
-            <a:off x="731520" y="1463040"/>
+            <a:off x="731520" y="1432096"/>
             <a:ext cx="10698480" cy="457200"/>
           </a:xfrm>
           <a:prstGeom prst="rect">
@@ -20263,6 +21747,7 @@
               </a:defRPr>
             </a:pPr>
             <a:r>
+              <a:rPr dirty="0"/>
               <a:t>Standardizing Telemetry and Events</a:t>
             </a:r>
           </a:p>
@@ -20276,8 +21761,8 @@
         </p:nvSpPr>
         <p:spPr>
           <a:xfrm>
-            <a:off x="731520" y="2103120"/>
-            <a:ext cx="4572000" cy="3657600"/>
+            <a:off x="650300" y="2011680"/>
+            <a:ext cx="4572000" cy="4206240"/>
           </a:xfrm>
           <a:prstGeom prst="roundRect">
             <a:avLst/>
@@ -20310,6 +21795,7 @@
           <a:lstStyle/>
           <a:p>
             <a:pPr algn="ctr"/>
+            <a:endParaRPr/>
           </a:p>
         </p:txBody>
       </p:sp>
@@ -20380,30 +21866,49 @@
               </a:defRPr>
             </a:pPr>
             <a:r>
+              <a:rPr dirty="0"/>
               <a:t>{</a:t>
             </a:r>
-            <a:br/>
-            <a:r>
+            <a:br>
+              <a:rPr dirty="0"/>
+            </a:br>
+            <a:r>
+              <a:rPr dirty="0"/>
               <a:t>  "sensor": "DHT22",</a:t>
             </a:r>
-            <a:br/>
-            <a:r>
+            <a:br>
+              <a:rPr dirty="0"/>
+            </a:br>
+            <a:r>
+              <a:rPr dirty="0"/>
               <a:t>  "data": {</a:t>
             </a:r>
-            <a:br/>
-            <a:r>
+            <a:br>
+              <a:rPr dirty="0"/>
+            </a:br>
+            <a:r>
+              <a:rPr dirty="0"/>
               <a:t>    "temp": 39.99,</a:t>
             </a:r>
-            <a:br/>
-            <a:r>
+            <a:br>
+              <a:rPr dirty="0"/>
+            </a:br>
+            <a:r>
+              <a:rPr dirty="0"/>
               <a:t>    "flow": 12.0</a:t>
             </a:r>
-            <a:br/>
-            <a:r>
+            <a:br>
+              <a:rPr dirty="0"/>
+            </a:br>
+            <a:r>
+              <a:rPr dirty="0"/>
               <a:t>  }</a:t>
             </a:r>
-            <a:br/>
-            <a:r>
+            <a:br>
+              <a:rPr dirty="0"/>
+            </a:br>
+            <a:r>
+              <a:rPr dirty="0"/>
               <a:t>}</a:t>
             </a:r>
           </a:p>
@@ -20417,7 +21922,7 @@
         </p:nvSpPr>
         <p:spPr>
           <a:xfrm>
-            <a:off x="5577840" y="3474720"/>
+            <a:off x="5450900" y="3886200"/>
             <a:ext cx="731520" cy="457200"/>
           </a:xfrm>
           <a:prstGeom prst="rightArrow">
@@ -20446,6 +21951,7 @@
           <a:lstStyle/>
           <a:p>
             <a:pPr algn="ctr"/>
+            <a:endParaRPr/>
           </a:p>
         </p:txBody>
       </p:sp>
@@ -20457,8 +21963,8 @@
         </p:nvSpPr>
         <p:spPr>
           <a:xfrm>
-            <a:off x="6583680" y="2103120"/>
-            <a:ext cx="4846320" cy="3657600"/>
+            <a:off x="6537960" y="2011680"/>
+            <a:ext cx="4846320" cy="4206240"/>
           </a:xfrm>
           <a:prstGeom prst="roundRect">
             <a:avLst/>
@@ -20491,6 +21997,7 @@
           <a:lstStyle/>
           <a:p>
             <a:pPr algn="ctr"/>
+            <a:endParaRPr/>
           </a:p>
         </p:txBody>
       </p:sp>
@@ -20561,42 +22068,110 @@
               </a:defRPr>
             </a:pPr>
             <a:r>
+              <a:rPr dirty="0"/>
               <a:t>{</a:t>
             </a:r>
-            <a:br/>
-            <a:r>
-              <a:t>  "event_id": "evt_101",</a:t>
-            </a:r>
-            <a:br/>
-            <a:r>
-              <a:t>  "sensor_id": "thermal_loop",</a:t>
-            </a:r>
-            <a:br/>
-            <a:r>
+            <a:br>
+              <a:rPr dirty="0"/>
+            </a:br>
+            <a:r>
+              <a:rPr dirty="0"/>
+              <a:t>  "</a:t>
+            </a:r>
+            <a:r>
+              <a:rPr dirty="0" err="1"/>
+              <a:t>event_id</a:t>
+            </a:r>
+            <a:r>
+              <a:rPr dirty="0"/>
+              <a:t>": "evt_101",</a:t>
+            </a:r>
+            <a:br>
+              <a:rPr dirty="0"/>
+            </a:br>
+            <a:r>
+              <a:rPr dirty="0"/>
+              <a:t>  "</a:t>
+            </a:r>
+            <a:r>
+              <a:rPr dirty="0" err="1"/>
+              <a:t>sensor_id</a:t>
+            </a:r>
+            <a:r>
+              <a:rPr dirty="0"/>
+              <a:t>": "</a:t>
+            </a:r>
+            <a:r>
+              <a:rPr dirty="0" err="1"/>
+              <a:t>thermal_loop</a:t>
+            </a:r>
+            <a:r>
+              <a:rPr dirty="0"/>
+              <a:t>",</a:t>
+            </a:r>
+            <a:br>
+              <a:rPr dirty="0"/>
+            </a:br>
+            <a:r>
+              <a:rPr dirty="0"/>
               <a:t>  "timestamp": "2026-03-10T12:00:00Z",</a:t>
             </a:r>
-            <a:br/>
-            <a:r>
-              <a:t>  "metric": "temperature_c",</a:t>
-            </a:r>
-            <a:br/>
-            <a:r>
+            <a:br>
+              <a:rPr dirty="0"/>
+            </a:br>
+            <a:r>
+              <a:rPr dirty="0"/>
+              <a:t>  "metric": "</a:t>
+            </a:r>
+            <a:r>
+              <a:rPr dirty="0" err="1"/>
+              <a:t>temperature_c</a:t>
+            </a:r>
+            <a:r>
+              <a:rPr dirty="0"/>
+              <a:t>",</a:t>
+            </a:r>
+            <a:br>
+              <a:rPr dirty="0"/>
+            </a:br>
+            <a:r>
+              <a:rPr dirty="0"/>
               <a:t>  "value": 39.99,</a:t>
             </a:r>
-            <a:br/>
-            <a:r>
+            <a:br>
+              <a:rPr dirty="0"/>
+            </a:br>
+            <a:r>
+              <a:rPr dirty="0"/>
               <a:t>  "unit": "C",</a:t>
             </a:r>
-            <a:br/>
-            <a:r>
-              <a:t>  "source": "sse",</a:t>
-            </a:r>
-            <a:br/>
-            <a:r>
+            <a:br>
+              <a:rPr dirty="0"/>
+            </a:br>
+            <a:r>
+              <a:rPr dirty="0"/>
+              <a:t>  "source": "</a:t>
+            </a:r>
+            <a:r>
+              <a:rPr dirty="0" err="1"/>
+              <a:t>sse</a:t>
+            </a:r>
+            <a:r>
+              <a:rPr dirty="0"/>
+              <a:t>",</a:t>
+            </a:r>
+            <a:br>
+              <a:rPr dirty="0"/>
+            </a:br>
+            <a:r>
+              <a:rPr dirty="0"/>
               <a:t>  "status": "warning"</a:t>
             </a:r>
-            <a:br/>
-            <a:r>
+            <a:br>
+              <a:rPr dirty="0"/>
+            </a:br>
+            <a:r>
+              <a:rPr dirty="0"/>
               <a:t>}</a:t>
             </a:r>
           </a:p>
@@ -20635,6 +22210,56 @@
             <a:r>
               <a:t>9/24</a:t>
             </a:r>
+          </a:p>
+        </p:txBody>
+      </p:sp>
+      <p:sp>
+        <p:nvSpPr>
+          <p:cNvPr id="14" name="Rectangle 13">
+            <a:extLst>
+              <a:ext uri="{FF2B5EF4-FFF2-40B4-BE49-F238E27FC236}">
+                <a16:creationId xmlns:a16="http://schemas.microsoft.com/office/drawing/2014/main" id="{39923756-3B11-60ED-ED8C-63056EDF95AF}"/>
+              </a:ext>
+            </a:extLst>
+          </p:cNvPr>
+          <p:cNvSpPr/>
+          <p:nvPr/>
+        </p:nvSpPr>
+        <p:spPr>
+          <a:xfrm>
+            <a:off x="650300" y="461218"/>
+            <a:ext cx="109728" cy="640080"/>
+          </a:xfrm>
+          <a:prstGeom prst="rect">
+            <a:avLst/>
+          </a:prstGeom>
+          <a:solidFill>
+            <a:srgbClr val="00D4FF"/>
+          </a:solidFill>
+          <a:ln>
+            <a:noFill/>
+          </a:ln>
+        </p:spPr>
+        <p:style>
+          <a:lnRef idx="1">
+            <a:schemeClr val="accent1"/>
+          </a:lnRef>
+          <a:fillRef idx="3">
+            <a:schemeClr val="accent1"/>
+          </a:fillRef>
+          <a:effectRef idx="2">
+            <a:schemeClr val="accent1"/>
+          </a:effectRef>
+          <a:fontRef idx="minor">
+            <a:schemeClr val="lt1"/>
+          </a:fontRef>
+        </p:style>
+        <p:txBody>
+          <a:bodyPr rtlCol="0" anchor="ctr"/>
+          <a:lstStyle/>
+          <a:p>
+            <a:pPr algn="ctr"/>
+            <a:endParaRPr/>
           </a:p>
         </p:txBody>
       </p:sp>
